--- a/Zava_Exec_Overview.pptx
+++ b/Zava_Exec_Overview.pptx
@@ -9,6 +9,8 @@
     <p:sldId id="257" r:id="rId8"/>
     <p:sldId id="258" r:id="rId9"/>
     <p:sldId id="259" r:id="rId10"/>
+    <p:sldId id="260" r:id="rId11"/>
+    <p:sldId id="261" r:id="rId12"/>
   </p:sldIdLst>
   <p:sldSz cx="12191695" cy="6858000" type="screen4x3"/>
   <p:notesSz cx="6858000" cy="9144000"/>
@@ -4325,7 +4327,7 @@
         <p:spPr>
           <a:xfrm>
             <a:off x="7589520" y="1371600"/>
-            <a:ext cx="2194560" cy="4892040"/>
+            <a:ext cx="2194560" cy="4901184"/>
           </a:xfrm>
           <a:prstGeom prst="roundRect">
             <a:avLst>
@@ -4372,7 +4374,7 @@
         </p:nvSpPr>
         <p:spPr>
           <a:xfrm>
-            <a:off x="7589520" y="1435608"/>
+            <a:off x="7589520" y="1417320"/>
             <a:ext cx="2194560" cy="274320"/>
           </a:xfrm>
           <a:prstGeom prst="rect">
@@ -4414,8 +4416,8 @@
         </p:nvSpPr>
         <p:spPr>
           <a:xfrm>
-            <a:off x="7744967" y="1783080"/>
-            <a:ext cx="1874519" cy="640080"/>
+            <a:off x="7744967" y="1737360"/>
+            <a:ext cx="1874519" cy="566928"/>
           </a:xfrm>
           <a:prstGeom prst="roundRect">
             <a:avLst>
@@ -4423,7 +4425,7 @@
             </a:avLst>
           </a:prstGeom>
           <a:solidFill>
-            <a:srgbClr val="6B4DE0"/>
+            <a:srgbClr val="3C465B"/>
           </a:solidFill>
           <a:ln>
             <a:noFill/>
@@ -4460,8 +4462,8 @@
         </p:nvSpPr>
         <p:spPr>
           <a:xfrm>
-            <a:off x="7744967" y="1783080"/>
-            <a:ext cx="1874519" cy="640080"/>
+            <a:off x="7744967" y="1737360"/>
+            <a:ext cx="1874519" cy="566928"/>
           </a:xfrm>
           <a:prstGeom prst="rect">
             <a:avLst/>
@@ -4489,7 +4491,7 @@
                 </a:solidFill>
                 <a:latin typeface="Segoe UI"/>
               </a:rPr>
-              <a:t>Sales agent</a:t>
+              <a:t>Intent Detector</a:t>
             </a:r>
           </a:p>
           <a:p>
@@ -4508,7 +4510,7 @@
                 </a:solidFill>
                 <a:latin typeface="Segoe UI"/>
               </a:rPr>
-              <a:t>trends &amp; revenue</a:t>
+              <a:t>chat vs business</a:t>
             </a:r>
           </a:p>
         </p:txBody>
@@ -4521,8 +4523,8 @@
         </p:nvSpPr>
         <p:spPr>
           <a:xfrm>
-            <a:off x="7744967" y="2542032"/>
-            <a:ext cx="1874519" cy="640080"/>
+            <a:off x="7744967" y="2340864"/>
+            <a:ext cx="1874519" cy="493776"/>
           </a:xfrm>
           <a:prstGeom prst="roundRect">
             <a:avLst>
@@ -4567,8 +4569,8 @@
         </p:nvSpPr>
         <p:spPr>
           <a:xfrm>
-            <a:off x="7744967" y="2542032"/>
-            <a:ext cx="1874519" cy="640080"/>
+            <a:off x="7744967" y="2340864"/>
+            <a:ext cx="1874519" cy="493776"/>
           </a:xfrm>
           <a:prstGeom prst="rect">
             <a:avLst/>
@@ -4596,7 +4598,7 @@
                 </a:solidFill>
                 <a:latin typeface="Segoe UI"/>
               </a:rPr>
-              <a:t>Inventory agent</a:t>
+              <a:t>Sales agent</a:t>
             </a:r>
           </a:p>
           <a:p>
@@ -4615,7 +4617,7 @@
                 </a:solidFill>
                 <a:latin typeface="Segoe UI"/>
               </a:rPr>
-              <a:t>stock &amp; reorder</a:t>
+              <a:t>trends &amp; revenue</a:t>
             </a:r>
           </a:p>
         </p:txBody>
@@ -4628,8 +4630,8 @@
         </p:nvSpPr>
         <p:spPr>
           <a:xfrm>
-            <a:off x="7744967" y="3300984"/>
-            <a:ext cx="1874519" cy="640080"/>
+            <a:off x="7744967" y="2871216"/>
+            <a:ext cx="1874519" cy="493776"/>
           </a:xfrm>
           <a:prstGeom prst="roundRect">
             <a:avLst>
@@ -4674,8 +4676,8 @@
         </p:nvSpPr>
         <p:spPr>
           <a:xfrm>
-            <a:off x="7744967" y="3300984"/>
-            <a:ext cx="1874519" cy="640080"/>
+            <a:off x="7744967" y="2871216"/>
+            <a:ext cx="1874519" cy="493776"/>
           </a:xfrm>
           <a:prstGeom prst="rect">
             <a:avLst/>
@@ -4703,7 +4705,7 @@
                 </a:solidFill>
                 <a:latin typeface="Segoe UI"/>
               </a:rPr>
-              <a:t>Marketing agent</a:t>
+              <a:t>Inventory agent</a:t>
             </a:r>
           </a:p>
           <a:p>
@@ -4722,7 +4724,7 @@
                 </a:solidFill>
                 <a:latin typeface="Segoe UI"/>
               </a:rPr>
-              <a:t>campaigns &amp; ROI</a:t>
+              <a:t>stock &amp; reorder</a:t>
             </a:r>
           </a:p>
         </p:txBody>
@@ -4735,8 +4737,8 @@
         </p:nvSpPr>
         <p:spPr>
           <a:xfrm>
-            <a:off x="7744967" y="4206240"/>
-            <a:ext cx="1874519" cy="960120"/>
+            <a:off x="7744967" y="3401568"/>
+            <a:ext cx="1874519" cy="493776"/>
           </a:xfrm>
           <a:prstGeom prst="roundRect">
             <a:avLst>
@@ -4744,7 +4746,7 @@
             </a:avLst>
           </a:prstGeom>
           <a:solidFill>
-            <a:srgbClr val="E28A00"/>
+            <a:srgbClr val="6B4DE0"/>
           </a:solidFill>
           <a:ln>
             <a:noFill/>
@@ -4781,8 +4783,8 @@
         </p:nvSpPr>
         <p:spPr>
           <a:xfrm>
-            <a:off x="7744967" y="4206240"/>
-            <a:ext cx="1874519" cy="960120"/>
+            <a:off x="7744967" y="3401568"/>
+            <a:ext cx="1874519" cy="493776"/>
           </a:xfrm>
           <a:prstGeom prst="rect">
             <a:avLst/>
@@ -4810,7 +4812,7 @@
                 </a:solidFill>
                 <a:latin typeface="Segoe UI"/>
               </a:rPr>
-              <a:t>Action agent</a:t>
+              <a:t>Marketing agent</a:t>
             </a:r>
           </a:p>
           <a:p>
@@ -4829,22 +4831,67 @@
                 </a:solidFill>
                 <a:latin typeface="Segoe UI"/>
               </a:rPr>
-              <a:t>final answer + chart
-(Code Interpreter)</a:t>
-            </a:r>
-          </a:p>
-        </p:txBody>
-      </p:sp>
-      <p:sp>
-        <p:nvSpPr>
-          <p:cNvPr id="35" name="TextBox 34"/>
+              <a:t>campaigns &amp; ROI</a:t>
+            </a:r>
+          </a:p>
+        </p:txBody>
+      </p:sp>
+      <p:sp>
+        <p:nvSpPr>
+          <p:cNvPr id="35" name="Rounded Rectangle 34"/>
+          <p:cNvSpPr/>
+          <p:nvPr/>
+        </p:nvSpPr>
+        <p:spPr>
+          <a:xfrm>
+            <a:off x="7744967" y="3950208"/>
+            <a:ext cx="1874519" cy="658368"/>
+          </a:xfrm>
+          <a:prstGeom prst="roundRect">
+            <a:avLst>
+              <a:gd name="adj" fmla="val 16000"/>
+            </a:avLst>
+          </a:prstGeom>
+          <a:solidFill>
+            <a:srgbClr val="E28A00"/>
+          </a:solidFill>
+          <a:ln>
+            <a:noFill/>
+          </a:ln>
+          <a:effectLst/>
+        </p:spPr>
+        <p:style>
+          <a:lnRef idx="1">
+            <a:schemeClr val="accent1"/>
+          </a:lnRef>
+          <a:fillRef idx="3">
+            <a:schemeClr val="accent1"/>
+          </a:fillRef>
+          <a:effectRef idx="2">
+            <a:schemeClr val="accent1"/>
+          </a:effectRef>
+          <a:fontRef idx="minor">
+            <a:schemeClr val="lt1"/>
+          </a:fontRef>
+        </p:style>
+        <p:txBody>
+          <a:bodyPr rtlCol="0" anchor="ctr"/>
+          <a:lstStyle/>
+          <a:p>
+            <a:pPr algn="ctr"/>
+          </a:p>
+        </p:txBody>
+      </p:sp>
+      <p:sp>
+        <p:nvSpPr>
+          <p:cNvPr id="36" name="TextBox 35"/>
           <p:cNvSpPr txBox="1"/>
           <p:nvPr/>
         </p:nvSpPr>
         <p:spPr>
           <a:xfrm>
-            <a:off x="7744967" y="5257800"/>
-            <a:ext cx="1874519" cy="868680"/>
+            <a:off x="7744967" y="3950208"/>
+            <a:ext cx="1874519" cy="658368"/>
           </a:xfrm>
           <a:prstGeom prst="rect">
             <a:avLst/>
@@ -4852,7 +4899,7 @@
           <a:noFill/>
         </p:spPr>
         <p:txBody>
-          <a:bodyPr wrap="square" anchor="t" lIns="50800" rIns="50800" tIns="25400" bIns="25400">
+          <a:bodyPr wrap="square" anchor="ctr" lIns="50800" rIns="50800" tIns="25400" bIns="25400">
             <a:spAutoFit/>
           </a:bodyPr>
           <a:lstStyle/>
@@ -4862,24 +4909,193 @@
                 <a:spcPct val="95000"/>
               </a:lnSpc>
               <a:spcAft>
+                <a:spcPts val="100"/>
+              </a:spcAft>
+            </a:pPr>
+            <a:r>
+              <a:rPr sz="1200" b="1">
+                <a:solidFill>
+                  <a:srgbClr val="FFFFFF"/>
+                </a:solidFill>
+                <a:latin typeface="Segoe UI"/>
+              </a:rPr>
+              <a:t>Action agent</a:t>
+            </a:r>
+          </a:p>
+          <a:p>
+            <a:pPr algn="ctr">
+              <a:lnSpc>
+                <a:spcPct val="95000"/>
+              </a:lnSpc>
+              <a:spcAft>
+                <a:spcPts val="100"/>
+              </a:spcAft>
+            </a:pPr>
+            <a:r>
+              <a:rPr sz="850" b="0">
+                <a:solidFill>
+                  <a:srgbClr val="ECF0FB"/>
+                </a:solidFill>
+                <a:latin typeface="Segoe UI"/>
+              </a:rPr>
+              <a:t>actions + chart
+(Code Interpreter)</a:t>
+            </a:r>
+          </a:p>
+        </p:txBody>
+      </p:sp>
+      <p:sp>
+        <p:nvSpPr>
+          <p:cNvPr id="37" name="Rounded Rectangle 36"/>
+          <p:cNvSpPr/>
+          <p:nvPr/>
+        </p:nvSpPr>
+        <p:spPr>
+          <a:xfrm>
+            <a:off x="7744967" y="4663440"/>
+            <a:ext cx="1874519" cy="640080"/>
+          </a:xfrm>
+          <a:prstGeom prst="roundRect">
+            <a:avLst>
+              <a:gd name="adj" fmla="val 16000"/>
+            </a:avLst>
+          </a:prstGeom>
+          <a:solidFill>
+            <a:srgbClr val="1E9E5A"/>
+          </a:solidFill>
+          <a:ln>
+            <a:noFill/>
+          </a:ln>
+          <a:effectLst/>
+        </p:spPr>
+        <p:style>
+          <a:lnRef idx="1">
+            <a:schemeClr val="accent1"/>
+          </a:lnRef>
+          <a:fillRef idx="3">
+            <a:schemeClr val="accent1"/>
+          </a:fillRef>
+          <a:effectRef idx="2">
+            <a:schemeClr val="accent1"/>
+          </a:effectRef>
+          <a:fontRef idx="minor">
+            <a:schemeClr val="lt1"/>
+          </a:fontRef>
+        </p:style>
+        <p:txBody>
+          <a:bodyPr rtlCol="0" anchor="ctr"/>
+          <a:lstStyle/>
+          <a:p>
+            <a:pPr algn="ctr"/>
+          </a:p>
+        </p:txBody>
+      </p:sp>
+      <p:sp>
+        <p:nvSpPr>
+          <p:cNvPr id="38" name="TextBox 37"/>
+          <p:cNvSpPr txBox="1"/>
+          <p:nvPr/>
+        </p:nvSpPr>
+        <p:spPr>
+          <a:xfrm>
+            <a:off x="7744967" y="4663440"/>
+            <a:ext cx="1874519" cy="640080"/>
+          </a:xfrm>
+          <a:prstGeom prst="rect">
+            <a:avLst/>
+          </a:prstGeom>
+          <a:noFill/>
+        </p:spPr>
+        <p:txBody>
+          <a:bodyPr wrap="square" anchor="ctr" lIns="50800" rIns="50800" tIns="25400" bIns="25400">
+            <a:spAutoFit/>
+          </a:bodyPr>
+          <a:lstStyle/>
+          <a:p>
+            <a:pPr algn="ctr">
+              <a:lnSpc>
+                <a:spcPct val="95000"/>
+              </a:lnSpc>
+              <a:spcAft>
+                <a:spcPts val="100"/>
+              </a:spcAft>
+            </a:pPr>
+            <a:r>
+              <a:rPr sz="1200" b="1">
+                <a:solidFill>
+                  <a:srgbClr val="FFFFFF"/>
+                </a:solidFill>
+                <a:latin typeface="Segoe UI"/>
+              </a:rPr>
+              <a:t>Response Gen</a:t>
+            </a:r>
+          </a:p>
+          <a:p>
+            <a:pPr algn="ctr">
+              <a:lnSpc>
+                <a:spcPct val="95000"/>
+              </a:lnSpc>
+              <a:spcAft>
+                <a:spcPts val="100"/>
+              </a:spcAft>
+            </a:pPr>
+            <a:r>
+              <a:rPr sz="850" b="0">
+                <a:solidFill>
+                  <a:srgbClr val="ECF0FB"/>
+                </a:solidFill>
+                <a:latin typeface="Segoe UI"/>
+              </a:rPr>
+              <a:t>writes the final reply</a:t>
+            </a:r>
+          </a:p>
+        </p:txBody>
+      </p:sp>
+      <p:sp>
+        <p:nvSpPr>
+          <p:cNvPr id="39" name="TextBox 38"/>
+          <p:cNvSpPr txBox="1"/>
+          <p:nvPr/>
+        </p:nvSpPr>
+        <p:spPr>
+          <a:xfrm>
+            <a:off x="7744967" y="5358384"/>
+            <a:ext cx="1874519" cy="841248"/>
+          </a:xfrm>
+          <a:prstGeom prst="rect">
+            <a:avLst/>
+          </a:prstGeom>
+          <a:noFill/>
+        </p:spPr>
+        <p:txBody>
+          <a:bodyPr wrap="square" anchor="t" lIns="50800" rIns="50800" tIns="25400" bIns="25400">
+            <a:spAutoFit/>
+          </a:bodyPr>
+          <a:lstStyle/>
+          <a:p>
+            <a:pPr algn="ctr">
+              <a:lnSpc>
+                <a:spcPct val="92000"/>
+              </a:lnSpc>
+              <a:spcAft>
                 <a:spcPts val="200"/>
               </a:spcAft>
             </a:pPr>
             <a:r>
-              <a:rPr sz="819" b="0">
+              <a:rPr sz="760" b="0">
                 <a:solidFill>
                   <a:srgbClr val="5A6172"/>
                 </a:solidFill>
                 <a:latin typeface="Segoe UI"/>
               </a:rPr>
-              <a:t>Always runs last — consolidates all insights into the reply.</a:t>
-            </a:r>
-          </a:p>
-        </p:txBody>
-      </p:sp>
-      <p:sp>
-        <p:nvSpPr>
-          <p:cNvPr id="36" name="Rounded Rectangle 35"/>
+              <a:t>Greetings skip straight to Response Gen; business questions fan out, then return here.</a:t>
+            </a:r>
+          </a:p>
+        </p:txBody>
+      </p:sp>
+      <p:sp>
+        <p:nvSpPr>
+          <p:cNvPr id="40" name="Rounded Rectangle 39"/>
           <p:cNvSpPr/>
           <p:nvPr/>
         </p:nvSpPr>
@@ -4927,7 +5143,7 @@
       </p:sp>
       <p:sp>
         <p:nvSpPr>
-          <p:cNvPr id="37" name="TextBox 36"/>
+          <p:cNvPr id="41" name="TextBox 40"/>
           <p:cNvSpPr txBox="1"/>
           <p:nvPr/>
         </p:nvSpPr>
@@ -4969,7 +5185,7 @@
       </p:sp>
       <p:sp>
         <p:nvSpPr>
-          <p:cNvPr id="38" name="Rounded Rectangle 37"/>
+          <p:cNvPr id="42" name="Rounded Rectangle 41"/>
           <p:cNvSpPr/>
           <p:nvPr/>
         </p:nvSpPr>
@@ -5015,7 +5231,7 @@
       </p:sp>
       <p:sp>
         <p:nvSpPr>
-          <p:cNvPr id="39" name="TextBox 38"/>
+          <p:cNvPr id="43" name="TextBox 42"/>
           <p:cNvSpPr txBox="1"/>
           <p:nvPr/>
         </p:nvSpPr>
@@ -5076,7 +5292,7 @@
       </p:sp>
       <p:sp>
         <p:nvSpPr>
-          <p:cNvPr id="40" name="Rounded Rectangle 39"/>
+          <p:cNvPr id="44" name="Rounded Rectangle 43"/>
           <p:cNvSpPr/>
           <p:nvPr/>
         </p:nvSpPr>
@@ -5122,7 +5338,7 @@
       </p:sp>
       <p:sp>
         <p:nvSpPr>
-          <p:cNvPr id="41" name="TextBox 40"/>
+          <p:cNvPr id="45" name="TextBox 44"/>
           <p:cNvSpPr txBox="1"/>
           <p:nvPr/>
         </p:nvSpPr>
@@ -5183,7 +5399,7 @@
       </p:sp>
       <p:sp>
         <p:nvSpPr>
-          <p:cNvPr id="42" name="Rounded Rectangle 41"/>
+          <p:cNvPr id="46" name="Rounded Rectangle 45"/>
           <p:cNvSpPr/>
           <p:nvPr/>
         </p:nvSpPr>
@@ -5229,7 +5445,7 @@
       </p:sp>
       <p:sp>
         <p:nvSpPr>
-          <p:cNvPr id="43" name="TextBox 42"/>
+          <p:cNvPr id="47" name="TextBox 46"/>
           <p:cNvSpPr txBox="1"/>
           <p:nvPr/>
         </p:nvSpPr>
@@ -5290,7 +5506,7 @@
       </p:sp>
       <p:sp>
         <p:nvSpPr>
-          <p:cNvPr id="44" name="Rounded Rectangle 43"/>
+          <p:cNvPr id="48" name="Rounded Rectangle 47"/>
           <p:cNvSpPr/>
           <p:nvPr/>
         </p:nvSpPr>
@@ -5336,7 +5552,7 @@
       </p:sp>
       <p:sp>
         <p:nvSpPr>
-          <p:cNvPr id="45" name="TextBox 44"/>
+          <p:cNvPr id="49" name="TextBox 48"/>
           <p:cNvSpPr txBox="1"/>
           <p:nvPr/>
         </p:nvSpPr>
@@ -5397,7 +5613,7 @@
       </p:sp>
       <p:cxnSp>
         <p:nvCxnSpPr>
-          <p:cNvPr id="46" name="Connector 45"/>
+          <p:cNvPr id="50" name="Connector 49"/>
           <p:cNvCxnSpPr/>
           <p:nvPr/>
         </p:nvCxnSpPr>
@@ -5434,7 +5650,7 @@
       </p:cxnSp>
       <p:cxnSp>
         <p:nvCxnSpPr>
-          <p:cNvPr id="47" name="Connector 46"/>
+          <p:cNvPr id="51" name="Connector 50"/>
           <p:cNvCxnSpPr/>
           <p:nvPr/>
         </p:nvCxnSpPr>
@@ -5471,7 +5687,7 @@
       </p:cxnSp>
       <p:cxnSp>
         <p:nvCxnSpPr>
-          <p:cNvPr id="48" name="Connector 47"/>
+          <p:cNvPr id="52" name="Connector 51"/>
           <p:cNvCxnSpPr/>
           <p:nvPr/>
         </p:nvCxnSpPr>
@@ -5508,7 +5724,7 @@
       </p:cxnSp>
       <p:sp>
         <p:nvSpPr>
-          <p:cNvPr id="49" name="Rounded Rectangle 48"/>
+          <p:cNvPr id="53" name="Rounded Rectangle 52"/>
           <p:cNvSpPr/>
           <p:nvPr/>
         </p:nvSpPr>
@@ -5554,7 +5770,7 @@
       </p:sp>
       <p:sp>
         <p:nvSpPr>
-          <p:cNvPr id="50" name="TextBox 49"/>
+          <p:cNvPr id="54" name="TextBox 53"/>
           <p:cNvSpPr txBox="1"/>
           <p:nvPr/>
         </p:nvSpPr>
@@ -9407,8 +9623,8 @@
         </p:nvSpPr>
         <p:spPr>
           <a:xfrm>
-            <a:off x="411480" y="1280160"/>
-            <a:ext cx="11384280" cy="658368"/>
+            <a:off x="411480" y="1243584"/>
+            <a:ext cx="11384280" cy="548640"/>
           </a:xfrm>
           <a:prstGeom prst="roundRect">
             <a:avLst>
@@ -9455,8 +9671,8 @@
         </p:nvSpPr>
         <p:spPr>
           <a:xfrm>
-            <a:off x="640080" y="1298448"/>
-            <a:ext cx="10972800" cy="621792"/>
+            <a:off x="640080" y="1243584"/>
+            <a:ext cx="10972800" cy="548640"/>
           </a:xfrm>
           <a:prstGeom prst="rect">
             <a:avLst/>
@@ -9506,8 +9722,107 @@
         </p:nvSpPr>
         <p:spPr>
           <a:xfrm>
-            <a:off x="411480" y="2148840"/>
-            <a:ext cx="2697480" cy="2331720"/>
+            <a:off x="411480" y="1865376"/>
+            <a:ext cx="11384280" cy="420624"/>
+          </a:xfrm>
+          <a:prstGeom prst="roundRect">
+            <a:avLst>
+              <a:gd name="adj" fmla="val 12000"/>
+            </a:avLst>
+          </a:prstGeom>
+          <a:solidFill>
+            <a:srgbClr val="E7EAF1"/>
+          </a:solidFill>
+          <a:ln w="12700">
+            <a:solidFill>
+              <a:srgbClr val="3C465B"/>
+            </a:solidFill>
+          </a:ln>
+          <a:effectLst/>
+        </p:spPr>
+        <p:style>
+          <a:lnRef idx="1">
+            <a:schemeClr val="accent1"/>
+          </a:lnRef>
+          <a:fillRef idx="3">
+            <a:schemeClr val="accent1"/>
+          </a:fillRef>
+          <a:effectRef idx="2">
+            <a:schemeClr val="accent1"/>
+          </a:effectRef>
+          <a:fontRef idx="minor">
+            <a:schemeClr val="lt1"/>
+          </a:fontRef>
+        </p:style>
+        <p:txBody>
+          <a:bodyPr rtlCol="0" anchor="ctr"/>
+          <a:lstStyle/>
+          <a:p>
+            <a:pPr algn="ctr"/>
+          </a:p>
+        </p:txBody>
+      </p:sp>
+      <p:sp>
+        <p:nvSpPr>
+          <p:cNvPr id="10" name="TextBox 9"/>
+          <p:cNvSpPr txBox="1"/>
+          <p:nvPr/>
+        </p:nvSpPr>
+        <p:spPr>
+          <a:xfrm>
+            <a:off x="640080" y="1865376"/>
+            <a:ext cx="10972800" cy="420624"/>
+          </a:xfrm>
+          <a:prstGeom prst="rect">
+            <a:avLst/>
+          </a:prstGeom>
+          <a:noFill/>
+        </p:spPr>
+        <p:txBody>
+          <a:bodyPr wrap="square" anchor="ctr" lIns="50800" rIns="50800" tIns="25400" bIns="25400">
+            <a:spAutoFit/>
+          </a:bodyPr>
+          <a:lstStyle/>
+          <a:p>
+            <a:pPr algn="l">
+              <a:lnSpc>
+                <a:spcPct val="100000"/>
+              </a:lnSpc>
+              <a:spcAft>
+                <a:spcPts val="200"/>
+              </a:spcAft>
+            </a:pPr>
+            <a:r>
+              <a:rPr sz="1050" b="1">
+                <a:solidFill>
+                  <a:srgbClr val="3C465B"/>
+                </a:solidFill>
+                <a:latin typeface="Segoe UI"/>
+              </a:rPr>
+              <a:t>Intent Detector:  </a:t>
+            </a:r>
+            <a:r>
+              <a:rPr sz="1000" b="0">
+                <a:solidFill>
+                  <a:srgbClr val="1B1F2A"/>
+                </a:solidFill>
+                <a:latin typeface="Segoe UI"/>
+              </a:rPr>
+              <a:t>first it classifies the message — a greeting would get a quick friendly reply; this is a business question, so the Manager engages the specialists.</a:t>
+            </a:r>
+          </a:p>
+        </p:txBody>
+      </p:sp>
+      <p:sp>
+        <p:nvSpPr>
+          <p:cNvPr id="11" name="Rounded Rectangle 10"/>
+          <p:cNvSpPr/>
+          <p:nvPr/>
+        </p:nvSpPr>
+        <p:spPr>
+          <a:xfrm>
+            <a:off x="411480" y="2359152"/>
+            <a:ext cx="2697480" cy="2011680"/>
           </a:xfrm>
           <a:prstGeom prst="roundRect">
             <a:avLst>
@@ -9548,13 +9863,13 @@
       </p:sp>
       <p:sp>
         <p:nvSpPr>
-          <p:cNvPr id="10" name="Rounded Rectangle 9"/>
+          <p:cNvPr id="12" name="Rounded Rectangle 11"/>
           <p:cNvSpPr/>
           <p:nvPr/>
         </p:nvSpPr>
         <p:spPr>
           <a:xfrm>
-            <a:off x="411480" y="2148840"/>
+            <a:off x="411480" y="2359152"/>
             <a:ext cx="2697480" cy="566928"/>
           </a:xfrm>
           <a:prstGeom prst="roundRect">
@@ -9594,13 +9909,13 @@
       </p:sp>
       <p:sp>
         <p:nvSpPr>
-          <p:cNvPr id="11" name="TextBox 10"/>
+          <p:cNvPr id="13" name="TextBox 12"/>
           <p:cNvSpPr txBox="1"/>
           <p:nvPr/>
         </p:nvSpPr>
         <p:spPr>
           <a:xfrm>
-            <a:off x="548640" y="2148840"/>
+            <a:off x="548640" y="2359152"/>
             <a:ext cx="2423160" cy="566928"/>
           </a:xfrm>
           <a:prstGeom prst="rect">
@@ -9636,13 +9951,13 @@
       </p:sp>
       <p:sp>
         <p:nvSpPr>
-          <p:cNvPr id="12" name="TextBox 11"/>
+          <p:cNvPr id="14" name="TextBox 13"/>
           <p:cNvSpPr txBox="1"/>
           <p:nvPr/>
         </p:nvSpPr>
         <p:spPr>
           <a:xfrm>
-            <a:off x="594360" y="2807208"/>
+            <a:off x="594360" y="3017520"/>
             <a:ext cx="2331720" cy="320040"/>
           </a:xfrm>
           <a:prstGeom prst="rect">
@@ -9678,14 +9993,14 @@
       </p:sp>
       <p:sp>
         <p:nvSpPr>
-          <p:cNvPr id="13" name="TextBox 12"/>
+          <p:cNvPr id="15" name="TextBox 14"/>
           <p:cNvSpPr txBox="1"/>
           <p:nvPr/>
         </p:nvSpPr>
         <p:spPr>
           <a:xfrm>
-            <a:off x="594360" y="3172968"/>
-            <a:ext cx="2331720" cy="1188720"/>
+            <a:off x="594360" y="3346704"/>
+            <a:ext cx="2331720" cy="960120"/>
           </a:xfrm>
           <a:prstGeom prst="rect">
             <a:avLst/>
@@ -9700,14 +10015,14 @@
           <a:p>
             <a:pPr algn="l">
               <a:lnSpc>
-                <a:spcPct val="105000"/>
+                <a:spcPct val="102000"/>
               </a:lnSpc>
               <a:spcAft>
                 <a:spcPts val="200"/>
               </a:spcAft>
             </a:pPr>
             <a:r>
-              <a:rPr sz="1000" b="0">
+              <a:rPr sz="969" b="0">
                 <a:solidFill>
                   <a:srgbClr val="1B1F2A"/>
                 </a:solidFill>
@@ -9720,13 +10035,13 @@
       </p:sp>
       <p:cxnSp>
         <p:nvCxnSpPr>
-          <p:cNvPr id="14" name="Connector 13"/>
+          <p:cNvPr id="16" name="Connector 15"/>
           <p:cNvCxnSpPr/>
           <p:nvPr/>
         </p:nvCxnSpPr>
         <p:spPr>
           <a:xfrm>
-            <a:off x="3118104" y="3314700"/>
+            <a:off x="3118104" y="3364992"/>
             <a:ext cx="182880" cy="0"/>
           </a:xfrm>
           <a:prstGeom prst="bentConnector3">
@@ -9757,14 +10072,14 @@
       </p:cxnSp>
       <p:sp>
         <p:nvSpPr>
-          <p:cNvPr id="15" name="Rounded Rectangle 14"/>
+          <p:cNvPr id="17" name="Rounded Rectangle 16"/>
           <p:cNvSpPr/>
           <p:nvPr/>
         </p:nvSpPr>
         <p:spPr>
           <a:xfrm>
-            <a:off x="3310128" y="2148840"/>
-            <a:ext cx="2697480" cy="2331720"/>
+            <a:off x="3310128" y="2359152"/>
+            <a:ext cx="2697480" cy="2011680"/>
           </a:xfrm>
           <a:prstGeom prst="roundRect">
             <a:avLst>
@@ -9805,13 +10120,13 @@
       </p:sp>
       <p:sp>
         <p:nvSpPr>
-          <p:cNvPr id="16" name="Rounded Rectangle 15"/>
+          <p:cNvPr id="18" name="Rounded Rectangle 17"/>
           <p:cNvSpPr/>
           <p:nvPr/>
         </p:nvSpPr>
         <p:spPr>
           <a:xfrm>
-            <a:off x="3310128" y="2148840"/>
+            <a:off x="3310128" y="2359152"/>
             <a:ext cx="2697480" cy="566928"/>
           </a:xfrm>
           <a:prstGeom prst="roundRect">
@@ -9851,13 +10166,13 @@
       </p:sp>
       <p:sp>
         <p:nvSpPr>
-          <p:cNvPr id="17" name="TextBox 16"/>
+          <p:cNvPr id="19" name="TextBox 18"/>
           <p:cNvSpPr txBox="1"/>
           <p:nvPr/>
         </p:nvSpPr>
         <p:spPr>
           <a:xfrm>
-            <a:off x="3447288" y="2148840"/>
+            <a:off x="3447288" y="2359152"/>
             <a:ext cx="2423160" cy="566928"/>
           </a:xfrm>
           <a:prstGeom prst="rect">
@@ -9893,13 +10208,13 @@
       </p:sp>
       <p:sp>
         <p:nvSpPr>
-          <p:cNvPr id="18" name="TextBox 17"/>
+          <p:cNvPr id="20" name="TextBox 19"/>
           <p:cNvSpPr txBox="1"/>
           <p:nvPr/>
         </p:nvSpPr>
         <p:spPr>
           <a:xfrm>
-            <a:off x="3493008" y="2807208"/>
+            <a:off x="3493008" y="3017520"/>
             <a:ext cx="2331720" cy="320040"/>
           </a:xfrm>
           <a:prstGeom prst="rect">
@@ -9935,14 +10250,14 @@
       </p:sp>
       <p:sp>
         <p:nvSpPr>
-          <p:cNvPr id="19" name="TextBox 18"/>
+          <p:cNvPr id="21" name="TextBox 20"/>
           <p:cNvSpPr txBox="1"/>
           <p:nvPr/>
         </p:nvSpPr>
         <p:spPr>
           <a:xfrm>
-            <a:off x="3493008" y="3172968"/>
-            <a:ext cx="2331720" cy="1188720"/>
+            <a:off x="3493008" y="3346704"/>
+            <a:ext cx="2331720" cy="960120"/>
           </a:xfrm>
           <a:prstGeom prst="rect">
             <a:avLst/>
@@ -9957,14 +10272,14 @@
           <a:p>
             <a:pPr algn="l">
               <a:lnSpc>
-                <a:spcPct val="105000"/>
+                <a:spcPct val="102000"/>
               </a:lnSpc>
               <a:spcAft>
                 <a:spcPts val="200"/>
               </a:spcAft>
             </a:pPr>
             <a:r>
-              <a:rPr sz="1000" b="0">
+              <a:rPr sz="969" b="0">
                 <a:solidFill>
                   <a:srgbClr val="1B1F2A"/>
                 </a:solidFill>
@@ -9977,13 +10292,13 @@
       </p:sp>
       <p:cxnSp>
         <p:nvCxnSpPr>
-          <p:cNvPr id="20" name="Connector 19"/>
+          <p:cNvPr id="22" name="Connector 21"/>
           <p:cNvCxnSpPr/>
           <p:nvPr/>
         </p:nvCxnSpPr>
         <p:spPr>
           <a:xfrm>
-            <a:off x="6016752" y="3314700"/>
+            <a:off x="6016752" y="3364992"/>
             <a:ext cx="182880" cy="0"/>
           </a:xfrm>
           <a:prstGeom prst="bentConnector3">
@@ -10014,14 +10329,14 @@
       </p:cxnSp>
       <p:sp>
         <p:nvSpPr>
-          <p:cNvPr id="21" name="Rounded Rectangle 20"/>
+          <p:cNvPr id="23" name="Rounded Rectangle 22"/>
           <p:cNvSpPr/>
           <p:nvPr/>
         </p:nvSpPr>
         <p:spPr>
           <a:xfrm>
-            <a:off x="6208776" y="2148840"/>
-            <a:ext cx="2697480" cy="2331720"/>
+            <a:off x="6208776" y="2359152"/>
+            <a:ext cx="2697480" cy="2011680"/>
           </a:xfrm>
           <a:prstGeom prst="roundRect">
             <a:avLst>
@@ -10062,13 +10377,13 @@
       </p:sp>
       <p:sp>
         <p:nvSpPr>
-          <p:cNvPr id="22" name="Rounded Rectangle 21"/>
+          <p:cNvPr id="24" name="Rounded Rectangle 23"/>
           <p:cNvSpPr/>
           <p:nvPr/>
         </p:nvSpPr>
         <p:spPr>
           <a:xfrm>
-            <a:off x="6208776" y="2148840"/>
+            <a:off x="6208776" y="2359152"/>
             <a:ext cx="2697480" cy="566928"/>
           </a:xfrm>
           <a:prstGeom prst="roundRect">
@@ -10108,13 +10423,13 @@
       </p:sp>
       <p:sp>
         <p:nvSpPr>
-          <p:cNvPr id="23" name="TextBox 22"/>
+          <p:cNvPr id="25" name="TextBox 24"/>
           <p:cNvSpPr txBox="1"/>
           <p:nvPr/>
         </p:nvSpPr>
         <p:spPr>
           <a:xfrm>
-            <a:off x="6345936" y="2148840"/>
+            <a:off x="6345936" y="2359152"/>
             <a:ext cx="2423160" cy="566928"/>
           </a:xfrm>
           <a:prstGeom prst="rect">
@@ -10150,13 +10465,13 @@
       </p:sp>
       <p:sp>
         <p:nvSpPr>
-          <p:cNvPr id="24" name="TextBox 23"/>
+          <p:cNvPr id="26" name="TextBox 25"/>
           <p:cNvSpPr txBox="1"/>
           <p:nvPr/>
         </p:nvSpPr>
         <p:spPr>
           <a:xfrm>
-            <a:off x="6391656" y="2807208"/>
+            <a:off x="6391656" y="3017520"/>
             <a:ext cx="2331720" cy="320040"/>
           </a:xfrm>
           <a:prstGeom prst="rect">
@@ -10192,14 +10507,14 @@
       </p:sp>
       <p:sp>
         <p:nvSpPr>
-          <p:cNvPr id="25" name="TextBox 24"/>
+          <p:cNvPr id="27" name="TextBox 26"/>
           <p:cNvSpPr txBox="1"/>
           <p:nvPr/>
         </p:nvSpPr>
         <p:spPr>
           <a:xfrm>
-            <a:off x="6391656" y="3172968"/>
-            <a:ext cx="2331720" cy="1188720"/>
+            <a:off x="6391656" y="3346704"/>
+            <a:ext cx="2331720" cy="960120"/>
           </a:xfrm>
           <a:prstGeom prst="rect">
             <a:avLst/>
@@ -10214,14 +10529,14 @@
           <a:p>
             <a:pPr algn="l">
               <a:lnSpc>
-                <a:spcPct val="105000"/>
+                <a:spcPct val="102000"/>
               </a:lnSpc>
               <a:spcAft>
                 <a:spcPts val="200"/>
               </a:spcAft>
             </a:pPr>
             <a:r>
-              <a:rPr sz="1000" b="0">
+              <a:rPr sz="969" b="0">
                 <a:solidFill>
                   <a:srgbClr val="1B1F2A"/>
                 </a:solidFill>
@@ -10234,13 +10549,13 @@
       </p:sp>
       <p:cxnSp>
         <p:nvCxnSpPr>
-          <p:cNvPr id="26" name="Connector 25"/>
+          <p:cNvPr id="28" name="Connector 27"/>
           <p:cNvCxnSpPr/>
           <p:nvPr/>
         </p:nvCxnSpPr>
         <p:spPr>
           <a:xfrm>
-            <a:off x="8915400" y="3314700"/>
+            <a:off x="8915400" y="3364992"/>
             <a:ext cx="182880" cy="0"/>
           </a:xfrm>
           <a:prstGeom prst="bentConnector3">
@@ -10271,14 +10586,14 @@
       </p:cxnSp>
       <p:sp>
         <p:nvSpPr>
-          <p:cNvPr id="27" name="Rounded Rectangle 26"/>
+          <p:cNvPr id="29" name="Rounded Rectangle 28"/>
           <p:cNvSpPr/>
           <p:nvPr/>
         </p:nvSpPr>
         <p:spPr>
           <a:xfrm>
-            <a:off x="9107424" y="2148840"/>
-            <a:ext cx="2697480" cy="2331720"/>
+            <a:off x="9107424" y="2359152"/>
+            <a:ext cx="2697480" cy="2011680"/>
           </a:xfrm>
           <a:prstGeom prst="roundRect">
             <a:avLst>
@@ -10319,13 +10634,13 @@
       </p:sp>
       <p:sp>
         <p:nvSpPr>
-          <p:cNvPr id="28" name="Rounded Rectangle 27"/>
+          <p:cNvPr id="30" name="Rounded Rectangle 29"/>
           <p:cNvSpPr/>
           <p:nvPr/>
         </p:nvSpPr>
         <p:spPr>
           <a:xfrm>
-            <a:off x="9107424" y="2148840"/>
+            <a:off x="9107424" y="2359152"/>
             <a:ext cx="2697480" cy="566928"/>
           </a:xfrm>
           <a:prstGeom prst="roundRect">
@@ -10365,13 +10680,13 @@
       </p:sp>
       <p:sp>
         <p:nvSpPr>
-          <p:cNvPr id="29" name="TextBox 28"/>
+          <p:cNvPr id="31" name="TextBox 30"/>
           <p:cNvSpPr txBox="1"/>
           <p:nvPr/>
         </p:nvSpPr>
         <p:spPr>
           <a:xfrm>
-            <a:off x="9244584" y="2148840"/>
+            <a:off x="9244584" y="2359152"/>
             <a:ext cx="2423160" cy="566928"/>
           </a:xfrm>
           <a:prstGeom prst="rect">
@@ -10407,13 +10722,13 @@
       </p:sp>
       <p:sp>
         <p:nvSpPr>
-          <p:cNvPr id="30" name="TextBox 29"/>
+          <p:cNvPr id="32" name="TextBox 31"/>
           <p:cNvSpPr txBox="1"/>
           <p:nvPr/>
         </p:nvSpPr>
         <p:spPr>
           <a:xfrm>
-            <a:off x="9290304" y="2807208"/>
+            <a:off x="9290304" y="3017520"/>
             <a:ext cx="2331720" cy="320040"/>
           </a:xfrm>
           <a:prstGeom prst="rect">
@@ -10442,21 +10757,21 @@
                 </a:solidFill>
                 <a:latin typeface="Segoe UI"/>
               </a:rPr>
-              <a:t>Decides &amp; replies</a:t>
-            </a:r>
-          </a:p>
-        </p:txBody>
-      </p:sp>
-      <p:sp>
-        <p:nvSpPr>
-          <p:cNvPr id="31" name="TextBox 30"/>
+              <a:t>Decides the moves</a:t>
+            </a:r>
+          </a:p>
+        </p:txBody>
+      </p:sp>
+      <p:sp>
+        <p:nvSpPr>
+          <p:cNvPr id="33" name="TextBox 32"/>
           <p:cNvSpPr txBox="1"/>
           <p:nvPr/>
         </p:nvSpPr>
         <p:spPr>
           <a:xfrm>
-            <a:off x="9290304" y="3172968"/>
-            <a:ext cx="2331720" cy="1188720"/>
+            <a:off x="9290304" y="3346704"/>
+            <a:ext cx="2331720" cy="960120"/>
           </a:xfrm>
           <a:prstGeom prst="rect">
             <a:avLst/>
@@ -10471,34 +10786,34 @@
           <a:p>
             <a:pPr algn="l">
               <a:lnSpc>
-                <a:spcPct val="105000"/>
+                <a:spcPct val="102000"/>
               </a:lnSpc>
               <a:spcAft>
                 <a:spcPts val="200"/>
               </a:spcAft>
             </a:pPr>
             <a:r>
-              <a:rPr sz="1000" b="0">
+              <a:rPr sz="969" b="0">
                 <a:solidFill>
                   <a:srgbClr val="1B1F2A"/>
                 </a:solidFill>
                 <a:latin typeface="Segoe UI"/>
               </a:rPr>
-              <a:t>Joins it all up and recommends the moves — with an owner and priority for each.</a:t>
-            </a:r>
-          </a:p>
-        </p:txBody>
-      </p:sp>
-      <p:sp>
-        <p:nvSpPr>
-          <p:cNvPr id="32" name="Rounded Rectangle 31"/>
+              <a:t>Joins it all up into a ranked set of actions — each with an owner and priority — plus a chart of the numbers.</a:t>
+            </a:r>
+          </a:p>
+        </p:txBody>
+      </p:sp>
+      <p:sp>
+        <p:nvSpPr>
+          <p:cNvPr id="34" name="Rounded Rectangle 33"/>
           <p:cNvSpPr/>
           <p:nvPr/>
         </p:nvSpPr>
         <p:spPr>
           <a:xfrm>
-            <a:off x="411480" y="4754880"/>
-            <a:ext cx="11384280" cy="1417320"/>
+            <a:off x="411480" y="4572000"/>
+            <a:ext cx="11384280" cy="1371600"/>
           </a:xfrm>
           <a:prstGeom prst="roundRect">
             <a:avLst>
@@ -10539,13 +10854,13 @@
       </p:sp>
       <p:sp>
         <p:nvSpPr>
-          <p:cNvPr id="33" name="TextBox 32"/>
+          <p:cNvPr id="35" name="TextBox 34"/>
           <p:cNvSpPr txBox="1"/>
           <p:nvPr/>
         </p:nvSpPr>
         <p:spPr>
           <a:xfrm>
-            <a:off x="640080" y="4828032"/>
+            <a:off x="640080" y="4626864"/>
             <a:ext cx="10972800" cy="365760"/>
           </a:xfrm>
           <a:prstGeom prst="rect">
@@ -10581,13 +10896,13 @@
       </p:sp>
       <p:sp>
         <p:nvSpPr>
-          <p:cNvPr id="34" name="TextBox 33"/>
+          <p:cNvPr id="36" name="TextBox 35"/>
           <p:cNvSpPr txBox="1"/>
           <p:nvPr/>
         </p:nvSpPr>
         <p:spPr>
           <a:xfrm>
-            <a:off x="640080" y="5212080"/>
+            <a:off x="640080" y="4992624"/>
             <a:ext cx="10972800" cy="914400"/>
           </a:xfrm>
           <a:prstGeom prst="rect">
@@ -10603,7 +10918,7 @@
           <a:p>
             <a:pPr algn="l">
               <a:lnSpc>
-                <a:spcPct val="100000"/>
+                <a:spcPct val="98000"/>
               </a:lnSpc>
               <a:spcAft>
                 <a:spcPts val="300"/>
@@ -10631,7 +10946,7 @@
           <a:p>
             <a:pPr algn="l">
               <a:lnSpc>
-                <a:spcPct val="100000"/>
+                <a:spcPct val="98000"/>
               </a:lnSpc>
               <a:spcAft>
                 <a:spcPts val="300"/>
@@ -10659,7 +10974,7 @@
           <a:p>
             <a:pPr algn="l">
               <a:lnSpc>
-                <a:spcPct val="100000"/>
+                <a:spcPct val="98000"/>
               </a:lnSpc>
               <a:spcAft>
                 <a:spcPts val="300"/>
@@ -10688,14 +11003,14 @@
       </p:sp>
       <p:sp>
         <p:nvSpPr>
-          <p:cNvPr id="35" name="TextBox 34"/>
+          <p:cNvPr id="37" name="TextBox 36"/>
           <p:cNvSpPr txBox="1"/>
           <p:nvPr/>
         </p:nvSpPr>
         <p:spPr>
           <a:xfrm>
-            <a:off x="411480" y="6327648"/>
-            <a:ext cx="11384280" cy="365760"/>
+            <a:off x="411480" y="6035040"/>
+            <a:ext cx="11384280" cy="457200"/>
           </a:xfrm>
           <a:prstGeom prst="rect">
             <a:avLst/>
@@ -10723,7 +11038,6405 @@
                 </a:solidFill>
                 <a:latin typeface="Segoe UI"/>
               </a:rPr>
-              <a:t>Every recommendation cites the exact numbers it came from — nothing is guessed.</a:t>
+              <a:t>The </a:t>
+            </a:r>
+            <a:r>
+              <a:rPr sz="1050" b="1">
+                <a:solidFill>
+                  <a:srgbClr val="1E9E5A"/>
+                </a:solidFill>
+                <a:latin typeface="Segoe UI"/>
+              </a:rPr>
+              <a:t>Response Generator</a:t>
+            </a:r>
+            <a:r>
+              <a:rPr sz="1050" b="0">
+                <a:solidFill>
+                  <a:srgbClr val="1B1F2A"/>
+                </a:solidFill>
+                <a:latin typeface="Segoe UI"/>
+              </a:rPr>
+              <a:t> writes the final reply — keeping the Action agent’s chart — and every recommendation cites the exact numbers it came from.</a:t>
+            </a:r>
+          </a:p>
+        </p:txBody>
+      </p:sp>
+    </p:spTree>
+  </p:cSld>
+  <p:clrMapOvr>
+    <a:masterClrMapping/>
+  </p:clrMapOvr>
+</p:sld>
+</file>
+
+<file path=ppt/slides/slide5.xml><?xml version="1.0" encoding="utf-8"?>
+<p:sld xmlns:a="http://schemas.openxmlformats.org/drawingml/2006/main" xmlns:p="http://schemas.openxmlformats.org/presentationml/2006/main" xmlns:r="http://schemas.openxmlformats.org/officeDocument/2006/relationships">
+  <p:cSld>
+    <p:spTree>
+      <p:nvGrpSpPr>
+        <p:cNvPr id="1" name=""/>
+        <p:cNvGrpSpPr/>
+        <p:nvPr/>
+      </p:nvGrpSpPr>
+      <p:grpSpPr/>
+      <p:sp>
+        <p:nvSpPr>
+          <p:cNvPr id="2" name="Rectangle 1"/>
+          <p:cNvSpPr/>
+          <p:nvPr/>
+        </p:nvSpPr>
+        <p:spPr>
+          <a:xfrm>
+            <a:off x="0" y="0"/>
+            <a:ext cx="12191695" cy="6858000"/>
+          </a:xfrm>
+          <a:prstGeom prst="rect">
+            <a:avLst/>
+          </a:prstGeom>
+          <a:solidFill>
+            <a:srgbClr val="F4F6FB"/>
+          </a:solidFill>
+          <a:ln>
+            <a:noFill/>
+          </a:ln>
+          <a:effectLst/>
+        </p:spPr>
+        <p:style>
+          <a:lnRef idx="1">
+            <a:schemeClr val="accent1"/>
+          </a:lnRef>
+          <a:fillRef idx="3">
+            <a:schemeClr val="accent1"/>
+          </a:fillRef>
+          <a:effectRef idx="2">
+            <a:schemeClr val="accent1"/>
+          </a:effectRef>
+          <a:fontRef idx="minor">
+            <a:schemeClr val="lt1"/>
+          </a:fontRef>
+        </p:style>
+        <p:txBody>
+          <a:bodyPr rtlCol="0" anchor="ctr"/>
+          <a:lstStyle/>
+          <a:p>
+            <a:pPr algn="ctr"/>
+          </a:p>
+        </p:txBody>
+      </p:sp>
+      <p:sp>
+        <p:nvSpPr>
+          <p:cNvPr id="3" name="Rectangle 2"/>
+          <p:cNvSpPr/>
+          <p:nvPr/>
+        </p:nvSpPr>
+        <p:spPr>
+          <a:xfrm>
+            <a:off x="0" y="0"/>
+            <a:ext cx="12191695" cy="1078992"/>
+          </a:xfrm>
+          <a:prstGeom prst="rect">
+            <a:avLst/>
+          </a:prstGeom>
+          <a:solidFill>
+            <a:srgbClr val="1B1F2A"/>
+          </a:solidFill>
+          <a:ln>
+            <a:noFill/>
+          </a:ln>
+          <a:effectLst/>
+        </p:spPr>
+        <p:style>
+          <a:lnRef idx="1">
+            <a:schemeClr val="accent1"/>
+          </a:lnRef>
+          <a:fillRef idx="3">
+            <a:schemeClr val="accent1"/>
+          </a:fillRef>
+          <a:effectRef idx="2">
+            <a:schemeClr val="accent1"/>
+          </a:effectRef>
+          <a:fontRef idx="minor">
+            <a:schemeClr val="lt1"/>
+          </a:fontRef>
+        </p:style>
+        <p:txBody>
+          <a:bodyPr rtlCol="0" anchor="ctr"/>
+          <a:lstStyle/>
+          <a:p>
+            <a:pPr algn="ctr"/>
+          </a:p>
+        </p:txBody>
+      </p:sp>
+      <p:sp>
+        <p:nvSpPr>
+          <p:cNvPr id="4" name="Rectangle 3"/>
+          <p:cNvSpPr/>
+          <p:nvPr/>
+        </p:nvSpPr>
+        <p:spPr>
+          <a:xfrm>
+            <a:off x="0" y="1024128"/>
+            <a:ext cx="12191695" cy="54864"/>
+          </a:xfrm>
+          <a:prstGeom prst="rect">
+            <a:avLst/>
+          </a:prstGeom>
+          <a:solidFill>
+            <a:srgbClr val="E28A00"/>
+          </a:solidFill>
+          <a:ln>
+            <a:noFill/>
+          </a:ln>
+          <a:effectLst/>
+        </p:spPr>
+        <p:style>
+          <a:lnRef idx="1">
+            <a:schemeClr val="accent1"/>
+          </a:lnRef>
+          <a:fillRef idx="3">
+            <a:schemeClr val="accent1"/>
+          </a:fillRef>
+          <a:effectRef idx="2">
+            <a:schemeClr val="accent1"/>
+          </a:effectRef>
+          <a:fontRef idx="minor">
+            <a:schemeClr val="lt1"/>
+          </a:fontRef>
+        </p:style>
+        <p:txBody>
+          <a:bodyPr rtlCol="0" anchor="ctr"/>
+          <a:lstStyle/>
+          <a:p>
+            <a:pPr algn="ctr"/>
+          </a:p>
+        </p:txBody>
+      </p:sp>
+      <p:sp>
+        <p:nvSpPr>
+          <p:cNvPr id="5" name="TextBox 4"/>
+          <p:cNvSpPr txBox="1"/>
+          <p:nvPr/>
+        </p:nvSpPr>
+        <p:spPr>
+          <a:xfrm>
+            <a:off x="502920" y="146304"/>
+            <a:ext cx="11247120" cy="365760"/>
+          </a:xfrm>
+          <a:prstGeom prst="rect">
+            <a:avLst/>
+          </a:prstGeom>
+          <a:noFill/>
+        </p:spPr>
+        <p:txBody>
+          <a:bodyPr wrap="square" anchor="t" lIns="0" rIns="0" tIns="0" bIns="0">
+            <a:spAutoFit/>
+          </a:bodyPr>
+          <a:lstStyle/>
+          <a:p>
+            <a:pPr algn="l"/>
+            <a:r>
+              <a:rPr sz="1200" b="1">
+                <a:solidFill>
+                  <a:srgbClr val="E28A00"/>
+                </a:solidFill>
+                <a:latin typeface="Segoe UI"/>
+              </a:rPr>
+              <a:t>ZAVA · AGENTIC AI REFERENCE ARCHITECTURE</a:t>
+            </a:r>
+          </a:p>
+        </p:txBody>
+      </p:sp>
+      <p:sp>
+        <p:nvSpPr>
+          <p:cNvPr id="6" name="TextBox 5"/>
+          <p:cNvSpPr txBox="1"/>
+          <p:nvPr/>
+        </p:nvSpPr>
+        <p:spPr>
+          <a:xfrm>
+            <a:off x="502920" y="402336"/>
+            <a:ext cx="11247120" cy="566928"/>
+          </a:xfrm>
+          <a:prstGeom prst="rect">
+            <a:avLst/>
+          </a:prstGeom>
+          <a:noFill/>
+        </p:spPr>
+        <p:txBody>
+          <a:bodyPr wrap="square" anchor="t" lIns="0" rIns="0" tIns="0" bIns="0">
+            <a:spAutoFit/>
+          </a:bodyPr>
+          <a:lstStyle/>
+          <a:p>
+            <a:pPr algn="l"/>
+            <a:r>
+              <a:rPr sz="2300" b="1">
+                <a:solidFill>
+                  <a:srgbClr val="FFFFFF"/>
+                </a:solidFill>
+                <a:latin typeface="Segoe UI"/>
+              </a:rPr>
+              <a:t>The Microsoft agent platform behind this demo — at enterprise scale</a:t>
+            </a:r>
+          </a:p>
+        </p:txBody>
+      </p:sp>
+      <p:sp>
+        <p:nvSpPr>
+          <p:cNvPr id="7" name="Rounded Rectangle 6"/>
+          <p:cNvSpPr/>
+          <p:nvPr/>
+        </p:nvSpPr>
+        <p:spPr>
+          <a:xfrm>
+            <a:off x="411480" y="1280160"/>
+            <a:ext cx="11384280" cy="713232"/>
+          </a:xfrm>
+          <a:prstGeom prst="roundRect">
+            <a:avLst>
+              <a:gd name="adj" fmla="val 10000"/>
+            </a:avLst>
+          </a:prstGeom>
+          <a:solidFill>
+            <a:srgbClr val="EAF0FE"/>
+          </a:solidFill>
+          <a:ln>
+            <a:noFill/>
+          </a:ln>
+          <a:effectLst/>
+        </p:spPr>
+        <p:style>
+          <a:lnRef idx="1">
+            <a:schemeClr val="accent1"/>
+          </a:lnRef>
+          <a:fillRef idx="3">
+            <a:schemeClr val="accent1"/>
+          </a:fillRef>
+          <a:effectRef idx="2">
+            <a:schemeClr val="accent1"/>
+          </a:effectRef>
+          <a:fontRef idx="minor">
+            <a:schemeClr val="lt1"/>
+          </a:fontRef>
+        </p:style>
+        <p:txBody>
+          <a:bodyPr rtlCol="0" anchor="ctr"/>
+          <a:lstStyle/>
+          <a:p>
+            <a:pPr algn="ctr"/>
+          </a:p>
+        </p:txBody>
+      </p:sp>
+      <p:sp>
+        <p:nvSpPr>
+          <p:cNvPr id="8" name="Rounded Rectangle 7"/>
+          <p:cNvSpPr/>
+          <p:nvPr/>
+        </p:nvSpPr>
+        <p:spPr>
+          <a:xfrm>
+            <a:off x="411480" y="1280160"/>
+            <a:ext cx="2423160" cy="713232"/>
+          </a:xfrm>
+          <a:prstGeom prst="roundRect">
+            <a:avLst>
+              <a:gd name="adj" fmla="val 10000"/>
+            </a:avLst>
+          </a:prstGeom>
+          <a:solidFill>
+            <a:srgbClr val="2F6FED"/>
+          </a:solidFill>
+          <a:ln>
+            <a:noFill/>
+          </a:ln>
+          <a:effectLst/>
+        </p:spPr>
+        <p:style>
+          <a:lnRef idx="1">
+            <a:schemeClr val="accent1"/>
+          </a:lnRef>
+          <a:fillRef idx="3">
+            <a:schemeClr val="accent1"/>
+          </a:fillRef>
+          <a:effectRef idx="2">
+            <a:schemeClr val="accent1"/>
+          </a:effectRef>
+          <a:fontRef idx="minor">
+            <a:schemeClr val="lt1"/>
+          </a:fontRef>
+        </p:style>
+        <p:txBody>
+          <a:bodyPr rtlCol="0" anchor="ctr"/>
+          <a:lstStyle/>
+          <a:p>
+            <a:pPr algn="ctr"/>
+          </a:p>
+        </p:txBody>
+      </p:sp>
+      <p:sp>
+        <p:nvSpPr>
+          <p:cNvPr id="9" name="TextBox 8"/>
+          <p:cNvSpPr txBox="1"/>
+          <p:nvPr/>
+        </p:nvSpPr>
+        <p:spPr>
+          <a:xfrm>
+            <a:off x="557784" y="1280160"/>
+            <a:ext cx="2148840" cy="713232"/>
+          </a:xfrm>
+          <a:prstGeom prst="rect">
+            <a:avLst/>
+          </a:prstGeom>
+          <a:noFill/>
+        </p:spPr>
+        <p:txBody>
+          <a:bodyPr wrap="square" anchor="ctr" lIns="0" rIns="0" tIns="0" bIns="0">
+            <a:spAutoFit/>
+          </a:bodyPr>
+          <a:lstStyle/>
+          <a:p>
+            <a:pPr algn="l"/>
+            <a:r>
+              <a:rPr sz="1150" b="1">
+                <a:solidFill>
+                  <a:srgbClr val="FFFFFF"/>
+                </a:solidFill>
+                <a:latin typeface="Segoe UI"/>
+              </a:rPr>
+              <a:t>EXPERIENCE</a:t>
+            </a:r>
+          </a:p>
+          <a:p>
+            <a:pPr algn="l"/>
+            <a:r>
+              <a:rPr sz="800" b="0">
+                <a:solidFill>
+                  <a:srgbClr val="ECF0FB"/>
+                </a:solidFill>
+                <a:latin typeface="Segoe UI"/>
+              </a:rPr>
+              <a:t>how people &amp; apps ask</a:t>
+            </a:r>
+          </a:p>
+        </p:txBody>
+      </p:sp>
+      <p:sp>
+        <p:nvSpPr>
+          <p:cNvPr id="10" name="Rounded Rectangle 9"/>
+          <p:cNvSpPr/>
+          <p:nvPr/>
+        </p:nvSpPr>
+        <p:spPr>
+          <a:xfrm>
+            <a:off x="2999232" y="1380744"/>
+            <a:ext cx="2061971" cy="512064"/>
+          </a:xfrm>
+          <a:prstGeom prst="roundRect">
+            <a:avLst>
+              <a:gd name="adj" fmla="val 16000"/>
+            </a:avLst>
+          </a:prstGeom>
+          <a:solidFill>
+            <a:srgbClr val="2F6FED"/>
+          </a:solidFill>
+          <a:ln>
+            <a:noFill/>
+          </a:ln>
+          <a:effectLst/>
+        </p:spPr>
+        <p:style>
+          <a:lnRef idx="1">
+            <a:schemeClr val="accent1"/>
+          </a:lnRef>
+          <a:fillRef idx="3">
+            <a:schemeClr val="accent1"/>
+          </a:fillRef>
+          <a:effectRef idx="2">
+            <a:schemeClr val="accent1"/>
+          </a:effectRef>
+          <a:fontRef idx="minor">
+            <a:schemeClr val="lt1"/>
+          </a:fontRef>
+        </p:style>
+        <p:txBody>
+          <a:bodyPr rtlCol="0" anchor="ctr"/>
+          <a:lstStyle/>
+          <a:p>
+            <a:pPr algn="ctr"/>
+          </a:p>
+        </p:txBody>
+      </p:sp>
+      <p:sp>
+        <p:nvSpPr>
+          <p:cNvPr id="11" name="TextBox 10"/>
+          <p:cNvSpPr txBox="1"/>
+          <p:nvPr/>
+        </p:nvSpPr>
+        <p:spPr>
+          <a:xfrm>
+            <a:off x="3072384" y="1380744"/>
+            <a:ext cx="1915667" cy="512064"/>
+          </a:xfrm>
+          <a:prstGeom prst="rect">
+            <a:avLst/>
+          </a:prstGeom>
+          <a:noFill/>
+        </p:spPr>
+        <p:txBody>
+          <a:bodyPr wrap="square" anchor="ctr" lIns="0" rIns="0" tIns="0" bIns="0">
+            <a:spAutoFit/>
+          </a:bodyPr>
+          <a:lstStyle/>
+          <a:p>
+            <a:pPr algn="ctr"/>
+            <a:r>
+              <a:rPr sz="1050" b="1">
+                <a:solidFill>
+                  <a:srgbClr val="FFFFFF"/>
+                </a:solidFill>
+                <a:latin typeface="Segoe UI"/>
+              </a:rPr>
+              <a:t>Microsoft 365 Copilot</a:t>
+            </a:r>
+          </a:p>
+          <a:p>
+            <a:pPr algn="ctr"/>
+            <a:r>
+              <a:rPr sz="800" b="0">
+                <a:solidFill>
+                  <a:srgbClr val="ECF0FB"/>
+                </a:solidFill>
+                <a:latin typeface="Segoe UI"/>
+              </a:rPr>
+              <a:t>Teams · Outlook · Word</a:t>
+            </a:r>
+          </a:p>
+        </p:txBody>
+      </p:sp>
+      <p:sp>
+        <p:nvSpPr>
+          <p:cNvPr id="12" name="Rounded Rectangle 11"/>
+          <p:cNvSpPr/>
+          <p:nvPr/>
+        </p:nvSpPr>
+        <p:spPr>
+          <a:xfrm>
+            <a:off x="5189220" y="1380744"/>
+            <a:ext cx="2061971" cy="512064"/>
+          </a:xfrm>
+          <a:prstGeom prst="roundRect">
+            <a:avLst>
+              <a:gd name="adj" fmla="val 16000"/>
+            </a:avLst>
+          </a:prstGeom>
+          <a:solidFill>
+            <a:srgbClr val="2F6FED"/>
+          </a:solidFill>
+          <a:ln>
+            <a:noFill/>
+          </a:ln>
+          <a:effectLst/>
+        </p:spPr>
+        <p:style>
+          <a:lnRef idx="1">
+            <a:schemeClr val="accent1"/>
+          </a:lnRef>
+          <a:fillRef idx="3">
+            <a:schemeClr val="accent1"/>
+          </a:fillRef>
+          <a:effectRef idx="2">
+            <a:schemeClr val="accent1"/>
+          </a:effectRef>
+          <a:fontRef idx="minor">
+            <a:schemeClr val="lt1"/>
+          </a:fontRef>
+        </p:style>
+        <p:txBody>
+          <a:bodyPr rtlCol="0" anchor="ctr"/>
+          <a:lstStyle/>
+          <a:p>
+            <a:pPr algn="ctr"/>
+          </a:p>
+        </p:txBody>
+      </p:sp>
+      <p:sp>
+        <p:nvSpPr>
+          <p:cNvPr id="13" name="TextBox 12"/>
+          <p:cNvSpPr txBox="1"/>
+          <p:nvPr/>
+        </p:nvSpPr>
+        <p:spPr>
+          <a:xfrm>
+            <a:off x="5262372" y="1380744"/>
+            <a:ext cx="1915667" cy="512064"/>
+          </a:xfrm>
+          <a:prstGeom prst="rect">
+            <a:avLst/>
+          </a:prstGeom>
+          <a:noFill/>
+        </p:spPr>
+        <p:txBody>
+          <a:bodyPr wrap="square" anchor="ctr" lIns="0" rIns="0" tIns="0" bIns="0">
+            <a:spAutoFit/>
+          </a:bodyPr>
+          <a:lstStyle/>
+          <a:p>
+            <a:pPr algn="ctr"/>
+            <a:r>
+              <a:rPr sz="1050" b="1">
+                <a:solidFill>
+                  <a:srgbClr val="FFFFFF"/>
+                </a:solidFill>
+                <a:latin typeface="Segoe UI"/>
+              </a:rPr>
+              <a:t>Copilot Studio</a:t>
+            </a:r>
+          </a:p>
+          <a:p>
+            <a:pPr algn="ctr"/>
+            <a:r>
+              <a:rPr sz="800" b="0">
+                <a:solidFill>
+                  <a:srgbClr val="ECF0FB"/>
+                </a:solidFill>
+                <a:latin typeface="Segoe UI"/>
+              </a:rPr>
+              <a:t>low-code agents</a:t>
+            </a:r>
+          </a:p>
+        </p:txBody>
+      </p:sp>
+      <p:sp>
+        <p:nvSpPr>
+          <p:cNvPr id="14" name="Rounded Rectangle 13"/>
+          <p:cNvSpPr/>
+          <p:nvPr/>
+        </p:nvSpPr>
+        <p:spPr>
+          <a:xfrm>
+            <a:off x="7379208" y="1380744"/>
+            <a:ext cx="2061971" cy="512064"/>
+          </a:xfrm>
+          <a:prstGeom prst="roundRect">
+            <a:avLst>
+              <a:gd name="adj" fmla="val 16000"/>
+            </a:avLst>
+          </a:prstGeom>
+          <a:solidFill>
+            <a:srgbClr val="2F6FED"/>
+          </a:solidFill>
+          <a:ln>
+            <a:noFill/>
+          </a:ln>
+          <a:effectLst/>
+        </p:spPr>
+        <p:style>
+          <a:lnRef idx="1">
+            <a:schemeClr val="accent1"/>
+          </a:lnRef>
+          <a:fillRef idx="3">
+            <a:schemeClr val="accent1"/>
+          </a:fillRef>
+          <a:effectRef idx="2">
+            <a:schemeClr val="accent1"/>
+          </a:effectRef>
+          <a:fontRef idx="minor">
+            <a:schemeClr val="lt1"/>
+          </a:fontRef>
+        </p:style>
+        <p:txBody>
+          <a:bodyPr rtlCol="0" anchor="ctr"/>
+          <a:lstStyle/>
+          <a:p>
+            <a:pPr algn="ctr"/>
+          </a:p>
+        </p:txBody>
+      </p:sp>
+      <p:sp>
+        <p:nvSpPr>
+          <p:cNvPr id="15" name="TextBox 14"/>
+          <p:cNvSpPr txBox="1"/>
+          <p:nvPr/>
+        </p:nvSpPr>
+        <p:spPr>
+          <a:xfrm>
+            <a:off x="7452360" y="1380744"/>
+            <a:ext cx="1915667" cy="512064"/>
+          </a:xfrm>
+          <a:prstGeom prst="rect">
+            <a:avLst/>
+          </a:prstGeom>
+          <a:noFill/>
+        </p:spPr>
+        <p:txBody>
+          <a:bodyPr wrap="square" anchor="ctr" lIns="0" rIns="0" tIns="0" bIns="0">
+            <a:spAutoFit/>
+          </a:bodyPr>
+          <a:lstStyle/>
+          <a:p>
+            <a:pPr algn="ctr"/>
+            <a:r>
+              <a:rPr sz="1050" b="1">
+                <a:solidFill>
+                  <a:srgbClr val="FFFFFF"/>
+                </a:solidFill>
+                <a:latin typeface="Segoe UI"/>
+              </a:rPr>
+              <a:t>Custom apps</a:t>
+            </a:r>
+          </a:p>
+          <a:p>
+            <a:pPr algn="ctr"/>
+            <a:r>
+              <a:rPr sz="800" b="0">
+                <a:solidFill>
+                  <a:srgbClr val="ECF0FB"/>
+                </a:solidFill>
+                <a:latin typeface="Segoe UI"/>
+              </a:rPr>
+              <a:t>Web / FastAPI · API endpoints</a:t>
+            </a:r>
+          </a:p>
+        </p:txBody>
+      </p:sp>
+      <p:sp>
+        <p:nvSpPr>
+          <p:cNvPr id="16" name="Rounded Rectangle 15"/>
+          <p:cNvSpPr/>
+          <p:nvPr/>
+        </p:nvSpPr>
+        <p:spPr>
+          <a:xfrm>
+            <a:off x="9569196" y="1380744"/>
+            <a:ext cx="2061971" cy="512064"/>
+          </a:xfrm>
+          <a:prstGeom prst="roundRect">
+            <a:avLst>
+              <a:gd name="adj" fmla="val 16000"/>
+            </a:avLst>
+          </a:prstGeom>
+          <a:solidFill>
+            <a:srgbClr val="2F6FED"/>
+          </a:solidFill>
+          <a:ln>
+            <a:noFill/>
+          </a:ln>
+          <a:effectLst/>
+        </p:spPr>
+        <p:style>
+          <a:lnRef idx="1">
+            <a:schemeClr val="accent1"/>
+          </a:lnRef>
+          <a:fillRef idx="3">
+            <a:schemeClr val="accent1"/>
+          </a:fillRef>
+          <a:effectRef idx="2">
+            <a:schemeClr val="accent1"/>
+          </a:effectRef>
+          <a:fontRef idx="minor">
+            <a:schemeClr val="lt1"/>
+          </a:fontRef>
+        </p:style>
+        <p:txBody>
+          <a:bodyPr rtlCol="0" anchor="ctr"/>
+          <a:lstStyle/>
+          <a:p>
+            <a:pPr algn="ctr"/>
+          </a:p>
+        </p:txBody>
+      </p:sp>
+      <p:sp>
+        <p:nvSpPr>
+          <p:cNvPr id="17" name="TextBox 16"/>
+          <p:cNvSpPr txBox="1"/>
+          <p:nvPr/>
+        </p:nvSpPr>
+        <p:spPr>
+          <a:xfrm>
+            <a:off x="9642348" y="1380744"/>
+            <a:ext cx="1915667" cy="512064"/>
+          </a:xfrm>
+          <a:prstGeom prst="rect">
+            <a:avLst/>
+          </a:prstGeom>
+          <a:noFill/>
+        </p:spPr>
+        <p:txBody>
+          <a:bodyPr wrap="square" anchor="ctr" lIns="0" rIns="0" tIns="0" bIns="0">
+            <a:spAutoFit/>
+          </a:bodyPr>
+          <a:lstStyle/>
+          <a:p>
+            <a:pPr algn="ctr"/>
+            <a:r>
+              <a:rPr sz="1050" b="1">
+                <a:solidFill>
+                  <a:srgbClr val="FFFFFF"/>
+                </a:solidFill>
+                <a:latin typeface="Segoe UI"/>
+              </a:rPr>
+              <a:t>Agent 365 / Agent Store</a:t>
+            </a:r>
+          </a:p>
+          <a:p>
+            <a:pPr algn="ctr"/>
+            <a:r>
+              <a:rPr sz="800" b="0">
+                <a:solidFill>
+                  <a:srgbClr val="ECF0FB"/>
+                </a:solidFill>
+                <a:latin typeface="Segoe UI"/>
+              </a:rPr>
+              <a:t>discover &amp; share</a:t>
+            </a:r>
+          </a:p>
+        </p:txBody>
+      </p:sp>
+      <p:sp>
+        <p:nvSpPr>
+          <p:cNvPr id="18" name="Rounded Rectangle 17"/>
+          <p:cNvSpPr/>
+          <p:nvPr/>
+        </p:nvSpPr>
+        <p:spPr>
+          <a:xfrm>
+            <a:off x="411480" y="2084831"/>
+            <a:ext cx="11384280" cy="713232"/>
+          </a:xfrm>
+          <a:prstGeom prst="roundRect">
+            <a:avLst>
+              <a:gd name="adj" fmla="val 10000"/>
+            </a:avLst>
+          </a:prstGeom>
+          <a:solidFill>
+            <a:srgbClr val="E7EAF1"/>
+          </a:solidFill>
+          <a:ln>
+            <a:noFill/>
+          </a:ln>
+          <a:effectLst/>
+        </p:spPr>
+        <p:style>
+          <a:lnRef idx="1">
+            <a:schemeClr val="accent1"/>
+          </a:lnRef>
+          <a:fillRef idx="3">
+            <a:schemeClr val="accent1"/>
+          </a:fillRef>
+          <a:effectRef idx="2">
+            <a:schemeClr val="accent1"/>
+          </a:effectRef>
+          <a:fontRef idx="minor">
+            <a:schemeClr val="lt1"/>
+          </a:fontRef>
+        </p:style>
+        <p:txBody>
+          <a:bodyPr rtlCol="0" anchor="ctr"/>
+          <a:lstStyle/>
+          <a:p>
+            <a:pPr algn="ctr"/>
+          </a:p>
+        </p:txBody>
+      </p:sp>
+      <p:sp>
+        <p:nvSpPr>
+          <p:cNvPr id="19" name="Rounded Rectangle 18"/>
+          <p:cNvSpPr/>
+          <p:nvPr/>
+        </p:nvSpPr>
+        <p:spPr>
+          <a:xfrm>
+            <a:off x="411480" y="2084831"/>
+            <a:ext cx="2423160" cy="713232"/>
+          </a:xfrm>
+          <a:prstGeom prst="roundRect">
+            <a:avLst>
+              <a:gd name="adj" fmla="val 10000"/>
+            </a:avLst>
+          </a:prstGeom>
+          <a:solidFill>
+            <a:srgbClr val="3C465B"/>
+          </a:solidFill>
+          <a:ln>
+            <a:noFill/>
+          </a:ln>
+          <a:effectLst/>
+        </p:spPr>
+        <p:style>
+          <a:lnRef idx="1">
+            <a:schemeClr val="accent1"/>
+          </a:lnRef>
+          <a:fillRef idx="3">
+            <a:schemeClr val="accent1"/>
+          </a:fillRef>
+          <a:effectRef idx="2">
+            <a:schemeClr val="accent1"/>
+          </a:effectRef>
+          <a:fontRef idx="minor">
+            <a:schemeClr val="lt1"/>
+          </a:fontRef>
+        </p:style>
+        <p:txBody>
+          <a:bodyPr rtlCol="0" anchor="ctr"/>
+          <a:lstStyle/>
+          <a:p>
+            <a:pPr algn="ctr"/>
+          </a:p>
+        </p:txBody>
+      </p:sp>
+      <p:sp>
+        <p:nvSpPr>
+          <p:cNvPr id="20" name="TextBox 19"/>
+          <p:cNvSpPr txBox="1"/>
+          <p:nvPr/>
+        </p:nvSpPr>
+        <p:spPr>
+          <a:xfrm>
+            <a:off x="557784" y="2084831"/>
+            <a:ext cx="2148840" cy="713232"/>
+          </a:xfrm>
+          <a:prstGeom prst="rect">
+            <a:avLst/>
+          </a:prstGeom>
+          <a:noFill/>
+        </p:spPr>
+        <p:txBody>
+          <a:bodyPr wrap="square" anchor="ctr" lIns="0" rIns="0" tIns="0" bIns="0">
+            <a:spAutoFit/>
+          </a:bodyPr>
+          <a:lstStyle/>
+          <a:p>
+            <a:pPr algn="l"/>
+            <a:r>
+              <a:rPr sz="1150" b="1">
+                <a:solidFill>
+                  <a:srgbClr val="FFFFFF"/>
+                </a:solidFill>
+                <a:latin typeface="Segoe UI"/>
+              </a:rPr>
+              <a:t>TRUST &amp; POLICY</a:t>
+            </a:r>
+          </a:p>
+          <a:p>
+            <a:pPr algn="l"/>
+            <a:r>
+              <a:rPr sz="800" b="0">
+                <a:solidFill>
+                  <a:srgbClr val="ECF0FB"/>
+                </a:solidFill>
+                <a:latin typeface="Segoe UI"/>
+              </a:rPr>
+              <a:t>identity · gateway · safety</a:t>
+            </a:r>
+          </a:p>
+        </p:txBody>
+      </p:sp>
+      <p:sp>
+        <p:nvSpPr>
+          <p:cNvPr id="21" name="Rounded Rectangle 20"/>
+          <p:cNvSpPr/>
+          <p:nvPr/>
+        </p:nvSpPr>
+        <p:spPr>
+          <a:xfrm>
+            <a:off x="2999232" y="2185415"/>
+            <a:ext cx="2061971" cy="512064"/>
+          </a:xfrm>
+          <a:prstGeom prst="roundRect">
+            <a:avLst>
+              <a:gd name="adj" fmla="val 16000"/>
+            </a:avLst>
+          </a:prstGeom>
+          <a:solidFill>
+            <a:srgbClr val="3C465B"/>
+          </a:solidFill>
+          <a:ln>
+            <a:noFill/>
+          </a:ln>
+          <a:effectLst/>
+        </p:spPr>
+        <p:style>
+          <a:lnRef idx="1">
+            <a:schemeClr val="accent1"/>
+          </a:lnRef>
+          <a:fillRef idx="3">
+            <a:schemeClr val="accent1"/>
+          </a:fillRef>
+          <a:effectRef idx="2">
+            <a:schemeClr val="accent1"/>
+          </a:effectRef>
+          <a:fontRef idx="minor">
+            <a:schemeClr val="lt1"/>
+          </a:fontRef>
+        </p:style>
+        <p:txBody>
+          <a:bodyPr rtlCol="0" anchor="ctr"/>
+          <a:lstStyle/>
+          <a:p>
+            <a:pPr algn="ctr"/>
+          </a:p>
+        </p:txBody>
+      </p:sp>
+      <p:sp>
+        <p:nvSpPr>
+          <p:cNvPr id="22" name="TextBox 21"/>
+          <p:cNvSpPr txBox="1"/>
+          <p:nvPr/>
+        </p:nvSpPr>
+        <p:spPr>
+          <a:xfrm>
+            <a:off x="3072384" y="2185415"/>
+            <a:ext cx="1915667" cy="512064"/>
+          </a:xfrm>
+          <a:prstGeom prst="rect">
+            <a:avLst/>
+          </a:prstGeom>
+          <a:noFill/>
+        </p:spPr>
+        <p:txBody>
+          <a:bodyPr wrap="square" anchor="ctr" lIns="0" rIns="0" tIns="0" bIns="0">
+            <a:spAutoFit/>
+          </a:bodyPr>
+          <a:lstStyle/>
+          <a:p>
+            <a:pPr algn="ctr"/>
+            <a:r>
+              <a:rPr sz="1050" b="1">
+                <a:solidFill>
+                  <a:srgbClr val="FFFFFF"/>
+                </a:solidFill>
+                <a:latin typeface="Segoe UI"/>
+              </a:rPr>
+              <a:t>Microsoft Entra Agent ID</a:t>
+            </a:r>
+          </a:p>
+          <a:p>
+            <a:pPr algn="ctr"/>
+            <a:r>
+              <a:rPr sz="800" b="0">
+                <a:solidFill>
+                  <a:srgbClr val="ECF0FB"/>
+                </a:solidFill>
+                <a:latin typeface="Segoe UI"/>
+              </a:rPr>
+              <a:t>agent identity &amp; AuthZ</a:t>
+            </a:r>
+          </a:p>
+        </p:txBody>
+      </p:sp>
+      <p:sp>
+        <p:nvSpPr>
+          <p:cNvPr id="23" name="Rounded Rectangle 22"/>
+          <p:cNvSpPr/>
+          <p:nvPr/>
+        </p:nvSpPr>
+        <p:spPr>
+          <a:xfrm>
+            <a:off x="5189220" y="2185415"/>
+            <a:ext cx="2061971" cy="512064"/>
+          </a:xfrm>
+          <a:prstGeom prst="roundRect">
+            <a:avLst>
+              <a:gd name="adj" fmla="val 16000"/>
+            </a:avLst>
+          </a:prstGeom>
+          <a:solidFill>
+            <a:srgbClr val="3C465B"/>
+          </a:solidFill>
+          <a:ln>
+            <a:noFill/>
+          </a:ln>
+          <a:effectLst/>
+        </p:spPr>
+        <p:style>
+          <a:lnRef idx="1">
+            <a:schemeClr val="accent1"/>
+          </a:lnRef>
+          <a:fillRef idx="3">
+            <a:schemeClr val="accent1"/>
+          </a:fillRef>
+          <a:effectRef idx="2">
+            <a:schemeClr val="accent1"/>
+          </a:effectRef>
+          <a:fontRef idx="minor">
+            <a:schemeClr val="lt1"/>
+          </a:fontRef>
+        </p:style>
+        <p:txBody>
+          <a:bodyPr rtlCol="0" anchor="ctr"/>
+          <a:lstStyle/>
+          <a:p>
+            <a:pPr algn="ctr"/>
+          </a:p>
+        </p:txBody>
+      </p:sp>
+      <p:sp>
+        <p:nvSpPr>
+          <p:cNvPr id="24" name="TextBox 23"/>
+          <p:cNvSpPr txBox="1"/>
+          <p:nvPr/>
+        </p:nvSpPr>
+        <p:spPr>
+          <a:xfrm>
+            <a:off x="5262372" y="2185415"/>
+            <a:ext cx="1915667" cy="512064"/>
+          </a:xfrm>
+          <a:prstGeom prst="rect">
+            <a:avLst/>
+          </a:prstGeom>
+          <a:noFill/>
+        </p:spPr>
+        <p:txBody>
+          <a:bodyPr wrap="square" anchor="ctr" lIns="0" rIns="0" tIns="0" bIns="0">
+            <a:spAutoFit/>
+          </a:bodyPr>
+          <a:lstStyle/>
+          <a:p>
+            <a:pPr algn="ctr"/>
+            <a:r>
+              <a:rPr sz="1050" b="1">
+                <a:solidFill>
+                  <a:srgbClr val="FFFFFF"/>
+                </a:solidFill>
+                <a:latin typeface="Segoe UI"/>
+              </a:rPr>
+              <a:t>Azure API Management</a:t>
+            </a:r>
+          </a:p>
+          <a:p>
+            <a:pPr algn="ctr"/>
+            <a:r>
+              <a:rPr sz="800" b="0">
+                <a:solidFill>
+                  <a:srgbClr val="ECF0FB"/>
+                </a:solidFill>
+                <a:latin typeface="Segoe UI"/>
+              </a:rPr>
+              <a:t>AI gateway · throttling</a:t>
+            </a:r>
+          </a:p>
+        </p:txBody>
+      </p:sp>
+      <p:sp>
+        <p:nvSpPr>
+          <p:cNvPr id="25" name="Rounded Rectangle 24"/>
+          <p:cNvSpPr/>
+          <p:nvPr/>
+        </p:nvSpPr>
+        <p:spPr>
+          <a:xfrm>
+            <a:off x="7379208" y="2185415"/>
+            <a:ext cx="2061971" cy="512064"/>
+          </a:xfrm>
+          <a:prstGeom prst="roundRect">
+            <a:avLst>
+              <a:gd name="adj" fmla="val 16000"/>
+            </a:avLst>
+          </a:prstGeom>
+          <a:solidFill>
+            <a:srgbClr val="3C465B"/>
+          </a:solidFill>
+          <a:ln>
+            <a:noFill/>
+          </a:ln>
+          <a:effectLst/>
+        </p:spPr>
+        <p:style>
+          <a:lnRef idx="1">
+            <a:schemeClr val="accent1"/>
+          </a:lnRef>
+          <a:fillRef idx="3">
+            <a:schemeClr val="accent1"/>
+          </a:fillRef>
+          <a:effectRef idx="2">
+            <a:schemeClr val="accent1"/>
+          </a:effectRef>
+          <a:fontRef idx="minor">
+            <a:schemeClr val="lt1"/>
+          </a:fontRef>
+        </p:style>
+        <p:txBody>
+          <a:bodyPr rtlCol="0" anchor="ctr"/>
+          <a:lstStyle/>
+          <a:p>
+            <a:pPr algn="ctr"/>
+          </a:p>
+        </p:txBody>
+      </p:sp>
+      <p:sp>
+        <p:nvSpPr>
+          <p:cNvPr id="26" name="TextBox 25"/>
+          <p:cNvSpPr txBox="1"/>
+          <p:nvPr/>
+        </p:nvSpPr>
+        <p:spPr>
+          <a:xfrm>
+            <a:off x="7452360" y="2185415"/>
+            <a:ext cx="1915667" cy="512064"/>
+          </a:xfrm>
+          <a:prstGeom prst="rect">
+            <a:avLst/>
+          </a:prstGeom>
+          <a:noFill/>
+        </p:spPr>
+        <p:txBody>
+          <a:bodyPr wrap="square" anchor="ctr" lIns="0" rIns="0" tIns="0" bIns="0">
+            <a:spAutoFit/>
+          </a:bodyPr>
+          <a:lstStyle/>
+          <a:p>
+            <a:pPr algn="ctr"/>
+            <a:r>
+              <a:rPr sz="1050" b="1">
+                <a:solidFill>
+                  <a:srgbClr val="FFFFFF"/>
+                </a:solidFill>
+                <a:latin typeface="Segoe UI"/>
+              </a:rPr>
+              <a:t>Microsoft Purview</a:t>
+            </a:r>
+          </a:p>
+          <a:p>
+            <a:pPr algn="ctr"/>
+            <a:r>
+              <a:rPr sz="800" b="0">
+                <a:solidFill>
+                  <a:srgbClr val="ECF0FB"/>
+                </a:solidFill>
+                <a:latin typeface="Segoe UI"/>
+              </a:rPr>
+              <a:t>DLP &amp; governance</a:t>
+            </a:r>
+          </a:p>
+        </p:txBody>
+      </p:sp>
+      <p:sp>
+        <p:nvSpPr>
+          <p:cNvPr id="27" name="Rounded Rectangle 26"/>
+          <p:cNvSpPr/>
+          <p:nvPr/>
+        </p:nvSpPr>
+        <p:spPr>
+          <a:xfrm>
+            <a:off x="9569196" y="2185415"/>
+            <a:ext cx="2061971" cy="512064"/>
+          </a:xfrm>
+          <a:prstGeom prst="roundRect">
+            <a:avLst>
+              <a:gd name="adj" fmla="val 16000"/>
+            </a:avLst>
+          </a:prstGeom>
+          <a:solidFill>
+            <a:srgbClr val="3C465B"/>
+          </a:solidFill>
+          <a:ln>
+            <a:noFill/>
+          </a:ln>
+          <a:effectLst/>
+        </p:spPr>
+        <p:style>
+          <a:lnRef idx="1">
+            <a:schemeClr val="accent1"/>
+          </a:lnRef>
+          <a:fillRef idx="3">
+            <a:schemeClr val="accent1"/>
+          </a:fillRef>
+          <a:effectRef idx="2">
+            <a:schemeClr val="accent1"/>
+          </a:effectRef>
+          <a:fontRef idx="minor">
+            <a:schemeClr val="lt1"/>
+          </a:fontRef>
+        </p:style>
+        <p:txBody>
+          <a:bodyPr rtlCol="0" anchor="ctr"/>
+          <a:lstStyle/>
+          <a:p>
+            <a:pPr algn="ctr"/>
+          </a:p>
+        </p:txBody>
+      </p:sp>
+      <p:sp>
+        <p:nvSpPr>
+          <p:cNvPr id="28" name="TextBox 27"/>
+          <p:cNvSpPr txBox="1"/>
+          <p:nvPr/>
+        </p:nvSpPr>
+        <p:spPr>
+          <a:xfrm>
+            <a:off x="9642348" y="2185415"/>
+            <a:ext cx="1915667" cy="512064"/>
+          </a:xfrm>
+          <a:prstGeom prst="rect">
+            <a:avLst/>
+          </a:prstGeom>
+          <a:noFill/>
+        </p:spPr>
+        <p:txBody>
+          <a:bodyPr wrap="square" anchor="ctr" lIns="0" rIns="0" tIns="0" bIns="0">
+            <a:spAutoFit/>
+          </a:bodyPr>
+          <a:lstStyle/>
+          <a:p>
+            <a:pPr algn="ctr"/>
+            <a:r>
+              <a:rPr sz="1050" b="1">
+                <a:solidFill>
+                  <a:srgbClr val="FFFFFF"/>
+                </a:solidFill>
+                <a:latin typeface="Segoe UI"/>
+              </a:rPr>
+              <a:t>Azure AI Content Safety</a:t>
+            </a:r>
+          </a:p>
+          <a:p>
+            <a:pPr algn="ctr"/>
+            <a:r>
+              <a:rPr sz="800" b="0">
+                <a:solidFill>
+                  <a:srgbClr val="ECF0FB"/>
+                </a:solidFill>
+                <a:latin typeface="Segoe UI"/>
+              </a:rPr>
+              <a:t>+ Defender · responsible AI</a:t>
+            </a:r>
+          </a:p>
+        </p:txBody>
+      </p:sp>
+      <p:sp>
+        <p:nvSpPr>
+          <p:cNvPr id="29" name="Rounded Rectangle 28"/>
+          <p:cNvSpPr/>
+          <p:nvPr/>
+        </p:nvSpPr>
+        <p:spPr>
+          <a:xfrm>
+            <a:off x="411480" y="2889503"/>
+            <a:ext cx="11384280" cy="786384"/>
+          </a:xfrm>
+          <a:prstGeom prst="roundRect">
+            <a:avLst>
+              <a:gd name="adj" fmla="val 10000"/>
+            </a:avLst>
+          </a:prstGeom>
+          <a:solidFill>
+            <a:srgbClr val="F0ECFB"/>
+          </a:solidFill>
+          <a:ln>
+            <a:noFill/>
+          </a:ln>
+          <a:effectLst/>
+        </p:spPr>
+        <p:style>
+          <a:lnRef idx="1">
+            <a:schemeClr val="accent1"/>
+          </a:lnRef>
+          <a:fillRef idx="3">
+            <a:schemeClr val="accent1"/>
+          </a:fillRef>
+          <a:effectRef idx="2">
+            <a:schemeClr val="accent1"/>
+          </a:effectRef>
+          <a:fontRef idx="minor">
+            <a:schemeClr val="lt1"/>
+          </a:fontRef>
+        </p:style>
+        <p:txBody>
+          <a:bodyPr rtlCol="0" anchor="ctr"/>
+          <a:lstStyle/>
+          <a:p>
+            <a:pPr algn="ctr"/>
+          </a:p>
+        </p:txBody>
+      </p:sp>
+      <p:sp>
+        <p:nvSpPr>
+          <p:cNvPr id="30" name="Rounded Rectangle 29"/>
+          <p:cNvSpPr/>
+          <p:nvPr/>
+        </p:nvSpPr>
+        <p:spPr>
+          <a:xfrm>
+            <a:off x="411480" y="2889503"/>
+            <a:ext cx="2423160" cy="786384"/>
+          </a:xfrm>
+          <a:prstGeom prst="roundRect">
+            <a:avLst>
+              <a:gd name="adj" fmla="val 10000"/>
+            </a:avLst>
+          </a:prstGeom>
+          <a:solidFill>
+            <a:srgbClr val="6B4DE0"/>
+          </a:solidFill>
+          <a:ln>
+            <a:noFill/>
+          </a:ln>
+          <a:effectLst/>
+        </p:spPr>
+        <p:style>
+          <a:lnRef idx="1">
+            <a:schemeClr val="accent1"/>
+          </a:lnRef>
+          <a:fillRef idx="3">
+            <a:schemeClr val="accent1"/>
+          </a:fillRef>
+          <a:effectRef idx="2">
+            <a:schemeClr val="accent1"/>
+          </a:effectRef>
+          <a:fontRef idx="minor">
+            <a:schemeClr val="lt1"/>
+          </a:fontRef>
+        </p:style>
+        <p:txBody>
+          <a:bodyPr rtlCol="0" anchor="ctr"/>
+          <a:lstStyle/>
+          <a:p>
+            <a:pPr algn="ctr"/>
+          </a:p>
+        </p:txBody>
+      </p:sp>
+      <p:sp>
+        <p:nvSpPr>
+          <p:cNvPr id="31" name="TextBox 30"/>
+          <p:cNvSpPr txBox="1"/>
+          <p:nvPr/>
+        </p:nvSpPr>
+        <p:spPr>
+          <a:xfrm>
+            <a:off x="557784" y="2889503"/>
+            <a:ext cx="2148840" cy="786384"/>
+          </a:xfrm>
+          <a:prstGeom prst="rect">
+            <a:avLst/>
+          </a:prstGeom>
+          <a:noFill/>
+        </p:spPr>
+        <p:txBody>
+          <a:bodyPr wrap="square" anchor="ctr" lIns="0" rIns="0" tIns="0" bIns="0">
+            <a:spAutoFit/>
+          </a:bodyPr>
+          <a:lstStyle/>
+          <a:p>
+            <a:pPr algn="l"/>
+            <a:r>
+              <a:rPr sz="1150" b="1">
+                <a:solidFill>
+                  <a:srgbClr val="FFFFFF"/>
+                </a:solidFill>
+                <a:latin typeface="Segoe UI"/>
+              </a:rPr>
+              <a:t>ORCHESTRATION</a:t>
+            </a:r>
+          </a:p>
+          <a:p>
+            <a:pPr algn="l"/>
+            <a:r>
+              <a:rPr sz="800" b="0">
+                <a:solidFill>
+                  <a:srgbClr val="ECF0FB"/>
+                </a:solidFill>
+                <a:latin typeface="Segoe UI"/>
+              </a:rPr>
+              <a:t>plan · run · remember</a:t>
+            </a:r>
+          </a:p>
+        </p:txBody>
+      </p:sp>
+      <p:sp>
+        <p:nvSpPr>
+          <p:cNvPr id="32" name="Rounded Rectangle 31"/>
+          <p:cNvSpPr/>
+          <p:nvPr/>
+        </p:nvSpPr>
+        <p:spPr>
+          <a:xfrm>
+            <a:off x="2999232" y="2990087"/>
+            <a:ext cx="2061971" cy="585216"/>
+          </a:xfrm>
+          <a:prstGeom prst="roundRect">
+            <a:avLst>
+              <a:gd name="adj" fmla="val 16000"/>
+            </a:avLst>
+          </a:prstGeom>
+          <a:solidFill>
+            <a:srgbClr val="6B4DE0"/>
+          </a:solidFill>
+          <a:ln>
+            <a:noFill/>
+          </a:ln>
+          <a:effectLst/>
+        </p:spPr>
+        <p:style>
+          <a:lnRef idx="1">
+            <a:schemeClr val="accent1"/>
+          </a:lnRef>
+          <a:fillRef idx="3">
+            <a:schemeClr val="accent1"/>
+          </a:fillRef>
+          <a:effectRef idx="2">
+            <a:schemeClr val="accent1"/>
+          </a:effectRef>
+          <a:fontRef idx="minor">
+            <a:schemeClr val="lt1"/>
+          </a:fontRef>
+        </p:style>
+        <p:txBody>
+          <a:bodyPr rtlCol="0" anchor="ctr"/>
+          <a:lstStyle/>
+          <a:p>
+            <a:pPr algn="ctr"/>
+          </a:p>
+        </p:txBody>
+      </p:sp>
+      <p:sp>
+        <p:nvSpPr>
+          <p:cNvPr id="33" name="TextBox 32"/>
+          <p:cNvSpPr txBox="1"/>
+          <p:nvPr/>
+        </p:nvSpPr>
+        <p:spPr>
+          <a:xfrm>
+            <a:off x="3072384" y="2990087"/>
+            <a:ext cx="1915667" cy="585216"/>
+          </a:xfrm>
+          <a:prstGeom prst="rect">
+            <a:avLst/>
+          </a:prstGeom>
+          <a:noFill/>
+        </p:spPr>
+        <p:txBody>
+          <a:bodyPr wrap="square" anchor="ctr" lIns="0" rIns="0" tIns="0" bIns="0">
+            <a:spAutoFit/>
+          </a:bodyPr>
+          <a:lstStyle/>
+          <a:p>
+            <a:pPr algn="ctr"/>
+            <a:r>
+              <a:rPr sz="1050" b="1">
+                <a:solidFill>
+                  <a:srgbClr val="FFFFFF"/>
+                </a:solidFill>
+                <a:latin typeface="Segoe UI"/>
+              </a:rPr>
+              <a:t>Microsoft Foundry</a:t>
+            </a:r>
+          </a:p>
+          <a:p>
+            <a:pPr algn="ctr"/>
+            <a:r>
+              <a:rPr sz="800" b="0">
+                <a:solidFill>
+                  <a:srgbClr val="ECF0FB"/>
+                </a:solidFill>
+                <a:latin typeface="Segoe UI"/>
+              </a:rPr>
+              <a:t>Agent Service · hosted agents</a:t>
+            </a:r>
+          </a:p>
+        </p:txBody>
+      </p:sp>
+      <p:sp>
+        <p:nvSpPr>
+          <p:cNvPr id="34" name="Rounded Rectangle 33"/>
+          <p:cNvSpPr/>
+          <p:nvPr/>
+        </p:nvSpPr>
+        <p:spPr>
+          <a:xfrm>
+            <a:off x="5189220" y="2990087"/>
+            <a:ext cx="2061971" cy="585216"/>
+          </a:xfrm>
+          <a:prstGeom prst="roundRect">
+            <a:avLst>
+              <a:gd name="adj" fmla="val 16000"/>
+            </a:avLst>
+          </a:prstGeom>
+          <a:solidFill>
+            <a:srgbClr val="6B4DE0"/>
+          </a:solidFill>
+          <a:ln>
+            <a:noFill/>
+          </a:ln>
+          <a:effectLst/>
+        </p:spPr>
+        <p:style>
+          <a:lnRef idx="1">
+            <a:schemeClr val="accent1"/>
+          </a:lnRef>
+          <a:fillRef idx="3">
+            <a:schemeClr val="accent1"/>
+          </a:fillRef>
+          <a:effectRef idx="2">
+            <a:schemeClr val="accent1"/>
+          </a:effectRef>
+          <a:fontRef idx="minor">
+            <a:schemeClr val="lt1"/>
+          </a:fontRef>
+        </p:style>
+        <p:txBody>
+          <a:bodyPr rtlCol="0" anchor="ctr"/>
+          <a:lstStyle/>
+          <a:p>
+            <a:pPr algn="ctr"/>
+          </a:p>
+        </p:txBody>
+      </p:sp>
+      <p:sp>
+        <p:nvSpPr>
+          <p:cNvPr id="35" name="TextBox 34"/>
+          <p:cNvSpPr txBox="1"/>
+          <p:nvPr/>
+        </p:nvSpPr>
+        <p:spPr>
+          <a:xfrm>
+            <a:off x="5262372" y="2990087"/>
+            <a:ext cx="1915667" cy="585216"/>
+          </a:xfrm>
+          <a:prstGeom prst="rect">
+            <a:avLst/>
+          </a:prstGeom>
+          <a:noFill/>
+        </p:spPr>
+        <p:txBody>
+          <a:bodyPr wrap="square" anchor="ctr" lIns="0" rIns="0" tIns="0" bIns="0">
+            <a:spAutoFit/>
+          </a:bodyPr>
+          <a:lstStyle/>
+          <a:p>
+            <a:pPr algn="ctr"/>
+            <a:r>
+              <a:rPr sz="1050" b="1">
+                <a:solidFill>
+                  <a:srgbClr val="FFFFFF"/>
+                </a:solidFill>
+                <a:latin typeface="Segoe UI"/>
+              </a:rPr>
+              <a:t>Agent Framework</a:t>
+            </a:r>
+          </a:p>
+          <a:p>
+            <a:pPr algn="ctr"/>
+            <a:r>
+              <a:rPr sz="800" b="0">
+                <a:solidFill>
+                  <a:srgbClr val="ECF0FB"/>
+                </a:solidFill>
+                <a:latin typeface="Segoe UI"/>
+              </a:rPr>
+              <a:t>Magentic multi-agent · A2A</a:t>
+            </a:r>
+          </a:p>
+        </p:txBody>
+      </p:sp>
+      <p:sp>
+        <p:nvSpPr>
+          <p:cNvPr id="36" name="Rounded Rectangle 35"/>
+          <p:cNvSpPr/>
+          <p:nvPr/>
+        </p:nvSpPr>
+        <p:spPr>
+          <a:xfrm>
+            <a:off x="7379208" y="2990087"/>
+            <a:ext cx="2061971" cy="585216"/>
+          </a:xfrm>
+          <a:prstGeom prst="roundRect">
+            <a:avLst>
+              <a:gd name="adj" fmla="val 16000"/>
+            </a:avLst>
+          </a:prstGeom>
+          <a:solidFill>
+            <a:srgbClr val="6B4DE0"/>
+          </a:solidFill>
+          <a:ln>
+            <a:noFill/>
+          </a:ln>
+          <a:effectLst/>
+        </p:spPr>
+        <p:style>
+          <a:lnRef idx="1">
+            <a:schemeClr val="accent1"/>
+          </a:lnRef>
+          <a:fillRef idx="3">
+            <a:schemeClr val="accent1"/>
+          </a:fillRef>
+          <a:effectRef idx="2">
+            <a:schemeClr val="accent1"/>
+          </a:effectRef>
+          <a:fontRef idx="minor">
+            <a:schemeClr val="lt1"/>
+          </a:fontRef>
+        </p:style>
+        <p:txBody>
+          <a:bodyPr rtlCol="0" anchor="ctr"/>
+          <a:lstStyle/>
+          <a:p>
+            <a:pPr algn="ctr"/>
+          </a:p>
+        </p:txBody>
+      </p:sp>
+      <p:sp>
+        <p:nvSpPr>
+          <p:cNvPr id="37" name="TextBox 36"/>
+          <p:cNvSpPr txBox="1"/>
+          <p:nvPr/>
+        </p:nvSpPr>
+        <p:spPr>
+          <a:xfrm>
+            <a:off x="7452360" y="2990087"/>
+            <a:ext cx="1915667" cy="585216"/>
+          </a:xfrm>
+          <a:prstGeom prst="rect">
+            <a:avLst/>
+          </a:prstGeom>
+          <a:noFill/>
+        </p:spPr>
+        <p:txBody>
+          <a:bodyPr wrap="square" anchor="ctr" lIns="0" rIns="0" tIns="0" bIns="0">
+            <a:spAutoFit/>
+          </a:bodyPr>
+          <a:lstStyle/>
+          <a:p>
+            <a:pPr algn="ctr"/>
+            <a:r>
+              <a:rPr sz="1050" b="1">
+                <a:solidFill>
+                  <a:srgbClr val="FFFFFF"/>
+                </a:solidFill>
+                <a:latin typeface="Segoe UI"/>
+              </a:rPr>
+              <a:t>Azure Durable Functions</a:t>
+            </a:r>
+          </a:p>
+          <a:p>
+            <a:pPr algn="ctr"/>
+            <a:r>
+              <a:rPr sz="800" b="0">
+                <a:solidFill>
+                  <a:srgbClr val="ECF0FB"/>
+                </a:solidFill>
+                <a:latin typeface="Segoe UI"/>
+              </a:rPr>
+              <a:t>durable workflow / state</a:t>
+            </a:r>
+          </a:p>
+        </p:txBody>
+      </p:sp>
+      <p:sp>
+        <p:nvSpPr>
+          <p:cNvPr id="38" name="Rounded Rectangle 37"/>
+          <p:cNvSpPr/>
+          <p:nvPr/>
+        </p:nvSpPr>
+        <p:spPr>
+          <a:xfrm>
+            <a:off x="9569196" y="2990087"/>
+            <a:ext cx="2061971" cy="585216"/>
+          </a:xfrm>
+          <a:prstGeom prst="roundRect">
+            <a:avLst>
+              <a:gd name="adj" fmla="val 16000"/>
+            </a:avLst>
+          </a:prstGeom>
+          <a:solidFill>
+            <a:srgbClr val="6B4DE0"/>
+          </a:solidFill>
+          <a:ln>
+            <a:noFill/>
+          </a:ln>
+          <a:effectLst/>
+        </p:spPr>
+        <p:style>
+          <a:lnRef idx="1">
+            <a:schemeClr val="accent1"/>
+          </a:lnRef>
+          <a:fillRef idx="3">
+            <a:schemeClr val="accent1"/>
+          </a:fillRef>
+          <a:effectRef idx="2">
+            <a:schemeClr val="accent1"/>
+          </a:effectRef>
+          <a:fontRef idx="minor">
+            <a:schemeClr val="lt1"/>
+          </a:fontRef>
+        </p:style>
+        <p:txBody>
+          <a:bodyPr rtlCol="0" anchor="ctr"/>
+          <a:lstStyle/>
+          <a:p>
+            <a:pPr algn="ctr"/>
+          </a:p>
+        </p:txBody>
+      </p:sp>
+      <p:sp>
+        <p:nvSpPr>
+          <p:cNvPr id="39" name="TextBox 38"/>
+          <p:cNvSpPr txBox="1"/>
+          <p:nvPr/>
+        </p:nvSpPr>
+        <p:spPr>
+          <a:xfrm>
+            <a:off x="9642348" y="2990087"/>
+            <a:ext cx="1915667" cy="585216"/>
+          </a:xfrm>
+          <a:prstGeom prst="rect">
+            <a:avLst/>
+          </a:prstGeom>
+          <a:noFill/>
+        </p:spPr>
+        <p:txBody>
+          <a:bodyPr wrap="square" anchor="ctr" lIns="0" rIns="0" tIns="0" bIns="0">
+            <a:spAutoFit/>
+          </a:bodyPr>
+          <a:lstStyle/>
+          <a:p>
+            <a:pPr algn="ctr"/>
+            <a:r>
+              <a:rPr sz="1050" b="1">
+                <a:solidFill>
+                  <a:srgbClr val="FFFFFF"/>
+                </a:solidFill>
+                <a:latin typeface="Segoe UI"/>
+              </a:rPr>
+              <a:t>Memory</a:t>
+            </a:r>
+          </a:p>
+          <a:p>
+            <a:pPr algn="ctr"/>
+            <a:r>
+              <a:rPr sz="800" b="0">
+                <a:solidFill>
+                  <a:srgbClr val="ECF0FB"/>
+                </a:solidFill>
+                <a:latin typeface="Segoe UI"/>
+              </a:rPr>
+              <a:t>short &amp; long-term · threads</a:t>
+            </a:r>
+          </a:p>
+        </p:txBody>
+      </p:sp>
+      <p:sp>
+        <p:nvSpPr>
+          <p:cNvPr id="40" name="Rounded Rectangle 39"/>
+          <p:cNvSpPr/>
+          <p:nvPr/>
+        </p:nvSpPr>
+        <p:spPr>
+          <a:xfrm>
+            <a:off x="411480" y="3767327"/>
+            <a:ext cx="11384280" cy="713232"/>
+          </a:xfrm>
+          <a:prstGeom prst="roundRect">
+            <a:avLst>
+              <a:gd name="adj" fmla="val 10000"/>
+            </a:avLst>
+          </a:prstGeom>
+          <a:solidFill>
+            <a:srgbClr val="E6F5F3"/>
+          </a:solidFill>
+          <a:ln>
+            <a:noFill/>
+          </a:ln>
+          <a:effectLst/>
+        </p:spPr>
+        <p:style>
+          <a:lnRef idx="1">
+            <a:schemeClr val="accent1"/>
+          </a:lnRef>
+          <a:fillRef idx="3">
+            <a:schemeClr val="accent1"/>
+          </a:fillRef>
+          <a:effectRef idx="2">
+            <a:schemeClr val="accent1"/>
+          </a:effectRef>
+          <a:fontRef idx="minor">
+            <a:schemeClr val="lt1"/>
+          </a:fontRef>
+        </p:style>
+        <p:txBody>
+          <a:bodyPr rtlCol="0" anchor="ctr"/>
+          <a:lstStyle/>
+          <a:p>
+            <a:pPr algn="ctr"/>
+          </a:p>
+        </p:txBody>
+      </p:sp>
+      <p:sp>
+        <p:nvSpPr>
+          <p:cNvPr id="41" name="Rounded Rectangle 40"/>
+          <p:cNvSpPr/>
+          <p:nvPr/>
+        </p:nvSpPr>
+        <p:spPr>
+          <a:xfrm>
+            <a:off x="411480" y="3767327"/>
+            <a:ext cx="2423160" cy="713232"/>
+          </a:xfrm>
+          <a:prstGeom prst="roundRect">
+            <a:avLst>
+              <a:gd name="adj" fmla="val 10000"/>
+            </a:avLst>
+          </a:prstGeom>
+          <a:solidFill>
+            <a:srgbClr val="129A8F"/>
+          </a:solidFill>
+          <a:ln>
+            <a:noFill/>
+          </a:ln>
+          <a:effectLst/>
+        </p:spPr>
+        <p:style>
+          <a:lnRef idx="1">
+            <a:schemeClr val="accent1"/>
+          </a:lnRef>
+          <a:fillRef idx="3">
+            <a:schemeClr val="accent1"/>
+          </a:fillRef>
+          <a:effectRef idx="2">
+            <a:schemeClr val="accent1"/>
+          </a:effectRef>
+          <a:fontRef idx="minor">
+            <a:schemeClr val="lt1"/>
+          </a:fontRef>
+        </p:style>
+        <p:txBody>
+          <a:bodyPr rtlCol="0" anchor="ctr"/>
+          <a:lstStyle/>
+          <a:p>
+            <a:pPr algn="ctr"/>
+          </a:p>
+        </p:txBody>
+      </p:sp>
+      <p:sp>
+        <p:nvSpPr>
+          <p:cNvPr id="42" name="TextBox 41"/>
+          <p:cNvSpPr txBox="1"/>
+          <p:nvPr/>
+        </p:nvSpPr>
+        <p:spPr>
+          <a:xfrm>
+            <a:off x="557784" y="3767327"/>
+            <a:ext cx="2148840" cy="713232"/>
+          </a:xfrm>
+          <a:prstGeom prst="rect">
+            <a:avLst/>
+          </a:prstGeom>
+          <a:noFill/>
+        </p:spPr>
+        <p:txBody>
+          <a:bodyPr wrap="square" anchor="ctr" lIns="0" rIns="0" tIns="0" bIns="0">
+            <a:spAutoFit/>
+          </a:bodyPr>
+          <a:lstStyle/>
+          <a:p>
+            <a:pPr algn="l"/>
+            <a:r>
+              <a:rPr sz="1150" b="1">
+                <a:solidFill>
+                  <a:srgbClr val="FFFFFF"/>
+                </a:solidFill>
+                <a:latin typeface="Segoe UI"/>
+              </a:rPr>
+              <a:t>TOOLS &amp; MCP</a:t>
+            </a:r>
+          </a:p>
+          <a:p>
+            <a:pPr algn="l"/>
+            <a:r>
+              <a:rPr sz="800" b="0">
+                <a:solidFill>
+                  <a:srgbClr val="ECF0FB"/>
+                </a:solidFill>
+                <a:latin typeface="Segoe UI"/>
+              </a:rPr>
+              <a:t>discover · authorize · call</a:t>
+            </a:r>
+          </a:p>
+        </p:txBody>
+      </p:sp>
+      <p:sp>
+        <p:nvSpPr>
+          <p:cNvPr id="43" name="Rounded Rectangle 42"/>
+          <p:cNvSpPr/>
+          <p:nvPr/>
+        </p:nvSpPr>
+        <p:spPr>
+          <a:xfrm>
+            <a:off x="2999232" y="3867911"/>
+            <a:ext cx="2061971" cy="512064"/>
+          </a:xfrm>
+          <a:prstGeom prst="roundRect">
+            <a:avLst>
+              <a:gd name="adj" fmla="val 16000"/>
+            </a:avLst>
+          </a:prstGeom>
+          <a:solidFill>
+            <a:srgbClr val="129A8F"/>
+          </a:solidFill>
+          <a:ln>
+            <a:noFill/>
+          </a:ln>
+          <a:effectLst/>
+        </p:spPr>
+        <p:style>
+          <a:lnRef idx="1">
+            <a:schemeClr val="accent1"/>
+          </a:lnRef>
+          <a:fillRef idx="3">
+            <a:schemeClr val="accent1"/>
+          </a:fillRef>
+          <a:effectRef idx="2">
+            <a:schemeClr val="accent1"/>
+          </a:effectRef>
+          <a:fontRef idx="minor">
+            <a:schemeClr val="lt1"/>
+          </a:fontRef>
+        </p:style>
+        <p:txBody>
+          <a:bodyPr rtlCol="0" anchor="ctr"/>
+          <a:lstStyle/>
+          <a:p>
+            <a:pPr algn="ctr"/>
+          </a:p>
+        </p:txBody>
+      </p:sp>
+      <p:sp>
+        <p:nvSpPr>
+          <p:cNvPr id="44" name="TextBox 43"/>
+          <p:cNvSpPr txBox="1"/>
+          <p:nvPr/>
+        </p:nvSpPr>
+        <p:spPr>
+          <a:xfrm>
+            <a:off x="3072384" y="3867911"/>
+            <a:ext cx="1915667" cy="512064"/>
+          </a:xfrm>
+          <a:prstGeom prst="rect">
+            <a:avLst/>
+          </a:prstGeom>
+          <a:noFill/>
+        </p:spPr>
+        <p:txBody>
+          <a:bodyPr wrap="square" anchor="ctr" lIns="0" rIns="0" tIns="0" bIns="0">
+            <a:spAutoFit/>
+          </a:bodyPr>
+          <a:lstStyle/>
+          <a:p>
+            <a:pPr algn="ctr"/>
+            <a:r>
+              <a:rPr sz="1050" b="1">
+                <a:solidFill>
+                  <a:srgbClr val="FFFFFF"/>
+                </a:solidFill>
+                <a:latin typeface="Segoe UI"/>
+              </a:rPr>
+              <a:t>API Center</a:t>
+            </a:r>
+          </a:p>
+          <a:p>
+            <a:pPr algn="ctr"/>
+            <a:r>
+              <a:rPr sz="800" b="0">
+                <a:solidFill>
+                  <a:srgbClr val="ECF0FB"/>
+                </a:solidFill>
+                <a:latin typeface="Segoe UI"/>
+              </a:rPr>
+              <a:t>MCP registry / catalog</a:t>
+            </a:r>
+          </a:p>
+        </p:txBody>
+      </p:sp>
+      <p:sp>
+        <p:nvSpPr>
+          <p:cNvPr id="45" name="Rounded Rectangle 44"/>
+          <p:cNvSpPr/>
+          <p:nvPr/>
+        </p:nvSpPr>
+        <p:spPr>
+          <a:xfrm>
+            <a:off x="5189220" y="3867911"/>
+            <a:ext cx="2061971" cy="512064"/>
+          </a:xfrm>
+          <a:prstGeom prst="roundRect">
+            <a:avLst>
+              <a:gd name="adj" fmla="val 16000"/>
+            </a:avLst>
+          </a:prstGeom>
+          <a:solidFill>
+            <a:srgbClr val="129A8F"/>
+          </a:solidFill>
+          <a:ln>
+            <a:noFill/>
+          </a:ln>
+          <a:effectLst/>
+        </p:spPr>
+        <p:style>
+          <a:lnRef idx="1">
+            <a:schemeClr val="accent1"/>
+          </a:lnRef>
+          <a:fillRef idx="3">
+            <a:schemeClr val="accent1"/>
+          </a:fillRef>
+          <a:effectRef idx="2">
+            <a:schemeClr val="accent1"/>
+          </a:effectRef>
+          <a:fontRef idx="minor">
+            <a:schemeClr val="lt1"/>
+          </a:fontRef>
+        </p:style>
+        <p:txBody>
+          <a:bodyPr rtlCol="0" anchor="ctr"/>
+          <a:lstStyle/>
+          <a:p>
+            <a:pPr algn="ctr"/>
+          </a:p>
+        </p:txBody>
+      </p:sp>
+      <p:sp>
+        <p:nvSpPr>
+          <p:cNvPr id="46" name="TextBox 45"/>
+          <p:cNvSpPr txBox="1"/>
+          <p:nvPr/>
+        </p:nvSpPr>
+        <p:spPr>
+          <a:xfrm>
+            <a:off x="5262372" y="3867911"/>
+            <a:ext cx="1915667" cy="512064"/>
+          </a:xfrm>
+          <a:prstGeom prst="rect">
+            <a:avLst/>
+          </a:prstGeom>
+          <a:noFill/>
+        </p:spPr>
+        <p:txBody>
+          <a:bodyPr wrap="square" anchor="ctr" lIns="0" rIns="0" tIns="0" bIns="0">
+            <a:spAutoFit/>
+          </a:bodyPr>
+          <a:lstStyle/>
+          <a:p>
+            <a:pPr algn="ctr"/>
+            <a:r>
+              <a:rPr sz="1050" b="1">
+                <a:solidFill>
+                  <a:srgbClr val="FFFFFF"/>
+                </a:solidFill>
+                <a:latin typeface="Segoe UI"/>
+              </a:rPr>
+              <a:t>APIM MCP gateway</a:t>
+            </a:r>
+          </a:p>
+          <a:p>
+            <a:pPr algn="ctr"/>
+            <a:r>
+              <a:rPr sz="800" b="0">
+                <a:solidFill>
+                  <a:srgbClr val="ECF0FB"/>
+                </a:solidFill>
+                <a:latin typeface="Segoe UI"/>
+              </a:rPr>
+              <a:t>govern internal &amp; external MCP</a:t>
+            </a:r>
+          </a:p>
+        </p:txBody>
+      </p:sp>
+      <p:sp>
+        <p:nvSpPr>
+          <p:cNvPr id="47" name="Rounded Rectangle 46"/>
+          <p:cNvSpPr/>
+          <p:nvPr/>
+        </p:nvSpPr>
+        <p:spPr>
+          <a:xfrm>
+            <a:off x="7379208" y="3867911"/>
+            <a:ext cx="2061971" cy="512064"/>
+          </a:xfrm>
+          <a:prstGeom prst="roundRect">
+            <a:avLst>
+              <a:gd name="adj" fmla="val 16000"/>
+            </a:avLst>
+          </a:prstGeom>
+          <a:solidFill>
+            <a:srgbClr val="129A8F"/>
+          </a:solidFill>
+          <a:ln>
+            <a:noFill/>
+          </a:ln>
+          <a:effectLst/>
+        </p:spPr>
+        <p:style>
+          <a:lnRef idx="1">
+            <a:schemeClr val="accent1"/>
+          </a:lnRef>
+          <a:fillRef idx="3">
+            <a:schemeClr val="accent1"/>
+          </a:fillRef>
+          <a:effectRef idx="2">
+            <a:schemeClr val="accent1"/>
+          </a:effectRef>
+          <a:fontRef idx="minor">
+            <a:schemeClr val="lt1"/>
+          </a:fontRef>
+        </p:style>
+        <p:txBody>
+          <a:bodyPr rtlCol="0" anchor="ctr"/>
+          <a:lstStyle/>
+          <a:p>
+            <a:pPr algn="ctr"/>
+          </a:p>
+        </p:txBody>
+      </p:sp>
+      <p:sp>
+        <p:nvSpPr>
+          <p:cNvPr id="48" name="TextBox 47"/>
+          <p:cNvSpPr txBox="1"/>
+          <p:nvPr/>
+        </p:nvSpPr>
+        <p:spPr>
+          <a:xfrm>
+            <a:off x="7452360" y="3867911"/>
+            <a:ext cx="1915667" cy="512064"/>
+          </a:xfrm>
+          <a:prstGeom prst="rect">
+            <a:avLst/>
+          </a:prstGeom>
+          <a:noFill/>
+        </p:spPr>
+        <p:txBody>
+          <a:bodyPr wrap="square" anchor="ctr" lIns="0" rIns="0" tIns="0" bIns="0">
+            <a:spAutoFit/>
+          </a:bodyPr>
+          <a:lstStyle/>
+          <a:p>
+            <a:pPr algn="ctr"/>
+            <a:r>
+              <a:rPr sz="1050" b="1">
+                <a:solidFill>
+                  <a:srgbClr val="FFFFFF"/>
+                </a:solidFill>
+                <a:latin typeface="Segoe UI"/>
+              </a:rPr>
+              <a:t>Foundry MCP servers</a:t>
+            </a:r>
+          </a:p>
+          <a:p>
+            <a:pPr algn="ctr"/>
+            <a:r>
+              <a:rPr sz="800" b="0">
+                <a:solidFill>
+                  <a:srgbClr val="ECF0FB"/>
+                </a:solidFill>
+                <a:latin typeface="Segoe UI"/>
+              </a:rPr>
+              <a:t>typed, read-only tools</a:t>
+            </a:r>
+          </a:p>
+        </p:txBody>
+      </p:sp>
+      <p:sp>
+        <p:nvSpPr>
+          <p:cNvPr id="49" name="Rounded Rectangle 48"/>
+          <p:cNvSpPr/>
+          <p:nvPr/>
+        </p:nvSpPr>
+        <p:spPr>
+          <a:xfrm>
+            <a:off x="9569196" y="3867911"/>
+            <a:ext cx="2061971" cy="512064"/>
+          </a:xfrm>
+          <a:prstGeom prst="roundRect">
+            <a:avLst>
+              <a:gd name="adj" fmla="val 16000"/>
+            </a:avLst>
+          </a:prstGeom>
+          <a:solidFill>
+            <a:srgbClr val="129A8F"/>
+          </a:solidFill>
+          <a:ln>
+            <a:noFill/>
+          </a:ln>
+          <a:effectLst/>
+        </p:spPr>
+        <p:style>
+          <a:lnRef idx="1">
+            <a:schemeClr val="accent1"/>
+          </a:lnRef>
+          <a:fillRef idx="3">
+            <a:schemeClr val="accent1"/>
+          </a:fillRef>
+          <a:effectRef idx="2">
+            <a:schemeClr val="accent1"/>
+          </a:effectRef>
+          <a:fontRef idx="minor">
+            <a:schemeClr val="lt1"/>
+          </a:fontRef>
+        </p:style>
+        <p:txBody>
+          <a:bodyPr rtlCol="0" anchor="ctr"/>
+          <a:lstStyle/>
+          <a:p>
+            <a:pPr algn="ctr"/>
+          </a:p>
+        </p:txBody>
+      </p:sp>
+      <p:sp>
+        <p:nvSpPr>
+          <p:cNvPr id="50" name="TextBox 49"/>
+          <p:cNvSpPr txBox="1"/>
+          <p:nvPr/>
+        </p:nvSpPr>
+        <p:spPr>
+          <a:xfrm>
+            <a:off x="9642348" y="3867911"/>
+            <a:ext cx="1915667" cy="512064"/>
+          </a:xfrm>
+          <a:prstGeom prst="rect">
+            <a:avLst/>
+          </a:prstGeom>
+          <a:noFill/>
+        </p:spPr>
+        <p:txBody>
+          <a:bodyPr wrap="square" anchor="ctr" lIns="0" rIns="0" tIns="0" bIns="0">
+            <a:spAutoFit/>
+          </a:bodyPr>
+          <a:lstStyle/>
+          <a:p>
+            <a:pPr algn="ctr"/>
+            <a:r>
+              <a:rPr sz="1050" b="1">
+                <a:solidFill>
+                  <a:srgbClr val="FFFFFF"/>
+                </a:solidFill>
+                <a:latin typeface="Segoe UI"/>
+              </a:rPr>
+              <a:t>Logic Apps connectors</a:t>
+            </a:r>
+          </a:p>
+          <a:p>
+            <a:pPr algn="ctr"/>
+            <a:r>
+              <a:rPr sz="800" b="0">
+                <a:solidFill>
+                  <a:srgbClr val="ECF0FB"/>
+                </a:solidFill>
+                <a:latin typeface="Segoe UI"/>
+              </a:rPr>
+              <a:t>1000+ enterprise apps</a:t>
+            </a:r>
+          </a:p>
+        </p:txBody>
+      </p:sp>
+      <p:sp>
+        <p:nvSpPr>
+          <p:cNvPr id="51" name="Rounded Rectangle 50"/>
+          <p:cNvSpPr/>
+          <p:nvPr/>
+        </p:nvSpPr>
+        <p:spPr>
+          <a:xfrm>
+            <a:off x="411480" y="4571999"/>
+            <a:ext cx="11384280" cy="713232"/>
+          </a:xfrm>
+          <a:prstGeom prst="roundRect">
+            <a:avLst>
+              <a:gd name="adj" fmla="val 10000"/>
+            </a:avLst>
+          </a:prstGeom>
+          <a:solidFill>
+            <a:srgbClr val="E5F5EB"/>
+          </a:solidFill>
+          <a:ln>
+            <a:noFill/>
+          </a:ln>
+          <a:effectLst/>
+        </p:spPr>
+        <p:style>
+          <a:lnRef idx="1">
+            <a:schemeClr val="accent1"/>
+          </a:lnRef>
+          <a:fillRef idx="3">
+            <a:schemeClr val="accent1"/>
+          </a:fillRef>
+          <a:effectRef idx="2">
+            <a:schemeClr val="accent1"/>
+          </a:effectRef>
+          <a:fontRef idx="minor">
+            <a:schemeClr val="lt1"/>
+          </a:fontRef>
+        </p:style>
+        <p:txBody>
+          <a:bodyPr rtlCol="0" anchor="ctr"/>
+          <a:lstStyle/>
+          <a:p>
+            <a:pPr algn="ctr"/>
+          </a:p>
+        </p:txBody>
+      </p:sp>
+      <p:sp>
+        <p:nvSpPr>
+          <p:cNvPr id="52" name="Rounded Rectangle 51"/>
+          <p:cNvSpPr/>
+          <p:nvPr/>
+        </p:nvSpPr>
+        <p:spPr>
+          <a:xfrm>
+            <a:off x="411480" y="4571999"/>
+            <a:ext cx="2423160" cy="713232"/>
+          </a:xfrm>
+          <a:prstGeom prst="roundRect">
+            <a:avLst>
+              <a:gd name="adj" fmla="val 10000"/>
+            </a:avLst>
+          </a:prstGeom>
+          <a:solidFill>
+            <a:srgbClr val="1E9E5A"/>
+          </a:solidFill>
+          <a:ln>
+            <a:noFill/>
+          </a:ln>
+          <a:effectLst/>
+        </p:spPr>
+        <p:style>
+          <a:lnRef idx="1">
+            <a:schemeClr val="accent1"/>
+          </a:lnRef>
+          <a:fillRef idx="3">
+            <a:schemeClr val="accent1"/>
+          </a:fillRef>
+          <a:effectRef idx="2">
+            <a:schemeClr val="accent1"/>
+          </a:effectRef>
+          <a:fontRef idx="minor">
+            <a:schemeClr val="lt1"/>
+          </a:fontRef>
+        </p:style>
+        <p:txBody>
+          <a:bodyPr rtlCol="0" anchor="ctr"/>
+          <a:lstStyle/>
+          <a:p>
+            <a:pPr algn="ctr"/>
+          </a:p>
+        </p:txBody>
+      </p:sp>
+      <p:sp>
+        <p:nvSpPr>
+          <p:cNvPr id="53" name="TextBox 52"/>
+          <p:cNvSpPr txBox="1"/>
+          <p:nvPr/>
+        </p:nvSpPr>
+        <p:spPr>
+          <a:xfrm>
+            <a:off x="557784" y="4571999"/>
+            <a:ext cx="2148840" cy="713232"/>
+          </a:xfrm>
+          <a:prstGeom prst="rect">
+            <a:avLst/>
+          </a:prstGeom>
+          <a:noFill/>
+        </p:spPr>
+        <p:txBody>
+          <a:bodyPr wrap="square" anchor="ctr" lIns="0" rIns="0" tIns="0" bIns="0">
+            <a:spAutoFit/>
+          </a:bodyPr>
+          <a:lstStyle/>
+          <a:p>
+            <a:pPr algn="l"/>
+            <a:r>
+              <a:rPr sz="1150" b="1">
+                <a:solidFill>
+                  <a:srgbClr val="FFFFFF"/>
+                </a:solidFill>
+                <a:latin typeface="Segoe UI"/>
+              </a:rPr>
+              <a:t>KNOWLEDGE &amp; DATA</a:t>
+            </a:r>
+          </a:p>
+          <a:p>
+            <a:pPr algn="l"/>
+            <a:r>
+              <a:rPr sz="800" b="0">
+                <a:solidFill>
+                  <a:srgbClr val="ECF0FB"/>
+                </a:solidFill>
+                <a:latin typeface="Segoe UI"/>
+              </a:rPr>
+              <a:t>ground every answer</a:t>
+            </a:r>
+          </a:p>
+        </p:txBody>
+      </p:sp>
+      <p:sp>
+        <p:nvSpPr>
+          <p:cNvPr id="54" name="Rounded Rectangle 53"/>
+          <p:cNvSpPr/>
+          <p:nvPr/>
+        </p:nvSpPr>
+        <p:spPr>
+          <a:xfrm>
+            <a:off x="2999232" y="4672583"/>
+            <a:ext cx="2061971" cy="512064"/>
+          </a:xfrm>
+          <a:prstGeom prst="roundRect">
+            <a:avLst>
+              <a:gd name="adj" fmla="val 16000"/>
+            </a:avLst>
+          </a:prstGeom>
+          <a:solidFill>
+            <a:srgbClr val="1E9E5A"/>
+          </a:solidFill>
+          <a:ln>
+            <a:noFill/>
+          </a:ln>
+          <a:effectLst/>
+        </p:spPr>
+        <p:style>
+          <a:lnRef idx="1">
+            <a:schemeClr val="accent1"/>
+          </a:lnRef>
+          <a:fillRef idx="3">
+            <a:schemeClr val="accent1"/>
+          </a:fillRef>
+          <a:effectRef idx="2">
+            <a:schemeClr val="accent1"/>
+          </a:effectRef>
+          <a:fontRef idx="minor">
+            <a:schemeClr val="lt1"/>
+          </a:fontRef>
+        </p:style>
+        <p:txBody>
+          <a:bodyPr rtlCol="0" anchor="ctr"/>
+          <a:lstStyle/>
+          <a:p>
+            <a:pPr algn="ctr"/>
+          </a:p>
+        </p:txBody>
+      </p:sp>
+      <p:sp>
+        <p:nvSpPr>
+          <p:cNvPr id="55" name="TextBox 54"/>
+          <p:cNvSpPr txBox="1"/>
+          <p:nvPr/>
+        </p:nvSpPr>
+        <p:spPr>
+          <a:xfrm>
+            <a:off x="3072384" y="4672583"/>
+            <a:ext cx="1915667" cy="512064"/>
+          </a:xfrm>
+          <a:prstGeom prst="rect">
+            <a:avLst/>
+          </a:prstGeom>
+          <a:noFill/>
+        </p:spPr>
+        <p:txBody>
+          <a:bodyPr wrap="square" anchor="ctr" lIns="0" rIns="0" tIns="0" bIns="0">
+            <a:spAutoFit/>
+          </a:bodyPr>
+          <a:lstStyle/>
+          <a:p>
+            <a:pPr algn="ctr"/>
+            <a:r>
+              <a:rPr sz="1050" b="1">
+                <a:solidFill>
+                  <a:srgbClr val="FFFFFF"/>
+                </a:solidFill>
+                <a:latin typeface="Segoe UI"/>
+              </a:rPr>
+              <a:t>Azure Cosmos DB</a:t>
+            </a:r>
+          </a:p>
+          <a:p>
+            <a:pPr algn="ctr"/>
+            <a:r>
+              <a:rPr sz="800" b="0">
+                <a:solidFill>
+                  <a:srgbClr val="ECF0FB"/>
+                </a:solidFill>
+                <a:latin typeface="Segoe UI"/>
+              </a:rPr>
+              <a:t>operational records</a:t>
+            </a:r>
+          </a:p>
+        </p:txBody>
+      </p:sp>
+      <p:sp>
+        <p:nvSpPr>
+          <p:cNvPr id="56" name="Rounded Rectangle 55"/>
+          <p:cNvSpPr/>
+          <p:nvPr/>
+        </p:nvSpPr>
+        <p:spPr>
+          <a:xfrm>
+            <a:off x="5189220" y="4672583"/>
+            <a:ext cx="2061971" cy="512064"/>
+          </a:xfrm>
+          <a:prstGeom prst="roundRect">
+            <a:avLst>
+              <a:gd name="adj" fmla="val 16000"/>
+            </a:avLst>
+          </a:prstGeom>
+          <a:solidFill>
+            <a:srgbClr val="1E9E5A"/>
+          </a:solidFill>
+          <a:ln>
+            <a:noFill/>
+          </a:ln>
+          <a:effectLst/>
+        </p:spPr>
+        <p:style>
+          <a:lnRef idx="1">
+            <a:schemeClr val="accent1"/>
+          </a:lnRef>
+          <a:fillRef idx="3">
+            <a:schemeClr val="accent1"/>
+          </a:fillRef>
+          <a:effectRef idx="2">
+            <a:schemeClr val="accent1"/>
+          </a:effectRef>
+          <a:fontRef idx="minor">
+            <a:schemeClr val="lt1"/>
+          </a:fontRef>
+        </p:style>
+        <p:txBody>
+          <a:bodyPr rtlCol="0" anchor="ctr"/>
+          <a:lstStyle/>
+          <a:p>
+            <a:pPr algn="ctr"/>
+          </a:p>
+        </p:txBody>
+      </p:sp>
+      <p:sp>
+        <p:nvSpPr>
+          <p:cNvPr id="57" name="TextBox 56"/>
+          <p:cNvSpPr txBox="1"/>
+          <p:nvPr/>
+        </p:nvSpPr>
+        <p:spPr>
+          <a:xfrm>
+            <a:off x="5262372" y="4672583"/>
+            <a:ext cx="1915667" cy="512064"/>
+          </a:xfrm>
+          <a:prstGeom prst="rect">
+            <a:avLst/>
+          </a:prstGeom>
+          <a:noFill/>
+        </p:spPr>
+        <p:txBody>
+          <a:bodyPr wrap="square" anchor="ctr" lIns="0" rIns="0" tIns="0" bIns="0">
+            <a:spAutoFit/>
+          </a:bodyPr>
+          <a:lstStyle/>
+          <a:p>
+            <a:pPr algn="ctr"/>
+            <a:r>
+              <a:rPr sz="1050" b="1">
+                <a:solidFill>
+                  <a:srgbClr val="FFFFFF"/>
+                </a:solidFill>
+                <a:latin typeface="Segoe UI"/>
+              </a:rPr>
+              <a:t>Foundry IQ / AI Search</a:t>
+            </a:r>
+          </a:p>
+          <a:p>
+            <a:pPr algn="ctr"/>
+            <a:r>
+              <a:rPr sz="800" b="0">
+                <a:solidFill>
+                  <a:srgbClr val="ECF0FB"/>
+                </a:solidFill>
+                <a:latin typeface="Segoe UI"/>
+              </a:rPr>
+              <a:t>vector + semantic</a:t>
+            </a:r>
+          </a:p>
+        </p:txBody>
+      </p:sp>
+      <p:sp>
+        <p:nvSpPr>
+          <p:cNvPr id="58" name="Rounded Rectangle 57"/>
+          <p:cNvSpPr/>
+          <p:nvPr/>
+        </p:nvSpPr>
+        <p:spPr>
+          <a:xfrm>
+            <a:off x="7379208" y="4672583"/>
+            <a:ext cx="2061971" cy="512064"/>
+          </a:xfrm>
+          <a:prstGeom prst="roundRect">
+            <a:avLst>
+              <a:gd name="adj" fmla="val 16000"/>
+            </a:avLst>
+          </a:prstGeom>
+          <a:solidFill>
+            <a:srgbClr val="1E9E5A"/>
+          </a:solidFill>
+          <a:ln>
+            <a:noFill/>
+          </a:ln>
+          <a:effectLst/>
+        </p:spPr>
+        <p:style>
+          <a:lnRef idx="1">
+            <a:schemeClr val="accent1"/>
+          </a:lnRef>
+          <a:fillRef idx="3">
+            <a:schemeClr val="accent1"/>
+          </a:fillRef>
+          <a:effectRef idx="2">
+            <a:schemeClr val="accent1"/>
+          </a:effectRef>
+          <a:fontRef idx="minor">
+            <a:schemeClr val="lt1"/>
+          </a:fontRef>
+        </p:style>
+        <p:txBody>
+          <a:bodyPr rtlCol="0" anchor="ctr"/>
+          <a:lstStyle/>
+          <a:p>
+            <a:pPr algn="ctr"/>
+          </a:p>
+        </p:txBody>
+      </p:sp>
+      <p:sp>
+        <p:nvSpPr>
+          <p:cNvPr id="59" name="TextBox 58"/>
+          <p:cNvSpPr txBox="1"/>
+          <p:nvPr/>
+        </p:nvSpPr>
+        <p:spPr>
+          <a:xfrm>
+            <a:off x="7452360" y="4672583"/>
+            <a:ext cx="1915667" cy="512064"/>
+          </a:xfrm>
+          <a:prstGeom prst="rect">
+            <a:avLst/>
+          </a:prstGeom>
+          <a:noFill/>
+        </p:spPr>
+        <p:txBody>
+          <a:bodyPr wrap="square" anchor="ctr" lIns="0" rIns="0" tIns="0" bIns="0">
+            <a:spAutoFit/>
+          </a:bodyPr>
+          <a:lstStyle/>
+          <a:p>
+            <a:pPr algn="ctr"/>
+            <a:r>
+              <a:rPr sz="1050" b="1">
+                <a:solidFill>
+                  <a:srgbClr val="FFFFFF"/>
+                </a:solidFill>
+                <a:latin typeface="Segoe UI"/>
+              </a:rPr>
+              <a:t>Microsoft Fabric</a:t>
+            </a:r>
+          </a:p>
+          <a:p>
+            <a:pPr algn="ctr"/>
+            <a:r>
+              <a:rPr sz="800" b="0">
+                <a:solidFill>
+                  <a:srgbClr val="ECF0FB"/>
+                </a:solidFill>
+                <a:latin typeface="Segoe UI"/>
+              </a:rPr>
+              <a:t>OneLake · lakehouse</a:t>
+            </a:r>
+          </a:p>
+        </p:txBody>
+      </p:sp>
+      <p:sp>
+        <p:nvSpPr>
+          <p:cNvPr id="60" name="Rounded Rectangle 59"/>
+          <p:cNvSpPr/>
+          <p:nvPr/>
+        </p:nvSpPr>
+        <p:spPr>
+          <a:xfrm>
+            <a:off x="9569196" y="4672583"/>
+            <a:ext cx="2061971" cy="512064"/>
+          </a:xfrm>
+          <a:prstGeom prst="roundRect">
+            <a:avLst>
+              <a:gd name="adj" fmla="val 16000"/>
+            </a:avLst>
+          </a:prstGeom>
+          <a:solidFill>
+            <a:srgbClr val="1E9E5A"/>
+          </a:solidFill>
+          <a:ln>
+            <a:noFill/>
+          </a:ln>
+          <a:effectLst/>
+        </p:spPr>
+        <p:style>
+          <a:lnRef idx="1">
+            <a:schemeClr val="accent1"/>
+          </a:lnRef>
+          <a:fillRef idx="3">
+            <a:schemeClr val="accent1"/>
+          </a:fillRef>
+          <a:effectRef idx="2">
+            <a:schemeClr val="accent1"/>
+          </a:effectRef>
+          <a:fontRef idx="minor">
+            <a:schemeClr val="lt1"/>
+          </a:fontRef>
+        </p:style>
+        <p:txBody>
+          <a:bodyPr rtlCol="0" anchor="ctr"/>
+          <a:lstStyle/>
+          <a:p>
+            <a:pPr algn="ctr"/>
+          </a:p>
+        </p:txBody>
+      </p:sp>
+      <p:sp>
+        <p:nvSpPr>
+          <p:cNvPr id="61" name="TextBox 60"/>
+          <p:cNvSpPr txBox="1"/>
+          <p:nvPr/>
+        </p:nvSpPr>
+        <p:spPr>
+          <a:xfrm>
+            <a:off x="9642348" y="4672583"/>
+            <a:ext cx="1915667" cy="512064"/>
+          </a:xfrm>
+          <a:prstGeom prst="rect">
+            <a:avLst/>
+          </a:prstGeom>
+          <a:noFill/>
+        </p:spPr>
+        <p:txBody>
+          <a:bodyPr wrap="square" anchor="ctr" lIns="0" rIns="0" tIns="0" bIns="0">
+            <a:spAutoFit/>
+          </a:bodyPr>
+          <a:lstStyle/>
+          <a:p>
+            <a:pPr algn="ctr"/>
+            <a:r>
+              <a:rPr sz="1050" b="1">
+                <a:solidFill>
+                  <a:srgbClr val="FFFFFF"/>
+                </a:solidFill>
+                <a:latin typeface="Segoe UI"/>
+              </a:rPr>
+              <a:t>Azure Databricks</a:t>
+            </a:r>
+          </a:p>
+          <a:p>
+            <a:pPr algn="ctr"/>
+            <a:r>
+              <a:rPr sz="800" b="0">
+                <a:solidFill>
+                  <a:srgbClr val="ECF0FB"/>
+                </a:solidFill>
+                <a:latin typeface="Segoe UI"/>
+              </a:rPr>
+              <a:t>analytics / ML</a:t>
+            </a:r>
+          </a:p>
+        </p:txBody>
+      </p:sp>
+      <p:sp>
+        <p:nvSpPr>
+          <p:cNvPr id="62" name="Rounded Rectangle 61"/>
+          <p:cNvSpPr/>
+          <p:nvPr/>
+        </p:nvSpPr>
+        <p:spPr>
+          <a:xfrm>
+            <a:off x="411480" y="5376671"/>
+            <a:ext cx="11384280" cy="713232"/>
+          </a:xfrm>
+          <a:prstGeom prst="roundRect">
+            <a:avLst>
+              <a:gd name="adj" fmla="val 10000"/>
+            </a:avLst>
+          </a:prstGeom>
+          <a:solidFill>
+            <a:srgbClr val="FDF1DF"/>
+          </a:solidFill>
+          <a:ln>
+            <a:noFill/>
+          </a:ln>
+          <a:effectLst/>
+        </p:spPr>
+        <p:style>
+          <a:lnRef idx="1">
+            <a:schemeClr val="accent1"/>
+          </a:lnRef>
+          <a:fillRef idx="3">
+            <a:schemeClr val="accent1"/>
+          </a:fillRef>
+          <a:effectRef idx="2">
+            <a:schemeClr val="accent1"/>
+          </a:effectRef>
+          <a:fontRef idx="minor">
+            <a:schemeClr val="lt1"/>
+          </a:fontRef>
+        </p:style>
+        <p:txBody>
+          <a:bodyPr rtlCol="0" anchor="ctr"/>
+          <a:lstStyle/>
+          <a:p>
+            <a:pPr algn="ctr"/>
+          </a:p>
+        </p:txBody>
+      </p:sp>
+      <p:sp>
+        <p:nvSpPr>
+          <p:cNvPr id="63" name="Rounded Rectangle 62"/>
+          <p:cNvSpPr/>
+          <p:nvPr/>
+        </p:nvSpPr>
+        <p:spPr>
+          <a:xfrm>
+            <a:off x="411480" y="5376671"/>
+            <a:ext cx="2423160" cy="713232"/>
+          </a:xfrm>
+          <a:prstGeom prst="roundRect">
+            <a:avLst>
+              <a:gd name="adj" fmla="val 10000"/>
+            </a:avLst>
+          </a:prstGeom>
+          <a:solidFill>
+            <a:srgbClr val="E28A00"/>
+          </a:solidFill>
+          <a:ln>
+            <a:noFill/>
+          </a:ln>
+          <a:effectLst/>
+        </p:spPr>
+        <p:style>
+          <a:lnRef idx="1">
+            <a:schemeClr val="accent1"/>
+          </a:lnRef>
+          <a:fillRef idx="3">
+            <a:schemeClr val="accent1"/>
+          </a:fillRef>
+          <a:effectRef idx="2">
+            <a:schemeClr val="accent1"/>
+          </a:effectRef>
+          <a:fontRef idx="minor">
+            <a:schemeClr val="lt1"/>
+          </a:fontRef>
+        </p:style>
+        <p:txBody>
+          <a:bodyPr rtlCol="0" anchor="ctr"/>
+          <a:lstStyle/>
+          <a:p>
+            <a:pPr algn="ctr"/>
+          </a:p>
+        </p:txBody>
+      </p:sp>
+      <p:sp>
+        <p:nvSpPr>
+          <p:cNvPr id="64" name="TextBox 63"/>
+          <p:cNvSpPr txBox="1"/>
+          <p:nvPr/>
+        </p:nvSpPr>
+        <p:spPr>
+          <a:xfrm>
+            <a:off x="557784" y="5376671"/>
+            <a:ext cx="2148840" cy="713232"/>
+          </a:xfrm>
+          <a:prstGeom prst="rect">
+            <a:avLst/>
+          </a:prstGeom>
+          <a:noFill/>
+        </p:spPr>
+        <p:txBody>
+          <a:bodyPr wrap="square" anchor="ctr" lIns="0" rIns="0" tIns="0" bIns="0">
+            <a:spAutoFit/>
+          </a:bodyPr>
+          <a:lstStyle/>
+          <a:p>
+            <a:pPr algn="l"/>
+            <a:r>
+              <a:rPr sz="1150" b="1">
+                <a:solidFill>
+                  <a:srgbClr val="FFFFFF"/>
+                </a:solidFill>
+                <a:latin typeface="Segoe UI"/>
+              </a:rPr>
+              <a:t>MODELS</a:t>
+            </a:r>
+          </a:p>
+          <a:p>
+            <a:pPr algn="l"/>
+            <a:r>
+              <a:rPr sz="800" b="0">
+                <a:solidFill>
+                  <a:srgbClr val="ECF0FB"/>
+                </a:solidFill>
+                <a:latin typeface="Segoe UI"/>
+              </a:rPr>
+              <a:t>reason &amp; generate</a:t>
+            </a:r>
+          </a:p>
+        </p:txBody>
+      </p:sp>
+      <p:sp>
+        <p:nvSpPr>
+          <p:cNvPr id="65" name="Rounded Rectangle 64"/>
+          <p:cNvSpPr/>
+          <p:nvPr/>
+        </p:nvSpPr>
+        <p:spPr>
+          <a:xfrm>
+            <a:off x="2999232" y="5477255"/>
+            <a:ext cx="2061971" cy="512064"/>
+          </a:xfrm>
+          <a:prstGeom prst="roundRect">
+            <a:avLst>
+              <a:gd name="adj" fmla="val 16000"/>
+            </a:avLst>
+          </a:prstGeom>
+          <a:solidFill>
+            <a:srgbClr val="E28A00"/>
+          </a:solidFill>
+          <a:ln>
+            <a:noFill/>
+          </a:ln>
+          <a:effectLst/>
+        </p:spPr>
+        <p:style>
+          <a:lnRef idx="1">
+            <a:schemeClr val="accent1"/>
+          </a:lnRef>
+          <a:fillRef idx="3">
+            <a:schemeClr val="accent1"/>
+          </a:fillRef>
+          <a:effectRef idx="2">
+            <a:schemeClr val="accent1"/>
+          </a:effectRef>
+          <a:fontRef idx="minor">
+            <a:schemeClr val="lt1"/>
+          </a:fontRef>
+        </p:style>
+        <p:txBody>
+          <a:bodyPr rtlCol="0" anchor="ctr"/>
+          <a:lstStyle/>
+          <a:p>
+            <a:pPr algn="ctr"/>
+          </a:p>
+        </p:txBody>
+      </p:sp>
+      <p:sp>
+        <p:nvSpPr>
+          <p:cNvPr id="66" name="TextBox 65"/>
+          <p:cNvSpPr txBox="1"/>
+          <p:nvPr/>
+        </p:nvSpPr>
+        <p:spPr>
+          <a:xfrm>
+            <a:off x="3072384" y="5477255"/>
+            <a:ext cx="1915667" cy="512064"/>
+          </a:xfrm>
+          <a:prstGeom prst="rect">
+            <a:avLst/>
+          </a:prstGeom>
+          <a:noFill/>
+        </p:spPr>
+        <p:txBody>
+          <a:bodyPr wrap="square" anchor="ctr" lIns="0" rIns="0" tIns="0" bIns="0">
+            <a:spAutoFit/>
+          </a:bodyPr>
+          <a:lstStyle/>
+          <a:p>
+            <a:pPr algn="ctr"/>
+            <a:r>
+              <a:rPr sz="1050" b="1">
+                <a:solidFill>
+                  <a:srgbClr val="FFFFFF"/>
+                </a:solidFill>
+                <a:latin typeface="Segoe UI"/>
+              </a:rPr>
+              <a:t>Foundry / Azure OpenAI</a:t>
+            </a:r>
+          </a:p>
+          <a:p>
+            <a:pPr algn="ctr"/>
+            <a:r>
+              <a:rPr sz="800" b="0">
+                <a:solidFill>
+                  <a:srgbClr val="ECF0FB"/>
+                </a:solidFill>
+                <a:latin typeface="Segoe UI"/>
+              </a:rPr>
+              <a:t>GPT family LLMs</a:t>
+            </a:r>
+          </a:p>
+        </p:txBody>
+      </p:sp>
+      <p:sp>
+        <p:nvSpPr>
+          <p:cNvPr id="67" name="Rounded Rectangle 66"/>
+          <p:cNvSpPr/>
+          <p:nvPr/>
+        </p:nvSpPr>
+        <p:spPr>
+          <a:xfrm>
+            <a:off x="5189220" y="5477255"/>
+            <a:ext cx="2061971" cy="512064"/>
+          </a:xfrm>
+          <a:prstGeom prst="roundRect">
+            <a:avLst>
+              <a:gd name="adj" fmla="val 16000"/>
+            </a:avLst>
+          </a:prstGeom>
+          <a:solidFill>
+            <a:srgbClr val="E28A00"/>
+          </a:solidFill>
+          <a:ln>
+            <a:noFill/>
+          </a:ln>
+          <a:effectLst/>
+        </p:spPr>
+        <p:style>
+          <a:lnRef idx="1">
+            <a:schemeClr val="accent1"/>
+          </a:lnRef>
+          <a:fillRef idx="3">
+            <a:schemeClr val="accent1"/>
+          </a:fillRef>
+          <a:effectRef idx="2">
+            <a:schemeClr val="accent1"/>
+          </a:effectRef>
+          <a:fontRef idx="minor">
+            <a:schemeClr val="lt1"/>
+          </a:fontRef>
+        </p:style>
+        <p:txBody>
+          <a:bodyPr rtlCol="0" anchor="ctr"/>
+          <a:lstStyle/>
+          <a:p>
+            <a:pPr algn="ctr"/>
+          </a:p>
+        </p:txBody>
+      </p:sp>
+      <p:sp>
+        <p:nvSpPr>
+          <p:cNvPr id="68" name="TextBox 67"/>
+          <p:cNvSpPr txBox="1"/>
+          <p:nvPr/>
+        </p:nvSpPr>
+        <p:spPr>
+          <a:xfrm>
+            <a:off x="5262372" y="5477255"/>
+            <a:ext cx="1915667" cy="512064"/>
+          </a:xfrm>
+          <a:prstGeom prst="rect">
+            <a:avLst/>
+          </a:prstGeom>
+          <a:noFill/>
+        </p:spPr>
+        <p:txBody>
+          <a:bodyPr wrap="square" anchor="ctr" lIns="0" rIns="0" tIns="0" bIns="0">
+            <a:spAutoFit/>
+          </a:bodyPr>
+          <a:lstStyle/>
+          <a:p>
+            <a:pPr algn="ctr"/>
+            <a:r>
+              <a:rPr sz="1050" b="1">
+                <a:solidFill>
+                  <a:srgbClr val="FFFFFF"/>
+                </a:solidFill>
+                <a:latin typeface="Segoe UI"/>
+              </a:rPr>
+              <a:t>Small language models</a:t>
+            </a:r>
+          </a:p>
+          <a:p>
+            <a:pPr algn="ctr"/>
+            <a:r>
+              <a:rPr sz="800" b="0">
+                <a:solidFill>
+                  <a:srgbClr val="ECF0FB"/>
+                </a:solidFill>
+                <a:latin typeface="Segoe UI"/>
+              </a:rPr>
+              <a:t>Phi · cost-efficient</a:t>
+            </a:r>
+          </a:p>
+        </p:txBody>
+      </p:sp>
+      <p:sp>
+        <p:nvSpPr>
+          <p:cNvPr id="69" name="Rounded Rectangle 68"/>
+          <p:cNvSpPr/>
+          <p:nvPr/>
+        </p:nvSpPr>
+        <p:spPr>
+          <a:xfrm>
+            <a:off x="7379208" y="5477255"/>
+            <a:ext cx="2061971" cy="512064"/>
+          </a:xfrm>
+          <a:prstGeom prst="roundRect">
+            <a:avLst>
+              <a:gd name="adj" fmla="val 16000"/>
+            </a:avLst>
+          </a:prstGeom>
+          <a:solidFill>
+            <a:srgbClr val="E28A00"/>
+          </a:solidFill>
+          <a:ln>
+            <a:noFill/>
+          </a:ln>
+          <a:effectLst/>
+        </p:spPr>
+        <p:style>
+          <a:lnRef idx="1">
+            <a:schemeClr val="accent1"/>
+          </a:lnRef>
+          <a:fillRef idx="3">
+            <a:schemeClr val="accent1"/>
+          </a:fillRef>
+          <a:effectRef idx="2">
+            <a:schemeClr val="accent1"/>
+          </a:effectRef>
+          <a:fontRef idx="minor">
+            <a:schemeClr val="lt1"/>
+          </a:fontRef>
+        </p:style>
+        <p:txBody>
+          <a:bodyPr rtlCol="0" anchor="ctr"/>
+          <a:lstStyle/>
+          <a:p>
+            <a:pPr algn="ctr"/>
+          </a:p>
+        </p:txBody>
+      </p:sp>
+      <p:sp>
+        <p:nvSpPr>
+          <p:cNvPr id="70" name="TextBox 69"/>
+          <p:cNvSpPr txBox="1"/>
+          <p:nvPr/>
+        </p:nvSpPr>
+        <p:spPr>
+          <a:xfrm>
+            <a:off x="7452360" y="5477255"/>
+            <a:ext cx="1915667" cy="512064"/>
+          </a:xfrm>
+          <a:prstGeom prst="rect">
+            <a:avLst/>
+          </a:prstGeom>
+          <a:noFill/>
+        </p:spPr>
+        <p:txBody>
+          <a:bodyPr wrap="square" anchor="ctr" lIns="0" rIns="0" tIns="0" bIns="0">
+            <a:spAutoFit/>
+          </a:bodyPr>
+          <a:lstStyle/>
+          <a:p>
+            <a:pPr algn="ctr"/>
+            <a:r>
+              <a:rPr sz="1050" b="1">
+                <a:solidFill>
+                  <a:srgbClr val="FFFFFF"/>
+                </a:solidFill>
+                <a:latin typeface="Segoe UI"/>
+              </a:rPr>
+              <a:t>Model router</a:t>
+            </a:r>
+          </a:p>
+          <a:p>
+            <a:pPr algn="ctr"/>
+            <a:r>
+              <a:rPr sz="800" b="0">
+                <a:solidFill>
+                  <a:srgbClr val="ECF0FB"/>
+                </a:solidFill>
+                <a:latin typeface="Segoe UI"/>
+              </a:rPr>
+              <a:t>right model per task</a:t>
+            </a:r>
+          </a:p>
+        </p:txBody>
+      </p:sp>
+      <p:sp>
+        <p:nvSpPr>
+          <p:cNvPr id="71" name="Rounded Rectangle 70"/>
+          <p:cNvSpPr/>
+          <p:nvPr/>
+        </p:nvSpPr>
+        <p:spPr>
+          <a:xfrm>
+            <a:off x="9569196" y="5477255"/>
+            <a:ext cx="2061971" cy="512064"/>
+          </a:xfrm>
+          <a:prstGeom prst="roundRect">
+            <a:avLst>
+              <a:gd name="adj" fmla="val 16000"/>
+            </a:avLst>
+          </a:prstGeom>
+          <a:solidFill>
+            <a:srgbClr val="E28A00"/>
+          </a:solidFill>
+          <a:ln>
+            <a:noFill/>
+          </a:ln>
+          <a:effectLst/>
+        </p:spPr>
+        <p:style>
+          <a:lnRef idx="1">
+            <a:schemeClr val="accent1"/>
+          </a:lnRef>
+          <a:fillRef idx="3">
+            <a:schemeClr val="accent1"/>
+          </a:fillRef>
+          <a:effectRef idx="2">
+            <a:schemeClr val="accent1"/>
+          </a:effectRef>
+          <a:fontRef idx="minor">
+            <a:schemeClr val="lt1"/>
+          </a:fontRef>
+        </p:style>
+        <p:txBody>
+          <a:bodyPr rtlCol="0" anchor="ctr"/>
+          <a:lstStyle/>
+          <a:p>
+            <a:pPr algn="ctr"/>
+          </a:p>
+        </p:txBody>
+      </p:sp>
+      <p:sp>
+        <p:nvSpPr>
+          <p:cNvPr id="72" name="TextBox 71"/>
+          <p:cNvSpPr txBox="1"/>
+          <p:nvPr/>
+        </p:nvSpPr>
+        <p:spPr>
+          <a:xfrm>
+            <a:off x="9642348" y="5477255"/>
+            <a:ext cx="1915667" cy="512064"/>
+          </a:xfrm>
+          <a:prstGeom prst="rect">
+            <a:avLst/>
+          </a:prstGeom>
+          <a:noFill/>
+        </p:spPr>
+        <p:txBody>
+          <a:bodyPr wrap="square" anchor="ctr" lIns="0" rIns="0" tIns="0" bIns="0">
+            <a:spAutoFit/>
+          </a:bodyPr>
+          <a:lstStyle/>
+          <a:p>
+            <a:pPr algn="ctr"/>
+            <a:r>
+              <a:rPr sz="1050" b="1">
+                <a:solidFill>
+                  <a:srgbClr val="FFFFFF"/>
+                </a:solidFill>
+                <a:latin typeface="Segoe UI"/>
+              </a:rPr>
+              <a:t>Code Interpreter</a:t>
+            </a:r>
+          </a:p>
+          <a:p>
+            <a:pPr algn="ctr"/>
+            <a:r>
+              <a:rPr sz="800" b="0">
+                <a:solidFill>
+                  <a:srgbClr val="ECF0FB"/>
+                </a:solidFill>
+                <a:latin typeface="Segoe UI"/>
+              </a:rPr>
+              <a:t>consolidated math</a:t>
+            </a:r>
+          </a:p>
+        </p:txBody>
+      </p:sp>
+      <p:sp>
+        <p:nvSpPr>
+          <p:cNvPr id="73" name="Rounded Rectangle 72"/>
+          <p:cNvSpPr/>
+          <p:nvPr/>
+        </p:nvSpPr>
+        <p:spPr>
+          <a:xfrm>
+            <a:off x="411480" y="6419088"/>
+            <a:ext cx="11384280" cy="384048"/>
+          </a:xfrm>
+          <a:prstGeom prst="roundRect">
+            <a:avLst>
+              <a:gd name="adj" fmla="val 25000"/>
+            </a:avLst>
+          </a:prstGeom>
+          <a:solidFill>
+            <a:srgbClr val="1B1F2A"/>
+          </a:solidFill>
+          <a:ln>
+            <a:noFill/>
+          </a:ln>
+          <a:effectLst/>
+        </p:spPr>
+        <p:style>
+          <a:lnRef idx="1">
+            <a:schemeClr val="accent1"/>
+          </a:lnRef>
+          <a:fillRef idx="3">
+            <a:schemeClr val="accent1"/>
+          </a:fillRef>
+          <a:effectRef idx="2">
+            <a:schemeClr val="accent1"/>
+          </a:effectRef>
+          <a:fontRef idx="minor">
+            <a:schemeClr val="lt1"/>
+          </a:fontRef>
+        </p:style>
+        <p:txBody>
+          <a:bodyPr rtlCol="0" anchor="ctr"/>
+          <a:lstStyle/>
+          <a:p>
+            <a:pPr algn="ctr"/>
+          </a:p>
+        </p:txBody>
+      </p:sp>
+      <p:sp>
+        <p:nvSpPr>
+          <p:cNvPr id="74" name="TextBox 73"/>
+          <p:cNvSpPr txBox="1"/>
+          <p:nvPr/>
+        </p:nvSpPr>
+        <p:spPr>
+          <a:xfrm>
+            <a:off x="548640" y="6437376"/>
+            <a:ext cx="11155680" cy="347472"/>
+          </a:xfrm>
+          <a:prstGeom prst="rect">
+            <a:avLst/>
+          </a:prstGeom>
+          <a:noFill/>
+        </p:spPr>
+        <p:txBody>
+          <a:bodyPr wrap="square" anchor="ctr" lIns="0" rIns="0" tIns="0" bIns="0">
+            <a:spAutoFit/>
+          </a:bodyPr>
+          <a:lstStyle/>
+          <a:p>
+            <a:pPr algn="l"/>
+            <a:r>
+              <a:rPr sz="1050" b="1">
+                <a:solidFill>
+                  <a:srgbClr val="E28A00"/>
+                </a:solidFill>
+                <a:latin typeface="Segoe UI"/>
+              </a:rPr>
+              <a:t>Governance &amp; observability span every layer:  </a:t>
+            </a:r>
+            <a:r>
+              <a:rPr sz="1050" b="0">
+                <a:solidFill>
+                  <a:srgbClr val="FFFFFF"/>
+                </a:solidFill>
+                <a:latin typeface="Segoe UI"/>
+              </a:rPr>
+              <a:t>Azure Monitor · Application Insights · Foundry Evaluations · Content Safety · Cost Management (FinOps).</a:t>
+            </a:r>
+          </a:p>
+        </p:txBody>
+      </p:sp>
+    </p:spTree>
+  </p:cSld>
+  <p:clrMapOvr>
+    <a:masterClrMapping/>
+  </p:clrMapOvr>
+</p:sld>
+</file>
+
+<file path=ppt/slides/slide6.xml><?xml version="1.0" encoding="utf-8"?>
+<p:sld xmlns:a="http://schemas.openxmlformats.org/drawingml/2006/main" xmlns:p="http://schemas.openxmlformats.org/presentationml/2006/main" xmlns:r="http://schemas.openxmlformats.org/officeDocument/2006/relationships">
+  <p:cSld>
+    <p:spTree>
+      <p:nvGrpSpPr>
+        <p:cNvPr id="1" name=""/>
+        <p:cNvGrpSpPr/>
+        <p:nvPr/>
+      </p:nvGrpSpPr>
+      <p:grpSpPr/>
+      <p:sp>
+        <p:nvSpPr>
+          <p:cNvPr id="2" name="Rectangle 1"/>
+          <p:cNvSpPr/>
+          <p:nvPr/>
+        </p:nvSpPr>
+        <p:spPr>
+          <a:xfrm>
+            <a:off x="0" y="0"/>
+            <a:ext cx="12191695" cy="6858000"/>
+          </a:xfrm>
+          <a:prstGeom prst="rect">
+            <a:avLst/>
+          </a:prstGeom>
+          <a:solidFill>
+            <a:srgbClr val="F4F6FB"/>
+          </a:solidFill>
+          <a:ln>
+            <a:noFill/>
+          </a:ln>
+          <a:effectLst/>
+        </p:spPr>
+        <p:style>
+          <a:lnRef idx="1">
+            <a:schemeClr val="accent1"/>
+          </a:lnRef>
+          <a:fillRef idx="3">
+            <a:schemeClr val="accent1"/>
+          </a:fillRef>
+          <a:effectRef idx="2">
+            <a:schemeClr val="accent1"/>
+          </a:effectRef>
+          <a:fontRef idx="minor">
+            <a:schemeClr val="lt1"/>
+          </a:fontRef>
+        </p:style>
+        <p:txBody>
+          <a:bodyPr rtlCol="0" anchor="ctr"/>
+          <a:lstStyle/>
+          <a:p>
+            <a:pPr algn="ctr"/>
+          </a:p>
+        </p:txBody>
+      </p:sp>
+      <p:sp>
+        <p:nvSpPr>
+          <p:cNvPr id="3" name="Rectangle 2"/>
+          <p:cNvSpPr/>
+          <p:nvPr/>
+        </p:nvSpPr>
+        <p:spPr>
+          <a:xfrm>
+            <a:off x="0" y="0"/>
+            <a:ext cx="12191695" cy="1078992"/>
+          </a:xfrm>
+          <a:prstGeom prst="rect">
+            <a:avLst/>
+          </a:prstGeom>
+          <a:solidFill>
+            <a:srgbClr val="1B1F2A"/>
+          </a:solidFill>
+          <a:ln>
+            <a:noFill/>
+          </a:ln>
+          <a:effectLst/>
+        </p:spPr>
+        <p:style>
+          <a:lnRef idx="1">
+            <a:schemeClr val="accent1"/>
+          </a:lnRef>
+          <a:fillRef idx="3">
+            <a:schemeClr val="accent1"/>
+          </a:fillRef>
+          <a:effectRef idx="2">
+            <a:schemeClr val="accent1"/>
+          </a:effectRef>
+          <a:fontRef idx="minor">
+            <a:schemeClr val="lt1"/>
+          </a:fontRef>
+        </p:style>
+        <p:txBody>
+          <a:bodyPr rtlCol="0" anchor="ctr"/>
+          <a:lstStyle/>
+          <a:p>
+            <a:pPr algn="ctr"/>
+          </a:p>
+        </p:txBody>
+      </p:sp>
+      <p:sp>
+        <p:nvSpPr>
+          <p:cNvPr id="4" name="Rectangle 3"/>
+          <p:cNvSpPr/>
+          <p:nvPr/>
+        </p:nvSpPr>
+        <p:spPr>
+          <a:xfrm>
+            <a:off x="0" y="1024128"/>
+            <a:ext cx="12191695" cy="54864"/>
+          </a:xfrm>
+          <a:prstGeom prst="rect">
+            <a:avLst/>
+          </a:prstGeom>
+          <a:solidFill>
+            <a:srgbClr val="E28A00"/>
+          </a:solidFill>
+          <a:ln>
+            <a:noFill/>
+          </a:ln>
+          <a:effectLst/>
+        </p:spPr>
+        <p:style>
+          <a:lnRef idx="1">
+            <a:schemeClr val="accent1"/>
+          </a:lnRef>
+          <a:fillRef idx="3">
+            <a:schemeClr val="accent1"/>
+          </a:fillRef>
+          <a:effectRef idx="2">
+            <a:schemeClr val="accent1"/>
+          </a:effectRef>
+          <a:fontRef idx="minor">
+            <a:schemeClr val="lt1"/>
+          </a:fontRef>
+        </p:style>
+        <p:txBody>
+          <a:bodyPr rtlCol="0" anchor="ctr"/>
+          <a:lstStyle/>
+          <a:p>
+            <a:pPr algn="ctr"/>
+          </a:p>
+        </p:txBody>
+      </p:sp>
+      <p:sp>
+        <p:nvSpPr>
+          <p:cNvPr id="5" name="TextBox 4"/>
+          <p:cNvSpPr txBox="1"/>
+          <p:nvPr/>
+        </p:nvSpPr>
+        <p:spPr>
+          <a:xfrm>
+            <a:off x="502920" y="146304"/>
+            <a:ext cx="11247120" cy="365760"/>
+          </a:xfrm>
+          <a:prstGeom prst="rect">
+            <a:avLst/>
+          </a:prstGeom>
+          <a:noFill/>
+        </p:spPr>
+        <p:txBody>
+          <a:bodyPr wrap="square" anchor="t" lIns="0" rIns="0" tIns="0" bIns="0">
+            <a:spAutoFit/>
+          </a:bodyPr>
+          <a:lstStyle/>
+          <a:p>
+            <a:pPr algn="l"/>
+            <a:r>
+              <a:rPr sz="1200" b="1">
+                <a:solidFill>
+                  <a:srgbClr val="E28A00"/>
+                </a:solidFill>
+                <a:latin typeface="Segoe UI"/>
+              </a:rPr>
+              <a:t>ZAVA · THIS DEMO ON THE REFERENCE ARCHITECTURE</a:t>
+            </a:r>
+          </a:p>
+        </p:txBody>
+      </p:sp>
+      <p:sp>
+        <p:nvSpPr>
+          <p:cNvPr id="6" name="TextBox 5"/>
+          <p:cNvSpPr txBox="1"/>
+          <p:nvPr/>
+        </p:nvSpPr>
+        <p:spPr>
+          <a:xfrm>
+            <a:off x="502920" y="402336"/>
+            <a:ext cx="11247120" cy="566928"/>
+          </a:xfrm>
+          <a:prstGeom prst="rect">
+            <a:avLst/>
+          </a:prstGeom>
+          <a:noFill/>
+        </p:spPr>
+        <p:txBody>
+          <a:bodyPr wrap="square" anchor="t" lIns="0" rIns="0" tIns="0" bIns="0">
+            <a:spAutoFit/>
+          </a:bodyPr>
+          <a:lstStyle/>
+          <a:p>
+            <a:pPr algn="l"/>
+            <a:r>
+              <a:rPr sz="2300" b="1">
+                <a:solidFill>
+                  <a:srgbClr val="FFFFFF"/>
+                </a:solidFill>
+                <a:latin typeface="Segoe UI"/>
+              </a:rPr>
+              <a:t>Every Zava component is a swap-in of the enterprise building block above it</a:t>
+            </a:r>
+          </a:p>
+        </p:txBody>
+      </p:sp>
+      <p:sp>
+        <p:nvSpPr>
+          <p:cNvPr id="7" name="Rounded Rectangle 6"/>
+          <p:cNvSpPr/>
+          <p:nvPr/>
+        </p:nvSpPr>
+        <p:spPr>
+          <a:xfrm>
+            <a:off x="411480" y="1280160"/>
+            <a:ext cx="11384280" cy="713232"/>
+          </a:xfrm>
+          <a:prstGeom prst="roundRect">
+            <a:avLst>
+              <a:gd name="adj" fmla="val 10000"/>
+            </a:avLst>
+          </a:prstGeom>
+          <a:solidFill>
+            <a:srgbClr val="EAF0FE"/>
+          </a:solidFill>
+          <a:ln>
+            <a:noFill/>
+          </a:ln>
+          <a:effectLst/>
+        </p:spPr>
+        <p:style>
+          <a:lnRef idx="1">
+            <a:schemeClr val="accent1"/>
+          </a:lnRef>
+          <a:fillRef idx="3">
+            <a:schemeClr val="accent1"/>
+          </a:fillRef>
+          <a:effectRef idx="2">
+            <a:schemeClr val="accent1"/>
+          </a:effectRef>
+          <a:fontRef idx="minor">
+            <a:schemeClr val="lt1"/>
+          </a:fontRef>
+        </p:style>
+        <p:txBody>
+          <a:bodyPr rtlCol="0" anchor="ctr"/>
+          <a:lstStyle/>
+          <a:p>
+            <a:pPr algn="ctr"/>
+          </a:p>
+        </p:txBody>
+      </p:sp>
+      <p:sp>
+        <p:nvSpPr>
+          <p:cNvPr id="8" name="Rounded Rectangle 7"/>
+          <p:cNvSpPr/>
+          <p:nvPr/>
+        </p:nvSpPr>
+        <p:spPr>
+          <a:xfrm>
+            <a:off x="411480" y="1280160"/>
+            <a:ext cx="2423160" cy="713232"/>
+          </a:xfrm>
+          <a:prstGeom prst="roundRect">
+            <a:avLst>
+              <a:gd name="adj" fmla="val 10000"/>
+            </a:avLst>
+          </a:prstGeom>
+          <a:solidFill>
+            <a:srgbClr val="2F6FED"/>
+          </a:solidFill>
+          <a:ln>
+            <a:noFill/>
+          </a:ln>
+          <a:effectLst/>
+        </p:spPr>
+        <p:style>
+          <a:lnRef idx="1">
+            <a:schemeClr val="accent1"/>
+          </a:lnRef>
+          <a:fillRef idx="3">
+            <a:schemeClr val="accent1"/>
+          </a:fillRef>
+          <a:effectRef idx="2">
+            <a:schemeClr val="accent1"/>
+          </a:effectRef>
+          <a:fontRef idx="minor">
+            <a:schemeClr val="lt1"/>
+          </a:fontRef>
+        </p:style>
+        <p:txBody>
+          <a:bodyPr rtlCol="0" anchor="ctr"/>
+          <a:lstStyle/>
+          <a:p>
+            <a:pPr algn="ctr"/>
+          </a:p>
+        </p:txBody>
+      </p:sp>
+      <p:sp>
+        <p:nvSpPr>
+          <p:cNvPr id="9" name="TextBox 8"/>
+          <p:cNvSpPr txBox="1"/>
+          <p:nvPr/>
+        </p:nvSpPr>
+        <p:spPr>
+          <a:xfrm>
+            <a:off x="557784" y="1280160"/>
+            <a:ext cx="2148840" cy="713232"/>
+          </a:xfrm>
+          <a:prstGeom prst="rect">
+            <a:avLst/>
+          </a:prstGeom>
+          <a:noFill/>
+        </p:spPr>
+        <p:txBody>
+          <a:bodyPr wrap="square" anchor="ctr" lIns="0" rIns="0" tIns="0" bIns="0">
+            <a:spAutoFit/>
+          </a:bodyPr>
+          <a:lstStyle/>
+          <a:p>
+            <a:pPr algn="l"/>
+            <a:r>
+              <a:rPr sz="1150" b="1">
+                <a:solidFill>
+                  <a:srgbClr val="FFFFFF"/>
+                </a:solidFill>
+                <a:latin typeface="Segoe UI"/>
+              </a:rPr>
+              <a:t>EXPERIENCE</a:t>
+            </a:r>
+          </a:p>
+          <a:p>
+            <a:pPr algn="l"/>
+            <a:r>
+              <a:rPr sz="800" b="0">
+                <a:solidFill>
+                  <a:srgbClr val="ECF0FB"/>
+                </a:solidFill>
+                <a:latin typeface="Segoe UI"/>
+              </a:rPr>
+              <a:t>how the user asks</a:t>
+            </a:r>
+          </a:p>
+        </p:txBody>
+      </p:sp>
+      <p:sp>
+        <p:nvSpPr>
+          <p:cNvPr id="10" name="Rounded Rectangle 9"/>
+          <p:cNvSpPr/>
+          <p:nvPr/>
+        </p:nvSpPr>
+        <p:spPr>
+          <a:xfrm>
+            <a:off x="2999232" y="1380744"/>
+            <a:ext cx="2791967" cy="512064"/>
+          </a:xfrm>
+          <a:prstGeom prst="roundRect">
+            <a:avLst>
+              <a:gd name="adj" fmla="val 16000"/>
+            </a:avLst>
+          </a:prstGeom>
+          <a:solidFill>
+            <a:srgbClr val="2F6FED"/>
+          </a:solidFill>
+          <a:ln>
+            <a:noFill/>
+          </a:ln>
+          <a:effectLst/>
+        </p:spPr>
+        <p:style>
+          <a:lnRef idx="1">
+            <a:schemeClr val="accent1"/>
+          </a:lnRef>
+          <a:fillRef idx="3">
+            <a:schemeClr val="accent1"/>
+          </a:fillRef>
+          <a:effectRef idx="2">
+            <a:schemeClr val="accent1"/>
+          </a:effectRef>
+          <a:fontRef idx="minor">
+            <a:schemeClr val="lt1"/>
+          </a:fontRef>
+        </p:style>
+        <p:txBody>
+          <a:bodyPr rtlCol="0" anchor="ctr"/>
+          <a:lstStyle/>
+          <a:p>
+            <a:pPr algn="ctr"/>
+          </a:p>
+        </p:txBody>
+      </p:sp>
+      <p:sp>
+        <p:nvSpPr>
+          <p:cNvPr id="11" name="TextBox 10"/>
+          <p:cNvSpPr txBox="1"/>
+          <p:nvPr/>
+        </p:nvSpPr>
+        <p:spPr>
+          <a:xfrm>
+            <a:off x="3072384" y="1380744"/>
+            <a:ext cx="2645663" cy="512064"/>
+          </a:xfrm>
+          <a:prstGeom prst="rect">
+            <a:avLst/>
+          </a:prstGeom>
+          <a:noFill/>
+        </p:spPr>
+        <p:txBody>
+          <a:bodyPr wrap="square" anchor="ctr" lIns="0" rIns="0" tIns="0" bIns="0">
+            <a:spAutoFit/>
+          </a:bodyPr>
+          <a:lstStyle/>
+          <a:p>
+            <a:pPr algn="ctr"/>
+            <a:r>
+              <a:rPr sz="1050" b="1">
+                <a:solidFill>
+                  <a:srgbClr val="FFFFFF"/>
+                </a:solidFill>
+                <a:latin typeface="Segoe UI"/>
+              </a:rPr>
+              <a:t>Chat app (FastAPI)</a:t>
+            </a:r>
+          </a:p>
+          <a:p>
+            <a:pPr algn="ctr"/>
+            <a:r>
+              <a:rPr sz="800" b="0">
+                <a:solidFill>
+                  <a:srgbClr val="ECF0FB"/>
+                </a:solidFill>
+                <a:latin typeface="Segoe UI"/>
+              </a:rPr>
+              <a:t>live UI + charts</a:t>
+            </a:r>
+          </a:p>
+        </p:txBody>
+      </p:sp>
+      <p:sp>
+        <p:nvSpPr>
+          <p:cNvPr id="12" name="Rounded Rectangle 11"/>
+          <p:cNvSpPr/>
+          <p:nvPr/>
+        </p:nvSpPr>
+        <p:spPr>
+          <a:xfrm>
+            <a:off x="5919215" y="1380744"/>
+            <a:ext cx="2791967" cy="512064"/>
+          </a:xfrm>
+          <a:prstGeom prst="roundRect">
+            <a:avLst>
+              <a:gd name="adj" fmla="val 16000"/>
+            </a:avLst>
+          </a:prstGeom>
+          <a:solidFill>
+            <a:srgbClr val="2F6FED"/>
+          </a:solidFill>
+          <a:ln>
+            <a:noFill/>
+          </a:ln>
+          <a:effectLst/>
+        </p:spPr>
+        <p:style>
+          <a:lnRef idx="1">
+            <a:schemeClr val="accent1"/>
+          </a:lnRef>
+          <a:fillRef idx="3">
+            <a:schemeClr val="accent1"/>
+          </a:fillRef>
+          <a:effectRef idx="2">
+            <a:schemeClr val="accent1"/>
+          </a:effectRef>
+          <a:fontRef idx="minor">
+            <a:schemeClr val="lt1"/>
+          </a:fontRef>
+        </p:style>
+        <p:txBody>
+          <a:bodyPr rtlCol="0" anchor="ctr"/>
+          <a:lstStyle/>
+          <a:p>
+            <a:pPr algn="ctr"/>
+          </a:p>
+        </p:txBody>
+      </p:sp>
+      <p:sp>
+        <p:nvSpPr>
+          <p:cNvPr id="13" name="TextBox 12"/>
+          <p:cNvSpPr txBox="1"/>
+          <p:nvPr/>
+        </p:nvSpPr>
+        <p:spPr>
+          <a:xfrm>
+            <a:off x="5992367" y="1380744"/>
+            <a:ext cx="2645663" cy="512064"/>
+          </a:xfrm>
+          <a:prstGeom prst="rect">
+            <a:avLst/>
+          </a:prstGeom>
+          <a:noFill/>
+        </p:spPr>
+        <p:txBody>
+          <a:bodyPr wrap="square" anchor="ctr" lIns="0" rIns="0" tIns="0" bIns="0">
+            <a:spAutoFit/>
+          </a:bodyPr>
+          <a:lstStyle/>
+          <a:p>
+            <a:pPr algn="ctr"/>
+            <a:r>
+              <a:rPr sz="1050" b="1">
+                <a:solidFill>
+                  <a:srgbClr val="FFFFFF"/>
+                </a:solidFill>
+                <a:latin typeface="Segoe UI"/>
+              </a:rPr>
+              <a:t>Azure Container Apps</a:t>
+            </a:r>
+          </a:p>
+          <a:p>
+            <a:pPr algn="ctr"/>
+            <a:r>
+              <a:rPr sz="800" b="0">
+                <a:solidFill>
+                  <a:srgbClr val="ECF0FB"/>
+                </a:solidFill>
+                <a:latin typeface="Segoe UI"/>
+              </a:rPr>
+              <a:t>serverless hosting</a:t>
+            </a:r>
+          </a:p>
+        </p:txBody>
+      </p:sp>
+      <p:sp>
+        <p:nvSpPr>
+          <p:cNvPr id="14" name="Rounded Rectangle 13"/>
+          <p:cNvSpPr/>
+          <p:nvPr/>
+        </p:nvSpPr>
+        <p:spPr>
+          <a:xfrm>
+            <a:off x="8839200" y="1380744"/>
+            <a:ext cx="2791967" cy="512064"/>
+          </a:xfrm>
+          <a:prstGeom prst="roundRect">
+            <a:avLst>
+              <a:gd name="adj" fmla="val 16000"/>
+            </a:avLst>
+          </a:prstGeom>
+          <a:solidFill>
+            <a:srgbClr val="2F6FED"/>
+          </a:solidFill>
+          <a:ln>
+            <a:noFill/>
+          </a:ln>
+          <a:effectLst/>
+        </p:spPr>
+        <p:style>
+          <a:lnRef idx="1">
+            <a:schemeClr val="accent1"/>
+          </a:lnRef>
+          <a:fillRef idx="3">
+            <a:schemeClr val="accent1"/>
+          </a:fillRef>
+          <a:effectRef idx="2">
+            <a:schemeClr val="accent1"/>
+          </a:effectRef>
+          <a:fontRef idx="minor">
+            <a:schemeClr val="lt1"/>
+          </a:fontRef>
+        </p:style>
+        <p:txBody>
+          <a:bodyPr rtlCol="0" anchor="ctr"/>
+          <a:lstStyle/>
+          <a:p>
+            <a:pPr algn="ctr"/>
+          </a:p>
+        </p:txBody>
+      </p:sp>
+      <p:sp>
+        <p:nvSpPr>
+          <p:cNvPr id="15" name="TextBox 14"/>
+          <p:cNvSpPr txBox="1"/>
+          <p:nvPr/>
+        </p:nvSpPr>
+        <p:spPr>
+          <a:xfrm>
+            <a:off x="8912352" y="1380744"/>
+            <a:ext cx="2645663" cy="512064"/>
+          </a:xfrm>
+          <a:prstGeom prst="rect">
+            <a:avLst/>
+          </a:prstGeom>
+          <a:noFill/>
+        </p:spPr>
+        <p:txBody>
+          <a:bodyPr wrap="square" anchor="ctr" lIns="0" rIns="0" tIns="0" bIns="0">
+            <a:spAutoFit/>
+          </a:bodyPr>
+          <a:lstStyle/>
+          <a:p>
+            <a:pPr algn="ctr"/>
+            <a:r>
+              <a:rPr sz="1050" b="1">
+                <a:solidFill>
+                  <a:srgbClr val="FFFFFF"/>
+                </a:solidFill>
+                <a:latin typeface="Segoe UI"/>
+              </a:rPr>
+              <a:t>Streaming UI</a:t>
+            </a:r>
+          </a:p>
+          <a:p>
+            <a:pPr algn="ctr"/>
+            <a:r>
+              <a:rPr sz="800" b="0">
+                <a:solidFill>
+                  <a:srgbClr val="ECF0FB"/>
+                </a:solidFill>
+                <a:latin typeface="Segoe UI"/>
+              </a:rPr>
+              <a:t>plan · agents · trace</a:t>
+            </a:r>
+          </a:p>
+        </p:txBody>
+      </p:sp>
+      <p:sp>
+        <p:nvSpPr>
+          <p:cNvPr id="16" name="Rounded Rectangle 15"/>
+          <p:cNvSpPr/>
+          <p:nvPr/>
+        </p:nvSpPr>
+        <p:spPr>
+          <a:xfrm>
+            <a:off x="411480" y="2084831"/>
+            <a:ext cx="11384280" cy="713232"/>
+          </a:xfrm>
+          <a:prstGeom prst="roundRect">
+            <a:avLst>
+              <a:gd name="adj" fmla="val 10000"/>
+            </a:avLst>
+          </a:prstGeom>
+          <a:solidFill>
+            <a:srgbClr val="E7EAF1"/>
+          </a:solidFill>
+          <a:ln>
+            <a:noFill/>
+          </a:ln>
+          <a:effectLst/>
+        </p:spPr>
+        <p:style>
+          <a:lnRef idx="1">
+            <a:schemeClr val="accent1"/>
+          </a:lnRef>
+          <a:fillRef idx="3">
+            <a:schemeClr val="accent1"/>
+          </a:fillRef>
+          <a:effectRef idx="2">
+            <a:schemeClr val="accent1"/>
+          </a:effectRef>
+          <a:fontRef idx="minor">
+            <a:schemeClr val="lt1"/>
+          </a:fontRef>
+        </p:style>
+        <p:txBody>
+          <a:bodyPr rtlCol="0" anchor="ctr"/>
+          <a:lstStyle/>
+          <a:p>
+            <a:pPr algn="ctr"/>
+          </a:p>
+        </p:txBody>
+      </p:sp>
+      <p:sp>
+        <p:nvSpPr>
+          <p:cNvPr id="17" name="Rounded Rectangle 16"/>
+          <p:cNvSpPr/>
+          <p:nvPr/>
+        </p:nvSpPr>
+        <p:spPr>
+          <a:xfrm>
+            <a:off x="411480" y="2084831"/>
+            <a:ext cx="2423160" cy="713232"/>
+          </a:xfrm>
+          <a:prstGeom prst="roundRect">
+            <a:avLst>
+              <a:gd name="adj" fmla="val 10000"/>
+            </a:avLst>
+          </a:prstGeom>
+          <a:solidFill>
+            <a:srgbClr val="3C465B"/>
+          </a:solidFill>
+          <a:ln>
+            <a:noFill/>
+          </a:ln>
+          <a:effectLst/>
+        </p:spPr>
+        <p:style>
+          <a:lnRef idx="1">
+            <a:schemeClr val="accent1"/>
+          </a:lnRef>
+          <a:fillRef idx="3">
+            <a:schemeClr val="accent1"/>
+          </a:fillRef>
+          <a:effectRef idx="2">
+            <a:schemeClr val="accent1"/>
+          </a:effectRef>
+          <a:fontRef idx="minor">
+            <a:schemeClr val="lt1"/>
+          </a:fontRef>
+        </p:style>
+        <p:txBody>
+          <a:bodyPr rtlCol="0" anchor="ctr"/>
+          <a:lstStyle/>
+          <a:p>
+            <a:pPr algn="ctr"/>
+          </a:p>
+        </p:txBody>
+      </p:sp>
+      <p:sp>
+        <p:nvSpPr>
+          <p:cNvPr id="18" name="TextBox 17"/>
+          <p:cNvSpPr txBox="1"/>
+          <p:nvPr/>
+        </p:nvSpPr>
+        <p:spPr>
+          <a:xfrm>
+            <a:off x="557784" y="2084831"/>
+            <a:ext cx="2148840" cy="713232"/>
+          </a:xfrm>
+          <a:prstGeom prst="rect">
+            <a:avLst/>
+          </a:prstGeom>
+          <a:noFill/>
+        </p:spPr>
+        <p:txBody>
+          <a:bodyPr wrap="square" anchor="ctr" lIns="0" rIns="0" tIns="0" bIns="0">
+            <a:spAutoFit/>
+          </a:bodyPr>
+          <a:lstStyle/>
+          <a:p>
+            <a:pPr algn="l"/>
+            <a:r>
+              <a:rPr sz="1150" b="1">
+                <a:solidFill>
+                  <a:srgbClr val="FFFFFF"/>
+                </a:solidFill>
+                <a:latin typeface="Segoe UI"/>
+              </a:rPr>
+              <a:t>TRUST &amp; POLICY</a:t>
+            </a:r>
+          </a:p>
+          <a:p>
+            <a:pPr algn="l"/>
+            <a:r>
+              <a:rPr sz="800" b="0">
+                <a:solidFill>
+                  <a:srgbClr val="ECF0FB"/>
+                </a:solidFill>
+                <a:latin typeface="Segoe UI"/>
+              </a:rPr>
+              <a:t>identity &amp; access</a:t>
+            </a:r>
+          </a:p>
+        </p:txBody>
+      </p:sp>
+      <p:sp>
+        <p:nvSpPr>
+          <p:cNvPr id="19" name="Rounded Rectangle 18"/>
+          <p:cNvSpPr/>
+          <p:nvPr/>
+        </p:nvSpPr>
+        <p:spPr>
+          <a:xfrm>
+            <a:off x="2999232" y="2185415"/>
+            <a:ext cx="2791967" cy="512064"/>
+          </a:xfrm>
+          <a:prstGeom prst="roundRect">
+            <a:avLst>
+              <a:gd name="adj" fmla="val 16000"/>
+            </a:avLst>
+          </a:prstGeom>
+          <a:solidFill>
+            <a:srgbClr val="3C465B"/>
+          </a:solidFill>
+          <a:ln>
+            <a:noFill/>
+          </a:ln>
+          <a:effectLst/>
+        </p:spPr>
+        <p:style>
+          <a:lnRef idx="1">
+            <a:schemeClr val="accent1"/>
+          </a:lnRef>
+          <a:fillRef idx="3">
+            <a:schemeClr val="accent1"/>
+          </a:fillRef>
+          <a:effectRef idx="2">
+            <a:schemeClr val="accent1"/>
+          </a:effectRef>
+          <a:fontRef idx="minor">
+            <a:schemeClr val="lt1"/>
+          </a:fontRef>
+        </p:style>
+        <p:txBody>
+          <a:bodyPr rtlCol="0" anchor="ctr"/>
+          <a:lstStyle/>
+          <a:p>
+            <a:pPr algn="ctr"/>
+          </a:p>
+        </p:txBody>
+      </p:sp>
+      <p:sp>
+        <p:nvSpPr>
+          <p:cNvPr id="20" name="TextBox 19"/>
+          <p:cNvSpPr txBox="1"/>
+          <p:nvPr/>
+        </p:nvSpPr>
+        <p:spPr>
+          <a:xfrm>
+            <a:off x="3072384" y="2185415"/>
+            <a:ext cx="2645663" cy="512064"/>
+          </a:xfrm>
+          <a:prstGeom prst="rect">
+            <a:avLst/>
+          </a:prstGeom>
+          <a:noFill/>
+        </p:spPr>
+        <p:txBody>
+          <a:bodyPr wrap="square" anchor="ctr" lIns="0" rIns="0" tIns="0" bIns="0">
+            <a:spAutoFit/>
+          </a:bodyPr>
+          <a:lstStyle/>
+          <a:p>
+            <a:pPr algn="ctr"/>
+            <a:r>
+              <a:rPr sz="1050" b="1">
+                <a:solidFill>
+                  <a:srgbClr val="FFFFFF"/>
+                </a:solidFill>
+                <a:latin typeface="Segoe UI"/>
+              </a:rPr>
+              <a:t>Microsoft Entra ID</a:t>
+            </a:r>
+          </a:p>
+          <a:p>
+            <a:pPr algn="ctr"/>
+            <a:r>
+              <a:rPr sz="800" b="0">
+                <a:solidFill>
+                  <a:srgbClr val="ECF0FB"/>
+                </a:solidFill>
+                <a:latin typeface="Segoe UI"/>
+              </a:rPr>
+              <a:t>DefaultAzureCredential</a:t>
+            </a:r>
+          </a:p>
+        </p:txBody>
+      </p:sp>
+      <p:sp>
+        <p:nvSpPr>
+          <p:cNvPr id="21" name="Rounded Rectangle 20"/>
+          <p:cNvSpPr/>
+          <p:nvPr/>
+        </p:nvSpPr>
+        <p:spPr>
+          <a:xfrm>
+            <a:off x="5919215" y="2185415"/>
+            <a:ext cx="2791967" cy="512064"/>
+          </a:xfrm>
+          <a:prstGeom prst="roundRect">
+            <a:avLst>
+              <a:gd name="adj" fmla="val 16000"/>
+            </a:avLst>
+          </a:prstGeom>
+          <a:solidFill>
+            <a:srgbClr val="3C465B"/>
+          </a:solidFill>
+          <a:ln>
+            <a:noFill/>
+          </a:ln>
+          <a:effectLst/>
+        </p:spPr>
+        <p:style>
+          <a:lnRef idx="1">
+            <a:schemeClr val="accent1"/>
+          </a:lnRef>
+          <a:fillRef idx="3">
+            <a:schemeClr val="accent1"/>
+          </a:fillRef>
+          <a:effectRef idx="2">
+            <a:schemeClr val="accent1"/>
+          </a:effectRef>
+          <a:fontRef idx="minor">
+            <a:schemeClr val="lt1"/>
+          </a:fontRef>
+        </p:style>
+        <p:txBody>
+          <a:bodyPr rtlCol="0" anchor="ctr"/>
+          <a:lstStyle/>
+          <a:p>
+            <a:pPr algn="ctr"/>
+          </a:p>
+        </p:txBody>
+      </p:sp>
+      <p:sp>
+        <p:nvSpPr>
+          <p:cNvPr id="22" name="TextBox 21"/>
+          <p:cNvSpPr txBox="1"/>
+          <p:nvPr/>
+        </p:nvSpPr>
+        <p:spPr>
+          <a:xfrm>
+            <a:off x="5992367" y="2185415"/>
+            <a:ext cx="2645663" cy="512064"/>
+          </a:xfrm>
+          <a:prstGeom prst="rect">
+            <a:avLst/>
+          </a:prstGeom>
+          <a:noFill/>
+        </p:spPr>
+        <p:txBody>
+          <a:bodyPr wrap="square" anchor="ctr" lIns="0" rIns="0" tIns="0" bIns="0">
+            <a:spAutoFit/>
+          </a:bodyPr>
+          <a:lstStyle/>
+          <a:p>
+            <a:pPr algn="ctr"/>
+            <a:r>
+              <a:rPr sz="1050" b="1">
+                <a:solidFill>
+                  <a:srgbClr val="FFFFFF"/>
+                </a:solidFill>
+                <a:latin typeface="Segoe UI"/>
+              </a:rPr>
+              <a:t>Basic auth gate</a:t>
+            </a:r>
+          </a:p>
+          <a:p>
+            <a:pPr algn="ctr"/>
+            <a:r>
+              <a:rPr sz="800" b="0">
+                <a:solidFill>
+                  <a:srgbClr val="ECF0FB"/>
+                </a:solidFill>
+                <a:latin typeface="Segoe UI"/>
+              </a:rPr>
+              <a:t>front-door protection</a:t>
+            </a:r>
+          </a:p>
+        </p:txBody>
+      </p:sp>
+      <p:sp>
+        <p:nvSpPr>
+          <p:cNvPr id="23" name="Rounded Rectangle 22"/>
+          <p:cNvSpPr/>
+          <p:nvPr/>
+        </p:nvSpPr>
+        <p:spPr>
+          <a:xfrm>
+            <a:off x="8839200" y="2185415"/>
+            <a:ext cx="2791967" cy="512064"/>
+          </a:xfrm>
+          <a:prstGeom prst="roundRect">
+            <a:avLst>
+              <a:gd name="adj" fmla="val 16000"/>
+            </a:avLst>
+          </a:prstGeom>
+          <a:solidFill>
+            <a:srgbClr val="3C465B"/>
+          </a:solidFill>
+          <a:ln>
+            <a:noFill/>
+          </a:ln>
+          <a:effectLst/>
+        </p:spPr>
+        <p:style>
+          <a:lnRef idx="1">
+            <a:schemeClr val="accent1"/>
+          </a:lnRef>
+          <a:fillRef idx="3">
+            <a:schemeClr val="accent1"/>
+          </a:fillRef>
+          <a:effectRef idx="2">
+            <a:schemeClr val="accent1"/>
+          </a:effectRef>
+          <a:fontRef idx="minor">
+            <a:schemeClr val="lt1"/>
+          </a:fontRef>
+        </p:style>
+        <p:txBody>
+          <a:bodyPr rtlCol="0" anchor="ctr"/>
+          <a:lstStyle/>
+          <a:p>
+            <a:pPr algn="ctr"/>
+          </a:p>
+        </p:txBody>
+      </p:sp>
+      <p:sp>
+        <p:nvSpPr>
+          <p:cNvPr id="24" name="TextBox 23"/>
+          <p:cNvSpPr txBox="1"/>
+          <p:nvPr/>
+        </p:nvSpPr>
+        <p:spPr>
+          <a:xfrm>
+            <a:off x="8912352" y="2185415"/>
+            <a:ext cx="2645663" cy="512064"/>
+          </a:xfrm>
+          <a:prstGeom prst="rect">
+            <a:avLst/>
+          </a:prstGeom>
+          <a:noFill/>
+        </p:spPr>
+        <p:txBody>
+          <a:bodyPr wrap="square" anchor="ctr" lIns="0" rIns="0" tIns="0" bIns="0">
+            <a:spAutoFit/>
+          </a:bodyPr>
+          <a:lstStyle/>
+          <a:p>
+            <a:pPr algn="ctr"/>
+            <a:r>
+              <a:rPr sz="1050" b="1">
+                <a:solidFill>
+                  <a:srgbClr val="FFFFFF"/>
+                </a:solidFill>
+                <a:latin typeface="Segoe UI"/>
+              </a:rPr>
+              <a:t>Typed read-only MCP</a:t>
+            </a:r>
+          </a:p>
+          <a:p>
+            <a:pPr algn="ctr"/>
+            <a:r>
+              <a:rPr sz="800" b="0">
+                <a:solidFill>
+                  <a:srgbClr val="ECF0FB"/>
+                </a:solidFill>
+                <a:latin typeface="Segoe UI"/>
+              </a:rPr>
+              <a:t>no write paths</a:t>
+            </a:r>
+          </a:p>
+        </p:txBody>
+      </p:sp>
+      <p:sp>
+        <p:nvSpPr>
+          <p:cNvPr id="25" name="Rounded Rectangle 24"/>
+          <p:cNvSpPr/>
+          <p:nvPr/>
+        </p:nvSpPr>
+        <p:spPr>
+          <a:xfrm>
+            <a:off x="411480" y="2889503"/>
+            <a:ext cx="11384280" cy="786384"/>
+          </a:xfrm>
+          <a:prstGeom prst="roundRect">
+            <a:avLst>
+              <a:gd name="adj" fmla="val 10000"/>
+            </a:avLst>
+          </a:prstGeom>
+          <a:solidFill>
+            <a:srgbClr val="F0ECFB"/>
+          </a:solidFill>
+          <a:ln>
+            <a:noFill/>
+          </a:ln>
+          <a:effectLst/>
+        </p:spPr>
+        <p:style>
+          <a:lnRef idx="1">
+            <a:schemeClr val="accent1"/>
+          </a:lnRef>
+          <a:fillRef idx="3">
+            <a:schemeClr val="accent1"/>
+          </a:fillRef>
+          <a:effectRef idx="2">
+            <a:schemeClr val="accent1"/>
+          </a:effectRef>
+          <a:fontRef idx="minor">
+            <a:schemeClr val="lt1"/>
+          </a:fontRef>
+        </p:style>
+        <p:txBody>
+          <a:bodyPr rtlCol="0" anchor="ctr"/>
+          <a:lstStyle/>
+          <a:p>
+            <a:pPr algn="ctr"/>
+          </a:p>
+        </p:txBody>
+      </p:sp>
+      <p:sp>
+        <p:nvSpPr>
+          <p:cNvPr id="26" name="Rounded Rectangle 25"/>
+          <p:cNvSpPr/>
+          <p:nvPr/>
+        </p:nvSpPr>
+        <p:spPr>
+          <a:xfrm>
+            <a:off x="411480" y="2889503"/>
+            <a:ext cx="2423160" cy="786384"/>
+          </a:xfrm>
+          <a:prstGeom prst="roundRect">
+            <a:avLst>
+              <a:gd name="adj" fmla="val 10000"/>
+            </a:avLst>
+          </a:prstGeom>
+          <a:solidFill>
+            <a:srgbClr val="6B4DE0"/>
+          </a:solidFill>
+          <a:ln>
+            <a:noFill/>
+          </a:ln>
+          <a:effectLst/>
+        </p:spPr>
+        <p:style>
+          <a:lnRef idx="1">
+            <a:schemeClr val="accent1"/>
+          </a:lnRef>
+          <a:fillRef idx="3">
+            <a:schemeClr val="accent1"/>
+          </a:fillRef>
+          <a:effectRef idx="2">
+            <a:schemeClr val="accent1"/>
+          </a:effectRef>
+          <a:fontRef idx="minor">
+            <a:schemeClr val="lt1"/>
+          </a:fontRef>
+        </p:style>
+        <p:txBody>
+          <a:bodyPr rtlCol="0" anchor="ctr"/>
+          <a:lstStyle/>
+          <a:p>
+            <a:pPr algn="ctr"/>
+          </a:p>
+        </p:txBody>
+      </p:sp>
+      <p:sp>
+        <p:nvSpPr>
+          <p:cNvPr id="27" name="TextBox 26"/>
+          <p:cNvSpPr txBox="1"/>
+          <p:nvPr/>
+        </p:nvSpPr>
+        <p:spPr>
+          <a:xfrm>
+            <a:off x="557784" y="2889503"/>
+            <a:ext cx="2148840" cy="786384"/>
+          </a:xfrm>
+          <a:prstGeom prst="rect">
+            <a:avLst/>
+          </a:prstGeom>
+          <a:noFill/>
+        </p:spPr>
+        <p:txBody>
+          <a:bodyPr wrap="square" anchor="ctr" lIns="0" rIns="0" tIns="0" bIns="0">
+            <a:spAutoFit/>
+          </a:bodyPr>
+          <a:lstStyle/>
+          <a:p>
+            <a:pPr algn="l"/>
+            <a:r>
+              <a:rPr sz="1150" b="1">
+                <a:solidFill>
+                  <a:srgbClr val="FFFFFF"/>
+                </a:solidFill>
+                <a:latin typeface="Segoe UI"/>
+              </a:rPr>
+              <a:t>ORCHESTRATION</a:t>
+            </a:r>
+          </a:p>
+          <a:p>
+            <a:pPr algn="l"/>
+            <a:r>
+              <a:rPr sz="800" b="0">
+                <a:solidFill>
+                  <a:srgbClr val="ECF0FB"/>
+                </a:solidFill>
+                <a:latin typeface="Segoe UI"/>
+              </a:rPr>
+              <a:t>intent routing + Magentic + response</a:t>
+            </a:r>
+          </a:p>
+        </p:txBody>
+      </p:sp>
+      <p:sp>
+        <p:nvSpPr>
+          <p:cNvPr id="28" name="Rounded Rectangle 27"/>
+          <p:cNvSpPr/>
+          <p:nvPr/>
+        </p:nvSpPr>
+        <p:spPr>
+          <a:xfrm>
+            <a:off x="2999232" y="2990087"/>
+            <a:ext cx="1623974" cy="585216"/>
+          </a:xfrm>
+          <a:prstGeom prst="roundRect">
+            <a:avLst>
+              <a:gd name="adj" fmla="val 16000"/>
+            </a:avLst>
+          </a:prstGeom>
+          <a:solidFill>
+            <a:srgbClr val="6B4DE0"/>
+          </a:solidFill>
+          <a:ln>
+            <a:noFill/>
+          </a:ln>
+          <a:effectLst/>
+        </p:spPr>
+        <p:style>
+          <a:lnRef idx="1">
+            <a:schemeClr val="accent1"/>
+          </a:lnRef>
+          <a:fillRef idx="3">
+            <a:schemeClr val="accent1"/>
+          </a:fillRef>
+          <a:effectRef idx="2">
+            <a:schemeClr val="accent1"/>
+          </a:effectRef>
+          <a:fontRef idx="minor">
+            <a:schemeClr val="lt1"/>
+          </a:fontRef>
+        </p:style>
+        <p:txBody>
+          <a:bodyPr rtlCol="0" anchor="ctr"/>
+          <a:lstStyle/>
+          <a:p>
+            <a:pPr algn="ctr"/>
+          </a:p>
+        </p:txBody>
+      </p:sp>
+      <p:sp>
+        <p:nvSpPr>
+          <p:cNvPr id="29" name="TextBox 28"/>
+          <p:cNvSpPr txBox="1"/>
+          <p:nvPr/>
+        </p:nvSpPr>
+        <p:spPr>
+          <a:xfrm>
+            <a:off x="3072384" y="2990087"/>
+            <a:ext cx="1477670" cy="585216"/>
+          </a:xfrm>
+          <a:prstGeom prst="rect">
+            <a:avLst/>
+          </a:prstGeom>
+          <a:noFill/>
+        </p:spPr>
+        <p:txBody>
+          <a:bodyPr wrap="square" anchor="ctr" lIns="0" rIns="0" tIns="0" bIns="0">
+            <a:spAutoFit/>
+          </a:bodyPr>
+          <a:lstStyle/>
+          <a:p>
+            <a:pPr algn="ctr"/>
+            <a:r>
+              <a:rPr sz="1050" b="1">
+                <a:solidFill>
+                  <a:srgbClr val="FFFFFF"/>
+                </a:solidFill>
+                <a:latin typeface="Segoe UI"/>
+              </a:rPr>
+              <a:t>Agent Framework</a:t>
+            </a:r>
+          </a:p>
+          <a:p>
+            <a:pPr algn="ctr"/>
+            <a:r>
+              <a:rPr sz="800" b="0">
+                <a:solidFill>
+                  <a:srgbClr val="ECF0FB"/>
+                </a:solidFill>
+                <a:latin typeface="Segoe UI"/>
+              </a:rPr>
+              <a:t>Magentic multi-agent</a:t>
+            </a:r>
+          </a:p>
+        </p:txBody>
+      </p:sp>
+      <p:sp>
+        <p:nvSpPr>
+          <p:cNvPr id="30" name="Rounded Rectangle 29"/>
+          <p:cNvSpPr/>
+          <p:nvPr/>
+        </p:nvSpPr>
+        <p:spPr>
+          <a:xfrm>
+            <a:off x="4751222" y="2990087"/>
+            <a:ext cx="1623974" cy="585216"/>
+          </a:xfrm>
+          <a:prstGeom prst="roundRect">
+            <a:avLst>
+              <a:gd name="adj" fmla="val 16000"/>
+            </a:avLst>
+          </a:prstGeom>
+          <a:solidFill>
+            <a:srgbClr val="6B4DE0"/>
+          </a:solidFill>
+          <a:ln>
+            <a:noFill/>
+          </a:ln>
+          <a:effectLst/>
+        </p:spPr>
+        <p:style>
+          <a:lnRef idx="1">
+            <a:schemeClr val="accent1"/>
+          </a:lnRef>
+          <a:fillRef idx="3">
+            <a:schemeClr val="accent1"/>
+          </a:fillRef>
+          <a:effectRef idx="2">
+            <a:schemeClr val="accent1"/>
+          </a:effectRef>
+          <a:fontRef idx="minor">
+            <a:schemeClr val="lt1"/>
+          </a:fontRef>
+        </p:style>
+        <p:txBody>
+          <a:bodyPr rtlCol="0" anchor="ctr"/>
+          <a:lstStyle/>
+          <a:p>
+            <a:pPr algn="ctr"/>
+          </a:p>
+        </p:txBody>
+      </p:sp>
+      <p:sp>
+        <p:nvSpPr>
+          <p:cNvPr id="31" name="TextBox 30"/>
+          <p:cNvSpPr txBox="1"/>
+          <p:nvPr/>
+        </p:nvSpPr>
+        <p:spPr>
+          <a:xfrm>
+            <a:off x="4824374" y="2990087"/>
+            <a:ext cx="1477670" cy="585216"/>
+          </a:xfrm>
+          <a:prstGeom prst="rect">
+            <a:avLst/>
+          </a:prstGeom>
+          <a:noFill/>
+        </p:spPr>
+        <p:txBody>
+          <a:bodyPr wrap="square" anchor="ctr" lIns="0" rIns="0" tIns="0" bIns="0">
+            <a:spAutoFit/>
+          </a:bodyPr>
+          <a:lstStyle/>
+          <a:p>
+            <a:pPr algn="ctr"/>
+            <a:r>
+              <a:rPr sz="1050" b="1">
+                <a:solidFill>
+                  <a:srgbClr val="FFFFFF"/>
+                </a:solidFill>
+                <a:latin typeface="Segoe UI"/>
+              </a:rPr>
+              <a:t>Intent Detector</a:t>
+            </a:r>
+          </a:p>
+          <a:p>
+            <a:pPr algn="ctr"/>
+            <a:r>
+              <a:rPr sz="800" b="0">
+                <a:solidFill>
+                  <a:srgbClr val="ECF0FB"/>
+                </a:solidFill>
+                <a:latin typeface="Segoe UI"/>
+              </a:rPr>
+              <a:t>chat vs business · shared memory</a:t>
+            </a:r>
+          </a:p>
+        </p:txBody>
+      </p:sp>
+      <p:sp>
+        <p:nvSpPr>
+          <p:cNvPr id="32" name="Rounded Rectangle 31"/>
+          <p:cNvSpPr/>
+          <p:nvPr/>
+        </p:nvSpPr>
+        <p:spPr>
+          <a:xfrm>
+            <a:off x="6503212" y="2990087"/>
+            <a:ext cx="1623974" cy="585216"/>
+          </a:xfrm>
+          <a:prstGeom prst="roundRect">
+            <a:avLst>
+              <a:gd name="adj" fmla="val 16000"/>
+            </a:avLst>
+          </a:prstGeom>
+          <a:solidFill>
+            <a:srgbClr val="6B4DE0"/>
+          </a:solidFill>
+          <a:ln>
+            <a:noFill/>
+          </a:ln>
+          <a:effectLst/>
+        </p:spPr>
+        <p:style>
+          <a:lnRef idx="1">
+            <a:schemeClr val="accent1"/>
+          </a:lnRef>
+          <a:fillRef idx="3">
+            <a:schemeClr val="accent1"/>
+          </a:fillRef>
+          <a:effectRef idx="2">
+            <a:schemeClr val="accent1"/>
+          </a:effectRef>
+          <a:fontRef idx="minor">
+            <a:schemeClr val="lt1"/>
+          </a:fontRef>
+        </p:style>
+        <p:txBody>
+          <a:bodyPr rtlCol="0" anchor="ctr"/>
+          <a:lstStyle/>
+          <a:p>
+            <a:pPr algn="ctr"/>
+          </a:p>
+        </p:txBody>
+      </p:sp>
+      <p:sp>
+        <p:nvSpPr>
+          <p:cNvPr id="33" name="TextBox 32"/>
+          <p:cNvSpPr txBox="1"/>
+          <p:nvPr/>
+        </p:nvSpPr>
+        <p:spPr>
+          <a:xfrm>
+            <a:off x="6576364" y="2990087"/>
+            <a:ext cx="1477670" cy="585216"/>
+          </a:xfrm>
+          <a:prstGeom prst="rect">
+            <a:avLst/>
+          </a:prstGeom>
+          <a:noFill/>
+        </p:spPr>
+        <p:txBody>
+          <a:bodyPr wrap="square" anchor="ctr" lIns="0" rIns="0" tIns="0" bIns="0">
+            <a:spAutoFit/>
+          </a:bodyPr>
+          <a:lstStyle/>
+          <a:p>
+            <a:pPr algn="ctr"/>
+            <a:r>
+              <a:rPr sz="1050" b="1">
+                <a:solidFill>
+                  <a:srgbClr val="FFFFFF"/>
+                </a:solidFill>
+                <a:latin typeface="Segoe UI"/>
+              </a:rPr>
+              <a:t>Manager · gpt-4.1-mini</a:t>
+            </a:r>
+          </a:p>
+          <a:p>
+            <a:pPr algn="ctr"/>
+            <a:r>
+              <a:rPr sz="800" b="0">
+                <a:solidFill>
+                  <a:srgbClr val="ECF0FB"/>
+                </a:solidFill>
+                <a:latin typeface="Segoe UI"/>
+              </a:rPr>
+              <a:t>plans the specialists</a:t>
+            </a:r>
+          </a:p>
+        </p:txBody>
+      </p:sp>
+      <p:sp>
+        <p:nvSpPr>
+          <p:cNvPr id="34" name="Rounded Rectangle 33"/>
+          <p:cNvSpPr/>
+          <p:nvPr/>
+        </p:nvSpPr>
+        <p:spPr>
+          <a:xfrm>
+            <a:off x="8255203" y="2990087"/>
+            <a:ext cx="1623974" cy="585216"/>
+          </a:xfrm>
+          <a:prstGeom prst="roundRect">
+            <a:avLst>
+              <a:gd name="adj" fmla="val 16000"/>
+            </a:avLst>
+          </a:prstGeom>
+          <a:solidFill>
+            <a:srgbClr val="6B4DE0"/>
+          </a:solidFill>
+          <a:ln>
+            <a:noFill/>
+          </a:ln>
+          <a:effectLst/>
+        </p:spPr>
+        <p:style>
+          <a:lnRef idx="1">
+            <a:schemeClr val="accent1"/>
+          </a:lnRef>
+          <a:fillRef idx="3">
+            <a:schemeClr val="accent1"/>
+          </a:fillRef>
+          <a:effectRef idx="2">
+            <a:schemeClr val="accent1"/>
+          </a:effectRef>
+          <a:fontRef idx="minor">
+            <a:schemeClr val="lt1"/>
+          </a:fontRef>
+        </p:style>
+        <p:txBody>
+          <a:bodyPr rtlCol="0" anchor="ctr"/>
+          <a:lstStyle/>
+          <a:p>
+            <a:pPr algn="ctr"/>
+          </a:p>
+        </p:txBody>
+      </p:sp>
+      <p:sp>
+        <p:nvSpPr>
+          <p:cNvPr id="35" name="TextBox 34"/>
+          <p:cNvSpPr txBox="1"/>
+          <p:nvPr/>
+        </p:nvSpPr>
+        <p:spPr>
+          <a:xfrm>
+            <a:off x="8328355" y="2990087"/>
+            <a:ext cx="1477670" cy="585216"/>
+          </a:xfrm>
+          <a:prstGeom prst="rect">
+            <a:avLst/>
+          </a:prstGeom>
+          <a:noFill/>
+        </p:spPr>
+        <p:txBody>
+          <a:bodyPr wrap="square" anchor="ctr" lIns="0" rIns="0" tIns="0" bIns="0">
+            <a:spAutoFit/>
+          </a:bodyPr>
+          <a:lstStyle/>
+          <a:p>
+            <a:pPr algn="ctr"/>
+            <a:r>
+              <a:rPr sz="1050" b="1">
+                <a:solidFill>
+                  <a:srgbClr val="FFFFFF"/>
+                </a:solidFill>
+                <a:latin typeface="Segoe UI"/>
+              </a:rPr>
+              <a:t>Sales·Inv·Mktg·Action</a:t>
+            </a:r>
+          </a:p>
+          <a:p>
+            <a:pPr algn="ctr"/>
+            <a:r>
+              <a:rPr sz="800" b="0">
+                <a:solidFill>
+                  <a:srgbClr val="ECF0FB"/>
+                </a:solidFill>
+                <a:latin typeface="Segoe UI"/>
+              </a:rPr>
+              <a:t>Foundry hosted agents</a:t>
+            </a:r>
+          </a:p>
+        </p:txBody>
+      </p:sp>
+      <p:sp>
+        <p:nvSpPr>
+          <p:cNvPr id="36" name="Rounded Rectangle 35"/>
+          <p:cNvSpPr/>
+          <p:nvPr/>
+        </p:nvSpPr>
+        <p:spPr>
+          <a:xfrm>
+            <a:off x="10007193" y="2990087"/>
+            <a:ext cx="1623974" cy="585216"/>
+          </a:xfrm>
+          <a:prstGeom prst="roundRect">
+            <a:avLst>
+              <a:gd name="adj" fmla="val 16000"/>
+            </a:avLst>
+          </a:prstGeom>
+          <a:solidFill>
+            <a:srgbClr val="6B4DE0"/>
+          </a:solidFill>
+          <a:ln>
+            <a:noFill/>
+          </a:ln>
+          <a:effectLst/>
+        </p:spPr>
+        <p:style>
+          <a:lnRef idx="1">
+            <a:schemeClr val="accent1"/>
+          </a:lnRef>
+          <a:fillRef idx="3">
+            <a:schemeClr val="accent1"/>
+          </a:fillRef>
+          <a:effectRef idx="2">
+            <a:schemeClr val="accent1"/>
+          </a:effectRef>
+          <a:fontRef idx="minor">
+            <a:schemeClr val="lt1"/>
+          </a:fontRef>
+        </p:style>
+        <p:txBody>
+          <a:bodyPr rtlCol="0" anchor="ctr"/>
+          <a:lstStyle/>
+          <a:p>
+            <a:pPr algn="ctr"/>
+          </a:p>
+        </p:txBody>
+      </p:sp>
+      <p:sp>
+        <p:nvSpPr>
+          <p:cNvPr id="37" name="TextBox 36"/>
+          <p:cNvSpPr txBox="1"/>
+          <p:nvPr/>
+        </p:nvSpPr>
+        <p:spPr>
+          <a:xfrm>
+            <a:off x="10080345" y="2990087"/>
+            <a:ext cx="1477670" cy="585216"/>
+          </a:xfrm>
+          <a:prstGeom prst="rect">
+            <a:avLst/>
+          </a:prstGeom>
+          <a:noFill/>
+        </p:spPr>
+        <p:txBody>
+          <a:bodyPr wrap="square" anchor="ctr" lIns="0" rIns="0" tIns="0" bIns="0">
+            <a:spAutoFit/>
+          </a:bodyPr>
+          <a:lstStyle/>
+          <a:p>
+            <a:pPr algn="ctr"/>
+            <a:r>
+              <a:rPr sz="1050" b="1">
+                <a:solidFill>
+                  <a:srgbClr val="FFFFFF"/>
+                </a:solidFill>
+                <a:latin typeface="Segoe UI"/>
+              </a:rPr>
+              <a:t>Response Generator</a:t>
+            </a:r>
+          </a:p>
+          <a:p>
+            <a:pPr algn="ctr"/>
+            <a:r>
+              <a:rPr sz="800" b="0">
+                <a:solidFill>
+                  <a:srgbClr val="ECF0FB"/>
+                </a:solidFill>
+                <a:latin typeface="Segoe UI"/>
+              </a:rPr>
+              <a:t>final reply · keeps charts</a:t>
+            </a:r>
+          </a:p>
+        </p:txBody>
+      </p:sp>
+      <p:sp>
+        <p:nvSpPr>
+          <p:cNvPr id="38" name="Rounded Rectangle 37"/>
+          <p:cNvSpPr/>
+          <p:nvPr/>
+        </p:nvSpPr>
+        <p:spPr>
+          <a:xfrm>
+            <a:off x="411480" y="3767327"/>
+            <a:ext cx="11384280" cy="713232"/>
+          </a:xfrm>
+          <a:prstGeom prst="roundRect">
+            <a:avLst>
+              <a:gd name="adj" fmla="val 10000"/>
+            </a:avLst>
+          </a:prstGeom>
+          <a:solidFill>
+            <a:srgbClr val="E6F5F3"/>
+          </a:solidFill>
+          <a:ln>
+            <a:noFill/>
+          </a:ln>
+          <a:effectLst/>
+        </p:spPr>
+        <p:style>
+          <a:lnRef idx="1">
+            <a:schemeClr val="accent1"/>
+          </a:lnRef>
+          <a:fillRef idx="3">
+            <a:schemeClr val="accent1"/>
+          </a:fillRef>
+          <a:effectRef idx="2">
+            <a:schemeClr val="accent1"/>
+          </a:effectRef>
+          <a:fontRef idx="minor">
+            <a:schemeClr val="lt1"/>
+          </a:fontRef>
+        </p:style>
+        <p:txBody>
+          <a:bodyPr rtlCol="0" anchor="ctr"/>
+          <a:lstStyle/>
+          <a:p>
+            <a:pPr algn="ctr"/>
+          </a:p>
+        </p:txBody>
+      </p:sp>
+      <p:sp>
+        <p:nvSpPr>
+          <p:cNvPr id="39" name="Rounded Rectangle 38"/>
+          <p:cNvSpPr/>
+          <p:nvPr/>
+        </p:nvSpPr>
+        <p:spPr>
+          <a:xfrm>
+            <a:off x="411480" y="3767327"/>
+            <a:ext cx="2423160" cy="713232"/>
+          </a:xfrm>
+          <a:prstGeom prst="roundRect">
+            <a:avLst>
+              <a:gd name="adj" fmla="val 10000"/>
+            </a:avLst>
+          </a:prstGeom>
+          <a:solidFill>
+            <a:srgbClr val="129A8F"/>
+          </a:solidFill>
+          <a:ln>
+            <a:noFill/>
+          </a:ln>
+          <a:effectLst/>
+        </p:spPr>
+        <p:style>
+          <a:lnRef idx="1">
+            <a:schemeClr val="accent1"/>
+          </a:lnRef>
+          <a:fillRef idx="3">
+            <a:schemeClr val="accent1"/>
+          </a:fillRef>
+          <a:effectRef idx="2">
+            <a:schemeClr val="accent1"/>
+          </a:effectRef>
+          <a:fontRef idx="minor">
+            <a:schemeClr val="lt1"/>
+          </a:fontRef>
+        </p:style>
+        <p:txBody>
+          <a:bodyPr rtlCol="0" anchor="ctr"/>
+          <a:lstStyle/>
+          <a:p>
+            <a:pPr algn="ctr"/>
+          </a:p>
+        </p:txBody>
+      </p:sp>
+      <p:sp>
+        <p:nvSpPr>
+          <p:cNvPr id="40" name="TextBox 39"/>
+          <p:cNvSpPr txBox="1"/>
+          <p:nvPr/>
+        </p:nvSpPr>
+        <p:spPr>
+          <a:xfrm>
+            <a:off x="557784" y="3767327"/>
+            <a:ext cx="2148840" cy="713232"/>
+          </a:xfrm>
+          <a:prstGeom prst="rect">
+            <a:avLst/>
+          </a:prstGeom>
+          <a:noFill/>
+        </p:spPr>
+        <p:txBody>
+          <a:bodyPr wrap="square" anchor="ctr" lIns="0" rIns="0" tIns="0" bIns="0">
+            <a:spAutoFit/>
+          </a:bodyPr>
+          <a:lstStyle/>
+          <a:p>
+            <a:pPr algn="l"/>
+            <a:r>
+              <a:rPr sz="1150" b="1">
+                <a:solidFill>
+                  <a:srgbClr val="FFFFFF"/>
+                </a:solidFill>
+                <a:latin typeface="Segoe UI"/>
+              </a:rPr>
+              <a:t>TOOLS &amp; MCP</a:t>
+            </a:r>
+          </a:p>
+          <a:p>
+            <a:pPr algn="l"/>
+            <a:r>
+              <a:rPr sz="800" b="0">
+                <a:solidFill>
+                  <a:srgbClr val="ECF0FB"/>
+                </a:solidFill>
+                <a:latin typeface="Segoe UI"/>
+              </a:rPr>
+              <a:t>Cosmos-backed tools</a:t>
+            </a:r>
+          </a:p>
+        </p:txBody>
+      </p:sp>
+      <p:sp>
+        <p:nvSpPr>
+          <p:cNvPr id="41" name="Rounded Rectangle 40"/>
+          <p:cNvSpPr/>
+          <p:nvPr/>
+        </p:nvSpPr>
+        <p:spPr>
+          <a:xfrm>
+            <a:off x="2999232" y="3867911"/>
+            <a:ext cx="2791967" cy="512064"/>
+          </a:xfrm>
+          <a:prstGeom prst="roundRect">
+            <a:avLst>
+              <a:gd name="adj" fmla="val 16000"/>
+            </a:avLst>
+          </a:prstGeom>
+          <a:solidFill>
+            <a:srgbClr val="129A8F"/>
+          </a:solidFill>
+          <a:ln>
+            <a:noFill/>
+          </a:ln>
+          <a:effectLst/>
+        </p:spPr>
+        <p:style>
+          <a:lnRef idx="1">
+            <a:schemeClr val="accent1"/>
+          </a:lnRef>
+          <a:fillRef idx="3">
+            <a:schemeClr val="accent1"/>
+          </a:fillRef>
+          <a:effectRef idx="2">
+            <a:schemeClr val="accent1"/>
+          </a:effectRef>
+          <a:fontRef idx="minor">
+            <a:schemeClr val="lt1"/>
+          </a:fontRef>
+        </p:style>
+        <p:txBody>
+          <a:bodyPr rtlCol="0" anchor="ctr"/>
+          <a:lstStyle/>
+          <a:p>
+            <a:pPr algn="ctr"/>
+          </a:p>
+        </p:txBody>
+      </p:sp>
+      <p:sp>
+        <p:nvSpPr>
+          <p:cNvPr id="42" name="TextBox 41"/>
+          <p:cNvSpPr txBox="1"/>
+          <p:nvPr/>
+        </p:nvSpPr>
+        <p:spPr>
+          <a:xfrm>
+            <a:off x="3072384" y="3867911"/>
+            <a:ext cx="2645663" cy="512064"/>
+          </a:xfrm>
+          <a:prstGeom prst="rect">
+            <a:avLst/>
+          </a:prstGeom>
+          <a:noFill/>
+        </p:spPr>
+        <p:txBody>
+          <a:bodyPr wrap="square" anchor="ctr" lIns="0" rIns="0" tIns="0" bIns="0">
+            <a:spAutoFit/>
+          </a:bodyPr>
+          <a:lstStyle/>
+          <a:p>
+            <a:pPr algn="ctr"/>
+            <a:r>
+              <a:rPr sz="1050" b="1">
+                <a:solidFill>
+                  <a:srgbClr val="FFFFFF"/>
+                </a:solidFill>
+                <a:latin typeface="Segoe UI"/>
+              </a:rPr>
+              <a:t>Products MCP</a:t>
+            </a:r>
+          </a:p>
+          <a:p>
+            <a:pPr algn="ctr"/>
+            <a:r>
+              <a:rPr sz="800" b="0">
+                <a:solidFill>
+                  <a:srgbClr val="ECF0FB"/>
+                </a:solidFill>
+                <a:latin typeface="Segoe UI"/>
+              </a:rPr>
+              <a:t>sales &amp; inventory</a:t>
+            </a:r>
+          </a:p>
+        </p:txBody>
+      </p:sp>
+      <p:sp>
+        <p:nvSpPr>
+          <p:cNvPr id="43" name="Rounded Rectangle 42"/>
+          <p:cNvSpPr/>
+          <p:nvPr/>
+        </p:nvSpPr>
+        <p:spPr>
+          <a:xfrm>
+            <a:off x="5919215" y="3867911"/>
+            <a:ext cx="2791967" cy="512064"/>
+          </a:xfrm>
+          <a:prstGeom prst="roundRect">
+            <a:avLst>
+              <a:gd name="adj" fmla="val 16000"/>
+            </a:avLst>
+          </a:prstGeom>
+          <a:solidFill>
+            <a:srgbClr val="129A8F"/>
+          </a:solidFill>
+          <a:ln>
+            <a:noFill/>
+          </a:ln>
+          <a:effectLst/>
+        </p:spPr>
+        <p:style>
+          <a:lnRef idx="1">
+            <a:schemeClr val="accent1"/>
+          </a:lnRef>
+          <a:fillRef idx="3">
+            <a:schemeClr val="accent1"/>
+          </a:fillRef>
+          <a:effectRef idx="2">
+            <a:schemeClr val="accent1"/>
+          </a:effectRef>
+          <a:fontRef idx="minor">
+            <a:schemeClr val="lt1"/>
+          </a:fontRef>
+        </p:style>
+        <p:txBody>
+          <a:bodyPr rtlCol="0" anchor="ctr"/>
+          <a:lstStyle/>
+          <a:p>
+            <a:pPr algn="ctr"/>
+          </a:p>
+        </p:txBody>
+      </p:sp>
+      <p:sp>
+        <p:nvSpPr>
+          <p:cNvPr id="44" name="TextBox 43"/>
+          <p:cNvSpPr txBox="1"/>
+          <p:nvPr/>
+        </p:nvSpPr>
+        <p:spPr>
+          <a:xfrm>
+            <a:off x="5992367" y="3867911"/>
+            <a:ext cx="2645663" cy="512064"/>
+          </a:xfrm>
+          <a:prstGeom prst="rect">
+            <a:avLst/>
+          </a:prstGeom>
+          <a:noFill/>
+        </p:spPr>
+        <p:txBody>
+          <a:bodyPr wrap="square" anchor="ctr" lIns="0" rIns="0" tIns="0" bIns="0">
+            <a:spAutoFit/>
+          </a:bodyPr>
+          <a:lstStyle/>
+          <a:p>
+            <a:pPr algn="ctr"/>
+            <a:r>
+              <a:rPr sz="1050" b="1">
+                <a:solidFill>
+                  <a:srgbClr val="FFFFFF"/>
+                </a:solidFill>
+                <a:latin typeface="Segoe UI"/>
+              </a:rPr>
+              <a:t>Marketing MCP</a:t>
+            </a:r>
+          </a:p>
+          <a:p>
+            <a:pPr algn="ctr"/>
+            <a:r>
+              <a:rPr sz="800" b="0">
+                <a:solidFill>
+                  <a:srgbClr val="ECF0FB"/>
+                </a:solidFill>
+                <a:latin typeface="Segoe UI"/>
+              </a:rPr>
+              <a:t>campaigns &amp; ROI</a:t>
+            </a:r>
+          </a:p>
+        </p:txBody>
+      </p:sp>
+      <p:sp>
+        <p:nvSpPr>
+          <p:cNvPr id="45" name="Rounded Rectangle 44"/>
+          <p:cNvSpPr/>
+          <p:nvPr/>
+        </p:nvSpPr>
+        <p:spPr>
+          <a:xfrm>
+            <a:off x="8839200" y="3867911"/>
+            <a:ext cx="2791967" cy="512064"/>
+          </a:xfrm>
+          <a:prstGeom prst="roundRect">
+            <a:avLst>
+              <a:gd name="adj" fmla="val 16000"/>
+            </a:avLst>
+          </a:prstGeom>
+          <a:solidFill>
+            <a:srgbClr val="129A8F"/>
+          </a:solidFill>
+          <a:ln>
+            <a:noFill/>
+          </a:ln>
+          <a:effectLst/>
+        </p:spPr>
+        <p:style>
+          <a:lnRef idx="1">
+            <a:schemeClr val="accent1"/>
+          </a:lnRef>
+          <a:fillRef idx="3">
+            <a:schemeClr val="accent1"/>
+          </a:fillRef>
+          <a:effectRef idx="2">
+            <a:schemeClr val="accent1"/>
+          </a:effectRef>
+          <a:fontRef idx="minor">
+            <a:schemeClr val="lt1"/>
+          </a:fontRef>
+        </p:style>
+        <p:txBody>
+          <a:bodyPr rtlCol="0" anchor="ctr"/>
+          <a:lstStyle/>
+          <a:p>
+            <a:pPr algn="ctr"/>
+          </a:p>
+        </p:txBody>
+      </p:sp>
+      <p:sp>
+        <p:nvSpPr>
+          <p:cNvPr id="46" name="TextBox 45"/>
+          <p:cNvSpPr txBox="1"/>
+          <p:nvPr/>
+        </p:nvSpPr>
+        <p:spPr>
+          <a:xfrm>
+            <a:off x="8912352" y="3867911"/>
+            <a:ext cx="2645663" cy="512064"/>
+          </a:xfrm>
+          <a:prstGeom prst="rect">
+            <a:avLst/>
+          </a:prstGeom>
+          <a:noFill/>
+        </p:spPr>
+        <p:txBody>
+          <a:bodyPr wrap="square" anchor="ctr" lIns="0" rIns="0" tIns="0" bIns="0">
+            <a:spAutoFit/>
+          </a:bodyPr>
+          <a:lstStyle/>
+          <a:p>
+            <a:pPr algn="ctr"/>
+            <a:r>
+              <a:rPr sz="1050" b="1">
+                <a:solidFill>
+                  <a:srgbClr val="FFFFFF"/>
+                </a:solidFill>
+                <a:latin typeface="Segoe UI"/>
+              </a:rPr>
+              <a:t>Code sandbox</a:t>
+            </a:r>
+          </a:p>
+          <a:p>
+            <a:pPr algn="ctr"/>
+            <a:r>
+              <a:rPr sz="800" b="0">
+                <a:solidFill>
+                  <a:srgbClr val="ECF0FB"/>
+                </a:solidFill>
+                <a:latin typeface="Segoe UI"/>
+              </a:rPr>
+              <a:t>Code Interpreter</a:t>
+            </a:r>
+          </a:p>
+        </p:txBody>
+      </p:sp>
+      <p:sp>
+        <p:nvSpPr>
+          <p:cNvPr id="47" name="Rounded Rectangle 46"/>
+          <p:cNvSpPr/>
+          <p:nvPr/>
+        </p:nvSpPr>
+        <p:spPr>
+          <a:xfrm>
+            <a:off x="411480" y="4571999"/>
+            <a:ext cx="11384280" cy="713232"/>
+          </a:xfrm>
+          <a:prstGeom prst="roundRect">
+            <a:avLst>
+              <a:gd name="adj" fmla="val 10000"/>
+            </a:avLst>
+          </a:prstGeom>
+          <a:solidFill>
+            <a:srgbClr val="E5F5EB"/>
+          </a:solidFill>
+          <a:ln>
+            <a:noFill/>
+          </a:ln>
+          <a:effectLst/>
+        </p:spPr>
+        <p:style>
+          <a:lnRef idx="1">
+            <a:schemeClr val="accent1"/>
+          </a:lnRef>
+          <a:fillRef idx="3">
+            <a:schemeClr val="accent1"/>
+          </a:fillRef>
+          <a:effectRef idx="2">
+            <a:schemeClr val="accent1"/>
+          </a:effectRef>
+          <a:fontRef idx="minor">
+            <a:schemeClr val="lt1"/>
+          </a:fontRef>
+        </p:style>
+        <p:txBody>
+          <a:bodyPr rtlCol="0" anchor="ctr"/>
+          <a:lstStyle/>
+          <a:p>
+            <a:pPr algn="ctr"/>
+          </a:p>
+        </p:txBody>
+      </p:sp>
+      <p:sp>
+        <p:nvSpPr>
+          <p:cNvPr id="48" name="Rounded Rectangle 47"/>
+          <p:cNvSpPr/>
+          <p:nvPr/>
+        </p:nvSpPr>
+        <p:spPr>
+          <a:xfrm>
+            <a:off x="411480" y="4571999"/>
+            <a:ext cx="2423160" cy="713232"/>
+          </a:xfrm>
+          <a:prstGeom prst="roundRect">
+            <a:avLst>
+              <a:gd name="adj" fmla="val 10000"/>
+            </a:avLst>
+          </a:prstGeom>
+          <a:solidFill>
+            <a:srgbClr val="1E9E5A"/>
+          </a:solidFill>
+          <a:ln>
+            <a:noFill/>
+          </a:ln>
+          <a:effectLst/>
+        </p:spPr>
+        <p:style>
+          <a:lnRef idx="1">
+            <a:schemeClr val="accent1"/>
+          </a:lnRef>
+          <a:fillRef idx="3">
+            <a:schemeClr val="accent1"/>
+          </a:fillRef>
+          <a:effectRef idx="2">
+            <a:schemeClr val="accent1"/>
+          </a:effectRef>
+          <a:fontRef idx="minor">
+            <a:schemeClr val="lt1"/>
+          </a:fontRef>
+        </p:style>
+        <p:txBody>
+          <a:bodyPr rtlCol="0" anchor="ctr"/>
+          <a:lstStyle/>
+          <a:p>
+            <a:pPr algn="ctr"/>
+          </a:p>
+        </p:txBody>
+      </p:sp>
+      <p:sp>
+        <p:nvSpPr>
+          <p:cNvPr id="49" name="TextBox 48"/>
+          <p:cNvSpPr txBox="1"/>
+          <p:nvPr/>
+        </p:nvSpPr>
+        <p:spPr>
+          <a:xfrm>
+            <a:off x="557784" y="4571999"/>
+            <a:ext cx="2148840" cy="713232"/>
+          </a:xfrm>
+          <a:prstGeom prst="rect">
+            <a:avLst/>
+          </a:prstGeom>
+          <a:noFill/>
+        </p:spPr>
+        <p:txBody>
+          <a:bodyPr wrap="square" anchor="ctr" lIns="0" rIns="0" tIns="0" bIns="0">
+            <a:spAutoFit/>
+          </a:bodyPr>
+          <a:lstStyle/>
+          <a:p>
+            <a:pPr algn="l"/>
+            <a:r>
+              <a:rPr sz="1150" b="1">
+                <a:solidFill>
+                  <a:srgbClr val="FFFFFF"/>
+                </a:solidFill>
+                <a:latin typeface="Segoe UI"/>
+              </a:rPr>
+              <a:t>KNOWLEDGE &amp; DATA</a:t>
+            </a:r>
+          </a:p>
+          <a:p>
+            <a:pPr algn="l"/>
+            <a:r>
+              <a:rPr sz="800" b="0">
+                <a:solidFill>
+                  <a:srgbClr val="ECF0FB"/>
+                </a:solidFill>
+                <a:latin typeface="Segoe UI"/>
+              </a:rPr>
+              <a:t>ground every number</a:t>
+            </a:r>
+          </a:p>
+        </p:txBody>
+      </p:sp>
+      <p:sp>
+        <p:nvSpPr>
+          <p:cNvPr id="50" name="Rounded Rectangle 49"/>
+          <p:cNvSpPr/>
+          <p:nvPr/>
+        </p:nvSpPr>
+        <p:spPr>
+          <a:xfrm>
+            <a:off x="2999232" y="4672583"/>
+            <a:ext cx="2791967" cy="512064"/>
+          </a:xfrm>
+          <a:prstGeom prst="roundRect">
+            <a:avLst>
+              <a:gd name="adj" fmla="val 16000"/>
+            </a:avLst>
+          </a:prstGeom>
+          <a:solidFill>
+            <a:srgbClr val="1E9E5A"/>
+          </a:solidFill>
+          <a:ln>
+            <a:noFill/>
+          </a:ln>
+          <a:effectLst/>
+        </p:spPr>
+        <p:style>
+          <a:lnRef idx="1">
+            <a:schemeClr val="accent1"/>
+          </a:lnRef>
+          <a:fillRef idx="3">
+            <a:schemeClr val="accent1"/>
+          </a:fillRef>
+          <a:effectRef idx="2">
+            <a:schemeClr val="accent1"/>
+          </a:effectRef>
+          <a:fontRef idx="minor">
+            <a:schemeClr val="lt1"/>
+          </a:fontRef>
+        </p:style>
+        <p:txBody>
+          <a:bodyPr rtlCol="0" anchor="ctr"/>
+          <a:lstStyle/>
+          <a:p>
+            <a:pPr algn="ctr"/>
+          </a:p>
+        </p:txBody>
+      </p:sp>
+      <p:sp>
+        <p:nvSpPr>
+          <p:cNvPr id="51" name="TextBox 50"/>
+          <p:cNvSpPr txBox="1"/>
+          <p:nvPr/>
+        </p:nvSpPr>
+        <p:spPr>
+          <a:xfrm>
+            <a:off x="3072384" y="4672583"/>
+            <a:ext cx="2645663" cy="512064"/>
+          </a:xfrm>
+          <a:prstGeom prst="rect">
+            <a:avLst/>
+          </a:prstGeom>
+          <a:noFill/>
+        </p:spPr>
+        <p:txBody>
+          <a:bodyPr wrap="square" anchor="ctr" lIns="0" rIns="0" tIns="0" bIns="0">
+            <a:spAutoFit/>
+          </a:bodyPr>
+          <a:lstStyle/>
+          <a:p>
+            <a:pPr algn="ctr"/>
+            <a:r>
+              <a:rPr sz="1050" b="1">
+                <a:solidFill>
+                  <a:srgbClr val="FFFFFF"/>
+                </a:solidFill>
+                <a:latin typeface="Segoe UI"/>
+              </a:rPr>
+              <a:t>Azure Cosmos DB</a:t>
+            </a:r>
+          </a:p>
+          <a:p>
+            <a:pPr algn="ctr"/>
+            <a:r>
+              <a:rPr sz="800" b="0">
+                <a:solidFill>
+                  <a:srgbClr val="ECF0FB"/>
+                </a:solidFill>
+                <a:latin typeface="Segoe UI"/>
+              </a:rPr>
+              <a:t>sales · inventory · marketing</a:t>
+            </a:r>
+          </a:p>
+        </p:txBody>
+      </p:sp>
+      <p:sp>
+        <p:nvSpPr>
+          <p:cNvPr id="52" name="Rounded Rectangle 51"/>
+          <p:cNvSpPr/>
+          <p:nvPr/>
+        </p:nvSpPr>
+        <p:spPr>
+          <a:xfrm>
+            <a:off x="5919215" y="4672583"/>
+            <a:ext cx="2791967" cy="512064"/>
+          </a:xfrm>
+          <a:prstGeom prst="roundRect">
+            <a:avLst>
+              <a:gd name="adj" fmla="val 16000"/>
+            </a:avLst>
+          </a:prstGeom>
+          <a:solidFill>
+            <a:srgbClr val="1E9E5A"/>
+          </a:solidFill>
+          <a:ln>
+            <a:noFill/>
+          </a:ln>
+          <a:effectLst/>
+        </p:spPr>
+        <p:style>
+          <a:lnRef idx="1">
+            <a:schemeClr val="accent1"/>
+          </a:lnRef>
+          <a:fillRef idx="3">
+            <a:schemeClr val="accent1"/>
+          </a:fillRef>
+          <a:effectRef idx="2">
+            <a:schemeClr val="accent1"/>
+          </a:effectRef>
+          <a:fontRef idx="minor">
+            <a:schemeClr val="lt1"/>
+          </a:fontRef>
+        </p:style>
+        <p:txBody>
+          <a:bodyPr rtlCol="0" anchor="ctr"/>
+          <a:lstStyle/>
+          <a:p>
+            <a:pPr algn="ctr"/>
+          </a:p>
+        </p:txBody>
+      </p:sp>
+      <p:sp>
+        <p:nvSpPr>
+          <p:cNvPr id="53" name="TextBox 52"/>
+          <p:cNvSpPr txBox="1"/>
+          <p:nvPr/>
+        </p:nvSpPr>
+        <p:spPr>
+          <a:xfrm>
+            <a:off x="5992367" y="4672583"/>
+            <a:ext cx="2645663" cy="512064"/>
+          </a:xfrm>
+          <a:prstGeom prst="rect">
+            <a:avLst/>
+          </a:prstGeom>
+          <a:noFill/>
+        </p:spPr>
+        <p:txBody>
+          <a:bodyPr wrap="square" anchor="ctr" lIns="0" rIns="0" tIns="0" bIns="0">
+            <a:spAutoFit/>
+          </a:bodyPr>
+          <a:lstStyle/>
+          <a:p>
+            <a:pPr algn="ctr"/>
+            <a:r>
+              <a:rPr sz="1050" b="1">
+                <a:solidFill>
+                  <a:srgbClr val="FFFFFF"/>
+                </a:solidFill>
+                <a:latin typeface="Segoe UI"/>
+              </a:rPr>
+              <a:t>Foundry IQ</a:t>
+            </a:r>
+          </a:p>
+          <a:p>
+            <a:pPr algn="ctr"/>
+            <a:r>
+              <a:rPr sz="800" b="0">
+                <a:solidFill>
+                  <a:srgbClr val="ECF0FB"/>
+                </a:solidFill>
+                <a:latin typeface="Segoe UI"/>
+              </a:rPr>
+              <a:t>briefs &amp; post-mortems</a:t>
+            </a:r>
+          </a:p>
+        </p:txBody>
+      </p:sp>
+      <p:sp>
+        <p:nvSpPr>
+          <p:cNvPr id="54" name="Rounded Rectangle 53"/>
+          <p:cNvSpPr/>
+          <p:nvPr/>
+        </p:nvSpPr>
+        <p:spPr>
+          <a:xfrm>
+            <a:off x="8839200" y="4672583"/>
+            <a:ext cx="2791967" cy="512064"/>
+          </a:xfrm>
+          <a:prstGeom prst="roundRect">
+            <a:avLst>
+              <a:gd name="adj" fmla="val 16000"/>
+            </a:avLst>
+          </a:prstGeom>
+          <a:solidFill>
+            <a:srgbClr val="1E9E5A"/>
+          </a:solidFill>
+          <a:ln>
+            <a:noFill/>
+          </a:ln>
+          <a:effectLst/>
+        </p:spPr>
+        <p:style>
+          <a:lnRef idx="1">
+            <a:schemeClr val="accent1"/>
+          </a:lnRef>
+          <a:fillRef idx="3">
+            <a:schemeClr val="accent1"/>
+          </a:fillRef>
+          <a:effectRef idx="2">
+            <a:schemeClr val="accent1"/>
+          </a:effectRef>
+          <a:fontRef idx="minor">
+            <a:schemeClr val="lt1"/>
+          </a:fontRef>
+        </p:style>
+        <p:txBody>
+          <a:bodyPr rtlCol="0" anchor="ctr"/>
+          <a:lstStyle/>
+          <a:p>
+            <a:pPr algn="ctr"/>
+          </a:p>
+        </p:txBody>
+      </p:sp>
+      <p:sp>
+        <p:nvSpPr>
+          <p:cNvPr id="55" name="TextBox 54"/>
+          <p:cNvSpPr txBox="1"/>
+          <p:nvPr/>
+        </p:nvSpPr>
+        <p:spPr>
+          <a:xfrm>
+            <a:off x="8912352" y="4672583"/>
+            <a:ext cx="2645663" cy="512064"/>
+          </a:xfrm>
+          <a:prstGeom prst="rect">
+            <a:avLst/>
+          </a:prstGeom>
+          <a:noFill/>
+        </p:spPr>
+        <p:txBody>
+          <a:bodyPr wrap="square" anchor="ctr" lIns="0" rIns="0" tIns="0" bIns="0">
+            <a:spAutoFit/>
+          </a:bodyPr>
+          <a:lstStyle/>
+          <a:p>
+            <a:pPr algn="ctr"/>
+            <a:r>
+              <a:rPr sz="1050" b="1">
+                <a:solidFill>
+                  <a:srgbClr val="FFFFFF"/>
+                </a:solidFill>
+                <a:latin typeface="Segoe UI"/>
+              </a:rPr>
+              <a:t>Bing web_search</a:t>
+            </a:r>
+          </a:p>
+          <a:p>
+            <a:pPr algn="ctr"/>
+            <a:r>
+              <a:rPr sz="800" b="0">
+                <a:solidFill>
+                  <a:srgbClr val="ECF0FB"/>
+                </a:solidFill>
+                <a:latin typeface="Segoe UI"/>
+              </a:rPr>
+              <a:t>live context</a:t>
+            </a:r>
+          </a:p>
+        </p:txBody>
+      </p:sp>
+      <p:sp>
+        <p:nvSpPr>
+          <p:cNvPr id="56" name="Rounded Rectangle 55"/>
+          <p:cNvSpPr/>
+          <p:nvPr/>
+        </p:nvSpPr>
+        <p:spPr>
+          <a:xfrm>
+            <a:off x="411480" y="5376671"/>
+            <a:ext cx="11384280" cy="713232"/>
+          </a:xfrm>
+          <a:prstGeom prst="roundRect">
+            <a:avLst>
+              <a:gd name="adj" fmla="val 10000"/>
+            </a:avLst>
+          </a:prstGeom>
+          <a:solidFill>
+            <a:srgbClr val="FDF1DF"/>
+          </a:solidFill>
+          <a:ln>
+            <a:noFill/>
+          </a:ln>
+          <a:effectLst/>
+        </p:spPr>
+        <p:style>
+          <a:lnRef idx="1">
+            <a:schemeClr val="accent1"/>
+          </a:lnRef>
+          <a:fillRef idx="3">
+            <a:schemeClr val="accent1"/>
+          </a:fillRef>
+          <a:effectRef idx="2">
+            <a:schemeClr val="accent1"/>
+          </a:effectRef>
+          <a:fontRef idx="minor">
+            <a:schemeClr val="lt1"/>
+          </a:fontRef>
+        </p:style>
+        <p:txBody>
+          <a:bodyPr rtlCol="0" anchor="ctr"/>
+          <a:lstStyle/>
+          <a:p>
+            <a:pPr algn="ctr"/>
+          </a:p>
+        </p:txBody>
+      </p:sp>
+      <p:sp>
+        <p:nvSpPr>
+          <p:cNvPr id="57" name="Rounded Rectangle 56"/>
+          <p:cNvSpPr/>
+          <p:nvPr/>
+        </p:nvSpPr>
+        <p:spPr>
+          <a:xfrm>
+            <a:off x="411480" y="5376671"/>
+            <a:ext cx="2423160" cy="713232"/>
+          </a:xfrm>
+          <a:prstGeom prst="roundRect">
+            <a:avLst>
+              <a:gd name="adj" fmla="val 10000"/>
+            </a:avLst>
+          </a:prstGeom>
+          <a:solidFill>
+            <a:srgbClr val="E28A00"/>
+          </a:solidFill>
+          <a:ln>
+            <a:noFill/>
+          </a:ln>
+          <a:effectLst/>
+        </p:spPr>
+        <p:style>
+          <a:lnRef idx="1">
+            <a:schemeClr val="accent1"/>
+          </a:lnRef>
+          <a:fillRef idx="3">
+            <a:schemeClr val="accent1"/>
+          </a:fillRef>
+          <a:effectRef idx="2">
+            <a:schemeClr val="accent1"/>
+          </a:effectRef>
+          <a:fontRef idx="minor">
+            <a:schemeClr val="lt1"/>
+          </a:fontRef>
+        </p:style>
+        <p:txBody>
+          <a:bodyPr rtlCol="0" anchor="ctr"/>
+          <a:lstStyle/>
+          <a:p>
+            <a:pPr algn="ctr"/>
+          </a:p>
+        </p:txBody>
+      </p:sp>
+      <p:sp>
+        <p:nvSpPr>
+          <p:cNvPr id="58" name="TextBox 57"/>
+          <p:cNvSpPr txBox="1"/>
+          <p:nvPr/>
+        </p:nvSpPr>
+        <p:spPr>
+          <a:xfrm>
+            <a:off x="557784" y="5376671"/>
+            <a:ext cx="2148840" cy="713232"/>
+          </a:xfrm>
+          <a:prstGeom prst="rect">
+            <a:avLst/>
+          </a:prstGeom>
+          <a:noFill/>
+        </p:spPr>
+        <p:txBody>
+          <a:bodyPr wrap="square" anchor="ctr" lIns="0" rIns="0" tIns="0" bIns="0">
+            <a:spAutoFit/>
+          </a:bodyPr>
+          <a:lstStyle/>
+          <a:p>
+            <a:pPr algn="l"/>
+            <a:r>
+              <a:rPr sz="1150" b="1">
+                <a:solidFill>
+                  <a:srgbClr val="FFFFFF"/>
+                </a:solidFill>
+                <a:latin typeface="Segoe UI"/>
+              </a:rPr>
+              <a:t>MODELS</a:t>
+            </a:r>
+          </a:p>
+          <a:p>
+            <a:pPr algn="l"/>
+            <a:r>
+              <a:rPr sz="800" b="0">
+                <a:solidFill>
+                  <a:srgbClr val="ECF0FB"/>
+                </a:solidFill>
+                <a:latin typeface="Segoe UI"/>
+              </a:rPr>
+              <a:t>reason &amp; answer</a:t>
+            </a:r>
+          </a:p>
+        </p:txBody>
+      </p:sp>
+      <p:sp>
+        <p:nvSpPr>
+          <p:cNvPr id="59" name="Rounded Rectangle 58"/>
+          <p:cNvSpPr/>
+          <p:nvPr/>
+        </p:nvSpPr>
+        <p:spPr>
+          <a:xfrm>
+            <a:off x="2999232" y="5477255"/>
+            <a:ext cx="2791967" cy="512064"/>
+          </a:xfrm>
+          <a:prstGeom prst="roundRect">
+            <a:avLst>
+              <a:gd name="adj" fmla="val 16000"/>
+            </a:avLst>
+          </a:prstGeom>
+          <a:solidFill>
+            <a:srgbClr val="E28A00"/>
+          </a:solidFill>
+          <a:ln>
+            <a:noFill/>
+          </a:ln>
+          <a:effectLst/>
+        </p:spPr>
+        <p:style>
+          <a:lnRef idx="1">
+            <a:schemeClr val="accent1"/>
+          </a:lnRef>
+          <a:fillRef idx="3">
+            <a:schemeClr val="accent1"/>
+          </a:fillRef>
+          <a:effectRef idx="2">
+            <a:schemeClr val="accent1"/>
+          </a:effectRef>
+          <a:fontRef idx="minor">
+            <a:schemeClr val="lt1"/>
+          </a:fontRef>
+        </p:style>
+        <p:txBody>
+          <a:bodyPr rtlCol="0" anchor="ctr"/>
+          <a:lstStyle/>
+          <a:p>
+            <a:pPr algn="ctr"/>
+          </a:p>
+        </p:txBody>
+      </p:sp>
+      <p:sp>
+        <p:nvSpPr>
+          <p:cNvPr id="60" name="TextBox 59"/>
+          <p:cNvSpPr txBox="1"/>
+          <p:nvPr/>
+        </p:nvSpPr>
+        <p:spPr>
+          <a:xfrm>
+            <a:off x="3072384" y="5477255"/>
+            <a:ext cx="2645663" cy="512064"/>
+          </a:xfrm>
+          <a:prstGeom prst="rect">
+            <a:avLst/>
+          </a:prstGeom>
+          <a:noFill/>
+        </p:spPr>
+        <p:txBody>
+          <a:bodyPr wrap="square" anchor="ctr" lIns="0" rIns="0" tIns="0" bIns="0">
+            <a:spAutoFit/>
+          </a:bodyPr>
+          <a:lstStyle/>
+          <a:p>
+            <a:pPr algn="ctr"/>
+            <a:r>
+              <a:rPr sz="1050" b="1">
+                <a:solidFill>
+                  <a:srgbClr val="FFFFFF"/>
+                </a:solidFill>
+                <a:latin typeface="Segoe UI"/>
+              </a:rPr>
+              <a:t>gpt-4.1-mini</a:t>
+            </a:r>
+          </a:p>
+          <a:p>
+            <a:pPr algn="ctr"/>
+            <a:r>
+              <a:rPr sz="800" b="0">
+                <a:solidFill>
+                  <a:srgbClr val="ECF0FB"/>
+                </a:solidFill>
+                <a:latin typeface="Segoe UI"/>
+              </a:rPr>
+              <a:t>manager + agents</a:t>
+            </a:r>
+          </a:p>
+        </p:txBody>
+      </p:sp>
+      <p:sp>
+        <p:nvSpPr>
+          <p:cNvPr id="61" name="Rounded Rectangle 60"/>
+          <p:cNvSpPr/>
+          <p:nvPr/>
+        </p:nvSpPr>
+        <p:spPr>
+          <a:xfrm>
+            <a:off x="5919215" y="5477255"/>
+            <a:ext cx="2791967" cy="512064"/>
+          </a:xfrm>
+          <a:prstGeom prst="roundRect">
+            <a:avLst>
+              <a:gd name="adj" fmla="val 16000"/>
+            </a:avLst>
+          </a:prstGeom>
+          <a:solidFill>
+            <a:srgbClr val="E28A00"/>
+          </a:solidFill>
+          <a:ln>
+            <a:noFill/>
+          </a:ln>
+          <a:effectLst/>
+        </p:spPr>
+        <p:style>
+          <a:lnRef idx="1">
+            <a:schemeClr val="accent1"/>
+          </a:lnRef>
+          <a:fillRef idx="3">
+            <a:schemeClr val="accent1"/>
+          </a:fillRef>
+          <a:effectRef idx="2">
+            <a:schemeClr val="accent1"/>
+          </a:effectRef>
+          <a:fontRef idx="minor">
+            <a:schemeClr val="lt1"/>
+          </a:fontRef>
+        </p:style>
+        <p:txBody>
+          <a:bodyPr rtlCol="0" anchor="ctr"/>
+          <a:lstStyle/>
+          <a:p>
+            <a:pPr algn="ctr"/>
+          </a:p>
+        </p:txBody>
+      </p:sp>
+      <p:sp>
+        <p:nvSpPr>
+          <p:cNvPr id="62" name="TextBox 61"/>
+          <p:cNvSpPr txBox="1"/>
+          <p:nvPr/>
+        </p:nvSpPr>
+        <p:spPr>
+          <a:xfrm>
+            <a:off x="5992367" y="5477255"/>
+            <a:ext cx="2645663" cy="512064"/>
+          </a:xfrm>
+          <a:prstGeom prst="rect">
+            <a:avLst/>
+          </a:prstGeom>
+          <a:noFill/>
+        </p:spPr>
+        <p:txBody>
+          <a:bodyPr wrap="square" anchor="ctr" lIns="0" rIns="0" tIns="0" bIns="0">
+            <a:spAutoFit/>
+          </a:bodyPr>
+          <a:lstStyle/>
+          <a:p>
+            <a:pPr algn="ctr"/>
+            <a:r>
+              <a:rPr sz="1050" b="1">
+                <a:solidFill>
+                  <a:srgbClr val="FFFFFF"/>
+                </a:solidFill>
+                <a:latin typeface="Segoe UI"/>
+              </a:rPr>
+              <a:t>Foundry agent models</a:t>
+            </a:r>
+          </a:p>
+          <a:p>
+            <a:pPr algn="ctr"/>
+            <a:r>
+              <a:rPr sz="800" b="0">
+                <a:solidFill>
+                  <a:srgbClr val="ECF0FB"/>
+                </a:solidFill>
+                <a:latin typeface="Segoe UI"/>
+              </a:rPr>
+              <a:t>per-agent config</a:t>
+            </a:r>
+          </a:p>
+        </p:txBody>
+      </p:sp>
+      <p:sp>
+        <p:nvSpPr>
+          <p:cNvPr id="63" name="Rounded Rectangle 62"/>
+          <p:cNvSpPr/>
+          <p:nvPr/>
+        </p:nvSpPr>
+        <p:spPr>
+          <a:xfrm>
+            <a:off x="8839200" y="5477255"/>
+            <a:ext cx="2791967" cy="512064"/>
+          </a:xfrm>
+          <a:prstGeom prst="roundRect">
+            <a:avLst>
+              <a:gd name="adj" fmla="val 16000"/>
+            </a:avLst>
+          </a:prstGeom>
+          <a:solidFill>
+            <a:srgbClr val="E28A00"/>
+          </a:solidFill>
+          <a:ln>
+            <a:noFill/>
+          </a:ln>
+          <a:effectLst/>
+        </p:spPr>
+        <p:style>
+          <a:lnRef idx="1">
+            <a:schemeClr val="accent1"/>
+          </a:lnRef>
+          <a:fillRef idx="3">
+            <a:schemeClr val="accent1"/>
+          </a:fillRef>
+          <a:effectRef idx="2">
+            <a:schemeClr val="accent1"/>
+          </a:effectRef>
+          <a:fontRef idx="minor">
+            <a:schemeClr val="lt1"/>
+          </a:fontRef>
+        </p:style>
+        <p:txBody>
+          <a:bodyPr rtlCol="0" anchor="ctr"/>
+          <a:lstStyle/>
+          <a:p>
+            <a:pPr algn="ctr"/>
+          </a:p>
+        </p:txBody>
+      </p:sp>
+      <p:sp>
+        <p:nvSpPr>
+          <p:cNvPr id="64" name="TextBox 63"/>
+          <p:cNvSpPr txBox="1"/>
+          <p:nvPr/>
+        </p:nvSpPr>
+        <p:spPr>
+          <a:xfrm>
+            <a:off x="8912352" y="5477255"/>
+            <a:ext cx="2645663" cy="512064"/>
+          </a:xfrm>
+          <a:prstGeom prst="rect">
+            <a:avLst/>
+          </a:prstGeom>
+          <a:noFill/>
+        </p:spPr>
+        <p:txBody>
+          <a:bodyPr wrap="square" anchor="ctr" lIns="0" rIns="0" tIns="0" bIns="0">
+            <a:spAutoFit/>
+          </a:bodyPr>
+          <a:lstStyle/>
+          <a:p>
+            <a:pPr algn="ctr"/>
+            <a:r>
+              <a:rPr sz="1050" b="1">
+                <a:solidFill>
+                  <a:srgbClr val="FFFFFF"/>
+                </a:solidFill>
+                <a:latin typeface="Segoe UI"/>
+              </a:rPr>
+              <a:t>Code Interpreter</a:t>
+            </a:r>
+          </a:p>
+          <a:p>
+            <a:pPr algn="ctr"/>
+            <a:r>
+              <a:rPr sz="800" b="0">
+                <a:solidFill>
+                  <a:srgbClr val="ECF0FB"/>
+                </a:solidFill>
+                <a:latin typeface="Segoe UI"/>
+              </a:rPr>
+              <a:t>consolidated chart + math</a:t>
+            </a:r>
+          </a:p>
+        </p:txBody>
+      </p:sp>
+      <p:sp>
+        <p:nvSpPr>
+          <p:cNvPr id="65" name="Rounded Rectangle 64"/>
+          <p:cNvSpPr/>
+          <p:nvPr/>
+        </p:nvSpPr>
+        <p:spPr>
+          <a:xfrm>
+            <a:off x="411480" y="6419088"/>
+            <a:ext cx="11384280" cy="384048"/>
+          </a:xfrm>
+          <a:prstGeom prst="roundRect">
+            <a:avLst>
+              <a:gd name="adj" fmla="val 25000"/>
+            </a:avLst>
+          </a:prstGeom>
+          <a:solidFill>
+            <a:srgbClr val="1B1F2A"/>
+          </a:solidFill>
+          <a:ln>
+            <a:noFill/>
+          </a:ln>
+          <a:effectLst/>
+        </p:spPr>
+        <p:style>
+          <a:lnRef idx="1">
+            <a:schemeClr val="accent1"/>
+          </a:lnRef>
+          <a:fillRef idx="3">
+            <a:schemeClr val="accent1"/>
+          </a:fillRef>
+          <a:effectRef idx="2">
+            <a:schemeClr val="accent1"/>
+          </a:effectRef>
+          <a:fontRef idx="minor">
+            <a:schemeClr val="lt1"/>
+          </a:fontRef>
+        </p:style>
+        <p:txBody>
+          <a:bodyPr rtlCol="0" anchor="ctr"/>
+          <a:lstStyle/>
+          <a:p>
+            <a:pPr algn="ctr"/>
+          </a:p>
+        </p:txBody>
+      </p:sp>
+      <p:sp>
+        <p:nvSpPr>
+          <p:cNvPr id="66" name="TextBox 65"/>
+          <p:cNvSpPr txBox="1"/>
+          <p:nvPr/>
+        </p:nvSpPr>
+        <p:spPr>
+          <a:xfrm>
+            <a:off x="548640" y="6437376"/>
+            <a:ext cx="11155680" cy="347472"/>
+          </a:xfrm>
+          <a:prstGeom prst="rect">
+            <a:avLst/>
+          </a:prstGeom>
+          <a:noFill/>
+        </p:spPr>
+        <p:txBody>
+          <a:bodyPr wrap="square" anchor="ctr" lIns="0" rIns="0" tIns="0" bIns="0">
+            <a:spAutoFit/>
+          </a:bodyPr>
+          <a:lstStyle/>
+          <a:p>
+            <a:pPr algn="l"/>
+            <a:r>
+              <a:rPr sz="1050" b="1">
+                <a:solidFill>
+                  <a:srgbClr val="E28A00"/>
+                </a:solidFill>
+                <a:latin typeface="Segoe UI"/>
+              </a:rPr>
+              <a:t>Observability in the demo:  </a:t>
+            </a:r>
+            <a:r>
+              <a:rPr sz="1050" b="0">
+                <a:solidFill>
+                  <a:srgbClr val="FFFFFF"/>
+                </a:solidFill>
+                <a:latin typeface="Segoe UI"/>
+              </a:rPr>
+              <a:t>Application Insights / OpenTelemetry tracing · Foundry Evaluations · red-team &amp; guardrails modules.</a:t>
             </a:r>
           </a:p>
         </p:txBody>

--- a/Zava_Exec_Overview.pptx
+++ b/Zava_Exec_Overview.pptx
@@ -5,14 +5,12 @@
     <p:sldMasterId id="2147483648" r:id="rId1"/>
   </p:sldMasterIdLst>
   <p:sldIdLst>
-    <p:sldId id="256" r:id="rId7"/>
-    <p:sldId id="257" r:id="rId8"/>
-    <p:sldId id="258" r:id="rId9"/>
-    <p:sldId id="259" r:id="rId10"/>
-    <p:sldId id="260" r:id="rId11"/>
-    <p:sldId id="261" r:id="rId12"/>
+    <p:sldId id="256" r:id="rId2"/>
+    <p:sldId id="257" r:id="rId3"/>
+    <p:sldId id="258" r:id="rId4"/>
+    <p:sldId id="259" r:id="rId5"/>
   </p:sldIdLst>
-  <p:sldSz cx="12191695" cy="6858000" type="screen4x3"/>
+  <p:sldSz cx="12192000" cy="6858000"/>
   <p:notesSz cx="6858000" cy="9144000"/>
   <p:defaultTextStyle>
     <a:defPPr>
@@ -109,6 +107,22 @@
       </a:defRPr>
     </a:lvl9pPr>
   </p:defaultTextStyle>
+  <p:extLst>
+    <p:ext uri="{EFAFB233-063F-42B5-8137-9DF3F51BA10A}">
+      <p15:sldGuideLst xmlns:p15="http://schemas.microsoft.com/office/powerpoint/2012/main">
+        <p15:guide id="1" orient="horz" pos="2160">
+          <p15:clr>
+            <a:srgbClr val="A4A3A4"/>
+          </p15:clr>
+        </p15:guide>
+        <p15:guide id="2" pos="2880">
+          <p15:clr>
+            <a:srgbClr val="A4A3A4"/>
+          </p15:clr>
+        </p15:guide>
+      </p15:sldGuideLst>
+    </p:ext>
+  </p:extLst>
 </p:presentation>
 </file>
 
@@ -150,10 +164,9 @@
           <a:lstStyle/>
           <a:p>
             <a:r>
-              <a:rPr lang="en-US" smtClean="0"/>
+              <a:rPr lang="en-US"/>
               <a:t>Click to edit Master title style</a:t>
             </a:r>
-            <a:endParaRPr lang="en-US"/>
           </a:p>
         </p:txBody>
       </p:sp>
@@ -269,10 +282,9 @@
           </a:lstStyle>
           <a:p>
             <a:r>
-              <a:rPr lang="en-US" smtClean="0"/>
+              <a:rPr lang="en-US"/>
               <a:t>Click to edit Master subtitle style</a:t>
             </a:r>
-            <a:endParaRPr lang="en-US"/>
           </a:p>
         </p:txBody>
       </p:sp>
@@ -293,7 +305,7 @@
           <a:p>
             <a:fld id="{5BCAD085-E8A6-8845-BD4E-CB4CCA059FC4}" type="datetimeFigureOut">
               <a:rPr lang="en-US" smtClean="0"/>
-              <a:t>1/27/13</a:t>
+              <a:t>6/4/2026</a:t>
             </a:fld>
             <a:endParaRPr lang="en-US"/>
           </a:p>
@@ -387,10 +399,9 @@
           <a:lstStyle/>
           <a:p>
             <a:r>
-              <a:rPr lang="en-US" smtClean="0"/>
+              <a:rPr lang="en-US"/>
               <a:t>Click to edit Master title style</a:t>
             </a:r>
-            <a:endParaRPr lang="en-US"/>
           </a:p>
         </p:txBody>
       </p:sp>
@@ -411,38 +422,37 @@
           <a:p>
             <a:pPr lvl="0"/>
             <a:r>
-              <a:rPr lang="en-US" smtClean="0"/>
+              <a:rPr lang="en-US"/>
               <a:t>Click to edit Master text styles</a:t>
             </a:r>
           </a:p>
           <a:p>
             <a:pPr lvl="1"/>
             <a:r>
-              <a:rPr lang="en-US" smtClean="0"/>
+              <a:rPr lang="en-US"/>
               <a:t>Second level</a:t>
             </a:r>
           </a:p>
           <a:p>
             <a:pPr lvl="2"/>
             <a:r>
-              <a:rPr lang="en-US" smtClean="0"/>
+              <a:rPr lang="en-US"/>
               <a:t>Third level</a:t>
             </a:r>
           </a:p>
           <a:p>
             <a:pPr lvl="3"/>
             <a:r>
-              <a:rPr lang="en-US" smtClean="0"/>
+              <a:rPr lang="en-US"/>
               <a:t>Fourth level</a:t>
             </a:r>
           </a:p>
           <a:p>
             <a:pPr lvl="4"/>
             <a:r>
-              <a:rPr lang="en-US" smtClean="0"/>
+              <a:rPr lang="en-US"/>
               <a:t>Fifth level</a:t>
             </a:r>
-            <a:endParaRPr lang="en-US"/>
           </a:p>
         </p:txBody>
       </p:sp>
@@ -463,7 +473,7 @@
           <a:p>
             <a:fld id="{5BCAD085-E8A6-8845-BD4E-CB4CCA059FC4}" type="datetimeFigureOut">
               <a:rPr lang="en-US" smtClean="0"/>
-              <a:t>1/27/13</a:t>
+              <a:t>6/4/2026</a:t>
             </a:fld>
             <a:endParaRPr lang="en-US"/>
           </a:p>
@@ -562,10 +572,9 @@
           <a:lstStyle/>
           <a:p>
             <a:r>
-              <a:rPr lang="en-US" smtClean="0"/>
+              <a:rPr lang="en-US"/>
               <a:t>Click to edit Master title style</a:t>
             </a:r>
-            <a:endParaRPr lang="en-US"/>
           </a:p>
         </p:txBody>
       </p:sp>
@@ -591,38 +600,37 @@
           <a:p>
             <a:pPr lvl="0"/>
             <a:r>
-              <a:rPr lang="en-US" smtClean="0"/>
+              <a:rPr lang="en-US"/>
               <a:t>Click to edit Master text styles</a:t>
             </a:r>
           </a:p>
           <a:p>
             <a:pPr lvl="1"/>
             <a:r>
-              <a:rPr lang="en-US" smtClean="0"/>
+              <a:rPr lang="en-US"/>
               <a:t>Second level</a:t>
             </a:r>
           </a:p>
           <a:p>
             <a:pPr lvl="2"/>
             <a:r>
-              <a:rPr lang="en-US" smtClean="0"/>
+              <a:rPr lang="en-US"/>
               <a:t>Third level</a:t>
             </a:r>
           </a:p>
           <a:p>
             <a:pPr lvl="3"/>
             <a:r>
-              <a:rPr lang="en-US" smtClean="0"/>
+              <a:rPr lang="en-US"/>
               <a:t>Fourth level</a:t>
             </a:r>
           </a:p>
           <a:p>
             <a:pPr lvl="4"/>
             <a:r>
-              <a:rPr lang="en-US" smtClean="0"/>
+              <a:rPr lang="en-US"/>
               <a:t>Fifth level</a:t>
             </a:r>
-            <a:endParaRPr lang="en-US"/>
           </a:p>
         </p:txBody>
       </p:sp>
@@ -643,7 +651,7 @@
           <a:p>
             <a:fld id="{5BCAD085-E8A6-8845-BD4E-CB4CCA059FC4}" type="datetimeFigureOut">
               <a:rPr lang="en-US" smtClean="0"/>
-              <a:t>1/27/13</a:t>
+              <a:t>6/4/2026</a:t>
             </a:fld>
             <a:endParaRPr lang="en-US"/>
           </a:p>
@@ -737,10 +745,9 @@
           <a:lstStyle/>
           <a:p>
             <a:r>
-              <a:rPr lang="en-US" smtClean="0"/>
+              <a:rPr lang="en-US"/>
               <a:t>Click to edit Master title style</a:t>
             </a:r>
-            <a:endParaRPr lang="en-US"/>
           </a:p>
         </p:txBody>
       </p:sp>
@@ -761,38 +768,37 @@
           <a:p>
             <a:pPr lvl="0"/>
             <a:r>
-              <a:rPr lang="en-US" smtClean="0"/>
+              <a:rPr lang="en-US"/>
               <a:t>Click to edit Master text styles</a:t>
             </a:r>
           </a:p>
           <a:p>
             <a:pPr lvl="1"/>
             <a:r>
-              <a:rPr lang="en-US" smtClean="0"/>
+              <a:rPr lang="en-US"/>
               <a:t>Second level</a:t>
             </a:r>
           </a:p>
           <a:p>
             <a:pPr lvl="2"/>
             <a:r>
-              <a:rPr lang="en-US" smtClean="0"/>
+              <a:rPr lang="en-US"/>
               <a:t>Third level</a:t>
             </a:r>
           </a:p>
           <a:p>
             <a:pPr lvl="3"/>
             <a:r>
-              <a:rPr lang="en-US" smtClean="0"/>
+              <a:rPr lang="en-US"/>
               <a:t>Fourth level</a:t>
             </a:r>
           </a:p>
           <a:p>
             <a:pPr lvl="4"/>
             <a:r>
-              <a:rPr lang="en-US" smtClean="0"/>
+              <a:rPr lang="en-US"/>
               <a:t>Fifth level</a:t>
             </a:r>
-            <a:endParaRPr lang="en-US"/>
           </a:p>
         </p:txBody>
       </p:sp>
@@ -813,7 +819,7 @@
           <a:p>
             <a:fld id="{5BCAD085-E8A6-8845-BD4E-CB4CCA059FC4}" type="datetimeFigureOut">
               <a:rPr lang="en-US" smtClean="0"/>
-              <a:t>1/27/13</a:t>
+              <a:t>6/4/2026</a:t>
             </a:fld>
             <a:endParaRPr lang="en-US"/>
           </a:p>
@@ -916,10 +922,9 @@
           </a:lstStyle>
           <a:p>
             <a:r>
-              <a:rPr lang="en-US" smtClean="0"/>
+              <a:rPr lang="en-US"/>
               <a:t>Click to edit Master title style</a:t>
             </a:r>
-            <a:endParaRPr lang="en-US"/>
           </a:p>
         </p:txBody>
       </p:sp>
@@ -1036,7 +1041,7 @@
           <a:p>
             <a:pPr lvl="0"/>
             <a:r>
-              <a:rPr lang="en-US" smtClean="0"/>
+              <a:rPr lang="en-US"/>
               <a:t>Click to edit Master text styles</a:t>
             </a:r>
           </a:p>
@@ -1059,7 +1064,7 @@
           <a:p>
             <a:fld id="{5BCAD085-E8A6-8845-BD4E-CB4CCA059FC4}" type="datetimeFigureOut">
               <a:rPr lang="en-US" smtClean="0"/>
-              <a:t>1/27/13</a:t>
+              <a:t>6/4/2026</a:t>
             </a:fld>
             <a:endParaRPr lang="en-US"/>
           </a:p>
@@ -1153,10 +1158,9 @@
           <a:lstStyle/>
           <a:p>
             <a:r>
-              <a:rPr lang="en-US" smtClean="0"/>
+              <a:rPr lang="en-US"/>
               <a:t>Click to edit Master title style</a:t>
             </a:r>
-            <a:endParaRPr lang="en-US"/>
           </a:p>
         </p:txBody>
       </p:sp>
@@ -1210,38 +1214,37 @@
           <a:p>
             <a:pPr lvl="0"/>
             <a:r>
-              <a:rPr lang="en-US" smtClean="0"/>
+              <a:rPr lang="en-US"/>
               <a:t>Click to edit Master text styles</a:t>
             </a:r>
           </a:p>
           <a:p>
             <a:pPr lvl="1"/>
             <a:r>
-              <a:rPr lang="en-US" smtClean="0"/>
+              <a:rPr lang="en-US"/>
               <a:t>Second level</a:t>
             </a:r>
           </a:p>
           <a:p>
             <a:pPr lvl="2"/>
             <a:r>
-              <a:rPr lang="en-US" smtClean="0"/>
+              <a:rPr lang="en-US"/>
               <a:t>Third level</a:t>
             </a:r>
           </a:p>
           <a:p>
             <a:pPr lvl="3"/>
             <a:r>
-              <a:rPr lang="en-US" smtClean="0"/>
+              <a:rPr lang="en-US"/>
               <a:t>Fourth level</a:t>
             </a:r>
           </a:p>
           <a:p>
             <a:pPr lvl="4"/>
             <a:r>
-              <a:rPr lang="en-US" smtClean="0"/>
+              <a:rPr lang="en-US"/>
               <a:t>Fifth level</a:t>
             </a:r>
-            <a:endParaRPr lang="en-US"/>
           </a:p>
         </p:txBody>
       </p:sp>
@@ -1295,38 +1298,37 @@
           <a:p>
             <a:pPr lvl="0"/>
             <a:r>
-              <a:rPr lang="en-US" smtClean="0"/>
+              <a:rPr lang="en-US"/>
               <a:t>Click to edit Master text styles</a:t>
             </a:r>
           </a:p>
           <a:p>
             <a:pPr lvl="1"/>
             <a:r>
-              <a:rPr lang="en-US" smtClean="0"/>
+              <a:rPr lang="en-US"/>
               <a:t>Second level</a:t>
             </a:r>
           </a:p>
           <a:p>
             <a:pPr lvl="2"/>
             <a:r>
-              <a:rPr lang="en-US" smtClean="0"/>
+              <a:rPr lang="en-US"/>
               <a:t>Third level</a:t>
             </a:r>
           </a:p>
           <a:p>
             <a:pPr lvl="3"/>
             <a:r>
-              <a:rPr lang="en-US" smtClean="0"/>
+              <a:rPr lang="en-US"/>
               <a:t>Fourth level</a:t>
             </a:r>
           </a:p>
           <a:p>
             <a:pPr lvl="4"/>
             <a:r>
-              <a:rPr lang="en-US" smtClean="0"/>
+              <a:rPr lang="en-US"/>
               <a:t>Fifth level</a:t>
             </a:r>
-            <a:endParaRPr lang="en-US"/>
           </a:p>
         </p:txBody>
       </p:sp>
@@ -1347,7 +1349,7 @@
           <a:p>
             <a:fld id="{5BCAD085-E8A6-8845-BD4E-CB4CCA059FC4}" type="datetimeFigureOut">
               <a:rPr lang="en-US" smtClean="0"/>
-              <a:t>1/27/13</a:t>
+              <a:t>6/4/2026</a:t>
             </a:fld>
             <a:endParaRPr lang="en-US"/>
           </a:p>
@@ -1445,10 +1447,9 @@
           </a:lstStyle>
           <a:p>
             <a:r>
-              <a:rPr lang="en-US" smtClean="0"/>
+              <a:rPr lang="en-US"/>
               <a:t>Click to edit Master title style</a:t>
             </a:r>
-            <a:endParaRPr lang="en-US"/>
           </a:p>
         </p:txBody>
       </p:sp>
@@ -1511,7 +1512,7 @@
           <a:p>
             <a:pPr lvl="0"/>
             <a:r>
-              <a:rPr lang="en-US" smtClean="0"/>
+              <a:rPr lang="en-US"/>
               <a:t>Click to edit Master text styles</a:t>
             </a:r>
           </a:p>
@@ -1567,38 +1568,37 @@
           <a:p>
             <a:pPr lvl="0"/>
             <a:r>
-              <a:rPr lang="en-US" smtClean="0"/>
+              <a:rPr lang="en-US"/>
               <a:t>Click to edit Master text styles</a:t>
             </a:r>
           </a:p>
           <a:p>
             <a:pPr lvl="1"/>
             <a:r>
-              <a:rPr lang="en-US" smtClean="0"/>
+              <a:rPr lang="en-US"/>
               <a:t>Second level</a:t>
             </a:r>
           </a:p>
           <a:p>
             <a:pPr lvl="2"/>
             <a:r>
-              <a:rPr lang="en-US" smtClean="0"/>
+              <a:rPr lang="en-US"/>
               <a:t>Third level</a:t>
             </a:r>
           </a:p>
           <a:p>
             <a:pPr lvl="3"/>
             <a:r>
-              <a:rPr lang="en-US" smtClean="0"/>
+              <a:rPr lang="en-US"/>
               <a:t>Fourth level</a:t>
             </a:r>
           </a:p>
           <a:p>
             <a:pPr lvl="4"/>
             <a:r>
-              <a:rPr lang="en-US" smtClean="0"/>
+              <a:rPr lang="en-US"/>
               <a:t>Fifth level</a:t>
             </a:r>
-            <a:endParaRPr lang="en-US"/>
           </a:p>
         </p:txBody>
       </p:sp>
@@ -1661,7 +1661,7 @@
           <a:p>
             <a:pPr lvl="0"/>
             <a:r>
-              <a:rPr lang="en-US" smtClean="0"/>
+              <a:rPr lang="en-US"/>
               <a:t>Click to edit Master text styles</a:t>
             </a:r>
           </a:p>
@@ -1717,38 +1717,37 @@
           <a:p>
             <a:pPr lvl="0"/>
             <a:r>
-              <a:rPr lang="en-US" smtClean="0"/>
+              <a:rPr lang="en-US"/>
               <a:t>Click to edit Master text styles</a:t>
             </a:r>
           </a:p>
           <a:p>
             <a:pPr lvl="1"/>
             <a:r>
-              <a:rPr lang="en-US" smtClean="0"/>
+              <a:rPr lang="en-US"/>
               <a:t>Second level</a:t>
             </a:r>
           </a:p>
           <a:p>
             <a:pPr lvl="2"/>
             <a:r>
-              <a:rPr lang="en-US" smtClean="0"/>
+              <a:rPr lang="en-US"/>
               <a:t>Third level</a:t>
             </a:r>
           </a:p>
           <a:p>
             <a:pPr lvl="3"/>
             <a:r>
-              <a:rPr lang="en-US" smtClean="0"/>
+              <a:rPr lang="en-US"/>
               <a:t>Fourth level</a:t>
             </a:r>
           </a:p>
           <a:p>
             <a:pPr lvl="4"/>
             <a:r>
-              <a:rPr lang="en-US" smtClean="0"/>
+              <a:rPr lang="en-US"/>
               <a:t>Fifth level</a:t>
             </a:r>
-            <a:endParaRPr lang="en-US"/>
           </a:p>
         </p:txBody>
       </p:sp>
@@ -1769,7 +1768,7 @@
           <a:p>
             <a:fld id="{5BCAD085-E8A6-8845-BD4E-CB4CCA059FC4}" type="datetimeFigureOut">
               <a:rPr lang="en-US" smtClean="0"/>
-              <a:t>1/27/13</a:t>
+              <a:t>6/4/2026</a:t>
             </a:fld>
             <a:endParaRPr lang="en-US"/>
           </a:p>
@@ -1863,10 +1862,9 @@
           <a:lstStyle/>
           <a:p>
             <a:r>
-              <a:rPr lang="en-US" smtClean="0"/>
+              <a:rPr lang="en-US"/>
               <a:t>Click to edit Master title style</a:t>
             </a:r>
-            <a:endParaRPr lang="en-US"/>
           </a:p>
         </p:txBody>
       </p:sp>
@@ -1887,7 +1885,7 @@
           <a:p>
             <a:fld id="{5BCAD085-E8A6-8845-BD4E-CB4CCA059FC4}" type="datetimeFigureOut">
               <a:rPr lang="en-US" smtClean="0"/>
-              <a:t>1/27/13</a:t>
+              <a:t>6/4/2026</a:t>
             </a:fld>
             <a:endParaRPr lang="en-US"/>
           </a:p>
@@ -1982,7 +1980,7 @@
           <a:p>
             <a:fld id="{5BCAD085-E8A6-8845-BD4E-CB4CCA059FC4}" type="datetimeFigureOut">
               <a:rPr lang="en-US" smtClean="0"/>
-              <a:t>1/27/13</a:t>
+              <a:t>6/4/2026</a:t>
             </a:fld>
             <a:endParaRPr lang="en-US"/>
           </a:p>
@@ -2085,10 +2083,9 @@
           </a:lstStyle>
           <a:p>
             <a:r>
-              <a:rPr lang="en-US" smtClean="0"/>
+              <a:rPr lang="en-US"/>
               <a:t>Click to edit Master title style</a:t>
             </a:r>
-            <a:endParaRPr lang="en-US"/>
           </a:p>
         </p:txBody>
       </p:sp>
@@ -2142,38 +2139,37 @@
           <a:p>
             <a:pPr lvl="0"/>
             <a:r>
-              <a:rPr lang="en-US" smtClean="0"/>
+              <a:rPr lang="en-US"/>
               <a:t>Click to edit Master text styles</a:t>
             </a:r>
           </a:p>
           <a:p>
             <a:pPr lvl="1"/>
             <a:r>
-              <a:rPr lang="en-US" smtClean="0"/>
+              <a:rPr lang="en-US"/>
               <a:t>Second level</a:t>
             </a:r>
           </a:p>
           <a:p>
             <a:pPr lvl="2"/>
             <a:r>
-              <a:rPr lang="en-US" smtClean="0"/>
+              <a:rPr lang="en-US"/>
               <a:t>Third level</a:t>
             </a:r>
           </a:p>
           <a:p>
             <a:pPr lvl="3"/>
             <a:r>
-              <a:rPr lang="en-US" smtClean="0"/>
+              <a:rPr lang="en-US"/>
               <a:t>Fourth level</a:t>
             </a:r>
           </a:p>
           <a:p>
             <a:pPr lvl="4"/>
             <a:r>
-              <a:rPr lang="en-US" smtClean="0"/>
+              <a:rPr lang="en-US"/>
               <a:t>Fifth level</a:t>
             </a:r>
-            <a:endParaRPr lang="en-US"/>
           </a:p>
         </p:txBody>
       </p:sp>
@@ -2236,7 +2232,7 @@
           <a:p>
             <a:pPr lvl="0"/>
             <a:r>
-              <a:rPr lang="en-US" smtClean="0"/>
+              <a:rPr lang="en-US"/>
               <a:t>Click to edit Master text styles</a:t>
             </a:r>
           </a:p>
@@ -2259,7 +2255,7 @@
           <a:p>
             <a:fld id="{5BCAD085-E8A6-8845-BD4E-CB4CCA059FC4}" type="datetimeFigureOut">
               <a:rPr lang="en-US" smtClean="0"/>
-              <a:t>1/27/13</a:t>
+              <a:t>6/4/2026</a:t>
             </a:fld>
             <a:endParaRPr lang="en-US"/>
           </a:p>
@@ -2362,10 +2358,9 @@
           </a:lstStyle>
           <a:p>
             <a:r>
-              <a:rPr lang="en-US" smtClean="0"/>
+              <a:rPr lang="en-US"/>
               <a:t>Click to edit Master title style</a:t>
             </a:r>
-            <a:endParaRPr lang="en-US"/>
           </a:p>
         </p:txBody>
       </p:sp>
@@ -2489,7 +2484,7 @@
           <a:p>
             <a:pPr lvl="0"/>
             <a:r>
-              <a:rPr lang="en-US" smtClean="0"/>
+              <a:rPr lang="en-US"/>
               <a:t>Click to edit Master text styles</a:t>
             </a:r>
           </a:p>
@@ -2512,7 +2507,7 @@
           <a:p>
             <a:fld id="{5BCAD085-E8A6-8845-BD4E-CB4CCA059FC4}" type="datetimeFigureOut">
               <a:rPr lang="en-US" smtClean="0"/>
-              <a:t>1/27/13</a:t>
+              <a:t>6/4/2026</a:t>
             </a:fld>
             <a:endParaRPr lang="en-US"/>
           </a:p>
@@ -2621,10 +2616,9 @@
           <a:lstStyle/>
           <a:p>
             <a:r>
-              <a:rPr lang="en-US" smtClean="0"/>
+              <a:rPr lang="en-US"/>
               <a:t>Click to edit Master title style</a:t>
             </a:r>
-            <a:endParaRPr lang="en-US"/>
           </a:p>
         </p:txBody>
       </p:sp>
@@ -2655,38 +2649,37 @@
           <a:p>
             <a:pPr lvl="0"/>
             <a:r>
-              <a:rPr lang="en-US" smtClean="0"/>
+              <a:rPr lang="en-US"/>
               <a:t>Click to edit Master text styles</a:t>
             </a:r>
           </a:p>
           <a:p>
             <a:pPr lvl="1"/>
             <a:r>
-              <a:rPr lang="en-US" smtClean="0"/>
+              <a:rPr lang="en-US"/>
               <a:t>Second level</a:t>
             </a:r>
           </a:p>
           <a:p>
             <a:pPr lvl="2"/>
             <a:r>
-              <a:rPr lang="en-US" smtClean="0"/>
+              <a:rPr lang="en-US"/>
               <a:t>Third level</a:t>
             </a:r>
           </a:p>
           <a:p>
             <a:pPr lvl="3"/>
             <a:r>
-              <a:rPr lang="en-US" smtClean="0"/>
+              <a:rPr lang="en-US"/>
               <a:t>Fourth level</a:t>
             </a:r>
           </a:p>
           <a:p>
             <a:pPr lvl="4"/>
             <a:r>
-              <a:rPr lang="en-US" smtClean="0"/>
+              <a:rPr lang="en-US"/>
               <a:t>Fifth level</a:t>
             </a:r>
-            <a:endParaRPr lang="en-US"/>
           </a:p>
         </p:txBody>
       </p:sp>
@@ -2725,7 +2718,7 @@
           <a:p>
             <a:fld id="{5BCAD085-E8A6-8845-BD4E-CB4CCA059FC4}" type="datetimeFigureOut">
               <a:rPr lang="en-US" smtClean="0"/>
-              <a:t>1/27/13</a:t>
+              <a:t>6/4/2026</a:t>
             </a:fld>
             <a:endParaRPr lang="en-US"/>
           </a:p>
@@ -3084,7 +3077,7 @@
 </file>
 
 <file path=ppt/slides/slide1.xml><?xml version="1.0" encoding="utf-8"?>
-<p:sld xmlns:a="http://schemas.openxmlformats.org/drawingml/2006/main" xmlns:p="http://schemas.openxmlformats.org/presentationml/2006/main" xmlns:r="http://schemas.openxmlformats.org/officeDocument/2006/relationships">
+<p:sld xmlns:a="http://schemas.openxmlformats.org/drawingml/2006/main" xmlns:r="http://schemas.openxmlformats.org/officeDocument/2006/relationships" xmlns:p="http://schemas.openxmlformats.org/presentationml/2006/main">
   <p:cSld>
     <p:spTree>
       <p:nvGrpSpPr>
@@ -3092,7 +3085,14 @@
         <p:cNvGrpSpPr/>
         <p:nvPr/>
       </p:nvGrpSpPr>
-      <p:grpSpPr/>
+      <p:grpSpPr>
+        <a:xfrm>
+          <a:off x="0" y="0"/>
+          <a:ext cx="0" cy="0"/>
+          <a:chOff x="0" y="0"/>
+          <a:chExt cx="0" cy="0"/>
+        </a:xfrm>
+      </p:grpSpPr>
       <p:sp>
         <p:nvSpPr>
           <p:cNvPr id="2" name="Rectangle 1"/>
@@ -3134,6 +3134,7 @@
           <a:lstStyle/>
           <a:p>
             <a:pPr algn="ctr"/>
+            <a:endParaRPr/>
           </a:p>
         </p:txBody>
       </p:sp>
@@ -3178,6 +3179,7 @@
           <a:lstStyle/>
           <a:p>
             <a:pPr algn="ctr"/>
+            <a:endParaRPr/>
           </a:p>
         </p:txBody>
       </p:sp>
@@ -3222,6 +3224,7 @@
           <a:lstStyle/>
           <a:p>
             <a:pPr algn="ctr"/>
+            <a:endParaRPr/>
           </a:p>
         </p:txBody>
       </p:sp>
@@ -3242,7 +3245,7 @@
           <a:noFill/>
         </p:spPr>
         <p:txBody>
-          <a:bodyPr wrap="square" anchor="t" lIns="50800" rIns="50800" tIns="25400" bIns="25400">
+          <a:bodyPr wrap="square" lIns="50800" tIns="25400" rIns="50800" bIns="25400" anchor="t">
             <a:spAutoFit/>
           </a:bodyPr>
           <a:lstStyle/>
@@ -3284,7 +3287,7 @@
           <a:noFill/>
         </p:spPr>
         <p:txBody>
-          <a:bodyPr wrap="square" anchor="t" lIns="50800" rIns="50800" tIns="25400" bIns="25400">
+          <a:bodyPr wrap="square" lIns="50800" tIns="25400" rIns="50800" bIns="25400" anchor="t">
             <a:spAutoFit/>
           </a:bodyPr>
           <a:lstStyle/>
@@ -3354,6 +3357,7 @@
           <a:lstStyle/>
           <a:p>
             <a:pPr algn="ctr"/>
+            <a:endParaRPr/>
           </a:p>
         </p:txBody>
       </p:sp>
@@ -3374,7 +3378,7 @@
           <a:noFill/>
         </p:spPr>
         <p:txBody>
-          <a:bodyPr wrap="square" anchor="t" lIns="50800" rIns="50800" tIns="25400" bIns="25400">
+          <a:bodyPr wrap="square" lIns="50800" tIns="25400" rIns="50800" bIns="25400" anchor="t">
             <a:spAutoFit/>
           </a:bodyPr>
           <a:lstStyle/>
@@ -3416,7 +3420,7 @@
           <a:noFill/>
         </p:spPr>
         <p:txBody>
-          <a:bodyPr wrap="square" anchor="t" lIns="50800" rIns="50800" tIns="25400" bIns="25400">
+          <a:bodyPr wrap="square" lIns="50800" tIns="25400" rIns="50800" bIns="25400" anchor="t">
             <a:spAutoFit/>
           </a:bodyPr>
           <a:lstStyle/>
@@ -3533,7 +3537,7 @@
           <a:noFill/>
         </p:spPr>
         <p:txBody>
-          <a:bodyPr wrap="square" anchor="t" lIns="50800" rIns="50800" tIns="25400" bIns="25400">
+          <a:bodyPr wrap="square" lIns="50800" tIns="25400" rIns="50800" bIns="25400" anchor="t">
             <a:spAutoFit/>
           </a:bodyPr>
           <a:lstStyle/>
@@ -3575,7 +3579,7 @@
           <a:noFill/>
         </p:spPr>
         <p:txBody>
-          <a:bodyPr wrap="square" anchor="t" lIns="50800" rIns="50800" tIns="25400" bIns="25400">
+          <a:bodyPr wrap="square" lIns="50800" tIns="25400" rIns="50800" bIns="25400" anchor="t">
             <a:spAutoFit/>
           </a:bodyPr>
           <a:lstStyle/>
@@ -3653,7 +3657,7 @@
           <a:noFill/>
         </p:spPr>
         <p:txBody>
-          <a:bodyPr wrap="square" anchor="t" lIns="50800" rIns="50800" tIns="25400" bIns="25400">
+          <a:bodyPr wrap="square" lIns="50800" tIns="25400" rIns="50800" bIns="25400" anchor="t">
             <a:spAutoFit/>
           </a:bodyPr>
           <a:lstStyle/>
@@ -3695,7 +3699,7 @@
           <a:noFill/>
         </p:spPr>
         <p:txBody>
-          <a:bodyPr wrap="square" anchor="t" lIns="50800" rIns="50800" tIns="25400" bIns="25400">
+          <a:bodyPr wrap="square" lIns="50800" tIns="25400" rIns="50800" bIns="25400" anchor="t">
             <a:spAutoFit/>
           </a:bodyPr>
           <a:lstStyle/>
@@ -3775,7 +3779,7 @@
           <a:noFill/>
         </p:spPr>
         <p:txBody>
-          <a:bodyPr wrap="square" anchor="t" lIns="50800" rIns="50800" tIns="25400" bIns="25400">
+          <a:bodyPr wrap="square" lIns="50800" tIns="25400" rIns="50800" bIns="25400" anchor="t">
             <a:spAutoFit/>
           </a:bodyPr>
           <a:lstStyle/>
@@ -3843,6 +3847,7 @@
           <a:lstStyle/>
           <a:p>
             <a:pPr algn="ctr"/>
+            <a:endParaRPr/>
           </a:p>
         </p:txBody>
       </p:sp>
@@ -3863,7 +3868,7 @@
           <a:noFill/>
         </p:spPr>
         <p:txBody>
-          <a:bodyPr wrap="square" anchor="ctr" lIns="50800" rIns="50800" tIns="25400" bIns="25400">
+          <a:bodyPr wrap="square" lIns="50800" tIns="25400" rIns="50800" bIns="25400" anchor="ctr">
             <a:spAutoFit/>
           </a:bodyPr>
           <a:lstStyle/>
@@ -3952,6 +3957,7 @@
           <a:lstStyle/>
           <a:p>
             <a:pPr algn="ctr"/>
+            <a:endParaRPr/>
           </a:p>
         </p:txBody>
       </p:sp>
@@ -3972,7 +3978,7 @@
           <a:noFill/>
         </p:spPr>
         <p:txBody>
-          <a:bodyPr wrap="square" anchor="t" lIns="50800" rIns="50800" tIns="25400" bIns="25400">
+          <a:bodyPr wrap="square" lIns="50800" tIns="25400" rIns="50800" bIns="25400" anchor="t">
             <a:spAutoFit/>
           </a:bodyPr>
           <a:lstStyle/>
@@ -4040,6 +4046,7 @@
           <a:lstStyle/>
           <a:p>
             <a:pPr algn="ctr"/>
+            <a:endParaRPr/>
           </a:p>
         </p:txBody>
       </p:sp>
@@ -4060,7 +4067,7 @@
           <a:noFill/>
         </p:spPr>
         <p:txBody>
-          <a:bodyPr wrap="square" anchor="ctr" lIns="50800" rIns="50800" tIns="25400" bIns="25400">
+          <a:bodyPr wrap="square" lIns="50800" tIns="25400" rIns="50800" bIns="25400" anchor="ctr">
             <a:spAutoFit/>
           </a:bodyPr>
           <a:lstStyle/>
@@ -4147,6 +4154,7 @@
           <a:lstStyle/>
           <a:p>
             <a:pPr algn="ctr"/>
+            <a:endParaRPr/>
           </a:p>
         </p:txBody>
       </p:sp>
@@ -4167,7 +4175,7 @@
           <a:noFill/>
         </p:spPr>
         <p:txBody>
-          <a:bodyPr wrap="square" anchor="ctr" lIns="50800" rIns="50800" tIns="25400" bIns="25400">
+          <a:bodyPr wrap="square" lIns="50800" tIns="25400" rIns="50800" bIns="25400" anchor="ctr">
             <a:spAutoFit/>
           </a:bodyPr>
           <a:lstStyle/>
@@ -4254,6 +4262,7 @@
           <a:lstStyle/>
           <a:p>
             <a:pPr algn="ctr"/>
+            <a:endParaRPr/>
           </a:p>
         </p:txBody>
       </p:sp>
@@ -4274,7 +4283,7 @@
           <a:noFill/>
         </p:spPr>
         <p:txBody>
-          <a:bodyPr wrap="square" anchor="ctr" lIns="50800" rIns="50800" tIns="25400" bIns="25400">
+          <a:bodyPr wrap="square" lIns="50800" tIns="25400" rIns="50800" bIns="25400" anchor="ctr">
             <a:spAutoFit/>
           </a:bodyPr>
           <a:lstStyle/>
@@ -4363,6 +4372,7 @@
           <a:lstStyle/>
           <a:p>
             <a:pPr algn="ctr"/>
+            <a:endParaRPr/>
           </a:p>
         </p:txBody>
       </p:sp>
@@ -4383,7 +4393,7 @@
           <a:noFill/>
         </p:spPr>
         <p:txBody>
-          <a:bodyPr wrap="square" anchor="t" lIns="50800" rIns="50800" tIns="25400" bIns="25400">
+          <a:bodyPr wrap="square" lIns="50800" tIns="25400" rIns="50800" bIns="25400" anchor="t">
             <a:spAutoFit/>
           </a:bodyPr>
           <a:lstStyle/>
@@ -4451,6 +4461,7 @@
           <a:lstStyle/>
           <a:p>
             <a:pPr algn="ctr"/>
+            <a:endParaRPr/>
           </a:p>
         </p:txBody>
       </p:sp>
@@ -4471,7 +4482,7 @@
           <a:noFill/>
         </p:spPr>
         <p:txBody>
-          <a:bodyPr wrap="square" anchor="ctr" lIns="50800" rIns="50800" tIns="25400" bIns="25400">
+          <a:bodyPr wrap="square" lIns="50800" tIns="25400" rIns="50800" bIns="25400" anchor="ctr">
             <a:spAutoFit/>
           </a:bodyPr>
           <a:lstStyle/>
@@ -4558,6 +4569,7 @@
           <a:lstStyle/>
           <a:p>
             <a:pPr algn="ctr"/>
+            <a:endParaRPr/>
           </a:p>
         </p:txBody>
       </p:sp>
@@ -4578,7 +4590,7 @@
           <a:noFill/>
         </p:spPr>
         <p:txBody>
-          <a:bodyPr wrap="square" anchor="ctr" lIns="50800" rIns="50800" tIns="25400" bIns="25400">
+          <a:bodyPr wrap="square" lIns="50800" tIns="25400" rIns="50800" bIns="25400" anchor="ctr">
             <a:spAutoFit/>
           </a:bodyPr>
           <a:lstStyle/>
@@ -4665,6 +4677,7 @@
           <a:lstStyle/>
           <a:p>
             <a:pPr algn="ctr"/>
+            <a:endParaRPr/>
           </a:p>
         </p:txBody>
       </p:sp>
@@ -4685,7 +4698,7 @@
           <a:noFill/>
         </p:spPr>
         <p:txBody>
-          <a:bodyPr wrap="square" anchor="ctr" lIns="50800" rIns="50800" tIns="25400" bIns="25400">
+          <a:bodyPr wrap="square" lIns="50800" tIns="25400" rIns="50800" bIns="25400" anchor="ctr">
             <a:spAutoFit/>
           </a:bodyPr>
           <a:lstStyle/>
@@ -4772,6 +4785,7 @@
           <a:lstStyle/>
           <a:p>
             <a:pPr algn="ctr"/>
+            <a:endParaRPr/>
           </a:p>
         </p:txBody>
       </p:sp>
@@ -4792,7 +4806,7 @@
           <a:noFill/>
         </p:spPr>
         <p:txBody>
-          <a:bodyPr wrap="square" anchor="ctr" lIns="50800" rIns="50800" tIns="25400" bIns="25400">
+          <a:bodyPr wrap="square" lIns="50800" tIns="25400" rIns="50800" bIns="25400" anchor="ctr">
             <a:spAutoFit/>
           </a:bodyPr>
           <a:lstStyle/>
@@ -4879,6 +4893,7 @@
           <a:lstStyle/>
           <a:p>
             <a:pPr algn="ctr"/>
+            <a:endParaRPr/>
           </a:p>
         </p:txBody>
       </p:sp>
@@ -4899,7 +4914,7 @@
           <a:noFill/>
         </p:spPr>
         <p:txBody>
-          <a:bodyPr wrap="square" anchor="ctr" lIns="50800" rIns="50800" tIns="25400" bIns="25400">
+          <a:bodyPr wrap="square" lIns="50800" tIns="25400" rIns="50800" bIns="25400" anchor="ctr">
             <a:spAutoFit/>
           </a:bodyPr>
           <a:lstStyle/>
@@ -4987,6 +5002,7 @@
           <a:lstStyle/>
           <a:p>
             <a:pPr algn="ctr"/>
+            <a:endParaRPr/>
           </a:p>
         </p:txBody>
       </p:sp>
@@ -5007,7 +5023,7 @@
           <a:noFill/>
         </p:spPr>
         <p:txBody>
-          <a:bodyPr wrap="square" anchor="ctr" lIns="50800" rIns="50800" tIns="25400" bIns="25400">
+          <a:bodyPr wrap="square" lIns="50800" tIns="25400" rIns="50800" bIns="25400" anchor="ctr">
             <a:spAutoFit/>
           </a:bodyPr>
           <a:lstStyle/>
@@ -5068,7 +5084,7 @@
           <a:noFill/>
         </p:spPr>
         <p:txBody>
-          <a:bodyPr wrap="square" anchor="t" lIns="50800" rIns="50800" tIns="25400" bIns="25400">
+          <a:bodyPr wrap="square" lIns="50800" tIns="25400" rIns="50800" bIns="25400" anchor="t">
             <a:spAutoFit/>
           </a:bodyPr>
           <a:lstStyle/>
@@ -5138,6 +5154,7 @@
           <a:lstStyle/>
           <a:p>
             <a:pPr algn="ctr"/>
+            <a:endParaRPr/>
           </a:p>
         </p:txBody>
       </p:sp>
@@ -5158,7 +5175,7 @@
           <a:noFill/>
         </p:spPr>
         <p:txBody>
-          <a:bodyPr wrap="square" anchor="t" lIns="50800" rIns="50800" tIns="25400" bIns="25400">
+          <a:bodyPr wrap="square" lIns="50800" tIns="25400" rIns="50800" bIns="25400" anchor="t">
             <a:spAutoFit/>
           </a:bodyPr>
           <a:lstStyle/>
@@ -5226,6 +5243,7 @@
           <a:lstStyle/>
           <a:p>
             <a:pPr algn="ctr"/>
+            <a:endParaRPr/>
           </a:p>
         </p:txBody>
       </p:sp>
@@ -5246,7 +5264,7 @@
           <a:noFill/>
         </p:spPr>
         <p:txBody>
-          <a:bodyPr wrap="square" anchor="ctr" lIns="50800" rIns="50800" tIns="25400" bIns="25400">
+          <a:bodyPr wrap="square" lIns="50800" tIns="25400" rIns="50800" bIns="25400" anchor="ctr">
             <a:spAutoFit/>
           </a:bodyPr>
           <a:lstStyle/>
@@ -5333,6 +5351,7 @@
           <a:lstStyle/>
           <a:p>
             <a:pPr algn="ctr"/>
+            <a:endParaRPr/>
           </a:p>
         </p:txBody>
       </p:sp>
@@ -5353,7 +5372,7 @@
           <a:noFill/>
         </p:spPr>
         <p:txBody>
-          <a:bodyPr wrap="square" anchor="ctr" lIns="50800" rIns="50800" tIns="25400" bIns="25400">
+          <a:bodyPr wrap="square" lIns="50800" tIns="25400" rIns="50800" bIns="25400" anchor="ctr">
             <a:spAutoFit/>
           </a:bodyPr>
           <a:lstStyle/>
@@ -5440,6 +5459,7 @@
           <a:lstStyle/>
           <a:p>
             <a:pPr algn="ctr"/>
+            <a:endParaRPr/>
           </a:p>
         </p:txBody>
       </p:sp>
@@ -5460,7 +5480,7 @@
           <a:noFill/>
         </p:spPr>
         <p:txBody>
-          <a:bodyPr wrap="square" anchor="ctr" lIns="50800" rIns="50800" tIns="25400" bIns="25400">
+          <a:bodyPr wrap="square" lIns="50800" tIns="25400" rIns="50800" bIns="25400" anchor="ctr">
             <a:spAutoFit/>
           </a:bodyPr>
           <a:lstStyle/>
@@ -5547,6 +5567,7 @@
           <a:lstStyle/>
           <a:p>
             <a:pPr algn="ctr"/>
+            <a:endParaRPr/>
           </a:p>
         </p:txBody>
       </p:sp>
@@ -5567,7 +5588,7 @@
           <a:noFill/>
         </p:spPr>
         <p:txBody>
-          <a:bodyPr wrap="square" anchor="ctr" lIns="50800" rIns="50800" tIns="25400" bIns="25400">
+          <a:bodyPr wrap="square" lIns="50800" tIns="25400" rIns="50800" bIns="25400" anchor="ctr">
             <a:spAutoFit/>
           </a:bodyPr>
           <a:lstStyle/>
@@ -5765,6 +5786,7 @@
           <a:lstStyle/>
           <a:p>
             <a:pPr algn="ctr"/>
+            <a:endParaRPr/>
           </a:p>
         </p:txBody>
       </p:sp>
@@ -5785,7 +5807,7 @@
           <a:noFill/>
         </p:spPr>
         <p:txBody>
-          <a:bodyPr wrap="square" anchor="ctr" lIns="50800" rIns="50800" tIns="25400" bIns="25400">
+          <a:bodyPr wrap="square" lIns="50800" tIns="25400" rIns="50800" bIns="25400" anchor="ctr">
             <a:spAutoFit/>
           </a:bodyPr>
           <a:lstStyle/>
@@ -5828,7 +5850,7 @@
 </file>
 
 <file path=ppt/slides/slide2.xml><?xml version="1.0" encoding="utf-8"?>
-<p:sld xmlns:a="http://schemas.openxmlformats.org/drawingml/2006/main" xmlns:p="http://schemas.openxmlformats.org/presentationml/2006/main" xmlns:r="http://schemas.openxmlformats.org/officeDocument/2006/relationships">
+<p:sld xmlns:a="http://schemas.openxmlformats.org/drawingml/2006/main" xmlns:r="http://schemas.openxmlformats.org/officeDocument/2006/relationships" xmlns:p="http://schemas.openxmlformats.org/presentationml/2006/main">
   <p:cSld>
     <p:spTree>
       <p:nvGrpSpPr>
@@ -5836,7 +5858,14 @@
         <p:cNvGrpSpPr/>
         <p:nvPr/>
       </p:nvGrpSpPr>
-      <p:grpSpPr/>
+      <p:grpSpPr>
+        <a:xfrm>
+          <a:off x="0" y="0"/>
+          <a:ext cx="0" cy="0"/>
+          <a:chOff x="0" y="0"/>
+          <a:chExt cx="0" cy="0"/>
+        </a:xfrm>
+      </p:grpSpPr>
       <p:sp>
         <p:nvSpPr>
           <p:cNvPr id="2" name="Rectangle 1"/>
@@ -5878,6 +5907,7 @@
           <a:lstStyle/>
           <a:p>
             <a:pPr algn="ctr"/>
+            <a:endParaRPr/>
           </a:p>
         </p:txBody>
       </p:sp>
@@ -5922,6 +5952,7 @@
           <a:lstStyle/>
           <a:p>
             <a:pPr algn="ctr"/>
+            <a:endParaRPr/>
           </a:p>
         </p:txBody>
       </p:sp>
@@ -5966,6 +5997,7 @@
           <a:lstStyle/>
           <a:p>
             <a:pPr algn="ctr"/>
+            <a:endParaRPr/>
           </a:p>
         </p:txBody>
       </p:sp>
@@ -5986,7 +6018,7 @@
           <a:noFill/>
         </p:spPr>
         <p:txBody>
-          <a:bodyPr wrap="square" anchor="t" lIns="50800" rIns="50800" tIns="25400" bIns="25400">
+          <a:bodyPr wrap="square" lIns="50800" tIns="25400" rIns="50800" bIns="25400" anchor="t">
             <a:spAutoFit/>
           </a:bodyPr>
           <a:lstStyle/>
@@ -6028,7 +6060,7 @@
           <a:noFill/>
         </p:spPr>
         <p:txBody>
-          <a:bodyPr wrap="square" anchor="t" lIns="50800" rIns="50800" tIns="25400" bIns="25400">
+          <a:bodyPr wrap="square" lIns="50800" tIns="25400" rIns="50800" bIns="25400" anchor="t">
             <a:spAutoFit/>
           </a:bodyPr>
           <a:lstStyle/>
@@ -6070,7 +6102,7 @@
           <a:noFill/>
         </p:spPr>
         <p:txBody>
-          <a:bodyPr wrap="square" anchor="t" lIns="50800" rIns="50800" tIns="25400" bIns="25400">
+          <a:bodyPr wrap="square" lIns="50800" tIns="25400" rIns="50800" bIns="25400" anchor="t">
             <a:spAutoFit/>
           </a:bodyPr>
           <a:lstStyle/>
@@ -6149,6 +6181,7 @@
           <a:lstStyle/>
           <a:p>
             <a:pPr algn="ctr"/>
+            <a:endParaRPr/>
           </a:p>
         </p:txBody>
       </p:sp>
@@ -6195,6 +6228,7 @@
           <a:lstStyle/>
           <a:p>
             <a:pPr algn="ctr"/>
+            <a:endParaRPr/>
           </a:p>
         </p:txBody>
       </p:sp>
@@ -6215,7 +6249,7 @@
           <a:noFill/>
         </p:spPr>
         <p:txBody>
-          <a:bodyPr wrap="square" anchor="ctr" lIns="50800" rIns="50800" tIns="25400" bIns="25400">
+          <a:bodyPr wrap="square" lIns="50800" tIns="25400" rIns="50800" bIns="25400" anchor="ctr">
             <a:spAutoFit/>
           </a:bodyPr>
           <a:lstStyle/>
@@ -6257,7 +6291,7 @@
           <a:noFill/>
         </p:spPr>
         <p:txBody>
-          <a:bodyPr wrap="square" anchor="t" lIns="50800" rIns="50800" tIns="25400" bIns="25400">
+          <a:bodyPr wrap="square" lIns="50800" tIns="25400" rIns="50800" bIns="25400" anchor="t">
             <a:spAutoFit/>
           </a:bodyPr>
           <a:lstStyle/>
@@ -6325,6 +6359,7 @@
           <a:lstStyle/>
           <a:p>
             <a:pPr algn="ctr"/>
+            <a:endParaRPr/>
           </a:p>
         </p:txBody>
       </p:sp>
@@ -6345,7 +6380,7 @@
           <a:noFill/>
         </p:spPr>
         <p:txBody>
-          <a:bodyPr wrap="square" anchor="ctr" lIns="50800" rIns="50800" tIns="25400" bIns="25400">
+          <a:bodyPr wrap="square" lIns="50800" tIns="25400" rIns="50800" bIns="25400" anchor="ctr">
             <a:spAutoFit/>
           </a:bodyPr>
           <a:lstStyle/>
@@ -6387,7 +6422,7 @@
           <a:noFill/>
         </p:spPr>
         <p:txBody>
-          <a:bodyPr wrap="square" anchor="t" lIns="50800" rIns="50800" tIns="25400" bIns="25400">
+          <a:bodyPr wrap="square" lIns="50800" tIns="25400" rIns="50800" bIns="25400" anchor="t">
             <a:spAutoFit/>
           </a:bodyPr>
           <a:lstStyle/>
@@ -6550,6 +6585,7 @@
           <a:lstStyle/>
           <a:p>
             <a:pPr algn="ctr"/>
+            <a:endParaRPr/>
           </a:p>
         </p:txBody>
       </p:sp>
@@ -6570,7 +6606,7 @@
           <a:noFill/>
         </p:spPr>
         <p:txBody>
-          <a:bodyPr wrap="square" anchor="ctr" lIns="50800" rIns="50800" tIns="25400" bIns="25400">
+          <a:bodyPr wrap="square" lIns="50800" tIns="25400" rIns="50800" bIns="25400" anchor="ctr">
             <a:spAutoFit/>
           </a:bodyPr>
           <a:lstStyle/>
@@ -6649,6 +6685,7 @@
           <a:lstStyle/>
           <a:p>
             <a:pPr algn="ctr"/>
+            <a:endParaRPr/>
           </a:p>
         </p:txBody>
       </p:sp>
@@ -6695,6 +6732,7 @@
           <a:lstStyle/>
           <a:p>
             <a:pPr algn="ctr"/>
+            <a:endParaRPr/>
           </a:p>
         </p:txBody>
       </p:sp>
@@ -6715,7 +6753,7 @@
           <a:noFill/>
         </p:spPr>
         <p:txBody>
-          <a:bodyPr wrap="square" anchor="ctr" lIns="50800" rIns="50800" tIns="25400" bIns="25400">
+          <a:bodyPr wrap="square" lIns="50800" tIns="25400" rIns="50800" bIns="25400" anchor="ctr">
             <a:spAutoFit/>
           </a:bodyPr>
           <a:lstStyle/>
@@ -6757,7 +6795,7 @@
           <a:noFill/>
         </p:spPr>
         <p:txBody>
-          <a:bodyPr wrap="square" anchor="t" lIns="50800" rIns="50800" tIns="25400" bIns="25400">
+          <a:bodyPr wrap="square" lIns="50800" tIns="25400" rIns="50800" bIns="25400" anchor="t">
             <a:spAutoFit/>
           </a:bodyPr>
           <a:lstStyle/>
@@ -6825,6 +6863,7 @@
           <a:lstStyle/>
           <a:p>
             <a:pPr algn="ctr"/>
+            <a:endParaRPr/>
           </a:p>
         </p:txBody>
       </p:sp>
@@ -6845,7 +6884,7 @@
           <a:noFill/>
         </p:spPr>
         <p:txBody>
-          <a:bodyPr wrap="square" anchor="ctr" lIns="50800" rIns="50800" tIns="25400" bIns="25400">
+          <a:bodyPr wrap="square" lIns="50800" tIns="25400" rIns="50800" bIns="25400" anchor="ctr">
             <a:spAutoFit/>
           </a:bodyPr>
           <a:lstStyle/>
@@ -6887,7 +6926,7 @@
           <a:noFill/>
         </p:spPr>
         <p:txBody>
-          <a:bodyPr wrap="square" anchor="t" lIns="50800" rIns="50800" tIns="25400" bIns="25400">
+          <a:bodyPr wrap="square" lIns="50800" tIns="25400" rIns="50800" bIns="25400" anchor="t">
             <a:spAutoFit/>
           </a:bodyPr>
           <a:lstStyle/>
@@ -7050,6 +7089,7 @@
           <a:lstStyle/>
           <a:p>
             <a:pPr algn="ctr"/>
+            <a:endParaRPr/>
           </a:p>
         </p:txBody>
       </p:sp>
@@ -7070,7 +7110,7 @@
           <a:noFill/>
         </p:spPr>
         <p:txBody>
-          <a:bodyPr wrap="square" anchor="ctr" lIns="50800" rIns="50800" tIns="25400" bIns="25400">
+          <a:bodyPr wrap="square" lIns="50800" tIns="25400" rIns="50800" bIns="25400" anchor="ctr">
             <a:spAutoFit/>
           </a:bodyPr>
           <a:lstStyle/>
@@ -7149,6 +7189,7 @@
           <a:lstStyle/>
           <a:p>
             <a:pPr algn="ctr"/>
+            <a:endParaRPr/>
           </a:p>
         </p:txBody>
       </p:sp>
@@ -7195,6 +7236,7 @@
           <a:lstStyle/>
           <a:p>
             <a:pPr algn="ctr"/>
+            <a:endParaRPr/>
           </a:p>
         </p:txBody>
       </p:sp>
@@ -7215,7 +7257,7 @@
           <a:noFill/>
         </p:spPr>
         <p:txBody>
-          <a:bodyPr wrap="square" anchor="ctr" lIns="50800" rIns="50800" tIns="25400" bIns="25400">
+          <a:bodyPr wrap="square" lIns="50800" tIns="25400" rIns="50800" bIns="25400" anchor="ctr">
             <a:spAutoFit/>
           </a:bodyPr>
           <a:lstStyle/>
@@ -7257,7 +7299,7 @@
           <a:noFill/>
         </p:spPr>
         <p:txBody>
-          <a:bodyPr wrap="square" anchor="t" lIns="50800" rIns="50800" tIns="25400" bIns="25400">
+          <a:bodyPr wrap="square" lIns="50800" tIns="25400" rIns="50800" bIns="25400" anchor="t">
             <a:spAutoFit/>
           </a:bodyPr>
           <a:lstStyle/>
@@ -7325,6 +7367,7 @@
           <a:lstStyle/>
           <a:p>
             <a:pPr algn="ctr"/>
+            <a:endParaRPr/>
           </a:p>
         </p:txBody>
       </p:sp>
@@ -7345,7 +7388,7 @@
           <a:noFill/>
         </p:spPr>
         <p:txBody>
-          <a:bodyPr wrap="square" anchor="ctr" lIns="50800" rIns="50800" tIns="25400" bIns="25400">
+          <a:bodyPr wrap="square" lIns="50800" tIns="25400" rIns="50800" bIns="25400" anchor="ctr">
             <a:spAutoFit/>
           </a:bodyPr>
           <a:lstStyle/>
@@ -7387,7 +7430,7 @@
           <a:noFill/>
         </p:spPr>
         <p:txBody>
-          <a:bodyPr wrap="square" anchor="t" lIns="50800" rIns="50800" tIns="25400" bIns="25400">
+          <a:bodyPr wrap="square" lIns="50800" tIns="25400" rIns="50800" bIns="25400" anchor="t">
             <a:spAutoFit/>
           </a:bodyPr>
           <a:lstStyle/>
@@ -7550,6 +7593,7 @@
           <a:lstStyle/>
           <a:p>
             <a:pPr algn="ctr"/>
+            <a:endParaRPr/>
           </a:p>
         </p:txBody>
       </p:sp>
@@ -7570,7 +7614,7 @@
           <a:noFill/>
         </p:spPr>
         <p:txBody>
-          <a:bodyPr wrap="square" anchor="ctr" lIns="50800" rIns="50800" tIns="25400" bIns="25400">
+          <a:bodyPr wrap="square" lIns="50800" tIns="25400" rIns="50800" bIns="25400" anchor="ctr">
             <a:spAutoFit/>
           </a:bodyPr>
           <a:lstStyle/>
@@ -7647,6 +7691,7 @@
           <a:lstStyle/>
           <a:p>
             <a:pPr algn="ctr"/>
+            <a:endParaRPr/>
           </a:p>
         </p:txBody>
       </p:sp>
@@ -7667,7 +7712,7 @@
           <a:noFill/>
         </p:spPr>
         <p:txBody>
-          <a:bodyPr wrap="square" anchor="ctr" lIns="50800" rIns="50800" tIns="25400" bIns="25400">
+          <a:bodyPr wrap="square" lIns="50800" tIns="25400" rIns="50800" bIns="25400" anchor="ctr">
             <a:spAutoFit/>
           </a:bodyPr>
           <a:lstStyle/>
@@ -7710,7 +7755,7 @@
 </file>
 
 <file path=ppt/slides/slide3.xml><?xml version="1.0" encoding="utf-8"?>
-<p:sld xmlns:a="http://schemas.openxmlformats.org/drawingml/2006/main" xmlns:p="http://schemas.openxmlformats.org/presentationml/2006/main" xmlns:r="http://schemas.openxmlformats.org/officeDocument/2006/relationships">
+<p:sld xmlns:a="http://schemas.openxmlformats.org/drawingml/2006/main" xmlns:r="http://schemas.openxmlformats.org/officeDocument/2006/relationships" xmlns:p="http://schemas.openxmlformats.org/presentationml/2006/main">
   <p:cSld>
     <p:spTree>
       <p:nvGrpSpPr>
@@ -7718,7 +7763,14 @@
         <p:cNvGrpSpPr/>
         <p:nvPr/>
       </p:nvGrpSpPr>
-      <p:grpSpPr/>
+      <p:grpSpPr>
+        <a:xfrm>
+          <a:off x="0" y="0"/>
+          <a:ext cx="0" cy="0"/>
+          <a:chOff x="0" y="0"/>
+          <a:chExt cx="0" cy="0"/>
+        </a:xfrm>
+      </p:grpSpPr>
       <p:sp>
         <p:nvSpPr>
           <p:cNvPr id="2" name="Rectangle 1"/>
@@ -7760,6 +7812,7 @@
           <a:lstStyle/>
           <a:p>
             <a:pPr algn="ctr"/>
+            <a:endParaRPr/>
           </a:p>
         </p:txBody>
       </p:sp>
@@ -7804,6 +7857,7 @@
           <a:lstStyle/>
           <a:p>
             <a:pPr algn="ctr"/>
+            <a:endParaRPr/>
           </a:p>
         </p:txBody>
       </p:sp>
@@ -7848,6 +7902,7 @@
           <a:lstStyle/>
           <a:p>
             <a:pPr algn="ctr"/>
+            <a:endParaRPr/>
           </a:p>
         </p:txBody>
       </p:sp>
@@ -7868,7 +7923,7 @@
           <a:noFill/>
         </p:spPr>
         <p:txBody>
-          <a:bodyPr wrap="square" anchor="t" lIns="50800" rIns="50800" tIns="25400" bIns="25400">
+          <a:bodyPr wrap="square" lIns="50800" tIns="25400" rIns="50800" bIns="25400" anchor="t">
             <a:spAutoFit/>
           </a:bodyPr>
           <a:lstStyle/>
@@ -7910,7 +7965,7 @@
           <a:noFill/>
         </p:spPr>
         <p:txBody>
-          <a:bodyPr wrap="square" anchor="t" lIns="50800" rIns="50800" tIns="25400" bIns="25400">
+          <a:bodyPr wrap="square" lIns="50800" tIns="25400" rIns="50800" bIns="25400" anchor="t">
             <a:spAutoFit/>
           </a:bodyPr>
           <a:lstStyle/>
@@ -7952,7 +8007,7 @@
           <a:noFill/>
         </p:spPr>
         <p:txBody>
-          <a:bodyPr wrap="square" anchor="t" lIns="50800" rIns="50800" tIns="25400" bIns="25400">
+          <a:bodyPr wrap="square" lIns="50800" tIns="25400" rIns="50800" bIns="25400" anchor="t">
             <a:spAutoFit/>
           </a:bodyPr>
           <a:lstStyle/>
@@ -8031,6 +8086,7 @@
           <a:lstStyle/>
           <a:p>
             <a:pPr algn="ctr"/>
+            <a:endParaRPr/>
           </a:p>
         </p:txBody>
       </p:sp>
@@ -8077,6 +8133,7 @@
           <a:lstStyle/>
           <a:p>
             <a:pPr algn="ctr"/>
+            <a:endParaRPr/>
           </a:p>
         </p:txBody>
       </p:sp>
@@ -8097,7 +8154,7 @@
           <a:noFill/>
         </p:spPr>
         <p:txBody>
-          <a:bodyPr wrap="square" anchor="ctr" lIns="50800" rIns="50800" tIns="25400" bIns="25400">
+          <a:bodyPr wrap="square" lIns="50800" tIns="25400" rIns="50800" bIns="25400" anchor="ctr">
             <a:spAutoFit/>
           </a:bodyPr>
           <a:lstStyle/>
@@ -8148,7 +8205,7 @@
           <a:noFill/>
         </p:spPr>
         <p:txBody>
-          <a:bodyPr wrap="square" anchor="t" lIns="50800" rIns="50800" tIns="25400" bIns="25400">
+          <a:bodyPr wrap="square" lIns="50800" tIns="25400" rIns="50800" bIns="25400" anchor="t">
             <a:spAutoFit/>
           </a:bodyPr>
           <a:lstStyle/>
@@ -8216,6 +8273,7 @@
           <a:lstStyle/>
           <a:p>
             <a:pPr algn="ctr"/>
+            <a:endParaRPr/>
           </a:p>
         </p:txBody>
       </p:sp>
@@ -8260,6 +8318,7 @@
           <a:lstStyle/>
           <a:p>
             <a:pPr algn="ctr"/>
+            <a:endParaRPr/>
           </a:p>
         </p:txBody>
       </p:sp>
@@ -8280,7 +8339,7 @@
           <a:noFill/>
         </p:spPr>
         <p:txBody>
-          <a:bodyPr wrap="square" anchor="ctr" lIns="50800" rIns="50800" tIns="25400" bIns="25400">
+          <a:bodyPr wrap="square" lIns="50800" tIns="25400" rIns="50800" bIns="25400" anchor="ctr">
             <a:spAutoFit/>
           </a:bodyPr>
           <a:lstStyle/>
@@ -8367,6 +8426,7 @@
           <a:lstStyle/>
           <a:p>
             <a:pPr algn="ctr"/>
+            <a:endParaRPr/>
           </a:p>
         </p:txBody>
       </p:sp>
@@ -8411,6 +8471,7 @@
           <a:lstStyle/>
           <a:p>
             <a:pPr algn="ctr"/>
+            <a:endParaRPr/>
           </a:p>
         </p:txBody>
       </p:sp>
@@ -8431,7 +8492,7 @@
           <a:noFill/>
         </p:spPr>
         <p:txBody>
-          <a:bodyPr wrap="square" anchor="ctr" lIns="50800" rIns="50800" tIns="25400" bIns="25400">
+          <a:bodyPr wrap="square" lIns="50800" tIns="25400" rIns="50800" bIns="25400" anchor="ctr">
             <a:spAutoFit/>
           </a:bodyPr>
           <a:lstStyle/>
@@ -8518,6 +8579,7 @@
           <a:lstStyle/>
           <a:p>
             <a:pPr algn="ctr"/>
+            <a:endParaRPr/>
           </a:p>
         </p:txBody>
       </p:sp>
@@ -8562,6 +8624,7 @@
           <a:lstStyle/>
           <a:p>
             <a:pPr algn="ctr"/>
+            <a:endParaRPr/>
           </a:p>
         </p:txBody>
       </p:sp>
@@ -8582,7 +8645,7 @@
           <a:noFill/>
         </p:spPr>
         <p:txBody>
-          <a:bodyPr wrap="square" anchor="ctr" lIns="50800" rIns="50800" tIns="25400" bIns="25400">
+          <a:bodyPr wrap="square" lIns="50800" tIns="25400" rIns="50800" bIns="25400" anchor="ctr">
             <a:spAutoFit/>
           </a:bodyPr>
           <a:lstStyle/>
@@ -8671,6 +8734,7 @@
           <a:lstStyle/>
           <a:p>
             <a:pPr algn="ctr"/>
+            <a:endParaRPr/>
           </a:p>
         </p:txBody>
       </p:sp>
@@ -8717,6 +8781,7 @@
           <a:lstStyle/>
           <a:p>
             <a:pPr algn="ctr"/>
+            <a:endParaRPr/>
           </a:p>
         </p:txBody>
       </p:sp>
@@ -8737,7 +8802,7 @@
           <a:noFill/>
         </p:spPr>
         <p:txBody>
-          <a:bodyPr wrap="square" anchor="ctr" lIns="50800" rIns="50800" tIns="25400" bIns="25400">
+          <a:bodyPr wrap="square" lIns="50800" tIns="25400" rIns="50800" bIns="25400" anchor="ctr">
             <a:spAutoFit/>
           </a:bodyPr>
           <a:lstStyle/>
@@ -8788,7 +8853,7 @@
           <a:noFill/>
         </p:spPr>
         <p:txBody>
-          <a:bodyPr wrap="square" anchor="t" lIns="50800" rIns="50800" tIns="25400" bIns="25400">
+          <a:bodyPr wrap="square" lIns="50800" tIns="25400" rIns="50800" bIns="25400" anchor="t">
             <a:spAutoFit/>
           </a:bodyPr>
           <a:lstStyle/>
@@ -8874,6 +8939,7 @@
           <a:lstStyle/>
           <a:p>
             <a:pPr algn="ctr"/>
+            <a:endParaRPr/>
           </a:p>
         </p:txBody>
       </p:sp>
@@ -8918,6 +8984,7 @@
           <a:lstStyle/>
           <a:p>
             <a:pPr algn="ctr"/>
+            <a:endParaRPr/>
           </a:p>
         </p:txBody>
       </p:sp>
@@ -8938,7 +9005,7 @@
           <a:noFill/>
         </p:spPr>
         <p:txBody>
-          <a:bodyPr wrap="square" anchor="ctr" lIns="50800" rIns="50800" tIns="25400" bIns="25400">
+          <a:bodyPr wrap="square" lIns="50800" tIns="25400" rIns="50800" bIns="25400" anchor="ctr">
             <a:spAutoFit/>
           </a:bodyPr>
           <a:lstStyle/>
@@ -9025,6 +9092,7 @@
           <a:lstStyle/>
           <a:p>
             <a:pPr algn="ctr"/>
+            <a:endParaRPr/>
           </a:p>
         </p:txBody>
       </p:sp>
@@ -9069,6 +9137,7 @@
           <a:lstStyle/>
           <a:p>
             <a:pPr algn="ctr"/>
+            <a:endParaRPr/>
           </a:p>
         </p:txBody>
       </p:sp>
@@ -9089,7 +9158,7 @@
           <a:noFill/>
         </p:spPr>
         <p:txBody>
-          <a:bodyPr wrap="square" anchor="ctr" lIns="50800" rIns="50800" tIns="25400" bIns="25400">
+          <a:bodyPr wrap="square" lIns="50800" tIns="25400" rIns="50800" bIns="25400" anchor="ctr">
             <a:spAutoFit/>
           </a:bodyPr>
           <a:lstStyle/>
@@ -9176,6 +9245,7 @@
           <a:lstStyle/>
           <a:p>
             <a:pPr algn="ctr"/>
+            <a:endParaRPr/>
           </a:p>
         </p:txBody>
       </p:sp>
@@ -9220,6 +9290,7 @@
           <a:lstStyle/>
           <a:p>
             <a:pPr algn="ctr"/>
+            <a:endParaRPr/>
           </a:p>
         </p:txBody>
       </p:sp>
@@ -9240,7 +9311,7 @@
           <a:noFill/>
         </p:spPr>
         <p:txBody>
-          <a:bodyPr wrap="square" anchor="ctr" lIns="50800" rIns="50800" tIns="25400" bIns="25400">
+          <a:bodyPr wrap="square" lIns="50800" tIns="25400" rIns="50800" bIns="25400" anchor="ctr">
             <a:spAutoFit/>
           </a:bodyPr>
           <a:lstStyle/>
@@ -9327,6 +9398,7 @@
           <a:lstStyle/>
           <a:p>
             <a:pPr algn="ctr"/>
+            <a:endParaRPr/>
           </a:p>
         </p:txBody>
       </p:sp>
@@ -9347,7 +9419,7 @@
           <a:noFill/>
         </p:spPr>
         <p:txBody>
-          <a:bodyPr wrap="square" anchor="ctr" lIns="50800" rIns="50800" tIns="25400" bIns="25400">
+          <a:bodyPr wrap="square" lIns="50800" tIns="25400" rIns="50800" bIns="25400" anchor="ctr">
             <a:spAutoFit/>
           </a:bodyPr>
           <a:lstStyle/>
@@ -9390,7 +9462,7 @@
 </file>
 
 <file path=ppt/slides/slide4.xml><?xml version="1.0" encoding="utf-8"?>
-<p:sld xmlns:a="http://schemas.openxmlformats.org/drawingml/2006/main" xmlns:p="http://schemas.openxmlformats.org/presentationml/2006/main" xmlns:r="http://schemas.openxmlformats.org/officeDocument/2006/relationships">
+<p:sld xmlns:a="http://schemas.openxmlformats.org/drawingml/2006/main" xmlns:r="http://schemas.openxmlformats.org/officeDocument/2006/relationships" xmlns:p="http://schemas.openxmlformats.org/presentationml/2006/main">
   <p:cSld>
     <p:spTree>
       <p:nvGrpSpPr>
@@ -9398,7 +9470,14 @@
         <p:cNvGrpSpPr/>
         <p:nvPr/>
       </p:nvGrpSpPr>
-      <p:grpSpPr/>
+      <p:grpSpPr>
+        <a:xfrm>
+          <a:off x="0" y="0"/>
+          <a:ext cx="0" cy="0"/>
+          <a:chOff x="0" y="0"/>
+          <a:chExt cx="0" cy="0"/>
+        </a:xfrm>
+      </p:grpSpPr>
       <p:sp>
         <p:nvSpPr>
           <p:cNvPr id="2" name="Rectangle 1"/>
@@ -9440,6 +9519,7 @@
           <a:lstStyle/>
           <a:p>
             <a:pPr algn="ctr"/>
+            <a:endParaRPr/>
           </a:p>
         </p:txBody>
       </p:sp>
@@ -9484,6 +9564,7 @@
           <a:lstStyle/>
           <a:p>
             <a:pPr algn="ctr"/>
+            <a:endParaRPr/>
           </a:p>
         </p:txBody>
       </p:sp>
@@ -9528,6 +9609,7 @@
           <a:lstStyle/>
           <a:p>
             <a:pPr algn="ctr"/>
+            <a:endParaRPr/>
           </a:p>
         </p:txBody>
       </p:sp>
@@ -9548,7 +9630,7 @@
           <a:noFill/>
         </p:spPr>
         <p:txBody>
-          <a:bodyPr wrap="square" anchor="t" lIns="50800" rIns="50800" tIns="25400" bIns="25400">
+          <a:bodyPr wrap="square" lIns="50800" tIns="25400" rIns="50800" bIns="25400" anchor="t">
             <a:spAutoFit/>
           </a:bodyPr>
           <a:lstStyle/>
@@ -9590,7 +9672,7 @@
           <a:noFill/>
         </p:spPr>
         <p:txBody>
-          <a:bodyPr wrap="square" anchor="t" lIns="50800" rIns="50800" tIns="25400" bIns="25400">
+          <a:bodyPr wrap="square" lIns="50800" tIns="25400" rIns="50800" bIns="25400" anchor="t">
             <a:spAutoFit/>
           </a:bodyPr>
           <a:lstStyle/>
@@ -9660,6 +9742,7 @@
           <a:lstStyle/>
           <a:p>
             <a:pPr algn="ctr"/>
+            <a:endParaRPr/>
           </a:p>
         </p:txBody>
       </p:sp>
@@ -9680,7 +9763,7 @@
           <a:noFill/>
         </p:spPr>
         <p:txBody>
-          <a:bodyPr wrap="square" anchor="ctr" lIns="50800" rIns="50800" tIns="25400" bIns="25400">
+          <a:bodyPr wrap="square" lIns="50800" tIns="25400" rIns="50800" bIns="25400" anchor="ctr">
             <a:spAutoFit/>
           </a:bodyPr>
           <a:lstStyle/>
@@ -9759,6 +9842,7 @@
           <a:lstStyle/>
           <a:p>
             <a:pPr algn="ctr"/>
+            <a:endParaRPr/>
           </a:p>
         </p:txBody>
       </p:sp>
@@ -9779,7 +9863,7 @@
           <a:noFill/>
         </p:spPr>
         <p:txBody>
-          <a:bodyPr wrap="square" anchor="ctr" lIns="50800" rIns="50800" tIns="25400" bIns="25400">
+          <a:bodyPr wrap="square" lIns="50800" tIns="25400" rIns="50800" bIns="25400" anchor="ctr">
             <a:spAutoFit/>
           </a:bodyPr>
           <a:lstStyle/>
@@ -9858,6 +9942,7 @@
           <a:lstStyle/>
           <a:p>
             <a:pPr algn="ctr"/>
+            <a:endParaRPr/>
           </a:p>
         </p:txBody>
       </p:sp>
@@ -9904,6 +9989,7 @@
           <a:lstStyle/>
           <a:p>
             <a:pPr algn="ctr"/>
+            <a:endParaRPr/>
           </a:p>
         </p:txBody>
       </p:sp>
@@ -9924,7 +10010,7 @@
           <a:noFill/>
         </p:spPr>
         <p:txBody>
-          <a:bodyPr wrap="square" anchor="ctr" lIns="50800" rIns="50800" tIns="25400" bIns="25400">
+          <a:bodyPr wrap="square" lIns="50800" tIns="25400" rIns="50800" bIns="25400" anchor="ctr">
             <a:spAutoFit/>
           </a:bodyPr>
           <a:lstStyle/>
@@ -9966,7 +10052,7 @@
           <a:noFill/>
         </p:spPr>
         <p:txBody>
-          <a:bodyPr wrap="square" anchor="t" lIns="50800" rIns="50800" tIns="25400" bIns="25400">
+          <a:bodyPr wrap="square" lIns="50800" tIns="25400" rIns="50800" bIns="25400" anchor="t">
             <a:spAutoFit/>
           </a:bodyPr>
           <a:lstStyle/>
@@ -10008,7 +10094,7 @@
           <a:noFill/>
         </p:spPr>
         <p:txBody>
-          <a:bodyPr wrap="square" anchor="t" lIns="50800" rIns="50800" tIns="25400" bIns="25400">
+          <a:bodyPr wrap="square" lIns="50800" tIns="25400" rIns="50800" bIns="25400" anchor="t">
             <a:spAutoFit/>
           </a:bodyPr>
           <a:lstStyle/>
@@ -10115,6 +10201,7 @@
           <a:lstStyle/>
           <a:p>
             <a:pPr algn="ctr"/>
+            <a:endParaRPr/>
           </a:p>
         </p:txBody>
       </p:sp>
@@ -10161,6 +10248,7 @@
           <a:lstStyle/>
           <a:p>
             <a:pPr algn="ctr"/>
+            <a:endParaRPr/>
           </a:p>
         </p:txBody>
       </p:sp>
@@ -10181,7 +10269,7 @@
           <a:noFill/>
         </p:spPr>
         <p:txBody>
-          <a:bodyPr wrap="square" anchor="ctr" lIns="50800" rIns="50800" tIns="25400" bIns="25400">
+          <a:bodyPr wrap="square" lIns="50800" tIns="25400" rIns="50800" bIns="25400" anchor="ctr">
             <a:spAutoFit/>
           </a:bodyPr>
           <a:lstStyle/>
@@ -10223,7 +10311,7 @@
           <a:noFill/>
         </p:spPr>
         <p:txBody>
-          <a:bodyPr wrap="square" anchor="t" lIns="50800" rIns="50800" tIns="25400" bIns="25400">
+          <a:bodyPr wrap="square" lIns="50800" tIns="25400" rIns="50800" bIns="25400" anchor="t">
             <a:spAutoFit/>
           </a:bodyPr>
           <a:lstStyle/>
@@ -10265,7 +10353,7 @@
           <a:noFill/>
         </p:spPr>
         <p:txBody>
-          <a:bodyPr wrap="square" anchor="t" lIns="50800" rIns="50800" tIns="25400" bIns="25400">
+          <a:bodyPr wrap="square" lIns="50800" tIns="25400" rIns="50800" bIns="25400" anchor="t">
             <a:spAutoFit/>
           </a:bodyPr>
           <a:lstStyle/>
@@ -10372,6 +10460,7 @@
           <a:lstStyle/>
           <a:p>
             <a:pPr algn="ctr"/>
+            <a:endParaRPr/>
           </a:p>
         </p:txBody>
       </p:sp>
@@ -10418,6 +10507,7 @@
           <a:lstStyle/>
           <a:p>
             <a:pPr algn="ctr"/>
+            <a:endParaRPr/>
           </a:p>
         </p:txBody>
       </p:sp>
@@ -10438,7 +10528,7 @@
           <a:noFill/>
         </p:spPr>
         <p:txBody>
-          <a:bodyPr wrap="square" anchor="ctr" lIns="50800" rIns="50800" tIns="25400" bIns="25400">
+          <a:bodyPr wrap="square" lIns="50800" tIns="25400" rIns="50800" bIns="25400" anchor="ctr">
             <a:spAutoFit/>
           </a:bodyPr>
           <a:lstStyle/>
@@ -10480,7 +10570,7 @@
           <a:noFill/>
         </p:spPr>
         <p:txBody>
-          <a:bodyPr wrap="square" anchor="t" lIns="50800" rIns="50800" tIns="25400" bIns="25400">
+          <a:bodyPr wrap="square" lIns="50800" tIns="25400" rIns="50800" bIns="25400" anchor="t">
             <a:spAutoFit/>
           </a:bodyPr>
           <a:lstStyle/>
@@ -10522,7 +10612,7 @@
           <a:noFill/>
         </p:spPr>
         <p:txBody>
-          <a:bodyPr wrap="square" anchor="t" lIns="50800" rIns="50800" tIns="25400" bIns="25400">
+          <a:bodyPr wrap="square" lIns="50800" tIns="25400" rIns="50800" bIns="25400" anchor="t">
             <a:spAutoFit/>
           </a:bodyPr>
           <a:lstStyle/>
@@ -10629,6 +10719,7 @@
           <a:lstStyle/>
           <a:p>
             <a:pPr algn="ctr"/>
+            <a:endParaRPr/>
           </a:p>
         </p:txBody>
       </p:sp>
@@ -10675,6 +10766,7 @@
           <a:lstStyle/>
           <a:p>
             <a:pPr algn="ctr"/>
+            <a:endParaRPr/>
           </a:p>
         </p:txBody>
       </p:sp>
@@ -10695,7 +10787,7 @@
           <a:noFill/>
         </p:spPr>
         <p:txBody>
-          <a:bodyPr wrap="square" anchor="ctr" lIns="50800" rIns="50800" tIns="25400" bIns="25400">
+          <a:bodyPr wrap="square" lIns="50800" tIns="25400" rIns="50800" bIns="25400" anchor="ctr">
             <a:spAutoFit/>
           </a:bodyPr>
           <a:lstStyle/>
@@ -10737,7 +10829,7 @@
           <a:noFill/>
         </p:spPr>
         <p:txBody>
-          <a:bodyPr wrap="square" anchor="t" lIns="50800" rIns="50800" tIns="25400" bIns="25400">
+          <a:bodyPr wrap="square" lIns="50800" tIns="25400" rIns="50800" bIns="25400" anchor="t">
             <a:spAutoFit/>
           </a:bodyPr>
           <a:lstStyle/>
@@ -10779,7 +10871,7 @@
           <a:noFill/>
         </p:spPr>
         <p:txBody>
-          <a:bodyPr wrap="square" anchor="t" lIns="50800" rIns="50800" tIns="25400" bIns="25400">
+          <a:bodyPr wrap="square" lIns="50800" tIns="25400" rIns="50800" bIns="25400" anchor="t">
             <a:spAutoFit/>
           </a:bodyPr>
           <a:lstStyle/>
@@ -10849,6 +10941,7 @@
           <a:lstStyle/>
           <a:p>
             <a:pPr algn="ctr"/>
+            <a:endParaRPr/>
           </a:p>
         </p:txBody>
       </p:sp>
@@ -10869,7 +10962,7 @@
           <a:noFill/>
         </p:spPr>
         <p:txBody>
-          <a:bodyPr wrap="square" anchor="t" lIns="50800" rIns="50800" tIns="25400" bIns="25400">
+          <a:bodyPr wrap="square" lIns="50800" tIns="25400" rIns="50800" bIns="25400" anchor="t">
             <a:spAutoFit/>
           </a:bodyPr>
           <a:lstStyle/>
@@ -10911,7 +11004,7 @@
           <a:noFill/>
         </p:spPr>
         <p:txBody>
-          <a:bodyPr wrap="square" anchor="t" lIns="50800" rIns="50800" tIns="25400" bIns="25400">
+          <a:bodyPr wrap="square" lIns="50800" tIns="25400" rIns="50800" bIns="25400" anchor="t">
             <a:spAutoFit/>
           </a:bodyPr>
           <a:lstStyle/>
@@ -11018,7 +11111,7 @@
           <a:noFill/>
         </p:spPr>
         <p:txBody>
-          <a:bodyPr wrap="square" anchor="t" lIns="50800" rIns="50800" tIns="25400" bIns="25400">
+          <a:bodyPr wrap="square" lIns="50800" tIns="25400" rIns="50800" bIns="25400" anchor="t">
             <a:spAutoFit/>
           </a:bodyPr>
           <a:lstStyle/>
@@ -11057,6386 +11150,6 @@
                 <a:latin typeface="Segoe UI"/>
               </a:rPr>
               <a:t> writes the final reply — keeping the Action agent’s chart — and every recommendation cites the exact numbers it came from.</a:t>
-            </a:r>
-          </a:p>
-        </p:txBody>
-      </p:sp>
-    </p:spTree>
-  </p:cSld>
-  <p:clrMapOvr>
-    <a:masterClrMapping/>
-  </p:clrMapOvr>
-</p:sld>
-</file>
-
-<file path=ppt/slides/slide5.xml><?xml version="1.0" encoding="utf-8"?>
-<p:sld xmlns:a="http://schemas.openxmlformats.org/drawingml/2006/main" xmlns:p="http://schemas.openxmlformats.org/presentationml/2006/main" xmlns:r="http://schemas.openxmlformats.org/officeDocument/2006/relationships">
-  <p:cSld>
-    <p:spTree>
-      <p:nvGrpSpPr>
-        <p:cNvPr id="1" name=""/>
-        <p:cNvGrpSpPr/>
-        <p:nvPr/>
-      </p:nvGrpSpPr>
-      <p:grpSpPr/>
-      <p:sp>
-        <p:nvSpPr>
-          <p:cNvPr id="2" name="Rectangle 1"/>
-          <p:cNvSpPr/>
-          <p:nvPr/>
-        </p:nvSpPr>
-        <p:spPr>
-          <a:xfrm>
-            <a:off x="0" y="0"/>
-            <a:ext cx="12191695" cy="6858000"/>
-          </a:xfrm>
-          <a:prstGeom prst="rect">
-            <a:avLst/>
-          </a:prstGeom>
-          <a:solidFill>
-            <a:srgbClr val="F4F6FB"/>
-          </a:solidFill>
-          <a:ln>
-            <a:noFill/>
-          </a:ln>
-          <a:effectLst/>
-        </p:spPr>
-        <p:style>
-          <a:lnRef idx="1">
-            <a:schemeClr val="accent1"/>
-          </a:lnRef>
-          <a:fillRef idx="3">
-            <a:schemeClr val="accent1"/>
-          </a:fillRef>
-          <a:effectRef idx="2">
-            <a:schemeClr val="accent1"/>
-          </a:effectRef>
-          <a:fontRef idx="minor">
-            <a:schemeClr val="lt1"/>
-          </a:fontRef>
-        </p:style>
-        <p:txBody>
-          <a:bodyPr rtlCol="0" anchor="ctr"/>
-          <a:lstStyle/>
-          <a:p>
-            <a:pPr algn="ctr"/>
-          </a:p>
-        </p:txBody>
-      </p:sp>
-      <p:sp>
-        <p:nvSpPr>
-          <p:cNvPr id="3" name="Rectangle 2"/>
-          <p:cNvSpPr/>
-          <p:nvPr/>
-        </p:nvSpPr>
-        <p:spPr>
-          <a:xfrm>
-            <a:off x="0" y="0"/>
-            <a:ext cx="12191695" cy="1078992"/>
-          </a:xfrm>
-          <a:prstGeom prst="rect">
-            <a:avLst/>
-          </a:prstGeom>
-          <a:solidFill>
-            <a:srgbClr val="1B1F2A"/>
-          </a:solidFill>
-          <a:ln>
-            <a:noFill/>
-          </a:ln>
-          <a:effectLst/>
-        </p:spPr>
-        <p:style>
-          <a:lnRef idx="1">
-            <a:schemeClr val="accent1"/>
-          </a:lnRef>
-          <a:fillRef idx="3">
-            <a:schemeClr val="accent1"/>
-          </a:fillRef>
-          <a:effectRef idx="2">
-            <a:schemeClr val="accent1"/>
-          </a:effectRef>
-          <a:fontRef idx="minor">
-            <a:schemeClr val="lt1"/>
-          </a:fontRef>
-        </p:style>
-        <p:txBody>
-          <a:bodyPr rtlCol="0" anchor="ctr"/>
-          <a:lstStyle/>
-          <a:p>
-            <a:pPr algn="ctr"/>
-          </a:p>
-        </p:txBody>
-      </p:sp>
-      <p:sp>
-        <p:nvSpPr>
-          <p:cNvPr id="4" name="Rectangle 3"/>
-          <p:cNvSpPr/>
-          <p:nvPr/>
-        </p:nvSpPr>
-        <p:spPr>
-          <a:xfrm>
-            <a:off x="0" y="1024128"/>
-            <a:ext cx="12191695" cy="54864"/>
-          </a:xfrm>
-          <a:prstGeom prst="rect">
-            <a:avLst/>
-          </a:prstGeom>
-          <a:solidFill>
-            <a:srgbClr val="E28A00"/>
-          </a:solidFill>
-          <a:ln>
-            <a:noFill/>
-          </a:ln>
-          <a:effectLst/>
-        </p:spPr>
-        <p:style>
-          <a:lnRef idx="1">
-            <a:schemeClr val="accent1"/>
-          </a:lnRef>
-          <a:fillRef idx="3">
-            <a:schemeClr val="accent1"/>
-          </a:fillRef>
-          <a:effectRef idx="2">
-            <a:schemeClr val="accent1"/>
-          </a:effectRef>
-          <a:fontRef idx="minor">
-            <a:schemeClr val="lt1"/>
-          </a:fontRef>
-        </p:style>
-        <p:txBody>
-          <a:bodyPr rtlCol="0" anchor="ctr"/>
-          <a:lstStyle/>
-          <a:p>
-            <a:pPr algn="ctr"/>
-          </a:p>
-        </p:txBody>
-      </p:sp>
-      <p:sp>
-        <p:nvSpPr>
-          <p:cNvPr id="5" name="TextBox 4"/>
-          <p:cNvSpPr txBox="1"/>
-          <p:nvPr/>
-        </p:nvSpPr>
-        <p:spPr>
-          <a:xfrm>
-            <a:off x="502920" y="146304"/>
-            <a:ext cx="11247120" cy="365760"/>
-          </a:xfrm>
-          <a:prstGeom prst="rect">
-            <a:avLst/>
-          </a:prstGeom>
-          <a:noFill/>
-        </p:spPr>
-        <p:txBody>
-          <a:bodyPr wrap="square" anchor="t" lIns="0" rIns="0" tIns="0" bIns="0">
-            <a:spAutoFit/>
-          </a:bodyPr>
-          <a:lstStyle/>
-          <a:p>
-            <a:pPr algn="l"/>
-            <a:r>
-              <a:rPr sz="1200" b="1">
-                <a:solidFill>
-                  <a:srgbClr val="E28A00"/>
-                </a:solidFill>
-                <a:latin typeface="Segoe UI"/>
-              </a:rPr>
-              <a:t>ZAVA · AGENTIC AI REFERENCE ARCHITECTURE</a:t>
-            </a:r>
-          </a:p>
-        </p:txBody>
-      </p:sp>
-      <p:sp>
-        <p:nvSpPr>
-          <p:cNvPr id="6" name="TextBox 5"/>
-          <p:cNvSpPr txBox="1"/>
-          <p:nvPr/>
-        </p:nvSpPr>
-        <p:spPr>
-          <a:xfrm>
-            <a:off x="502920" y="402336"/>
-            <a:ext cx="11247120" cy="566928"/>
-          </a:xfrm>
-          <a:prstGeom prst="rect">
-            <a:avLst/>
-          </a:prstGeom>
-          <a:noFill/>
-        </p:spPr>
-        <p:txBody>
-          <a:bodyPr wrap="square" anchor="t" lIns="0" rIns="0" tIns="0" bIns="0">
-            <a:spAutoFit/>
-          </a:bodyPr>
-          <a:lstStyle/>
-          <a:p>
-            <a:pPr algn="l"/>
-            <a:r>
-              <a:rPr sz="2300" b="1">
-                <a:solidFill>
-                  <a:srgbClr val="FFFFFF"/>
-                </a:solidFill>
-                <a:latin typeface="Segoe UI"/>
-              </a:rPr>
-              <a:t>The Microsoft agent platform behind this demo — at enterprise scale</a:t>
-            </a:r>
-          </a:p>
-        </p:txBody>
-      </p:sp>
-      <p:sp>
-        <p:nvSpPr>
-          <p:cNvPr id="7" name="Rounded Rectangle 6"/>
-          <p:cNvSpPr/>
-          <p:nvPr/>
-        </p:nvSpPr>
-        <p:spPr>
-          <a:xfrm>
-            <a:off x="411480" y="1280160"/>
-            <a:ext cx="11384280" cy="713232"/>
-          </a:xfrm>
-          <a:prstGeom prst="roundRect">
-            <a:avLst>
-              <a:gd name="adj" fmla="val 10000"/>
-            </a:avLst>
-          </a:prstGeom>
-          <a:solidFill>
-            <a:srgbClr val="EAF0FE"/>
-          </a:solidFill>
-          <a:ln>
-            <a:noFill/>
-          </a:ln>
-          <a:effectLst/>
-        </p:spPr>
-        <p:style>
-          <a:lnRef idx="1">
-            <a:schemeClr val="accent1"/>
-          </a:lnRef>
-          <a:fillRef idx="3">
-            <a:schemeClr val="accent1"/>
-          </a:fillRef>
-          <a:effectRef idx="2">
-            <a:schemeClr val="accent1"/>
-          </a:effectRef>
-          <a:fontRef idx="minor">
-            <a:schemeClr val="lt1"/>
-          </a:fontRef>
-        </p:style>
-        <p:txBody>
-          <a:bodyPr rtlCol="0" anchor="ctr"/>
-          <a:lstStyle/>
-          <a:p>
-            <a:pPr algn="ctr"/>
-          </a:p>
-        </p:txBody>
-      </p:sp>
-      <p:sp>
-        <p:nvSpPr>
-          <p:cNvPr id="8" name="Rounded Rectangle 7"/>
-          <p:cNvSpPr/>
-          <p:nvPr/>
-        </p:nvSpPr>
-        <p:spPr>
-          <a:xfrm>
-            <a:off x="411480" y="1280160"/>
-            <a:ext cx="2423160" cy="713232"/>
-          </a:xfrm>
-          <a:prstGeom prst="roundRect">
-            <a:avLst>
-              <a:gd name="adj" fmla="val 10000"/>
-            </a:avLst>
-          </a:prstGeom>
-          <a:solidFill>
-            <a:srgbClr val="2F6FED"/>
-          </a:solidFill>
-          <a:ln>
-            <a:noFill/>
-          </a:ln>
-          <a:effectLst/>
-        </p:spPr>
-        <p:style>
-          <a:lnRef idx="1">
-            <a:schemeClr val="accent1"/>
-          </a:lnRef>
-          <a:fillRef idx="3">
-            <a:schemeClr val="accent1"/>
-          </a:fillRef>
-          <a:effectRef idx="2">
-            <a:schemeClr val="accent1"/>
-          </a:effectRef>
-          <a:fontRef idx="minor">
-            <a:schemeClr val="lt1"/>
-          </a:fontRef>
-        </p:style>
-        <p:txBody>
-          <a:bodyPr rtlCol="0" anchor="ctr"/>
-          <a:lstStyle/>
-          <a:p>
-            <a:pPr algn="ctr"/>
-          </a:p>
-        </p:txBody>
-      </p:sp>
-      <p:sp>
-        <p:nvSpPr>
-          <p:cNvPr id="9" name="TextBox 8"/>
-          <p:cNvSpPr txBox="1"/>
-          <p:nvPr/>
-        </p:nvSpPr>
-        <p:spPr>
-          <a:xfrm>
-            <a:off x="557784" y="1280160"/>
-            <a:ext cx="2148840" cy="713232"/>
-          </a:xfrm>
-          <a:prstGeom prst="rect">
-            <a:avLst/>
-          </a:prstGeom>
-          <a:noFill/>
-        </p:spPr>
-        <p:txBody>
-          <a:bodyPr wrap="square" anchor="ctr" lIns="0" rIns="0" tIns="0" bIns="0">
-            <a:spAutoFit/>
-          </a:bodyPr>
-          <a:lstStyle/>
-          <a:p>
-            <a:pPr algn="l"/>
-            <a:r>
-              <a:rPr sz="1150" b="1">
-                <a:solidFill>
-                  <a:srgbClr val="FFFFFF"/>
-                </a:solidFill>
-                <a:latin typeface="Segoe UI"/>
-              </a:rPr>
-              <a:t>EXPERIENCE</a:t>
-            </a:r>
-          </a:p>
-          <a:p>
-            <a:pPr algn="l"/>
-            <a:r>
-              <a:rPr sz="800" b="0">
-                <a:solidFill>
-                  <a:srgbClr val="ECF0FB"/>
-                </a:solidFill>
-                <a:latin typeface="Segoe UI"/>
-              </a:rPr>
-              <a:t>how people &amp; apps ask</a:t>
-            </a:r>
-          </a:p>
-        </p:txBody>
-      </p:sp>
-      <p:sp>
-        <p:nvSpPr>
-          <p:cNvPr id="10" name="Rounded Rectangle 9"/>
-          <p:cNvSpPr/>
-          <p:nvPr/>
-        </p:nvSpPr>
-        <p:spPr>
-          <a:xfrm>
-            <a:off x="2999232" y="1380744"/>
-            <a:ext cx="2061971" cy="512064"/>
-          </a:xfrm>
-          <a:prstGeom prst="roundRect">
-            <a:avLst>
-              <a:gd name="adj" fmla="val 16000"/>
-            </a:avLst>
-          </a:prstGeom>
-          <a:solidFill>
-            <a:srgbClr val="2F6FED"/>
-          </a:solidFill>
-          <a:ln>
-            <a:noFill/>
-          </a:ln>
-          <a:effectLst/>
-        </p:spPr>
-        <p:style>
-          <a:lnRef idx="1">
-            <a:schemeClr val="accent1"/>
-          </a:lnRef>
-          <a:fillRef idx="3">
-            <a:schemeClr val="accent1"/>
-          </a:fillRef>
-          <a:effectRef idx="2">
-            <a:schemeClr val="accent1"/>
-          </a:effectRef>
-          <a:fontRef idx="minor">
-            <a:schemeClr val="lt1"/>
-          </a:fontRef>
-        </p:style>
-        <p:txBody>
-          <a:bodyPr rtlCol="0" anchor="ctr"/>
-          <a:lstStyle/>
-          <a:p>
-            <a:pPr algn="ctr"/>
-          </a:p>
-        </p:txBody>
-      </p:sp>
-      <p:sp>
-        <p:nvSpPr>
-          <p:cNvPr id="11" name="TextBox 10"/>
-          <p:cNvSpPr txBox="1"/>
-          <p:nvPr/>
-        </p:nvSpPr>
-        <p:spPr>
-          <a:xfrm>
-            <a:off x="3072384" y="1380744"/>
-            <a:ext cx="1915667" cy="512064"/>
-          </a:xfrm>
-          <a:prstGeom prst="rect">
-            <a:avLst/>
-          </a:prstGeom>
-          <a:noFill/>
-        </p:spPr>
-        <p:txBody>
-          <a:bodyPr wrap="square" anchor="ctr" lIns="0" rIns="0" tIns="0" bIns="0">
-            <a:spAutoFit/>
-          </a:bodyPr>
-          <a:lstStyle/>
-          <a:p>
-            <a:pPr algn="ctr"/>
-            <a:r>
-              <a:rPr sz="1050" b="1">
-                <a:solidFill>
-                  <a:srgbClr val="FFFFFF"/>
-                </a:solidFill>
-                <a:latin typeface="Segoe UI"/>
-              </a:rPr>
-              <a:t>Microsoft 365 Copilot</a:t>
-            </a:r>
-          </a:p>
-          <a:p>
-            <a:pPr algn="ctr"/>
-            <a:r>
-              <a:rPr sz="800" b="0">
-                <a:solidFill>
-                  <a:srgbClr val="ECF0FB"/>
-                </a:solidFill>
-                <a:latin typeface="Segoe UI"/>
-              </a:rPr>
-              <a:t>Teams · Outlook · Word</a:t>
-            </a:r>
-          </a:p>
-        </p:txBody>
-      </p:sp>
-      <p:sp>
-        <p:nvSpPr>
-          <p:cNvPr id="12" name="Rounded Rectangle 11"/>
-          <p:cNvSpPr/>
-          <p:nvPr/>
-        </p:nvSpPr>
-        <p:spPr>
-          <a:xfrm>
-            <a:off x="5189220" y="1380744"/>
-            <a:ext cx="2061971" cy="512064"/>
-          </a:xfrm>
-          <a:prstGeom prst="roundRect">
-            <a:avLst>
-              <a:gd name="adj" fmla="val 16000"/>
-            </a:avLst>
-          </a:prstGeom>
-          <a:solidFill>
-            <a:srgbClr val="2F6FED"/>
-          </a:solidFill>
-          <a:ln>
-            <a:noFill/>
-          </a:ln>
-          <a:effectLst/>
-        </p:spPr>
-        <p:style>
-          <a:lnRef idx="1">
-            <a:schemeClr val="accent1"/>
-          </a:lnRef>
-          <a:fillRef idx="3">
-            <a:schemeClr val="accent1"/>
-          </a:fillRef>
-          <a:effectRef idx="2">
-            <a:schemeClr val="accent1"/>
-          </a:effectRef>
-          <a:fontRef idx="minor">
-            <a:schemeClr val="lt1"/>
-          </a:fontRef>
-        </p:style>
-        <p:txBody>
-          <a:bodyPr rtlCol="0" anchor="ctr"/>
-          <a:lstStyle/>
-          <a:p>
-            <a:pPr algn="ctr"/>
-          </a:p>
-        </p:txBody>
-      </p:sp>
-      <p:sp>
-        <p:nvSpPr>
-          <p:cNvPr id="13" name="TextBox 12"/>
-          <p:cNvSpPr txBox="1"/>
-          <p:nvPr/>
-        </p:nvSpPr>
-        <p:spPr>
-          <a:xfrm>
-            <a:off x="5262372" y="1380744"/>
-            <a:ext cx="1915667" cy="512064"/>
-          </a:xfrm>
-          <a:prstGeom prst="rect">
-            <a:avLst/>
-          </a:prstGeom>
-          <a:noFill/>
-        </p:spPr>
-        <p:txBody>
-          <a:bodyPr wrap="square" anchor="ctr" lIns="0" rIns="0" tIns="0" bIns="0">
-            <a:spAutoFit/>
-          </a:bodyPr>
-          <a:lstStyle/>
-          <a:p>
-            <a:pPr algn="ctr"/>
-            <a:r>
-              <a:rPr sz="1050" b="1">
-                <a:solidFill>
-                  <a:srgbClr val="FFFFFF"/>
-                </a:solidFill>
-                <a:latin typeface="Segoe UI"/>
-              </a:rPr>
-              <a:t>Copilot Studio</a:t>
-            </a:r>
-          </a:p>
-          <a:p>
-            <a:pPr algn="ctr"/>
-            <a:r>
-              <a:rPr sz="800" b="0">
-                <a:solidFill>
-                  <a:srgbClr val="ECF0FB"/>
-                </a:solidFill>
-                <a:latin typeface="Segoe UI"/>
-              </a:rPr>
-              <a:t>low-code agents</a:t>
-            </a:r>
-          </a:p>
-        </p:txBody>
-      </p:sp>
-      <p:sp>
-        <p:nvSpPr>
-          <p:cNvPr id="14" name="Rounded Rectangle 13"/>
-          <p:cNvSpPr/>
-          <p:nvPr/>
-        </p:nvSpPr>
-        <p:spPr>
-          <a:xfrm>
-            <a:off x="7379208" y="1380744"/>
-            <a:ext cx="2061971" cy="512064"/>
-          </a:xfrm>
-          <a:prstGeom prst="roundRect">
-            <a:avLst>
-              <a:gd name="adj" fmla="val 16000"/>
-            </a:avLst>
-          </a:prstGeom>
-          <a:solidFill>
-            <a:srgbClr val="2F6FED"/>
-          </a:solidFill>
-          <a:ln>
-            <a:noFill/>
-          </a:ln>
-          <a:effectLst/>
-        </p:spPr>
-        <p:style>
-          <a:lnRef idx="1">
-            <a:schemeClr val="accent1"/>
-          </a:lnRef>
-          <a:fillRef idx="3">
-            <a:schemeClr val="accent1"/>
-          </a:fillRef>
-          <a:effectRef idx="2">
-            <a:schemeClr val="accent1"/>
-          </a:effectRef>
-          <a:fontRef idx="minor">
-            <a:schemeClr val="lt1"/>
-          </a:fontRef>
-        </p:style>
-        <p:txBody>
-          <a:bodyPr rtlCol="0" anchor="ctr"/>
-          <a:lstStyle/>
-          <a:p>
-            <a:pPr algn="ctr"/>
-          </a:p>
-        </p:txBody>
-      </p:sp>
-      <p:sp>
-        <p:nvSpPr>
-          <p:cNvPr id="15" name="TextBox 14"/>
-          <p:cNvSpPr txBox="1"/>
-          <p:nvPr/>
-        </p:nvSpPr>
-        <p:spPr>
-          <a:xfrm>
-            <a:off x="7452360" y="1380744"/>
-            <a:ext cx="1915667" cy="512064"/>
-          </a:xfrm>
-          <a:prstGeom prst="rect">
-            <a:avLst/>
-          </a:prstGeom>
-          <a:noFill/>
-        </p:spPr>
-        <p:txBody>
-          <a:bodyPr wrap="square" anchor="ctr" lIns="0" rIns="0" tIns="0" bIns="0">
-            <a:spAutoFit/>
-          </a:bodyPr>
-          <a:lstStyle/>
-          <a:p>
-            <a:pPr algn="ctr"/>
-            <a:r>
-              <a:rPr sz="1050" b="1">
-                <a:solidFill>
-                  <a:srgbClr val="FFFFFF"/>
-                </a:solidFill>
-                <a:latin typeface="Segoe UI"/>
-              </a:rPr>
-              <a:t>Custom apps</a:t>
-            </a:r>
-          </a:p>
-          <a:p>
-            <a:pPr algn="ctr"/>
-            <a:r>
-              <a:rPr sz="800" b="0">
-                <a:solidFill>
-                  <a:srgbClr val="ECF0FB"/>
-                </a:solidFill>
-                <a:latin typeface="Segoe UI"/>
-              </a:rPr>
-              <a:t>Web / FastAPI · API endpoints</a:t>
-            </a:r>
-          </a:p>
-        </p:txBody>
-      </p:sp>
-      <p:sp>
-        <p:nvSpPr>
-          <p:cNvPr id="16" name="Rounded Rectangle 15"/>
-          <p:cNvSpPr/>
-          <p:nvPr/>
-        </p:nvSpPr>
-        <p:spPr>
-          <a:xfrm>
-            <a:off x="9569196" y="1380744"/>
-            <a:ext cx="2061971" cy="512064"/>
-          </a:xfrm>
-          <a:prstGeom prst="roundRect">
-            <a:avLst>
-              <a:gd name="adj" fmla="val 16000"/>
-            </a:avLst>
-          </a:prstGeom>
-          <a:solidFill>
-            <a:srgbClr val="2F6FED"/>
-          </a:solidFill>
-          <a:ln>
-            <a:noFill/>
-          </a:ln>
-          <a:effectLst/>
-        </p:spPr>
-        <p:style>
-          <a:lnRef idx="1">
-            <a:schemeClr val="accent1"/>
-          </a:lnRef>
-          <a:fillRef idx="3">
-            <a:schemeClr val="accent1"/>
-          </a:fillRef>
-          <a:effectRef idx="2">
-            <a:schemeClr val="accent1"/>
-          </a:effectRef>
-          <a:fontRef idx="minor">
-            <a:schemeClr val="lt1"/>
-          </a:fontRef>
-        </p:style>
-        <p:txBody>
-          <a:bodyPr rtlCol="0" anchor="ctr"/>
-          <a:lstStyle/>
-          <a:p>
-            <a:pPr algn="ctr"/>
-          </a:p>
-        </p:txBody>
-      </p:sp>
-      <p:sp>
-        <p:nvSpPr>
-          <p:cNvPr id="17" name="TextBox 16"/>
-          <p:cNvSpPr txBox="1"/>
-          <p:nvPr/>
-        </p:nvSpPr>
-        <p:spPr>
-          <a:xfrm>
-            <a:off x="9642348" y="1380744"/>
-            <a:ext cx="1915667" cy="512064"/>
-          </a:xfrm>
-          <a:prstGeom prst="rect">
-            <a:avLst/>
-          </a:prstGeom>
-          <a:noFill/>
-        </p:spPr>
-        <p:txBody>
-          <a:bodyPr wrap="square" anchor="ctr" lIns="0" rIns="0" tIns="0" bIns="0">
-            <a:spAutoFit/>
-          </a:bodyPr>
-          <a:lstStyle/>
-          <a:p>
-            <a:pPr algn="ctr"/>
-            <a:r>
-              <a:rPr sz="1050" b="1">
-                <a:solidFill>
-                  <a:srgbClr val="FFFFFF"/>
-                </a:solidFill>
-                <a:latin typeface="Segoe UI"/>
-              </a:rPr>
-              <a:t>Agent 365 / Agent Store</a:t>
-            </a:r>
-          </a:p>
-          <a:p>
-            <a:pPr algn="ctr"/>
-            <a:r>
-              <a:rPr sz="800" b="0">
-                <a:solidFill>
-                  <a:srgbClr val="ECF0FB"/>
-                </a:solidFill>
-                <a:latin typeface="Segoe UI"/>
-              </a:rPr>
-              <a:t>discover &amp; share</a:t>
-            </a:r>
-          </a:p>
-        </p:txBody>
-      </p:sp>
-      <p:sp>
-        <p:nvSpPr>
-          <p:cNvPr id="18" name="Rounded Rectangle 17"/>
-          <p:cNvSpPr/>
-          <p:nvPr/>
-        </p:nvSpPr>
-        <p:spPr>
-          <a:xfrm>
-            <a:off x="411480" y="2084831"/>
-            <a:ext cx="11384280" cy="713232"/>
-          </a:xfrm>
-          <a:prstGeom prst="roundRect">
-            <a:avLst>
-              <a:gd name="adj" fmla="val 10000"/>
-            </a:avLst>
-          </a:prstGeom>
-          <a:solidFill>
-            <a:srgbClr val="E7EAF1"/>
-          </a:solidFill>
-          <a:ln>
-            <a:noFill/>
-          </a:ln>
-          <a:effectLst/>
-        </p:spPr>
-        <p:style>
-          <a:lnRef idx="1">
-            <a:schemeClr val="accent1"/>
-          </a:lnRef>
-          <a:fillRef idx="3">
-            <a:schemeClr val="accent1"/>
-          </a:fillRef>
-          <a:effectRef idx="2">
-            <a:schemeClr val="accent1"/>
-          </a:effectRef>
-          <a:fontRef idx="minor">
-            <a:schemeClr val="lt1"/>
-          </a:fontRef>
-        </p:style>
-        <p:txBody>
-          <a:bodyPr rtlCol="0" anchor="ctr"/>
-          <a:lstStyle/>
-          <a:p>
-            <a:pPr algn="ctr"/>
-          </a:p>
-        </p:txBody>
-      </p:sp>
-      <p:sp>
-        <p:nvSpPr>
-          <p:cNvPr id="19" name="Rounded Rectangle 18"/>
-          <p:cNvSpPr/>
-          <p:nvPr/>
-        </p:nvSpPr>
-        <p:spPr>
-          <a:xfrm>
-            <a:off x="411480" y="2084831"/>
-            <a:ext cx="2423160" cy="713232"/>
-          </a:xfrm>
-          <a:prstGeom prst="roundRect">
-            <a:avLst>
-              <a:gd name="adj" fmla="val 10000"/>
-            </a:avLst>
-          </a:prstGeom>
-          <a:solidFill>
-            <a:srgbClr val="3C465B"/>
-          </a:solidFill>
-          <a:ln>
-            <a:noFill/>
-          </a:ln>
-          <a:effectLst/>
-        </p:spPr>
-        <p:style>
-          <a:lnRef idx="1">
-            <a:schemeClr val="accent1"/>
-          </a:lnRef>
-          <a:fillRef idx="3">
-            <a:schemeClr val="accent1"/>
-          </a:fillRef>
-          <a:effectRef idx="2">
-            <a:schemeClr val="accent1"/>
-          </a:effectRef>
-          <a:fontRef idx="minor">
-            <a:schemeClr val="lt1"/>
-          </a:fontRef>
-        </p:style>
-        <p:txBody>
-          <a:bodyPr rtlCol="0" anchor="ctr"/>
-          <a:lstStyle/>
-          <a:p>
-            <a:pPr algn="ctr"/>
-          </a:p>
-        </p:txBody>
-      </p:sp>
-      <p:sp>
-        <p:nvSpPr>
-          <p:cNvPr id="20" name="TextBox 19"/>
-          <p:cNvSpPr txBox="1"/>
-          <p:nvPr/>
-        </p:nvSpPr>
-        <p:spPr>
-          <a:xfrm>
-            <a:off x="557784" y="2084831"/>
-            <a:ext cx="2148840" cy="713232"/>
-          </a:xfrm>
-          <a:prstGeom prst="rect">
-            <a:avLst/>
-          </a:prstGeom>
-          <a:noFill/>
-        </p:spPr>
-        <p:txBody>
-          <a:bodyPr wrap="square" anchor="ctr" lIns="0" rIns="0" tIns="0" bIns="0">
-            <a:spAutoFit/>
-          </a:bodyPr>
-          <a:lstStyle/>
-          <a:p>
-            <a:pPr algn="l"/>
-            <a:r>
-              <a:rPr sz="1150" b="1">
-                <a:solidFill>
-                  <a:srgbClr val="FFFFFF"/>
-                </a:solidFill>
-                <a:latin typeface="Segoe UI"/>
-              </a:rPr>
-              <a:t>TRUST &amp; POLICY</a:t>
-            </a:r>
-          </a:p>
-          <a:p>
-            <a:pPr algn="l"/>
-            <a:r>
-              <a:rPr sz="800" b="0">
-                <a:solidFill>
-                  <a:srgbClr val="ECF0FB"/>
-                </a:solidFill>
-                <a:latin typeface="Segoe UI"/>
-              </a:rPr>
-              <a:t>identity · gateway · safety</a:t>
-            </a:r>
-          </a:p>
-        </p:txBody>
-      </p:sp>
-      <p:sp>
-        <p:nvSpPr>
-          <p:cNvPr id="21" name="Rounded Rectangle 20"/>
-          <p:cNvSpPr/>
-          <p:nvPr/>
-        </p:nvSpPr>
-        <p:spPr>
-          <a:xfrm>
-            <a:off x="2999232" y="2185415"/>
-            <a:ext cx="2061971" cy="512064"/>
-          </a:xfrm>
-          <a:prstGeom prst="roundRect">
-            <a:avLst>
-              <a:gd name="adj" fmla="val 16000"/>
-            </a:avLst>
-          </a:prstGeom>
-          <a:solidFill>
-            <a:srgbClr val="3C465B"/>
-          </a:solidFill>
-          <a:ln>
-            <a:noFill/>
-          </a:ln>
-          <a:effectLst/>
-        </p:spPr>
-        <p:style>
-          <a:lnRef idx="1">
-            <a:schemeClr val="accent1"/>
-          </a:lnRef>
-          <a:fillRef idx="3">
-            <a:schemeClr val="accent1"/>
-          </a:fillRef>
-          <a:effectRef idx="2">
-            <a:schemeClr val="accent1"/>
-          </a:effectRef>
-          <a:fontRef idx="minor">
-            <a:schemeClr val="lt1"/>
-          </a:fontRef>
-        </p:style>
-        <p:txBody>
-          <a:bodyPr rtlCol="0" anchor="ctr"/>
-          <a:lstStyle/>
-          <a:p>
-            <a:pPr algn="ctr"/>
-          </a:p>
-        </p:txBody>
-      </p:sp>
-      <p:sp>
-        <p:nvSpPr>
-          <p:cNvPr id="22" name="TextBox 21"/>
-          <p:cNvSpPr txBox="1"/>
-          <p:nvPr/>
-        </p:nvSpPr>
-        <p:spPr>
-          <a:xfrm>
-            <a:off x="3072384" y="2185415"/>
-            <a:ext cx="1915667" cy="512064"/>
-          </a:xfrm>
-          <a:prstGeom prst="rect">
-            <a:avLst/>
-          </a:prstGeom>
-          <a:noFill/>
-        </p:spPr>
-        <p:txBody>
-          <a:bodyPr wrap="square" anchor="ctr" lIns="0" rIns="0" tIns="0" bIns="0">
-            <a:spAutoFit/>
-          </a:bodyPr>
-          <a:lstStyle/>
-          <a:p>
-            <a:pPr algn="ctr"/>
-            <a:r>
-              <a:rPr sz="1050" b="1">
-                <a:solidFill>
-                  <a:srgbClr val="FFFFFF"/>
-                </a:solidFill>
-                <a:latin typeface="Segoe UI"/>
-              </a:rPr>
-              <a:t>Microsoft Entra Agent ID</a:t>
-            </a:r>
-          </a:p>
-          <a:p>
-            <a:pPr algn="ctr"/>
-            <a:r>
-              <a:rPr sz="800" b="0">
-                <a:solidFill>
-                  <a:srgbClr val="ECF0FB"/>
-                </a:solidFill>
-                <a:latin typeface="Segoe UI"/>
-              </a:rPr>
-              <a:t>agent identity &amp; AuthZ</a:t>
-            </a:r>
-          </a:p>
-        </p:txBody>
-      </p:sp>
-      <p:sp>
-        <p:nvSpPr>
-          <p:cNvPr id="23" name="Rounded Rectangle 22"/>
-          <p:cNvSpPr/>
-          <p:nvPr/>
-        </p:nvSpPr>
-        <p:spPr>
-          <a:xfrm>
-            <a:off x="5189220" y="2185415"/>
-            <a:ext cx="2061971" cy="512064"/>
-          </a:xfrm>
-          <a:prstGeom prst="roundRect">
-            <a:avLst>
-              <a:gd name="adj" fmla="val 16000"/>
-            </a:avLst>
-          </a:prstGeom>
-          <a:solidFill>
-            <a:srgbClr val="3C465B"/>
-          </a:solidFill>
-          <a:ln>
-            <a:noFill/>
-          </a:ln>
-          <a:effectLst/>
-        </p:spPr>
-        <p:style>
-          <a:lnRef idx="1">
-            <a:schemeClr val="accent1"/>
-          </a:lnRef>
-          <a:fillRef idx="3">
-            <a:schemeClr val="accent1"/>
-          </a:fillRef>
-          <a:effectRef idx="2">
-            <a:schemeClr val="accent1"/>
-          </a:effectRef>
-          <a:fontRef idx="minor">
-            <a:schemeClr val="lt1"/>
-          </a:fontRef>
-        </p:style>
-        <p:txBody>
-          <a:bodyPr rtlCol="0" anchor="ctr"/>
-          <a:lstStyle/>
-          <a:p>
-            <a:pPr algn="ctr"/>
-          </a:p>
-        </p:txBody>
-      </p:sp>
-      <p:sp>
-        <p:nvSpPr>
-          <p:cNvPr id="24" name="TextBox 23"/>
-          <p:cNvSpPr txBox="1"/>
-          <p:nvPr/>
-        </p:nvSpPr>
-        <p:spPr>
-          <a:xfrm>
-            <a:off x="5262372" y="2185415"/>
-            <a:ext cx="1915667" cy="512064"/>
-          </a:xfrm>
-          <a:prstGeom prst="rect">
-            <a:avLst/>
-          </a:prstGeom>
-          <a:noFill/>
-        </p:spPr>
-        <p:txBody>
-          <a:bodyPr wrap="square" anchor="ctr" lIns="0" rIns="0" tIns="0" bIns="0">
-            <a:spAutoFit/>
-          </a:bodyPr>
-          <a:lstStyle/>
-          <a:p>
-            <a:pPr algn="ctr"/>
-            <a:r>
-              <a:rPr sz="1050" b="1">
-                <a:solidFill>
-                  <a:srgbClr val="FFFFFF"/>
-                </a:solidFill>
-                <a:latin typeface="Segoe UI"/>
-              </a:rPr>
-              <a:t>Azure API Management</a:t>
-            </a:r>
-          </a:p>
-          <a:p>
-            <a:pPr algn="ctr"/>
-            <a:r>
-              <a:rPr sz="800" b="0">
-                <a:solidFill>
-                  <a:srgbClr val="ECF0FB"/>
-                </a:solidFill>
-                <a:latin typeface="Segoe UI"/>
-              </a:rPr>
-              <a:t>AI gateway · throttling</a:t>
-            </a:r>
-          </a:p>
-        </p:txBody>
-      </p:sp>
-      <p:sp>
-        <p:nvSpPr>
-          <p:cNvPr id="25" name="Rounded Rectangle 24"/>
-          <p:cNvSpPr/>
-          <p:nvPr/>
-        </p:nvSpPr>
-        <p:spPr>
-          <a:xfrm>
-            <a:off x="7379208" y="2185415"/>
-            <a:ext cx="2061971" cy="512064"/>
-          </a:xfrm>
-          <a:prstGeom prst="roundRect">
-            <a:avLst>
-              <a:gd name="adj" fmla="val 16000"/>
-            </a:avLst>
-          </a:prstGeom>
-          <a:solidFill>
-            <a:srgbClr val="3C465B"/>
-          </a:solidFill>
-          <a:ln>
-            <a:noFill/>
-          </a:ln>
-          <a:effectLst/>
-        </p:spPr>
-        <p:style>
-          <a:lnRef idx="1">
-            <a:schemeClr val="accent1"/>
-          </a:lnRef>
-          <a:fillRef idx="3">
-            <a:schemeClr val="accent1"/>
-          </a:fillRef>
-          <a:effectRef idx="2">
-            <a:schemeClr val="accent1"/>
-          </a:effectRef>
-          <a:fontRef idx="minor">
-            <a:schemeClr val="lt1"/>
-          </a:fontRef>
-        </p:style>
-        <p:txBody>
-          <a:bodyPr rtlCol="0" anchor="ctr"/>
-          <a:lstStyle/>
-          <a:p>
-            <a:pPr algn="ctr"/>
-          </a:p>
-        </p:txBody>
-      </p:sp>
-      <p:sp>
-        <p:nvSpPr>
-          <p:cNvPr id="26" name="TextBox 25"/>
-          <p:cNvSpPr txBox="1"/>
-          <p:nvPr/>
-        </p:nvSpPr>
-        <p:spPr>
-          <a:xfrm>
-            <a:off x="7452360" y="2185415"/>
-            <a:ext cx="1915667" cy="512064"/>
-          </a:xfrm>
-          <a:prstGeom prst="rect">
-            <a:avLst/>
-          </a:prstGeom>
-          <a:noFill/>
-        </p:spPr>
-        <p:txBody>
-          <a:bodyPr wrap="square" anchor="ctr" lIns="0" rIns="0" tIns="0" bIns="0">
-            <a:spAutoFit/>
-          </a:bodyPr>
-          <a:lstStyle/>
-          <a:p>
-            <a:pPr algn="ctr"/>
-            <a:r>
-              <a:rPr sz="1050" b="1">
-                <a:solidFill>
-                  <a:srgbClr val="FFFFFF"/>
-                </a:solidFill>
-                <a:latin typeface="Segoe UI"/>
-              </a:rPr>
-              <a:t>Microsoft Purview</a:t>
-            </a:r>
-          </a:p>
-          <a:p>
-            <a:pPr algn="ctr"/>
-            <a:r>
-              <a:rPr sz="800" b="0">
-                <a:solidFill>
-                  <a:srgbClr val="ECF0FB"/>
-                </a:solidFill>
-                <a:latin typeface="Segoe UI"/>
-              </a:rPr>
-              <a:t>DLP &amp; governance</a:t>
-            </a:r>
-          </a:p>
-        </p:txBody>
-      </p:sp>
-      <p:sp>
-        <p:nvSpPr>
-          <p:cNvPr id="27" name="Rounded Rectangle 26"/>
-          <p:cNvSpPr/>
-          <p:nvPr/>
-        </p:nvSpPr>
-        <p:spPr>
-          <a:xfrm>
-            <a:off x="9569196" y="2185415"/>
-            <a:ext cx="2061971" cy="512064"/>
-          </a:xfrm>
-          <a:prstGeom prst="roundRect">
-            <a:avLst>
-              <a:gd name="adj" fmla="val 16000"/>
-            </a:avLst>
-          </a:prstGeom>
-          <a:solidFill>
-            <a:srgbClr val="3C465B"/>
-          </a:solidFill>
-          <a:ln>
-            <a:noFill/>
-          </a:ln>
-          <a:effectLst/>
-        </p:spPr>
-        <p:style>
-          <a:lnRef idx="1">
-            <a:schemeClr val="accent1"/>
-          </a:lnRef>
-          <a:fillRef idx="3">
-            <a:schemeClr val="accent1"/>
-          </a:fillRef>
-          <a:effectRef idx="2">
-            <a:schemeClr val="accent1"/>
-          </a:effectRef>
-          <a:fontRef idx="minor">
-            <a:schemeClr val="lt1"/>
-          </a:fontRef>
-        </p:style>
-        <p:txBody>
-          <a:bodyPr rtlCol="0" anchor="ctr"/>
-          <a:lstStyle/>
-          <a:p>
-            <a:pPr algn="ctr"/>
-          </a:p>
-        </p:txBody>
-      </p:sp>
-      <p:sp>
-        <p:nvSpPr>
-          <p:cNvPr id="28" name="TextBox 27"/>
-          <p:cNvSpPr txBox="1"/>
-          <p:nvPr/>
-        </p:nvSpPr>
-        <p:spPr>
-          <a:xfrm>
-            <a:off x="9642348" y="2185415"/>
-            <a:ext cx="1915667" cy="512064"/>
-          </a:xfrm>
-          <a:prstGeom prst="rect">
-            <a:avLst/>
-          </a:prstGeom>
-          <a:noFill/>
-        </p:spPr>
-        <p:txBody>
-          <a:bodyPr wrap="square" anchor="ctr" lIns="0" rIns="0" tIns="0" bIns="0">
-            <a:spAutoFit/>
-          </a:bodyPr>
-          <a:lstStyle/>
-          <a:p>
-            <a:pPr algn="ctr"/>
-            <a:r>
-              <a:rPr sz="1050" b="1">
-                <a:solidFill>
-                  <a:srgbClr val="FFFFFF"/>
-                </a:solidFill>
-                <a:latin typeface="Segoe UI"/>
-              </a:rPr>
-              <a:t>Azure AI Content Safety</a:t>
-            </a:r>
-          </a:p>
-          <a:p>
-            <a:pPr algn="ctr"/>
-            <a:r>
-              <a:rPr sz="800" b="0">
-                <a:solidFill>
-                  <a:srgbClr val="ECF0FB"/>
-                </a:solidFill>
-                <a:latin typeface="Segoe UI"/>
-              </a:rPr>
-              <a:t>+ Defender · responsible AI</a:t>
-            </a:r>
-          </a:p>
-        </p:txBody>
-      </p:sp>
-      <p:sp>
-        <p:nvSpPr>
-          <p:cNvPr id="29" name="Rounded Rectangle 28"/>
-          <p:cNvSpPr/>
-          <p:nvPr/>
-        </p:nvSpPr>
-        <p:spPr>
-          <a:xfrm>
-            <a:off x="411480" y="2889503"/>
-            <a:ext cx="11384280" cy="786384"/>
-          </a:xfrm>
-          <a:prstGeom prst="roundRect">
-            <a:avLst>
-              <a:gd name="adj" fmla="val 10000"/>
-            </a:avLst>
-          </a:prstGeom>
-          <a:solidFill>
-            <a:srgbClr val="F0ECFB"/>
-          </a:solidFill>
-          <a:ln>
-            <a:noFill/>
-          </a:ln>
-          <a:effectLst/>
-        </p:spPr>
-        <p:style>
-          <a:lnRef idx="1">
-            <a:schemeClr val="accent1"/>
-          </a:lnRef>
-          <a:fillRef idx="3">
-            <a:schemeClr val="accent1"/>
-          </a:fillRef>
-          <a:effectRef idx="2">
-            <a:schemeClr val="accent1"/>
-          </a:effectRef>
-          <a:fontRef idx="minor">
-            <a:schemeClr val="lt1"/>
-          </a:fontRef>
-        </p:style>
-        <p:txBody>
-          <a:bodyPr rtlCol="0" anchor="ctr"/>
-          <a:lstStyle/>
-          <a:p>
-            <a:pPr algn="ctr"/>
-          </a:p>
-        </p:txBody>
-      </p:sp>
-      <p:sp>
-        <p:nvSpPr>
-          <p:cNvPr id="30" name="Rounded Rectangle 29"/>
-          <p:cNvSpPr/>
-          <p:nvPr/>
-        </p:nvSpPr>
-        <p:spPr>
-          <a:xfrm>
-            <a:off x="411480" y="2889503"/>
-            <a:ext cx="2423160" cy="786384"/>
-          </a:xfrm>
-          <a:prstGeom prst="roundRect">
-            <a:avLst>
-              <a:gd name="adj" fmla="val 10000"/>
-            </a:avLst>
-          </a:prstGeom>
-          <a:solidFill>
-            <a:srgbClr val="6B4DE0"/>
-          </a:solidFill>
-          <a:ln>
-            <a:noFill/>
-          </a:ln>
-          <a:effectLst/>
-        </p:spPr>
-        <p:style>
-          <a:lnRef idx="1">
-            <a:schemeClr val="accent1"/>
-          </a:lnRef>
-          <a:fillRef idx="3">
-            <a:schemeClr val="accent1"/>
-          </a:fillRef>
-          <a:effectRef idx="2">
-            <a:schemeClr val="accent1"/>
-          </a:effectRef>
-          <a:fontRef idx="minor">
-            <a:schemeClr val="lt1"/>
-          </a:fontRef>
-        </p:style>
-        <p:txBody>
-          <a:bodyPr rtlCol="0" anchor="ctr"/>
-          <a:lstStyle/>
-          <a:p>
-            <a:pPr algn="ctr"/>
-          </a:p>
-        </p:txBody>
-      </p:sp>
-      <p:sp>
-        <p:nvSpPr>
-          <p:cNvPr id="31" name="TextBox 30"/>
-          <p:cNvSpPr txBox="1"/>
-          <p:nvPr/>
-        </p:nvSpPr>
-        <p:spPr>
-          <a:xfrm>
-            <a:off x="557784" y="2889503"/>
-            <a:ext cx="2148840" cy="786384"/>
-          </a:xfrm>
-          <a:prstGeom prst="rect">
-            <a:avLst/>
-          </a:prstGeom>
-          <a:noFill/>
-        </p:spPr>
-        <p:txBody>
-          <a:bodyPr wrap="square" anchor="ctr" lIns="0" rIns="0" tIns="0" bIns="0">
-            <a:spAutoFit/>
-          </a:bodyPr>
-          <a:lstStyle/>
-          <a:p>
-            <a:pPr algn="l"/>
-            <a:r>
-              <a:rPr sz="1150" b="1">
-                <a:solidFill>
-                  <a:srgbClr val="FFFFFF"/>
-                </a:solidFill>
-                <a:latin typeface="Segoe UI"/>
-              </a:rPr>
-              <a:t>ORCHESTRATION</a:t>
-            </a:r>
-          </a:p>
-          <a:p>
-            <a:pPr algn="l"/>
-            <a:r>
-              <a:rPr sz="800" b="0">
-                <a:solidFill>
-                  <a:srgbClr val="ECF0FB"/>
-                </a:solidFill>
-                <a:latin typeface="Segoe UI"/>
-              </a:rPr>
-              <a:t>plan · run · remember</a:t>
-            </a:r>
-          </a:p>
-        </p:txBody>
-      </p:sp>
-      <p:sp>
-        <p:nvSpPr>
-          <p:cNvPr id="32" name="Rounded Rectangle 31"/>
-          <p:cNvSpPr/>
-          <p:nvPr/>
-        </p:nvSpPr>
-        <p:spPr>
-          <a:xfrm>
-            <a:off x="2999232" y="2990087"/>
-            <a:ext cx="2061971" cy="585216"/>
-          </a:xfrm>
-          <a:prstGeom prst="roundRect">
-            <a:avLst>
-              <a:gd name="adj" fmla="val 16000"/>
-            </a:avLst>
-          </a:prstGeom>
-          <a:solidFill>
-            <a:srgbClr val="6B4DE0"/>
-          </a:solidFill>
-          <a:ln>
-            <a:noFill/>
-          </a:ln>
-          <a:effectLst/>
-        </p:spPr>
-        <p:style>
-          <a:lnRef idx="1">
-            <a:schemeClr val="accent1"/>
-          </a:lnRef>
-          <a:fillRef idx="3">
-            <a:schemeClr val="accent1"/>
-          </a:fillRef>
-          <a:effectRef idx="2">
-            <a:schemeClr val="accent1"/>
-          </a:effectRef>
-          <a:fontRef idx="minor">
-            <a:schemeClr val="lt1"/>
-          </a:fontRef>
-        </p:style>
-        <p:txBody>
-          <a:bodyPr rtlCol="0" anchor="ctr"/>
-          <a:lstStyle/>
-          <a:p>
-            <a:pPr algn="ctr"/>
-          </a:p>
-        </p:txBody>
-      </p:sp>
-      <p:sp>
-        <p:nvSpPr>
-          <p:cNvPr id="33" name="TextBox 32"/>
-          <p:cNvSpPr txBox="1"/>
-          <p:nvPr/>
-        </p:nvSpPr>
-        <p:spPr>
-          <a:xfrm>
-            <a:off x="3072384" y="2990087"/>
-            <a:ext cx="1915667" cy="585216"/>
-          </a:xfrm>
-          <a:prstGeom prst="rect">
-            <a:avLst/>
-          </a:prstGeom>
-          <a:noFill/>
-        </p:spPr>
-        <p:txBody>
-          <a:bodyPr wrap="square" anchor="ctr" lIns="0" rIns="0" tIns="0" bIns="0">
-            <a:spAutoFit/>
-          </a:bodyPr>
-          <a:lstStyle/>
-          <a:p>
-            <a:pPr algn="ctr"/>
-            <a:r>
-              <a:rPr sz="1050" b="1">
-                <a:solidFill>
-                  <a:srgbClr val="FFFFFF"/>
-                </a:solidFill>
-                <a:latin typeface="Segoe UI"/>
-              </a:rPr>
-              <a:t>Microsoft Foundry</a:t>
-            </a:r>
-          </a:p>
-          <a:p>
-            <a:pPr algn="ctr"/>
-            <a:r>
-              <a:rPr sz="800" b="0">
-                <a:solidFill>
-                  <a:srgbClr val="ECF0FB"/>
-                </a:solidFill>
-                <a:latin typeface="Segoe UI"/>
-              </a:rPr>
-              <a:t>Agent Service · hosted agents</a:t>
-            </a:r>
-          </a:p>
-        </p:txBody>
-      </p:sp>
-      <p:sp>
-        <p:nvSpPr>
-          <p:cNvPr id="34" name="Rounded Rectangle 33"/>
-          <p:cNvSpPr/>
-          <p:nvPr/>
-        </p:nvSpPr>
-        <p:spPr>
-          <a:xfrm>
-            <a:off x="5189220" y="2990087"/>
-            <a:ext cx="2061971" cy="585216"/>
-          </a:xfrm>
-          <a:prstGeom prst="roundRect">
-            <a:avLst>
-              <a:gd name="adj" fmla="val 16000"/>
-            </a:avLst>
-          </a:prstGeom>
-          <a:solidFill>
-            <a:srgbClr val="6B4DE0"/>
-          </a:solidFill>
-          <a:ln>
-            <a:noFill/>
-          </a:ln>
-          <a:effectLst/>
-        </p:spPr>
-        <p:style>
-          <a:lnRef idx="1">
-            <a:schemeClr val="accent1"/>
-          </a:lnRef>
-          <a:fillRef idx="3">
-            <a:schemeClr val="accent1"/>
-          </a:fillRef>
-          <a:effectRef idx="2">
-            <a:schemeClr val="accent1"/>
-          </a:effectRef>
-          <a:fontRef idx="minor">
-            <a:schemeClr val="lt1"/>
-          </a:fontRef>
-        </p:style>
-        <p:txBody>
-          <a:bodyPr rtlCol="0" anchor="ctr"/>
-          <a:lstStyle/>
-          <a:p>
-            <a:pPr algn="ctr"/>
-          </a:p>
-        </p:txBody>
-      </p:sp>
-      <p:sp>
-        <p:nvSpPr>
-          <p:cNvPr id="35" name="TextBox 34"/>
-          <p:cNvSpPr txBox="1"/>
-          <p:nvPr/>
-        </p:nvSpPr>
-        <p:spPr>
-          <a:xfrm>
-            <a:off x="5262372" y="2990087"/>
-            <a:ext cx="1915667" cy="585216"/>
-          </a:xfrm>
-          <a:prstGeom prst="rect">
-            <a:avLst/>
-          </a:prstGeom>
-          <a:noFill/>
-        </p:spPr>
-        <p:txBody>
-          <a:bodyPr wrap="square" anchor="ctr" lIns="0" rIns="0" tIns="0" bIns="0">
-            <a:spAutoFit/>
-          </a:bodyPr>
-          <a:lstStyle/>
-          <a:p>
-            <a:pPr algn="ctr"/>
-            <a:r>
-              <a:rPr sz="1050" b="1">
-                <a:solidFill>
-                  <a:srgbClr val="FFFFFF"/>
-                </a:solidFill>
-                <a:latin typeface="Segoe UI"/>
-              </a:rPr>
-              <a:t>Agent Framework</a:t>
-            </a:r>
-          </a:p>
-          <a:p>
-            <a:pPr algn="ctr"/>
-            <a:r>
-              <a:rPr sz="800" b="0">
-                <a:solidFill>
-                  <a:srgbClr val="ECF0FB"/>
-                </a:solidFill>
-                <a:latin typeface="Segoe UI"/>
-              </a:rPr>
-              <a:t>Magentic multi-agent · A2A</a:t>
-            </a:r>
-          </a:p>
-        </p:txBody>
-      </p:sp>
-      <p:sp>
-        <p:nvSpPr>
-          <p:cNvPr id="36" name="Rounded Rectangle 35"/>
-          <p:cNvSpPr/>
-          <p:nvPr/>
-        </p:nvSpPr>
-        <p:spPr>
-          <a:xfrm>
-            <a:off x="7379208" y="2990087"/>
-            <a:ext cx="2061971" cy="585216"/>
-          </a:xfrm>
-          <a:prstGeom prst="roundRect">
-            <a:avLst>
-              <a:gd name="adj" fmla="val 16000"/>
-            </a:avLst>
-          </a:prstGeom>
-          <a:solidFill>
-            <a:srgbClr val="6B4DE0"/>
-          </a:solidFill>
-          <a:ln>
-            <a:noFill/>
-          </a:ln>
-          <a:effectLst/>
-        </p:spPr>
-        <p:style>
-          <a:lnRef idx="1">
-            <a:schemeClr val="accent1"/>
-          </a:lnRef>
-          <a:fillRef idx="3">
-            <a:schemeClr val="accent1"/>
-          </a:fillRef>
-          <a:effectRef idx="2">
-            <a:schemeClr val="accent1"/>
-          </a:effectRef>
-          <a:fontRef idx="minor">
-            <a:schemeClr val="lt1"/>
-          </a:fontRef>
-        </p:style>
-        <p:txBody>
-          <a:bodyPr rtlCol="0" anchor="ctr"/>
-          <a:lstStyle/>
-          <a:p>
-            <a:pPr algn="ctr"/>
-          </a:p>
-        </p:txBody>
-      </p:sp>
-      <p:sp>
-        <p:nvSpPr>
-          <p:cNvPr id="37" name="TextBox 36"/>
-          <p:cNvSpPr txBox="1"/>
-          <p:nvPr/>
-        </p:nvSpPr>
-        <p:spPr>
-          <a:xfrm>
-            <a:off x="7452360" y="2990087"/>
-            <a:ext cx="1915667" cy="585216"/>
-          </a:xfrm>
-          <a:prstGeom prst="rect">
-            <a:avLst/>
-          </a:prstGeom>
-          <a:noFill/>
-        </p:spPr>
-        <p:txBody>
-          <a:bodyPr wrap="square" anchor="ctr" lIns="0" rIns="0" tIns="0" bIns="0">
-            <a:spAutoFit/>
-          </a:bodyPr>
-          <a:lstStyle/>
-          <a:p>
-            <a:pPr algn="ctr"/>
-            <a:r>
-              <a:rPr sz="1050" b="1">
-                <a:solidFill>
-                  <a:srgbClr val="FFFFFF"/>
-                </a:solidFill>
-                <a:latin typeface="Segoe UI"/>
-              </a:rPr>
-              <a:t>Azure Durable Functions</a:t>
-            </a:r>
-          </a:p>
-          <a:p>
-            <a:pPr algn="ctr"/>
-            <a:r>
-              <a:rPr sz="800" b="0">
-                <a:solidFill>
-                  <a:srgbClr val="ECF0FB"/>
-                </a:solidFill>
-                <a:latin typeface="Segoe UI"/>
-              </a:rPr>
-              <a:t>durable workflow / state</a:t>
-            </a:r>
-          </a:p>
-        </p:txBody>
-      </p:sp>
-      <p:sp>
-        <p:nvSpPr>
-          <p:cNvPr id="38" name="Rounded Rectangle 37"/>
-          <p:cNvSpPr/>
-          <p:nvPr/>
-        </p:nvSpPr>
-        <p:spPr>
-          <a:xfrm>
-            <a:off x="9569196" y="2990087"/>
-            <a:ext cx="2061971" cy="585216"/>
-          </a:xfrm>
-          <a:prstGeom prst="roundRect">
-            <a:avLst>
-              <a:gd name="adj" fmla="val 16000"/>
-            </a:avLst>
-          </a:prstGeom>
-          <a:solidFill>
-            <a:srgbClr val="6B4DE0"/>
-          </a:solidFill>
-          <a:ln>
-            <a:noFill/>
-          </a:ln>
-          <a:effectLst/>
-        </p:spPr>
-        <p:style>
-          <a:lnRef idx="1">
-            <a:schemeClr val="accent1"/>
-          </a:lnRef>
-          <a:fillRef idx="3">
-            <a:schemeClr val="accent1"/>
-          </a:fillRef>
-          <a:effectRef idx="2">
-            <a:schemeClr val="accent1"/>
-          </a:effectRef>
-          <a:fontRef idx="minor">
-            <a:schemeClr val="lt1"/>
-          </a:fontRef>
-        </p:style>
-        <p:txBody>
-          <a:bodyPr rtlCol="0" anchor="ctr"/>
-          <a:lstStyle/>
-          <a:p>
-            <a:pPr algn="ctr"/>
-          </a:p>
-        </p:txBody>
-      </p:sp>
-      <p:sp>
-        <p:nvSpPr>
-          <p:cNvPr id="39" name="TextBox 38"/>
-          <p:cNvSpPr txBox="1"/>
-          <p:nvPr/>
-        </p:nvSpPr>
-        <p:spPr>
-          <a:xfrm>
-            <a:off x="9642348" y="2990087"/>
-            <a:ext cx="1915667" cy="585216"/>
-          </a:xfrm>
-          <a:prstGeom prst="rect">
-            <a:avLst/>
-          </a:prstGeom>
-          <a:noFill/>
-        </p:spPr>
-        <p:txBody>
-          <a:bodyPr wrap="square" anchor="ctr" lIns="0" rIns="0" tIns="0" bIns="0">
-            <a:spAutoFit/>
-          </a:bodyPr>
-          <a:lstStyle/>
-          <a:p>
-            <a:pPr algn="ctr"/>
-            <a:r>
-              <a:rPr sz="1050" b="1">
-                <a:solidFill>
-                  <a:srgbClr val="FFFFFF"/>
-                </a:solidFill>
-                <a:latin typeface="Segoe UI"/>
-              </a:rPr>
-              <a:t>Memory</a:t>
-            </a:r>
-          </a:p>
-          <a:p>
-            <a:pPr algn="ctr"/>
-            <a:r>
-              <a:rPr sz="800" b="0">
-                <a:solidFill>
-                  <a:srgbClr val="ECF0FB"/>
-                </a:solidFill>
-                <a:latin typeface="Segoe UI"/>
-              </a:rPr>
-              <a:t>short &amp; long-term · threads</a:t>
-            </a:r>
-          </a:p>
-        </p:txBody>
-      </p:sp>
-      <p:sp>
-        <p:nvSpPr>
-          <p:cNvPr id="40" name="Rounded Rectangle 39"/>
-          <p:cNvSpPr/>
-          <p:nvPr/>
-        </p:nvSpPr>
-        <p:spPr>
-          <a:xfrm>
-            <a:off x="411480" y="3767327"/>
-            <a:ext cx="11384280" cy="713232"/>
-          </a:xfrm>
-          <a:prstGeom prst="roundRect">
-            <a:avLst>
-              <a:gd name="adj" fmla="val 10000"/>
-            </a:avLst>
-          </a:prstGeom>
-          <a:solidFill>
-            <a:srgbClr val="E6F5F3"/>
-          </a:solidFill>
-          <a:ln>
-            <a:noFill/>
-          </a:ln>
-          <a:effectLst/>
-        </p:spPr>
-        <p:style>
-          <a:lnRef idx="1">
-            <a:schemeClr val="accent1"/>
-          </a:lnRef>
-          <a:fillRef idx="3">
-            <a:schemeClr val="accent1"/>
-          </a:fillRef>
-          <a:effectRef idx="2">
-            <a:schemeClr val="accent1"/>
-          </a:effectRef>
-          <a:fontRef idx="minor">
-            <a:schemeClr val="lt1"/>
-          </a:fontRef>
-        </p:style>
-        <p:txBody>
-          <a:bodyPr rtlCol="0" anchor="ctr"/>
-          <a:lstStyle/>
-          <a:p>
-            <a:pPr algn="ctr"/>
-          </a:p>
-        </p:txBody>
-      </p:sp>
-      <p:sp>
-        <p:nvSpPr>
-          <p:cNvPr id="41" name="Rounded Rectangle 40"/>
-          <p:cNvSpPr/>
-          <p:nvPr/>
-        </p:nvSpPr>
-        <p:spPr>
-          <a:xfrm>
-            <a:off x="411480" y="3767327"/>
-            <a:ext cx="2423160" cy="713232"/>
-          </a:xfrm>
-          <a:prstGeom prst="roundRect">
-            <a:avLst>
-              <a:gd name="adj" fmla="val 10000"/>
-            </a:avLst>
-          </a:prstGeom>
-          <a:solidFill>
-            <a:srgbClr val="129A8F"/>
-          </a:solidFill>
-          <a:ln>
-            <a:noFill/>
-          </a:ln>
-          <a:effectLst/>
-        </p:spPr>
-        <p:style>
-          <a:lnRef idx="1">
-            <a:schemeClr val="accent1"/>
-          </a:lnRef>
-          <a:fillRef idx="3">
-            <a:schemeClr val="accent1"/>
-          </a:fillRef>
-          <a:effectRef idx="2">
-            <a:schemeClr val="accent1"/>
-          </a:effectRef>
-          <a:fontRef idx="minor">
-            <a:schemeClr val="lt1"/>
-          </a:fontRef>
-        </p:style>
-        <p:txBody>
-          <a:bodyPr rtlCol="0" anchor="ctr"/>
-          <a:lstStyle/>
-          <a:p>
-            <a:pPr algn="ctr"/>
-          </a:p>
-        </p:txBody>
-      </p:sp>
-      <p:sp>
-        <p:nvSpPr>
-          <p:cNvPr id="42" name="TextBox 41"/>
-          <p:cNvSpPr txBox="1"/>
-          <p:nvPr/>
-        </p:nvSpPr>
-        <p:spPr>
-          <a:xfrm>
-            <a:off x="557784" y="3767327"/>
-            <a:ext cx="2148840" cy="713232"/>
-          </a:xfrm>
-          <a:prstGeom prst="rect">
-            <a:avLst/>
-          </a:prstGeom>
-          <a:noFill/>
-        </p:spPr>
-        <p:txBody>
-          <a:bodyPr wrap="square" anchor="ctr" lIns="0" rIns="0" tIns="0" bIns="0">
-            <a:spAutoFit/>
-          </a:bodyPr>
-          <a:lstStyle/>
-          <a:p>
-            <a:pPr algn="l"/>
-            <a:r>
-              <a:rPr sz="1150" b="1">
-                <a:solidFill>
-                  <a:srgbClr val="FFFFFF"/>
-                </a:solidFill>
-                <a:latin typeface="Segoe UI"/>
-              </a:rPr>
-              <a:t>TOOLS &amp; MCP</a:t>
-            </a:r>
-          </a:p>
-          <a:p>
-            <a:pPr algn="l"/>
-            <a:r>
-              <a:rPr sz="800" b="0">
-                <a:solidFill>
-                  <a:srgbClr val="ECF0FB"/>
-                </a:solidFill>
-                <a:latin typeface="Segoe UI"/>
-              </a:rPr>
-              <a:t>discover · authorize · call</a:t>
-            </a:r>
-          </a:p>
-        </p:txBody>
-      </p:sp>
-      <p:sp>
-        <p:nvSpPr>
-          <p:cNvPr id="43" name="Rounded Rectangle 42"/>
-          <p:cNvSpPr/>
-          <p:nvPr/>
-        </p:nvSpPr>
-        <p:spPr>
-          <a:xfrm>
-            <a:off x="2999232" y="3867911"/>
-            <a:ext cx="2061971" cy="512064"/>
-          </a:xfrm>
-          <a:prstGeom prst="roundRect">
-            <a:avLst>
-              <a:gd name="adj" fmla="val 16000"/>
-            </a:avLst>
-          </a:prstGeom>
-          <a:solidFill>
-            <a:srgbClr val="129A8F"/>
-          </a:solidFill>
-          <a:ln>
-            <a:noFill/>
-          </a:ln>
-          <a:effectLst/>
-        </p:spPr>
-        <p:style>
-          <a:lnRef idx="1">
-            <a:schemeClr val="accent1"/>
-          </a:lnRef>
-          <a:fillRef idx="3">
-            <a:schemeClr val="accent1"/>
-          </a:fillRef>
-          <a:effectRef idx="2">
-            <a:schemeClr val="accent1"/>
-          </a:effectRef>
-          <a:fontRef idx="minor">
-            <a:schemeClr val="lt1"/>
-          </a:fontRef>
-        </p:style>
-        <p:txBody>
-          <a:bodyPr rtlCol="0" anchor="ctr"/>
-          <a:lstStyle/>
-          <a:p>
-            <a:pPr algn="ctr"/>
-          </a:p>
-        </p:txBody>
-      </p:sp>
-      <p:sp>
-        <p:nvSpPr>
-          <p:cNvPr id="44" name="TextBox 43"/>
-          <p:cNvSpPr txBox="1"/>
-          <p:nvPr/>
-        </p:nvSpPr>
-        <p:spPr>
-          <a:xfrm>
-            <a:off x="3072384" y="3867911"/>
-            <a:ext cx="1915667" cy="512064"/>
-          </a:xfrm>
-          <a:prstGeom prst="rect">
-            <a:avLst/>
-          </a:prstGeom>
-          <a:noFill/>
-        </p:spPr>
-        <p:txBody>
-          <a:bodyPr wrap="square" anchor="ctr" lIns="0" rIns="0" tIns="0" bIns="0">
-            <a:spAutoFit/>
-          </a:bodyPr>
-          <a:lstStyle/>
-          <a:p>
-            <a:pPr algn="ctr"/>
-            <a:r>
-              <a:rPr sz="1050" b="1">
-                <a:solidFill>
-                  <a:srgbClr val="FFFFFF"/>
-                </a:solidFill>
-                <a:latin typeface="Segoe UI"/>
-              </a:rPr>
-              <a:t>API Center</a:t>
-            </a:r>
-          </a:p>
-          <a:p>
-            <a:pPr algn="ctr"/>
-            <a:r>
-              <a:rPr sz="800" b="0">
-                <a:solidFill>
-                  <a:srgbClr val="ECF0FB"/>
-                </a:solidFill>
-                <a:latin typeface="Segoe UI"/>
-              </a:rPr>
-              <a:t>MCP registry / catalog</a:t>
-            </a:r>
-          </a:p>
-        </p:txBody>
-      </p:sp>
-      <p:sp>
-        <p:nvSpPr>
-          <p:cNvPr id="45" name="Rounded Rectangle 44"/>
-          <p:cNvSpPr/>
-          <p:nvPr/>
-        </p:nvSpPr>
-        <p:spPr>
-          <a:xfrm>
-            <a:off x="5189220" y="3867911"/>
-            <a:ext cx="2061971" cy="512064"/>
-          </a:xfrm>
-          <a:prstGeom prst="roundRect">
-            <a:avLst>
-              <a:gd name="adj" fmla="val 16000"/>
-            </a:avLst>
-          </a:prstGeom>
-          <a:solidFill>
-            <a:srgbClr val="129A8F"/>
-          </a:solidFill>
-          <a:ln>
-            <a:noFill/>
-          </a:ln>
-          <a:effectLst/>
-        </p:spPr>
-        <p:style>
-          <a:lnRef idx="1">
-            <a:schemeClr val="accent1"/>
-          </a:lnRef>
-          <a:fillRef idx="3">
-            <a:schemeClr val="accent1"/>
-          </a:fillRef>
-          <a:effectRef idx="2">
-            <a:schemeClr val="accent1"/>
-          </a:effectRef>
-          <a:fontRef idx="minor">
-            <a:schemeClr val="lt1"/>
-          </a:fontRef>
-        </p:style>
-        <p:txBody>
-          <a:bodyPr rtlCol="0" anchor="ctr"/>
-          <a:lstStyle/>
-          <a:p>
-            <a:pPr algn="ctr"/>
-          </a:p>
-        </p:txBody>
-      </p:sp>
-      <p:sp>
-        <p:nvSpPr>
-          <p:cNvPr id="46" name="TextBox 45"/>
-          <p:cNvSpPr txBox="1"/>
-          <p:nvPr/>
-        </p:nvSpPr>
-        <p:spPr>
-          <a:xfrm>
-            <a:off x="5262372" y="3867911"/>
-            <a:ext cx="1915667" cy="512064"/>
-          </a:xfrm>
-          <a:prstGeom prst="rect">
-            <a:avLst/>
-          </a:prstGeom>
-          <a:noFill/>
-        </p:spPr>
-        <p:txBody>
-          <a:bodyPr wrap="square" anchor="ctr" lIns="0" rIns="0" tIns="0" bIns="0">
-            <a:spAutoFit/>
-          </a:bodyPr>
-          <a:lstStyle/>
-          <a:p>
-            <a:pPr algn="ctr"/>
-            <a:r>
-              <a:rPr sz="1050" b="1">
-                <a:solidFill>
-                  <a:srgbClr val="FFFFFF"/>
-                </a:solidFill>
-                <a:latin typeface="Segoe UI"/>
-              </a:rPr>
-              <a:t>APIM MCP gateway</a:t>
-            </a:r>
-          </a:p>
-          <a:p>
-            <a:pPr algn="ctr"/>
-            <a:r>
-              <a:rPr sz="800" b="0">
-                <a:solidFill>
-                  <a:srgbClr val="ECF0FB"/>
-                </a:solidFill>
-                <a:latin typeface="Segoe UI"/>
-              </a:rPr>
-              <a:t>govern internal &amp; external MCP</a:t>
-            </a:r>
-          </a:p>
-        </p:txBody>
-      </p:sp>
-      <p:sp>
-        <p:nvSpPr>
-          <p:cNvPr id="47" name="Rounded Rectangle 46"/>
-          <p:cNvSpPr/>
-          <p:nvPr/>
-        </p:nvSpPr>
-        <p:spPr>
-          <a:xfrm>
-            <a:off x="7379208" y="3867911"/>
-            <a:ext cx="2061971" cy="512064"/>
-          </a:xfrm>
-          <a:prstGeom prst="roundRect">
-            <a:avLst>
-              <a:gd name="adj" fmla="val 16000"/>
-            </a:avLst>
-          </a:prstGeom>
-          <a:solidFill>
-            <a:srgbClr val="129A8F"/>
-          </a:solidFill>
-          <a:ln>
-            <a:noFill/>
-          </a:ln>
-          <a:effectLst/>
-        </p:spPr>
-        <p:style>
-          <a:lnRef idx="1">
-            <a:schemeClr val="accent1"/>
-          </a:lnRef>
-          <a:fillRef idx="3">
-            <a:schemeClr val="accent1"/>
-          </a:fillRef>
-          <a:effectRef idx="2">
-            <a:schemeClr val="accent1"/>
-          </a:effectRef>
-          <a:fontRef idx="minor">
-            <a:schemeClr val="lt1"/>
-          </a:fontRef>
-        </p:style>
-        <p:txBody>
-          <a:bodyPr rtlCol="0" anchor="ctr"/>
-          <a:lstStyle/>
-          <a:p>
-            <a:pPr algn="ctr"/>
-          </a:p>
-        </p:txBody>
-      </p:sp>
-      <p:sp>
-        <p:nvSpPr>
-          <p:cNvPr id="48" name="TextBox 47"/>
-          <p:cNvSpPr txBox="1"/>
-          <p:nvPr/>
-        </p:nvSpPr>
-        <p:spPr>
-          <a:xfrm>
-            <a:off x="7452360" y="3867911"/>
-            <a:ext cx="1915667" cy="512064"/>
-          </a:xfrm>
-          <a:prstGeom prst="rect">
-            <a:avLst/>
-          </a:prstGeom>
-          <a:noFill/>
-        </p:spPr>
-        <p:txBody>
-          <a:bodyPr wrap="square" anchor="ctr" lIns="0" rIns="0" tIns="0" bIns="0">
-            <a:spAutoFit/>
-          </a:bodyPr>
-          <a:lstStyle/>
-          <a:p>
-            <a:pPr algn="ctr"/>
-            <a:r>
-              <a:rPr sz="1050" b="1">
-                <a:solidFill>
-                  <a:srgbClr val="FFFFFF"/>
-                </a:solidFill>
-                <a:latin typeface="Segoe UI"/>
-              </a:rPr>
-              <a:t>Foundry MCP servers</a:t>
-            </a:r>
-          </a:p>
-          <a:p>
-            <a:pPr algn="ctr"/>
-            <a:r>
-              <a:rPr sz="800" b="0">
-                <a:solidFill>
-                  <a:srgbClr val="ECF0FB"/>
-                </a:solidFill>
-                <a:latin typeface="Segoe UI"/>
-              </a:rPr>
-              <a:t>typed, read-only tools</a:t>
-            </a:r>
-          </a:p>
-        </p:txBody>
-      </p:sp>
-      <p:sp>
-        <p:nvSpPr>
-          <p:cNvPr id="49" name="Rounded Rectangle 48"/>
-          <p:cNvSpPr/>
-          <p:nvPr/>
-        </p:nvSpPr>
-        <p:spPr>
-          <a:xfrm>
-            <a:off x="9569196" y="3867911"/>
-            <a:ext cx="2061971" cy="512064"/>
-          </a:xfrm>
-          <a:prstGeom prst="roundRect">
-            <a:avLst>
-              <a:gd name="adj" fmla="val 16000"/>
-            </a:avLst>
-          </a:prstGeom>
-          <a:solidFill>
-            <a:srgbClr val="129A8F"/>
-          </a:solidFill>
-          <a:ln>
-            <a:noFill/>
-          </a:ln>
-          <a:effectLst/>
-        </p:spPr>
-        <p:style>
-          <a:lnRef idx="1">
-            <a:schemeClr val="accent1"/>
-          </a:lnRef>
-          <a:fillRef idx="3">
-            <a:schemeClr val="accent1"/>
-          </a:fillRef>
-          <a:effectRef idx="2">
-            <a:schemeClr val="accent1"/>
-          </a:effectRef>
-          <a:fontRef idx="minor">
-            <a:schemeClr val="lt1"/>
-          </a:fontRef>
-        </p:style>
-        <p:txBody>
-          <a:bodyPr rtlCol="0" anchor="ctr"/>
-          <a:lstStyle/>
-          <a:p>
-            <a:pPr algn="ctr"/>
-          </a:p>
-        </p:txBody>
-      </p:sp>
-      <p:sp>
-        <p:nvSpPr>
-          <p:cNvPr id="50" name="TextBox 49"/>
-          <p:cNvSpPr txBox="1"/>
-          <p:nvPr/>
-        </p:nvSpPr>
-        <p:spPr>
-          <a:xfrm>
-            <a:off x="9642348" y="3867911"/>
-            <a:ext cx="1915667" cy="512064"/>
-          </a:xfrm>
-          <a:prstGeom prst="rect">
-            <a:avLst/>
-          </a:prstGeom>
-          <a:noFill/>
-        </p:spPr>
-        <p:txBody>
-          <a:bodyPr wrap="square" anchor="ctr" lIns="0" rIns="0" tIns="0" bIns="0">
-            <a:spAutoFit/>
-          </a:bodyPr>
-          <a:lstStyle/>
-          <a:p>
-            <a:pPr algn="ctr"/>
-            <a:r>
-              <a:rPr sz="1050" b="1">
-                <a:solidFill>
-                  <a:srgbClr val="FFFFFF"/>
-                </a:solidFill>
-                <a:latin typeface="Segoe UI"/>
-              </a:rPr>
-              <a:t>Logic Apps connectors</a:t>
-            </a:r>
-          </a:p>
-          <a:p>
-            <a:pPr algn="ctr"/>
-            <a:r>
-              <a:rPr sz="800" b="0">
-                <a:solidFill>
-                  <a:srgbClr val="ECF0FB"/>
-                </a:solidFill>
-                <a:latin typeface="Segoe UI"/>
-              </a:rPr>
-              <a:t>1000+ enterprise apps</a:t>
-            </a:r>
-          </a:p>
-        </p:txBody>
-      </p:sp>
-      <p:sp>
-        <p:nvSpPr>
-          <p:cNvPr id="51" name="Rounded Rectangle 50"/>
-          <p:cNvSpPr/>
-          <p:nvPr/>
-        </p:nvSpPr>
-        <p:spPr>
-          <a:xfrm>
-            <a:off x="411480" y="4571999"/>
-            <a:ext cx="11384280" cy="713232"/>
-          </a:xfrm>
-          <a:prstGeom prst="roundRect">
-            <a:avLst>
-              <a:gd name="adj" fmla="val 10000"/>
-            </a:avLst>
-          </a:prstGeom>
-          <a:solidFill>
-            <a:srgbClr val="E5F5EB"/>
-          </a:solidFill>
-          <a:ln>
-            <a:noFill/>
-          </a:ln>
-          <a:effectLst/>
-        </p:spPr>
-        <p:style>
-          <a:lnRef idx="1">
-            <a:schemeClr val="accent1"/>
-          </a:lnRef>
-          <a:fillRef idx="3">
-            <a:schemeClr val="accent1"/>
-          </a:fillRef>
-          <a:effectRef idx="2">
-            <a:schemeClr val="accent1"/>
-          </a:effectRef>
-          <a:fontRef idx="minor">
-            <a:schemeClr val="lt1"/>
-          </a:fontRef>
-        </p:style>
-        <p:txBody>
-          <a:bodyPr rtlCol="0" anchor="ctr"/>
-          <a:lstStyle/>
-          <a:p>
-            <a:pPr algn="ctr"/>
-          </a:p>
-        </p:txBody>
-      </p:sp>
-      <p:sp>
-        <p:nvSpPr>
-          <p:cNvPr id="52" name="Rounded Rectangle 51"/>
-          <p:cNvSpPr/>
-          <p:nvPr/>
-        </p:nvSpPr>
-        <p:spPr>
-          <a:xfrm>
-            <a:off x="411480" y="4571999"/>
-            <a:ext cx="2423160" cy="713232"/>
-          </a:xfrm>
-          <a:prstGeom prst="roundRect">
-            <a:avLst>
-              <a:gd name="adj" fmla="val 10000"/>
-            </a:avLst>
-          </a:prstGeom>
-          <a:solidFill>
-            <a:srgbClr val="1E9E5A"/>
-          </a:solidFill>
-          <a:ln>
-            <a:noFill/>
-          </a:ln>
-          <a:effectLst/>
-        </p:spPr>
-        <p:style>
-          <a:lnRef idx="1">
-            <a:schemeClr val="accent1"/>
-          </a:lnRef>
-          <a:fillRef idx="3">
-            <a:schemeClr val="accent1"/>
-          </a:fillRef>
-          <a:effectRef idx="2">
-            <a:schemeClr val="accent1"/>
-          </a:effectRef>
-          <a:fontRef idx="minor">
-            <a:schemeClr val="lt1"/>
-          </a:fontRef>
-        </p:style>
-        <p:txBody>
-          <a:bodyPr rtlCol="0" anchor="ctr"/>
-          <a:lstStyle/>
-          <a:p>
-            <a:pPr algn="ctr"/>
-          </a:p>
-        </p:txBody>
-      </p:sp>
-      <p:sp>
-        <p:nvSpPr>
-          <p:cNvPr id="53" name="TextBox 52"/>
-          <p:cNvSpPr txBox="1"/>
-          <p:nvPr/>
-        </p:nvSpPr>
-        <p:spPr>
-          <a:xfrm>
-            <a:off x="557784" y="4571999"/>
-            <a:ext cx="2148840" cy="713232"/>
-          </a:xfrm>
-          <a:prstGeom prst="rect">
-            <a:avLst/>
-          </a:prstGeom>
-          <a:noFill/>
-        </p:spPr>
-        <p:txBody>
-          <a:bodyPr wrap="square" anchor="ctr" lIns="0" rIns="0" tIns="0" bIns="0">
-            <a:spAutoFit/>
-          </a:bodyPr>
-          <a:lstStyle/>
-          <a:p>
-            <a:pPr algn="l"/>
-            <a:r>
-              <a:rPr sz="1150" b="1">
-                <a:solidFill>
-                  <a:srgbClr val="FFFFFF"/>
-                </a:solidFill>
-                <a:latin typeface="Segoe UI"/>
-              </a:rPr>
-              <a:t>KNOWLEDGE &amp; DATA</a:t>
-            </a:r>
-          </a:p>
-          <a:p>
-            <a:pPr algn="l"/>
-            <a:r>
-              <a:rPr sz="800" b="0">
-                <a:solidFill>
-                  <a:srgbClr val="ECF0FB"/>
-                </a:solidFill>
-                <a:latin typeface="Segoe UI"/>
-              </a:rPr>
-              <a:t>ground every answer</a:t>
-            </a:r>
-          </a:p>
-        </p:txBody>
-      </p:sp>
-      <p:sp>
-        <p:nvSpPr>
-          <p:cNvPr id="54" name="Rounded Rectangle 53"/>
-          <p:cNvSpPr/>
-          <p:nvPr/>
-        </p:nvSpPr>
-        <p:spPr>
-          <a:xfrm>
-            <a:off x="2999232" y="4672583"/>
-            <a:ext cx="2061971" cy="512064"/>
-          </a:xfrm>
-          <a:prstGeom prst="roundRect">
-            <a:avLst>
-              <a:gd name="adj" fmla="val 16000"/>
-            </a:avLst>
-          </a:prstGeom>
-          <a:solidFill>
-            <a:srgbClr val="1E9E5A"/>
-          </a:solidFill>
-          <a:ln>
-            <a:noFill/>
-          </a:ln>
-          <a:effectLst/>
-        </p:spPr>
-        <p:style>
-          <a:lnRef idx="1">
-            <a:schemeClr val="accent1"/>
-          </a:lnRef>
-          <a:fillRef idx="3">
-            <a:schemeClr val="accent1"/>
-          </a:fillRef>
-          <a:effectRef idx="2">
-            <a:schemeClr val="accent1"/>
-          </a:effectRef>
-          <a:fontRef idx="minor">
-            <a:schemeClr val="lt1"/>
-          </a:fontRef>
-        </p:style>
-        <p:txBody>
-          <a:bodyPr rtlCol="0" anchor="ctr"/>
-          <a:lstStyle/>
-          <a:p>
-            <a:pPr algn="ctr"/>
-          </a:p>
-        </p:txBody>
-      </p:sp>
-      <p:sp>
-        <p:nvSpPr>
-          <p:cNvPr id="55" name="TextBox 54"/>
-          <p:cNvSpPr txBox="1"/>
-          <p:nvPr/>
-        </p:nvSpPr>
-        <p:spPr>
-          <a:xfrm>
-            <a:off x="3072384" y="4672583"/>
-            <a:ext cx="1915667" cy="512064"/>
-          </a:xfrm>
-          <a:prstGeom prst="rect">
-            <a:avLst/>
-          </a:prstGeom>
-          <a:noFill/>
-        </p:spPr>
-        <p:txBody>
-          <a:bodyPr wrap="square" anchor="ctr" lIns="0" rIns="0" tIns="0" bIns="0">
-            <a:spAutoFit/>
-          </a:bodyPr>
-          <a:lstStyle/>
-          <a:p>
-            <a:pPr algn="ctr"/>
-            <a:r>
-              <a:rPr sz="1050" b="1">
-                <a:solidFill>
-                  <a:srgbClr val="FFFFFF"/>
-                </a:solidFill>
-                <a:latin typeface="Segoe UI"/>
-              </a:rPr>
-              <a:t>Azure Cosmos DB</a:t>
-            </a:r>
-          </a:p>
-          <a:p>
-            <a:pPr algn="ctr"/>
-            <a:r>
-              <a:rPr sz="800" b="0">
-                <a:solidFill>
-                  <a:srgbClr val="ECF0FB"/>
-                </a:solidFill>
-                <a:latin typeface="Segoe UI"/>
-              </a:rPr>
-              <a:t>operational records</a:t>
-            </a:r>
-          </a:p>
-        </p:txBody>
-      </p:sp>
-      <p:sp>
-        <p:nvSpPr>
-          <p:cNvPr id="56" name="Rounded Rectangle 55"/>
-          <p:cNvSpPr/>
-          <p:nvPr/>
-        </p:nvSpPr>
-        <p:spPr>
-          <a:xfrm>
-            <a:off x="5189220" y="4672583"/>
-            <a:ext cx="2061971" cy="512064"/>
-          </a:xfrm>
-          <a:prstGeom prst="roundRect">
-            <a:avLst>
-              <a:gd name="adj" fmla="val 16000"/>
-            </a:avLst>
-          </a:prstGeom>
-          <a:solidFill>
-            <a:srgbClr val="1E9E5A"/>
-          </a:solidFill>
-          <a:ln>
-            <a:noFill/>
-          </a:ln>
-          <a:effectLst/>
-        </p:spPr>
-        <p:style>
-          <a:lnRef idx="1">
-            <a:schemeClr val="accent1"/>
-          </a:lnRef>
-          <a:fillRef idx="3">
-            <a:schemeClr val="accent1"/>
-          </a:fillRef>
-          <a:effectRef idx="2">
-            <a:schemeClr val="accent1"/>
-          </a:effectRef>
-          <a:fontRef idx="minor">
-            <a:schemeClr val="lt1"/>
-          </a:fontRef>
-        </p:style>
-        <p:txBody>
-          <a:bodyPr rtlCol="0" anchor="ctr"/>
-          <a:lstStyle/>
-          <a:p>
-            <a:pPr algn="ctr"/>
-          </a:p>
-        </p:txBody>
-      </p:sp>
-      <p:sp>
-        <p:nvSpPr>
-          <p:cNvPr id="57" name="TextBox 56"/>
-          <p:cNvSpPr txBox="1"/>
-          <p:nvPr/>
-        </p:nvSpPr>
-        <p:spPr>
-          <a:xfrm>
-            <a:off x="5262372" y="4672583"/>
-            <a:ext cx="1915667" cy="512064"/>
-          </a:xfrm>
-          <a:prstGeom prst="rect">
-            <a:avLst/>
-          </a:prstGeom>
-          <a:noFill/>
-        </p:spPr>
-        <p:txBody>
-          <a:bodyPr wrap="square" anchor="ctr" lIns="0" rIns="0" tIns="0" bIns="0">
-            <a:spAutoFit/>
-          </a:bodyPr>
-          <a:lstStyle/>
-          <a:p>
-            <a:pPr algn="ctr"/>
-            <a:r>
-              <a:rPr sz="1050" b="1">
-                <a:solidFill>
-                  <a:srgbClr val="FFFFFF"/>
-                </a:solidFill>
-                <a:latin typeface="Segoe UI"/>
-              </a:rPr>
-              <a:t>Foundry IQ / AI Search</a:t>
-            </a:r>
-          </a:p>
-          <a:p>
-            <a:pPr algn="ctr"/>
-            <a:r>
-              <a:rPr sz="800" b="0">
-                <a:solidFill>
-                  <a:srgbClr val="ECF0FB"/>
-                </a:solidFill>
-                <a:latin typeface="Segoe UI"/>
-              </a:rPr>
-              <a:t>vector + semantic</a:t>
-            </a:r>
-          </a:p>
-        </p:txBody>
-      </p:sp>
-      <p:sp>
-        <p:nvSpPr>
-          <p:cNvPr id="58" name="Rounded Rectangle 57"/>
-          <p:cNvSpPr/>
-          <p:nvPr/>
-        </p:nvSpPr>
-        <p:spPr>
-          <a:xfrm>
-            <a:off x="7379208" y="4672583"/>
-            <a:ext cx="2061971" cy="512064"/>
-          </a:xfrm>
-          <a:prstGeom prst="roundRect">
-            <a:avLst>
-              <a:gd name="adj" fmla="val 16000"/>
-            </a:avLst>
-          </a:prstGeom>
-          <a:solidFill>
-            <a:srgbClr val="1E9E5A"/>
-          </a:solidFill>
-          <a:ln>
-            <a:noFill/>
-          </a:ln>
-          <a:effectLst/>
-        </p:spPr>
-        <p:style>
-          <a:lnRef idx="1">
-            <a:schemeClr val="accent1"/>
-          </a:lnRef>
-          <a:fillRef idx="3">
-            <a:schemeClr val="accent1"/>
-          </a:fillRef>
-          <a:effectRef idx="2">
-            <a:schemeClr val="accent1"/>
-          </a:effectRef>
-          <a:fontRef idx="minor">
-            <a:schemeClr val="lt1"/>
-          </a:fontRef>
-        </p:style>
-        <p:txBody>
-          <a:bodyPr rtlCol="0" anchor="ctr"/>
-          <a:lstStyle/>
-          <a:p>
-            <a:pPr algn="ctr"/>
-          </a:p>
-        </p:txBody>
-      </p:sp>
-      <p:sp>
-        <p:nvSpPr>
-          <p:cNvPr id="59" name="TextBox 58"/>
-          <p:cNvSpPr txBox="1"/>
-          <p:nvPr/>
-        </p:nvSpPr>
-        <p:spPr>
-          <a:xfrm>
-            <a:off x="7452360" y="4672583"/>
-            <a:ext cx="1915667" cy="512064"/>
-          </a:xfrm>
-          <a:prstGeom prst="rect">
-            <a:avLst/>
-          </a:prstGeom>
-          <a:noFill/>
-        </p:spPr>
-        <p:txBody>
-          <a:bodyPr wrap="square" anchor="ctr" lIns="0" rIns="0" tIns="0" bIns="0">
-            <a:spAutoFit/>
-          </a:bodyPr>
-          <a:lstStyle/>
-          <a:p>
-            <a:pPr algn="ctr"/>
-            <a:r>
-              <a:rPr sz="1050" b="1">
-                <a:solidFill>
-                  <a:srgbClr val="FFFFFF"/>
-                </a:solidFill>
-                <a:latin typeface="Segoe UI"/>
-              </a:rPr>
-              <a:t>Microsoft Fabric</a:t>
-            </a:r>
-          </a:p>
-          <a:p>
-            <a:pPr algn="ctr"/>
-            <a:r>
-              <a:rPr sz="800" b="0">
-                <a:solidFill>
-                  <a:srgbClr val="ECF0FB"/>
-                </a:solidFill>
-                <a:latin typeface="Segoe UI"/>
-              </a:rPr>
-              <a:t>OneLake · lakehouse</a:t>
-            </a:r>
-          </a:p>
-        </p:txBody>
-      </p:sp>
-      <p:sp>
-        <p:nvSpPr>
-          <p:cNvPr id="60" name="Rounded Rectangle 59"/>
-          <p:cNvSpPr/>
-          <p:nvPr/>
-        </p:nvSpPr>
-        <p:spPr>
-          <a:xfrm>
-            <a:off x="9569196" y="4672583"/>
-            <a:ext cx="2061971" cy="512064"/>
-          </a:xfrm>
-          <a:prstGeom prst="roundRect">
-            <a:avLst>
-              <a:gd name="adj" fmla="val 16000"/>
-            </a:avLst>
-          </a:prstGeom>
-          <a:solidFill>
-            <a:srgbClr val="1E9E5A"/>
-          </a:solidFill>
-          <a:ln>
-            <a:noFill/>
-          </a:ln>
-          <a:effectLst/>
-        </p:spPr>
-        <p:style>
-          <a:lnRef idx="1">
-            <a:schemeClr val="accent1"/>
-          </a:lnRef>
-          <a:fillRef idx="3">
-            <a:schemeClr val="accent1"/>
-          </a:fillRef>
-          <a:effectRef idx="2">
-            <a:schemeClr val="accent1"/>
-          </a:effectRef>
-          <a:fontRef idx="minor">
-            <a:schemeClr val="lt1"/>
-          </a:fontRef>
-        </p:style>
-        <p:txBody>
-          <a:bodyPr rtlCol="0" anchor="ctr"/>
-          <a:lstStyle/>
-          <a:p>
-            <a:pPr algn="ctr"/>
-          </a:p>
-        </p:txBody>
-      </p:sp>
-      <p:sp>
-        <p:nvSpPr>
-          <p:cNvPr id="61" name="TextBox 60"/>
-          <p:cNvSpPr txBox="1"/>
-          <p:nvPr/>
-        </p:nvSpPr>
-        <p:spPr>
-          <a:xfrm>
-            <a:off x="9642348" y="4672583"/>
-            <a:ext cx="1915667" cy="512064"/>
-          </a:xfrm>
-          <a:prstGeom prst="rect">
-            <a:avLst/>
-          </a:prstGeom>
-          <a:noFill/>
-        </p:spPr>
-        <p:txBody>
-          <a:bodyPr wrap="square" anchor="ctr" lIns="0" rIns="0" tIns="0" bIns="0">
-            <a:spAutoFit/>
-          </a:bodyPr>
-          <a:lstStyle/>
-          <a:p>
-            <a:pPr algn="ctr"/>
-            <a:r>
-              <a:rPr sz="1050" b="1">
-                <a:solidFill>
-                  <a:srgbClr val="FFFFFF"/>
-                </a:solidFill>
-                <a:latin typeface="Segoe UI"/>
-              </a:rPr>
-              <a:t>Azure Databricks</a:t>
-            </a:r>
-          </a:p>
-          <a:p>
-            <a:pPr algn="ctr"/>
-            <a:r>
-              <a:rPr sz="800" b="0">
-                <a:solidFill>
-                  <a:srgbClr val="ECF0FB"/>
-                </a:solidFill>
-                <a:latin typeface="Segoe UI"/>
-              </a:rPr>
-              <a:t>analytics / ML</a:t>
-            </a:r>
-          </a:p>
-        </p:txBody>
-      </p:sp>
-      <p:sp>
-        <p:nvSpPr>
-          <p:cNvPr id="62" name="Rounded Rectangle 61"/>
-          <p:cNvSpPr/>
-          <p:nvPr/>
-        </p:nvSpPr>
-        <p:spPr>
-          <a:xfrm>
-            <a:off x="411480" y="5376671"/>
-            <a:ext cx="11384280" cy="713232"/>
-          </a:xfrm>
-          <a:prstGeom prst="roundRect">
-            <a:avLst>
-              <a:gd name="adj" fmla="val 10000"/>
-            </a:avLst>
-          </a:prstGeom>
-          <a:solidFill>
-            <a:srgbClr val="FDF1DF"/>
-          </a:solidFill>
-          <a:ln>
-            <a:noFill/>
-          </a:ln>
-          <a:effectLst/>
-        </p:spPr>
-        <p:style>
-          <a:lnRef idx="1">
-            <a:schemeClr val="accent1"/>
-          </a:lnRef>
-          <a:fillRef idx="3">
-            <a:schemeClr val="accent1"/>
-          </a:fillRef>
-          <a:effectRef idx="2">
-            <a:schemeClr val="accent1"/>
-          </a:effectRef>
-          <a:fontRef idx="minor">
-            <a:schemeClr val="lt1"/>
-          </a:fontRef>
-        </p:style>
-        <p:txBody>
-          <a:bodyPr rtlCol="0" anchor="ctr"/>
-          <a:lstStyle/>
-          <a:p>
-            <a:pPr algn="ctr"/>
-          </a:p>
-        </p:txBody>
-      </p:sp>
-      <p:sp>
-        <p:nvSpPr>
-          <p:cNvPr id="63" name="Rounded Rectangle 62"/>
-          <p:cNvSpPr/>
-          <p:nvPr/>
-        </p:nvSpPr>
-        <p:spPr>
-          <a:xfrm>
-            <a:off x="411480" y="5376671"/>
-            <a:ext cx="2423160" cy="713232"/>
-          </a:xfrm>
-          <a:prstGeom prst="roundRect">
-            <a:avLst>
-              <a:gd name="adj" fmla="val 10000"/>
-            </a:avLst>
-          </a:prstGeom>
-          <a:solidFill>
-            <a:srgbClr val="E28A00"/>
-          </a:solidFill>
-          <a:ln>
-            <a:noFill/>
-          </a:ln>
-          <a:effectLst/>
-        </p:spPr>
-        <p:style>
-          <a:lnRef idx="1">
-            <a:schemeClr val="accent1"/>
-          </a:lnRef>
-          <a:fillRef idx="3">
-            <a:schemeClr val="accent1"/>
-          </a:fillRef>
-          <a:effectRef idx="2">
-            <a:schemeClr val="accent1"/>
-          </a:effectRef>
-          <a:fontRef idx="minor">
-            <a:schemeClr val="lt1"/>
-          </a:fontRef>
-        </p:style>
-        <p:txBody>
-          <a:bodyPr rtlCol="0" anchor="ctr"/>
-          <a:lstStyle/>
-          <a:p>
-            <a:pPr algn="ctr"/>
-          </a:p>
-        </p:txBody>
-      </p:sp>
-      <p:sp>
-        <p:nvSpPr>
-          <p:cNvPr id="64" name="TextBox 63"/>
-          <p:cNvSpPr txBox="1"/>
-          <p:nvPr/>
-        </p:nvSpPr>
-        <p:spPr>
-          <a:xfrm>
-            <a:off x="557784" y="5376671"/>
-            <a:ext cx="2148840" cy="713232"/>
-          </a:xfrm>
-          <a:prstGeom prst="rect">
-            <a:avLst/>
-          </a:prstGeom>
-          <a:noFill/>
-        </p:spPr>
-        <p:txBody>
-          <a:bodyPr wrap="square" anchor="ctr" lIns="0" rIns="0" tIns="0" bIns="0">
-            <a:spAutoFit/>
-          </a:bodyPr>
-          <a:lstStyle/>
-          <a:p>
-            <a:pPr algn="l"/>
-            <a:r>
-              <a:rPr sz="1150" b="1">
-                <a:solidFill>
-                  <a:srgbClr val="FFFFFF"/>
-                </a:solidFill>
-                <a:latin typeface="Segoe UI"/>
-              </a:rPr>
-              <a:t>MODELS</a:t>
-            </a:r>
-          </a:p>
-          <a:p>
-            <a:pPr algn="l"/>
-            <a:r>
-              <a:rPr sz="800" b="0">
-                <a:solidFill>
-                  <a:srgbClr val="ECF0FB"/>
-                </a:solidFill>
-                <a:latin typeface="Segoe UI"/>
-              </a:rPr>
-              <a:t>reason &amp; generate</a:t>
-            </a:r>
-          </a:p>
-        </p:txBody>
-      </p:sp>
-      <p:sp>
-        <p:nvSpPr>
-          <p:cNvPr id="65" name="Rounded Rectangle 64"/>
-          <p:cNvSpPr/>
-          <p:nvPr/>
-        </p:nvSpPr>
-        <p:spPr>
-          <a:xfrm>
-            <a:off x="2999232" y="5477255"/>
-            <a:ext cx="2061971" cy="512064"/>
-          </a:xfrm>
-          <a:prstGeom prst="roundRect">
-            <a:avLst>
-              <a:gd name="adj" fmla="val 16000"/>
-            </a:avLst>
-          </a:prstGeom>
-          <a:solidFill>
-            <a:srgbClr val="E28A00"/>
-          </a:solidFill>
-          <a:ln>
-            <a:noFill/>
-          </a:ln>
-          <a:effectLst/>
-        </p:spPr>
-        <p:style>
-          <a:lnRef idx="1">
-            <a:schemeClr val="accent1"/>
-          </a:lnRef>
-          <a:fillRef idx="3">
-            <a:schemeClr val="accent1"/>
-          </a:fillRef>
-          <a:effectRef idx="2">
-            <a:schemeClr val="accent1"/>
-          </a:effectRef>
-          <a:fontRef idx="minor">
-            <a:schemeClr val="lt1"/>
-          </a:fontRef>
-        </p:style>
-        <p:txBody>
-          <a:bodyPr rtlCol="0" anchor="ctr"/>
-          <a:lstStyle/>
-          <a:p>
-            <a:pPr algn="ctr"/>
-          </a:p>
-        </p:txBody>
-      </p:sp>
-      <p:sp>
-        <p:nvSpPr>
-          <p:cNvPr id="66" name="TextBox 65"/>
-          <p:cNvSpPr txBox="1"/>
-          <p:nvPr/>
-        </p:nvSpPr>
-        <p:spPr>
-          <a:xfrm>
-            <a:off x="3072384" y="5477255"/>
-            <a:ext cx="1915667" cy="512064"/>
-          </a:xfrm>
-          <a:prstGeom prst="rect">
-            <a:avLst/>
-          </a:prstGeom>
-          <a:noFill/>
-        </p:spPr>
-        <p:txBody>
-          <a:bodyPr wrap="square" anchor="ctr" lIns="0" rIns="0" tIns="0" bIns="0">
-            <a:spAutoFit/>
-          </a:bodyPr>
-          <a:lstStyle/>
-          <a:p>
-            <a:pPr algn="ctr"/>
-            <a:r>
-              <a:rPr sz="1050" b="1">
-                <a:solidFill>
-                  <a:srgbClr val="FFFFFF"/>
-                </a:solidFill>
-                <a:latin typeface="Segoe UI"/>
-              </a:rPr>
-              <a:t>Foundry / Azure OpenAI</a:t>
-            </a:r>
-          </a:p>
-          <a:p>
-            <a:pPr algn="ctr"/>
-            <a:r>
-              <a:rPr sz="800" b="0">
-                <a:solidFill>
-                  <a:srgbClr val="ECF0FB"/>
-                </a:solidFill>
-                <a:latin typeface="Segoe UI"/>
-              </a:rPr>
-              <a:t>GPT family LLMs</a:t>
-            </a:r>
-          </a:p>
-        </p:txBody>
-      </p:sp>
-      <p:sp>
-        <p:nvSpPr>
-          <p:cNvPr id="67" name="Rounded Rectangle 66"/>
-          <p:cNvSpPr/>
-          <p:nvPr/>
-        </p:nvSpPr>
-        <p:spPr>
-          <a:xfrm>
-            <a:off x="5189220" y="5477255"/>
-            <a:ext cx="2061971" cy="512064"/>
-          </a:xfrm>
-          <a:prstGeom prst="roundRect">
-            <a:avLst>
-              <a:gd name="adj" fmla="val 16000"/>
-            </a:avLst>
-          </a:prstGeom>
-          <a:solidFill>
-            <a:srgbClr val="E28A00"/>
-          </a:solidFill>
-          <a:ln>
-            <a:noFill/>
-          </a:ln>
-          <a:effectLst/>
-        </p:spPr>
-        <p:style>
-          <a:lnRef idx="1">
-            <a:schemeClr val="accent1"/>
-          </a:lnRef>
-          <a:fillRef idx="3">
-            <a:schemeClr val="accent1"/>
-          </a:fillRef>
-          <a:effectRef idx="2">
-            <a:schemeClr val="accent1"/>
-          </a:effectRef>
-          <a:fontRef idx="minor">
-            <a:schemeClr val="lt1"/>
-          </a:fontRef>
-        </p:style>
-        <p:txBody>
-          <a:bodyPr rtlCol="0" anchor="ctr"/>
-          <a:lstStyle/>
-          <a:p>
-            <a:pPr algn="ctr"/>
-          </a:p>
-        </p:txBody>
-      </p:sp>
-      <p:sp>
-        <p:nvSpPr>
-          <p:cNvPr id="68" name="TextBox 67"/>
-          <p:cNvSpPr txBox="1"/>
-          <p:nvPr/>
-        </p:nvSpPr>
-        <p:spPr>
-          <a:xfrm>
-            <a:off x="5262372" y="5477255"/>
-            <a:ext cx="1915667" cy="512064"/>
-          </a:xfrm>
-          <a:prstGeom prst="rect">
-            <a:avLst/>
-          </a:prstGeom>
-          <a:noFill/>
-        </p:spPr>
-        <p:txBody>
-          <a:bodyPr wrap="square" anchor="ctr" lIns="0" rIns="0" tIns="0" bIns="0">
-            <a:spAutoFit/>
-          </a:bodyPr>
-          <a:lstStyle/>
-          <a:p>
-            <a:pPr algn="ctr"/>
-            <a:r>
-              <a:rPr sz="1050" b="1">
-                <a:solidFill>
-                  <a:srgbClr val="FFFFFF"/>
-                </a:solidFill>
-                <a:latin typeface="Segoe UI"/>
-              </a:rPr>
-              <a:t>Small language models</a:t>
-            </a:r>
-          </a:p>
-          <a:p>
-            <a:pPr algn="ctr"/>
-            <a:r>
-              <a:rPr sz="800" b="0">
-                <a:solidFill>
-                  <a:srgbClr val="ECF0FB"/>
-                </a:solidFill>
-                <a:latin typeface="Segoe UI"/>
-              </a:rPr>
-              <a:t>Phi · cost-efficient</a:t>
-            </a:r>
-          </a:p>
-        </p:txBody>
-      </p:sp>
-      <p:sp>
-        <p:nvSpPr>
-          <p:cNvPr id="69" name="Rounded Rectangle 68"/>
-          <p:cNvSpPr/>
-          <p:nvPr/>
-        </p:nvSpPr>
-        <p:spPr>
-          <a:xfrm>
-            <a:off x="7379208" y="5477255"/>
-            <a:ext cx="2061971" cy="512064"/>
-          </a:xfrm>
-          <a:prstGeom prst="roundRect">
-            <a:avLst>
-              <a:gd name="adj" fmla="val 16000"/>
-            </a:avLst>
-          </a:prstGeom>
-          <a:solidFill>
-            <a:srgbClr val="E28A00"/>
-          </a:solidFill>
-          <a:ln>
-            <a:noFill/>
-          </a:ln>
-          <a:effectLst/>
-        </p:spPr>
-        <p:style>
-          <a:lnRef idx="1">
-            <a:schemeClr val="accent1"/>
-          </a:lnRef>
-          <a:fillRef idx="3">
-            <a:schemeClr val="accent1"/>
-          </a:fillRef>
-          <a:effectRef idx="2">
-            <a:schemeClr val="accent1"/>
-          </a:effectRef>
-          <a:fontRef idx="minor">
-            <a:schemeClr val="lt1"/>
-          </a:fontRef>
-        </p:style>
-        <p:txBody>
-          <a:bodyPr rtlCol="0" anchor="ctr"/>
-          <a:lstStyle/>
-          <a:p>
-            <a:pPr algn="ctr"/>
-          </a:p>
-        </p:txBody>
-      </p:sp>
-      <p:sp>
-        <p:nvSpPr>
-          <p:cNvPr id="70" name="TextBox 69"/>
-          <p:cNvSpPr txBox="1"/>
-          <p:nvPr/>
-        </p:nvSpPr>
-        <p:spPr>
-          <a:xfrm>
-            <a:off x="7452360" y="5477255"/>
-            <a:ext cx="1915667" cy="512064"/>
-          </a:xfrm>
-          <a:prstGeom prst="rect">
-            <a:avLst/>
-          </a:prstGeom>
-          <a:noFill/>
-        </p:spPr>
-        <p:txBody>
-          <a:bodyPr wrap="square" anchor="ctr" lIns="0" rIns="0" tIns="0" bIns="0">
-            <a:spAutoFit/>
-          </a:bodyPr>
-          <a:lstStyle/>
-          <a:p>
-            <a:pPr algn="ctr"/>
-            <a:r>
-              <a:rPr sz="1050" b="1">
-                <a:solidFill>
-                  <a:srgbClr val="FFFFFF"/>
-                </a:solidFill>
-                <a:latin typeface="Segoe UI"/>
-              </a:rPr>
-              <a:t>Model router</a:t>
-            </a:r>
-          </a:p>
-          <a:p>
-            <a:pPr algn="ctr"/>
-            <a:r>
-              <a:rPr sz="800" b="0">
-                <a:solidFill>
-                  <a:srgbClr val="ECF0FB"/>
-                </a:solidFill>
-                <a:latin typeface="Segoe UI"/>
-              </a:rPr>
-              <a:t>right model per task</a:t>
-            </a:r>
-          </a:p>
-        </p:txBody>
-      </p:sp>
-      <p:sp>
-        <p:nvSpPr>
-          <p:cNvPr id="71" name="Rounded Rectangle 70"/>
-          <p:cNvSpPr/>
-          <p:nvPr/>
-        </p:nvSpPr>
-        <p:spPr>
-          <a:xfrm>
-            <a:off x="9569196" y="5477255"/>
-            <a:ext cx="2061971" cy="512064"/>
-          </a:xfrm>
-          <a:prstGeom prst="roundRect">
-            <a:avLst>
-              <a:gd name="adj" fmla="val 16000"/>
-            </a:avLst>
-          </a:prstGeom>
-          <a:solidFill>
-            <a:srgbClr val="E28A00"/>
-          </a:solidFill>
-          <a:ln>
-            <a:noFill/>
-          </a:ln>
-          <a:effectLst/>
-        </p:spPr>
-        <p:style>
-          <a:lnRef idx="1">
-            <a:schemeClr val="accent1"/>
-          </a:lnRef>
-          <a:fillRef idx="3">
-            <a:schemeClr val="accent1"/>
-          </a:fillRef>
-          <a:effectRef idx="2">
-            <a:schemeClr val="accent1"/>
-          </a:effectRef>
-          <a:fontRef idx="minor">
-            <a:schemeClr val="lt1"/>
-          </a:fontRef>
-        </p:style>
-        <p:txBody>
-          <a:bodyPr rtlCol="0" anchor="ctr"/>
-          <a:lstStyle/>
-          <a:p>
-            <a:pPr algn="ctr"/>
-          </a:p>
-        </p:txBody>
-      </p:sp>
-      <p:sp>
-        <p:nvSpPr>
-          <p:cNvPr id="72" name="TextBox 71"/>
-          <p:cNvSpPr txBox="1"/>
-          <p:nvPr/>
-        </p:nvSpPr>
-        <p:spPr>
-          <a:xfrm>
-            <a:off x="9642348" y="5477255"/>
-            <a:ext cx="1915667" cy="512064"/>
-          </a:xfrm>
-          <a:prstGeom prst="rect">
-            <a:avLst/>
-          </a:prstGeom>
-          <a:noFill/>
-        </p:spPr>
-        <p:txBody>
-          <a:bodyPr wrap="square" anchor="ctr" lIns="0" rIns="0" tIns="0" bIns="0">
-            <a:spAutoFit/>
-          </a:bodyPr>
-          <a:lstStyle/>
-          <a:p>
-            <a:pPr algn="ctr"/>
-            <a:r>
-              <a:rPr sz="1050" b="1">
-                <a:solidFill>
-                  <a:srgbClr val="FFFFFF"/>
-                </a:solidFill>
-                <a:latin typeface="Segoe UI"/>
-              </a:rPr>
-              <a:t>Code Interpreter</a:t>
-            </a:r>
-          </a:p>
-          <a:p>
-            <a:pPr algn="ctr"/>
-            <a:r>
-              <a:rPr sz="800" b="0">
-                <a:solidFill>
-                  <a:srgbClr val="ECF0FB"/>
-                </a:solidFill>
-                <a:latin typeface="Segoe UI"/>
-              </a:rPr>
-              <a:t>consolidated math</a:t>
-            </a:r>
-          </a:p>
-        </p:txBody>
-      </p:sp>
-      <p:sp>
-        <p:nvSpPr>
-          <p:cNvPr id="73" name="Rounded Rectangle 72"/>
-          <p:cNvSpPr/>
-          <p:nvPr/>
-        </p:nvSpPr>
-        <p:spPr>
-          <a:xfrm>
-            <a:off x="411480" y="6419088"/>
-            <a:ext cx="11384280" cy="384048"/>
-          </a:xfrm>
-          <a:prstGeom prst="roundRect">
-            <a:avLst>
-              <a:gd name="adj" fmla="val 25000"/>
-            </a:avLst>
-          </a:prstGeom>
-          <a:solidFill>
-            <a:srgbClr val="1B1F2A"/>
-          </a:solidFill>
-          <a:ln>
-            <a:noFill/>
-          </a:ln>
-          <a:effectLst/>
-        </p:spPr>
-        <p:style>
-          <a:lnRef idx="1">
-            <a:schemeClr val="accent1"/>
-          </a:lnRef>
-          <a:fillRef idx="3">
-            <a:schemeClr val="accent1"/>
-          </a:fillRef>
-          <a:effectRef idx="2">
-            <a:schemeClr val="accent1"/>
-          </a:effectRef>
-          <a:fontRef idx="minor">
-            <a:schemeClr val="lt1"/>
-          </a:fontRef>
-        </p:style>
-        <p:txBody>
-          <a:bodyPr rtlCol="0" anchor="ctr"/>
-          <a:lstStyle/>
-          <a:p>
-            <a:pPr algn="ctr"/>
-          </a:p>
-        </p:txBody>
-      </p:sp>
-      <p:sp>
-        <p:nvSpPr>
-          <p:cNvPr id="74" name="TextBox 73"/>
-          <p:cNvSpPr txBox="1"/>
-          <p:nvPr/>
-        </p:nvSpPr>
-        <p:spPr>
-          <a:xfrm>
-            <a:off x="548640" y="6437376"/>
-            <a:ext cx="11155680" cy="347472"/>
-          </a:xfrm>
-          <a:prstGeom prst="rect">
-            <a:avLst/>
-          </a:prstGeom>
-          <a:noFill/>
-        </p:spPr>
-        <p:txBody>
-          <a:bodyPr wrap="square" anchor="ctr" lIns="0" rIns="0" tIns="0" bIns="0">
-            <a:spAutoFit/>
-          </a:bodyPr>
-          <a:lstStyle/>
-          <a:p>
-            <a:pPr algn="l"/>
-            <a:r>
-              <a:rPr sz="1050" b="1">
-                <a:solidFill>
-                  <a:srgbClr val="E28A00"/>
-                </a:solidFill>
-                <a:latin typeface="Segoe UI"/>
-              </a:rPr>
-              <a:t>Governance &amp; observability span every layer:  </a:t>
-            </a:r>
-            <a:r>
-              <a:rPr sz="1050" b="0">
-                <a:solidFill>
-                  <a:srgbClr val="FFFFFF"/>
-                </a:solidFill>
-                <a:latin typeface="Segoe UI"/>
-              </a:rPr>
-              <a:t>Azure Monitor · Application Insights · Foundry Evaluations · Content Safety · Cost Management (FinOps).</a:t>
-            </a:r>
-          </a:p>
-        </p:txBody>
-      </p:sp>
-    </p:spTree>
-  </p:cSld>
-  <p:clrMapOvr>
-    <a:masterClrMapping/>
-  </p:clrMapOvr>
-</p:sld>
-</file>
-
-<file path=ppt/slides/slide6.xml><?xml version="1.0" encoding="utf-8"?>
-<p:sld xmlns:a="http://schemas.openxmlformats.org/drawingml/2006/main" xmlns:p="http://schemas.openxmlformats.org/presentationml/2006/main" xmlns:r="http://schemas.openxmlformats.org/officeDocument/2006/relationships">
-  <p:cSld>
-    <p:spTree>
-      <p:nvGrpSpPr>
-        <p:cNvPr id="1" name=""/>
-        <p:cNvGrpSpPr/>
-        <p:nvPr/>
-      </p:nvGrpSpPr>
-      <p:grpSpPr/>
-      <p:sp>
-        <p:nvSpPr>
-          <p:cNvPr id="2" name="Rectangle 1"/>
-          <p:cNvSpPr/>
-          <p:nvPr/>
-        </p:nvSpPr>
-        <p:spPr>
-          <a:xfrm>
-            <a:off x="0" y="0"/>
-            <a:ext cx="12191695" cy="6858000"/>
-          </a:xfrm>
-          <a:prstGeom prst="rect">
-            <a:avLst/>
-          </a:prstGeom>
-          <a:solidFill>
-            <a:srgbClr val="F4F6FB"/>
-          </a:solidFill>
-          <a:ln>
-            <a:noFill/>
-          </a:ln>
-          <a:effectLst/>
-        </p:spPr>
-        <p:style>
-          <a:lnRef idx="1">
-            <a:schemeClr val="accent1"/>
-          </a:lnRef>
-          <a:fillRef idx="3">
-            <a:schemeClr val="accent1"/>
-          </a:fillRef>
-          <a:effectRef idx="2">
-            <a:schemeClr val="accent1"/>
-          </a:effectRef>
-          <a:fontRef idx="minor">
-            <a:schemeClr val="lt1"/>
-          </a:fontRef>
-        </p:style>
-        <p:txBody>
-          <a:bodyPr rtlCol="0" anchor="ctr"/>
-          <a:lstStyle/>
-          <a:p>
-            <a:pPr algn="ctr"/>
-          </a:p>
-        </p:txBody>
-      </p:sp>
-      <p:sp>
-        <p:nvSpPr>
-          <p:cNvPr id="3" name="Rectangle 2"/>
-          <p:cNvSpPr/>
-          <p:nvPr/>
-        </p:nvSpPr>
-        <p:spPr>
-          <a:xfrm>
-            <a:off x="0" y="0"/>
-            <a:ext cx="12191695" cy="1078992"/>
-          </a:xfrm>
-          <a:prstGeom prst="rect">
-            <a:avLst/>
-          </a:prstGeom>
-          <a:solidFill>
-            <a:srgbClr val="1B1F2A"/>
-          </a:solidFill>
-          <a:ln>
-            <a:noFill/>
-          </a:ln>
-          <a:effectLst/>
-        </p:spPr>
-        <p:style>
-          <a:lnRef idx="1">
-            <a:schemeClr val="accent1"/>
-          </a:lnRef>
-          <a:fillRef idx="3">
-            <a:schemeClr val="accent1"/>
-          </a:fillRef>
-          <a:effectRef idx="2">
-            <a:schemeClr val="accent1"/>
-          </a:effectRef>
-          <a:fontRef idx="minor">
-            <a:schemeClr val="lt1"/>
-          </a:fontRef>
-        </p:style>
-        <p:txBody>
-          <a:bodyPr rtlCol="0" anchor="ctr"/>
-          <a:lstStyle/>
-          <a:p>
-            <a:pPr algn="ctr"/>
-          </a:p>
-        </p:txBody>
-      </p:sp>
-      <p:sp>
-        <p:nvSpPr>
-          <p:cNvPr id="4" name="Rectangle 3"/>
-          <p:cNvSpPr/>
-          <p:nvPr/>
-        </p:nvSpPr>
-        <p:spPr>
-          <a:xfrm>
-            <a:off x="0" y="1024128"/>
-            <a:ext cx="12191695" cy="54864"/>
-          </a:xfrm>
-          <a:prstGeom prst="rect">
-            <a:avLst/>
-          </a:prstGeom>
-          <a:solidFill>
-            <a:srgbClr val="E28A00"/>
-          </a:solidFill>
-          <a:ln>
-            <a:noFill/>
-          </a:ln>
-          <a:effectLst/>
-        </p:spPr>
-        <p:style>
-          <a:lnRef idx="1">
-            <a:schemeClr val="accent1"/>
-          </a:lnRef>
-          <a:fillRef idx="3">
-            <a:schemeClr val="accent1"/>
-          </a:fillRef>
-          <a:effectRef idx="2">
-            <a:schemeClr val="accent1"/>
-          </a:effectRef>
-          <a:fontRef idx="minor">
-            <a:schemeClr val="lt1"/>
-          </a:fontRef>
-        </p:style>
-        <p:txBody>
-          <a:bodyPr rtlCol="0" anchor="ctr"/>
-          <a:lstStyle/>
-          <a:p>
-            <a:pPr algn="ctr"/>
-          </a:p>
-        </p:txBody>
-      </p:sp>
-      <p:sp>
-        <p:nvSpPr>
-          <p:cNvPr id="5" name="TextBox 4"/>
-          <p:cNvSpPr txBox="1"/>
-          <p:nvPr/>
-        </p:nvSpPr>
-        <p:spPr>
-          <a:xfrm>
-            <a:off x="502920" y="146304"/>
-            <a:ext cx="11247120" cy="365760"/>
-          </a:xfrm>
-          <a:prstGeom prst="rect">
-            <a:avLst/>
-          </a:prstGeom>
-          <a:noFill/>
-        </p:spPr>
-        <p:txBody>
-          <a:bodyPr wrap="square" anchor="t" lIns="0" rIns="0" tIns="0" bIns="0">
-            <a:spAutoFit/>
-          </a:bodyPr>
-          <a:lstStyle/>
-          <a:p>
-            <a:pPr algn="l"/>
-            <a:r>
-              <a:rPr sz="1200" b="1">
-                <a:solidFill>
-                  <a:srgbClr val="E28A00"/>
-                </a:solidFill>
-                <a:latin typeface="Segoe UI"/>
-              </a:rPr>
-              <a:t>ZAVA · THIS DEMO ON THE REFERENCE ARCHITECTURE</a:t>
-            </a:r>
-          </a:p>
-        </p:txBody>
-      </p:sp>
-      <p:sp>
-        <p:nvSpPr>
-          <p:cNvPr id="6" name="TextBox 5"/>
-          <p:cNvSpPr txBox="1"/>
-          <p:nvPr/>
-        </p:nvSpPr>
-        <p:spPr>
-          <a:xfrm>
-            <a:off x="502920" y="402336"/>
-            <a:ext cx="11247120" cy="566928"/>
-          </a:xfrm>
-          <a:prstGeom prst="rect">
-            <a:avLst/>
-          </a:prstGeom>
-          <a:noFill/>
-        </p:spPr>
-        <p:txBody>
-          <a:bodyPr wrap="square" anchor="t" lIns="0" rIns="0" tIns="0" bIns="0">
-            <a:spAutoFit/>
-          </a:bodyPr>
-          <a:lstStyle/>
-          <a:p>
-            <a:pPr algn="l"/>
-            <a:r>
-              <a:rPr sz="2300" b="1">
-                <a:solidFill>
-                  <a:srgbClr val="FFFFFF"/>
-                </a:solidFill>
-                <a:latin typeface="Segoe UI"/>
-              </a:rPr>
-              <a:t>Every Zava component is a swap-in of the enterprise building block above it</a:t>
-            </a:r>
-          </a:p>
-        </p:txBody>
-      </p:sp>
-      <p:sp>
-        <p:nvSpPr>
-          <p:cNvPr id="7" name="Rounded Rectangle 6"/>
-          <p:cNvSpPr/>
-          <p:nvPr/>
-        </p:nvSpPr>
-        <p:spPr>
-          <a:xfrm>
-            <a:off x="411480" y="1280160"/>
-            <a:ext cx="11384280" cy="713232"/>
-          </a:xfrm>
-          <a:prstGeom prst="roundRect">
-            <a:avLst>
-              <a:gd name="adj" fmla="val 10000"/>
-            </a:avLst>
-          </a:prstGeom>
-          <a:solidFill>
-            <a:srgbClr val="EAF0FE"/>
-          </a:solidFill>
-          <a:ln>
-            <a:noFill/>
-          </a:ln>
-          <a:effectLst/>
-        </p:spPr>
-        <p:style>
-          <a:lnRef idx="1">
-            <a:schemeClr val="accent1"/>
-          </a:lnRef>
-          <a:fillRef idx="3">
-            <a:schemeClr val="accent1"/>
-          </a:fillRef>
-          <a:effectRef idx="2">
-            <a:schemeClr val="accent1"/>
-          </a:effectRef>
-          <a:fontRef idx="minor">
-            <a:schemeClr val="lt1"/>
-          </a:fontRef>
-        </p:style>
-        <p:txBody>
-          <a:bodyPr rtlCol="0" anchor="ctr"/>
-          <a:lstStyle/>
-          <a:p>
-            <a:pPr algn="ctr"/>
-          </a:p>
-        </p:txBody>
-      </p:sp>
-      <p:sp>
-        <p:nvSpPr>
-          <p:cNvPr id="8" name="Rounded Rectangle 7"/>
-          <p:cNvSpPr/>
-          <p:nvPr/>
-        </p:nvSpPr>
-        <p:spPr>
-          <a:xfrm>
-            <a:off x="411480" y="1280160"/>
-            <a:ext cx="2423160" cy="713232"/>
-          </a:xfrm>
-          <a:prstGeom prst="roundRect">
-            <a:avLst>
-              <a:gd name="adj" fmla="val 10000"/>
-            </a:avLst>
-          </a:prstGeom>
-          <a:solidFill>
-            <a:srgbClr val="2F6FED"/>
-          </a:solidFill>
-          <a:ln>
-            <a:noFill/>
-          </a:ln>
-          <a:effectLst/>
-        </p:spPr>
-        <p:style>
-          <a:lnRef idx="1">
-            <a:schemeClr val="accent1"/>
-          </a:lnRef>
-          <a:fillRef idx="3">
-            <a:schemeClr val="accent1"/>
-          </a:fillRef>
-          <a:effectRef idx="2">
-            <a:schemeClr val="accent1"/>
-          </a:effectRef>
-          <a:fontRef idx="minor">
-            <a:schemeClr val="lt1"/>
-          </a:fontRef>
-        </p:style>
-        <p:txBody>
-          <a:bodyPr rtlCol="0" anchor="ctr"/>
-          <a:lstStyle/>
-          <a:p>
-            <a:pPr algn="ctr"/>
-          </a:p>
-        </p:txBody>
-      </p:sp>
-      <p:sp>
-        <p:nvSpPr>
-          <p:cNvPr id="9" name="TextBox 8"/>
-          <p:cNvSpPr txBox="1"/>
-          <p:nvPr/>
-        </p:nvSpPr>
-        <p:spPr>
-          <a:xfrm>
-            <a:off x="557784" y="1280160"/>
-            <a:ext cx="2148840" cy="713232"/>
-          </a:xfrm>
-          <a:prstGeom prst="rect">
-            <a:avLst/>
-          </a:prstGeom>
-          <a:noFill/>
-        </p:spPr>
-        <p:txBody>
-          <a:bodyPr wrap="square" anchor="ctr" lIns="0" rIns="0" tIns="0" bIns="0">
-            <a:spAutoFit/>
-          </a:bodyPr>
-          <a:lstStyle/>
-          <a:p>
-            <a:pPr algn="l"/>
-            <a:r>
-              <a:rPr sz="1150" b="1">
-                <a:solidFill>
-                  <a:srgbClr val="FFFFFF"/>
-                </a:solidFill>
-                <a:latin typeface="Segoe UI"/>
-              </a:rPr>
-              <a:t>EXPERIENCE</a:t>
-            </a:r>
-          </a:p>
-          <a:p>
-            <a:pPr algn="l"/>
-            <a:r>
-              <a:rPr sz="800" b="0">
-                <a:solidFill>
-                  <a:srgbClr val="ECF0FB"/>
-                </a:solidFill>
-                <a:latin typeface="Segoe UI"/>
-              </a:rPr>
-              <a:t>how the user asks</a:t>
-            </a:r>
-          </a:p>
-        </p:txBody>
-      </p:sp>
-      <p:sp>
-        <p:nvSpPr>
-          <p:cNvPr id="10" name="Rounded Rectangle 9"/>
-          <p:cNvSpPr/>
-          <p:nvPr/>
-        </p:nvSpPr>
-        <p:spPr>
-          <a:xfrm>
-            <a:off x="2999232" y="1380744"/>
-            <a:ext cx="2791967" cy="512064"/>
-          </a:xfrm>
-          <a:prstGeom prst="roundRect">
-            <a:avLst>
-              <a:gd name="adj" fmla="val 16000"/>
-            </a:avLst>
-          </a:prstGeom>
-          <a:solidFill>
-            <a:srgbClr val="2F6FED"/>
-          </a:solidFill>
-          <a:ln>
-            <a:noFill/>
-          </a:ln>
-          <a:effectLst/>
-        </p:spPr>
-        <p:style>
-          <a:lnRef idx="1">
-            <a:schemeClr val="accent1"/>
-          </a:lnRef>
-          <a:fillRef idx="3">
-            <a:schemeClr val="accent1"/>
-          </a:fillRef>
-          <a:effectRef idx="2">
-            <a:schemeClr val="accent1"/>
-          </a:effectRef>
-          <a:fontRef idx="minor">
-            <a:schemeClr val="lt1"/>
-          </a:fontRef>
-        </p:style>
-        <p:txBody>
-          <a:bodyPr rtlCol="0" anchor="ctr"/>
-          <a:lstStyle/>
-          <a:p>
-            <a:pPr algn="ctr"/>
-          </a:p>
-        </p:txBody>
-      </p:sp>
-      <p:sp>
-        <p:nvSpPr>
-          <p:cNvPr id="11" name="TextBox 10"/>
-          <p:cNvSpPr txBox="1"/>
-          <p:nvPr/>
-        </p:nvSpPr>
-        <p:spPr>
-          <a:xfrm>
-            <a:off x="3072384" y="1380744"/>
-            <a:ext cx="2645663" cy="512064"/>
-          </a:xfrm>
-          <a:prstGeom prst="rect">
-            <a:avLst/>
-          </a:prstGeom>
-          <a:noFill/>
-        </p:spPr>
-        <p:txBody>
-          <a:bodyPr wrap="square" anchor="ctr" lIns="0" rIns="0" tIns="0" bIns="0">
-            <a:spAutoFit/>
-          </a:bodyPr>
-          <a:lstStyle/>
-          <a:p>
-            <a:pPr algn="ctr"/>
-            <a:r>
-              <a:rPr sz="1050" b="1">
-                <a:solidFill>
-                  <a:srgbClr val="FFFFFF"/>
-                </a:solidFill>
-                <a:latin typeface="Segoe UI"/>
-              </a:rPr>
-              <a:t>Chat app (FastAPI)</a:t>
-            </a:r>
-          </a:p>
-          <a:p>
-            <a:pPr algn="ctr"/>
-            <a:r>
-              <a:rPr sz="800" b="0">
-                <a:solidFill>
-                  <a:srgbClr val="ECF0FB"/>
-                </a:solidFill>
-                <a:latin typeface="Segoe UI"/>
-              </a:rPr>
-              <a:t>live UI + charts</a:t>
-            </a:r>
-          </a:p>
-        </p:txBody>
-      </p:sp>
-      <p:sp>
-        <p:nvSpPr>
-          <p:cNvPr id="12" name="Rounded Rectangle 11"/>
-          <p:cNvSpPr/>
-          <p:nvPr/>
-        </p:nvSpPr>
-        <p:spPr>
-          <a:xfrm>
-            <a:off x="5919215" y="1380744"/>
-            <a:ext cx="2791967" cy="512064"/>
-          </a:xfrm>
-          <a:prstGeom prst="roundRect">
-            <a:avLst>
-              <a:gd name="adj" fmla="val 16000"/>
-            </a:avLst>
-          </a:prstGeom>
-          <a:solidFill>
-            <a:srgbClr val="2F6FED"/>
-          </a:solidFill>
-          <a:ln>
-            <a:noFill/>
-          </a:ln>
-          <a:effectLst/>
-        </p:spPr>
-        <p:style>
-          <a:lnRef idx="1">
-            <a:schemeClr val="accent1"/>
-          </a:lnRef>
-          <a:fillRef idx="3">
-            <a:schemeClr val="accent1"/>
-          </a:fillRef>
-          <a:effectRef idx="2">
-            <a:schemeClr val="accent1"/>
-          </a:effectRef>
-          <a:fontRef idx="minor">
-            <a:schemeClr val="lt1"/>
-          </a:fontRef>
-        </p:style>
-        <p:txBody>
-          <a:bodyPr rtlCol="0" anchor="ctr"/>
-          <a:lstStyle/>
-          <a:p>
-            <a:pPr algn="ctr"/>
-          </a:p>
-        </p:txBody>
-      </p:sp>
-      <p:sp>
-        <p:nvSpPr>
-          <p:cNvPr id="13" name="TextBox 12"/>
-          <p:cNvSpPr txBox="1"/>
-          <p:nvPr/>
-        </p:nvSpPr>
-        <p:spPr>
-          <a:xfrm>
-            <a:off x="5992367" y="1380744"/>
-            <a:ext cx="2645663" cy="512064"/>
-          </a:xfrm>
-          <a:prstGeom prst="rect">
-            <a:avLst/>
-          </a:prstGeom>
-          <a:noFill/>
-        </p:spPr>
-        <p:txBody>
-          <a:bodyPr wrap="square" anchor="ctr" lIns="0" rIns="0" tIns="0" bIns="0">
-            <a:spAutoFit/>
-          </a:bodyPr>
-          <a:lstStyle/>
-          <a:p>
-            <a:pPr algn="ctr"/>
-            <a:r>
-              <a:rPr sz="1050" b="1">
-                <a:solidFill>
-                  <a:srgbClr val="FFFFFF"/>
-                </a:solidFill>
-                <a:latin typeface="Segoe UI"/>
-              </a:rPr>
-              <a:t>Azure Container Apps</a:t>
-            </a:r>
-          </a:p>
-          <a:p>
-            <a:pPr algn="ctr"/>
-            <a:r>
-              <a:rPr sz="800" b="0">
-                <a:solidFill>
-                  <a:srgbClr val="ECF0FB"/>
-                </a:solidFill>
-                <a:latin typeface="Segoe UI"/>
-              </a:rPr>
-              <a:t>serverless hosting</a:t>
-            </a:r>
-          </a:p>
-        </p:txBody>
-      </p:sp>
-      <p:sp>
-        <p:nvSpPr>
-          <p:cNvPr id="14" name="Rounded Rectangle 13"/>
-          <p:cNvSpPr/>
-          <p:nvPr/>
-        </p:nvSpPr>
-        <p:spPr>
-          <a:xfrm>
-            <a:off x="8839200" y="1380744"/>
-            <a:ext cx="2791967" cy="512064"/>
-          </a:xfrm>
-          <a:prstGeom prst="roundRect">
-            <a:avLst>
-              <a:gd name="adj" fmla="val 16000"/>
-            </a:avLst>
-          </a:prstGeom>
-          <a:solidFill>
-            <a:srgbClr val="2F6FED"/>
-          </a:solidFill>
-          <a:ln>
-            <a:noFill/>
-          </a:ln>
-          <a:effectLst/>
-        </p:spPr>
-        <p:style>
-          <a:lnRef idx="1">
-            <a:schemeClr val="accent1"/>
-          </a:lnRef>
-          <a:fillRef idx="3">
-            <a:schemeClr val="accent1"/>
-          </a:fillRef>
-          <a:effectRef idx="2">
-            <a:schemeClr val="accent1"/>
-          </a:effectRef>
-          <a:fontRef idx="minor">
-            <a:schemeClr val="lt1"/>
-          </a:fontRef>
-        </p:style>
-        <p:txBody>
-          <a:bodyPr rtlCol="0" anchor="ctr"/>
-          <a:lstStyle/>
-          <a:p>
-            <a:pPr algn="ctr"/>
-          </a:p>
-        </p:txBody>
-      </p:sp>
-      <p:sp>
-        <p:nvSpPr>
-          <p:cNvPr id="15" name="TextBox 14"/>
-          <p:cNvSpPr txBox="1"/>
-          <p:nvPr/>
-        </p:nvSpPr>
-        <p:spPr>
-          <a:xfrm>
-            <a:off x="8912352" y="1380744"/>
-            <a:ext cx="2645663" cy="512064"/>
-          </a:xfrm>
-          <a:prstGeom prst="rect">
-            <a:avLst/>
-          </a:prstGeom>
-          <a:noFill/>
-        </p:spPr>
-        <p:txBody>
-          <a:bodyPr wrap="square" anchor="ctr" lIns="0" rIns="0" tIns="0" bIns="0">
-            <a:spAutoFit/>
-          </a:bodyPr>
-          <a:lstStyle/>
-          <a:p>
-            <a:pPr algn="ctr"/>
-            <a:r>
-              <a:rPr sz="1050" b="1">
-                <a:solidFill>
-                  <a:srgbClr val="FFFFFF"/>
-                </a:solidFill>
-                <a:latin typeface="Segoe UI"/>
-              </a:rPr>
-              <a:t>Streaming UI</a:t>
-            </a:r>
-          </a:p>
-          <a:p>
-            <a:pPr algn="ctr"/>
-            <a:r>
-              <a:rPr sz="800" b="0">
-                <a:solidFill>
-                  <a:srgbClr val="ECF0FB"/>
-                </a:solidFill>
-                <a:latin typeface="Segoe UI"/>
-              </a:rPr>
-              <a:t>plan · agents · trace</a:t>
-            </a:r>
-          </a:p>
-        </p:txBody>
-      </p:sp>
-      <p:sp>
-        <p:nvSpPr>
-          <p:cNvPr id="16" name="Rounded Rectangle 15"/>
-          <p:cNvSpPr/>
-          <p:nvPr/>
-        </p:nvSpPr>
-        <p:spPr>
-          <a:xfrm>
-            <a:off x="411480" y="2084831"/>
-            <a:ext cx="11384280" cy="713232"/>
-          </a:xfrm>
-          <a:prstGeom prst="roundRect">
-            <a:avLst>
-              <a:gd name="adj" fmla="val 10000"/>
-            </a:avLst>
-          </a:prstGeom>
-          <a:solidFill>
-            <a:srgbClr val="E7EAF1"/>
-          </a:solidFill>
-          <a:ln>
-            <a:noFill/>
-          </a:ln>
-          <a:effectLst/>
-        </p:spPr>
-        <p:style>
-          <a:lnRef idx="1">
-            <a:schemeClr val="accent1"/>
-          </a:lnRef>
-          <a:fillRef idx="3">
-            <a:schemeClr val="accent1"/>
-          </a:fillRef>
-          <a:effectRef idx="2">
-            <a:schemeClr val="accent1"/>
-          </a:effectRef>
-          <a:fontRef idx="minor">
-            <a:schemeClr val="lt1"/>
-          </a:fontRef>
-        </p:style>
-        <p:txBody>
-          <a:bodyPr rtlCol="0" anchor="ctr"/>
-          <a:lstStyle/>
-          <a:p>
-            <a:pPr algn="ctr"/>
-          </a:p>
-        </p:txBody>
-      </p:sp>
-      <p:sp>
-        <p:nvSpPr>
-          <p:cNvPr id="17" name="Rounded Rectangle 16"/>
-          <p:cNvSpPr/>
-          <p:nvPr/>
-        </p:nvSpPr>
-        <p:spPr>
-          <a:xfrm>
-            <a:off x="411480" y="2084831"/>
-            <a:ext cx="2423160" cy="713232"/>
-          </a:xfrm>
-          <a:prstGeom prst="roundRect">
-            <a:avLst>
-              <a:gd name="adj" fmla="val 10000"/>
-            </a:avLst>
-          </a:prstGeom>
-          <a:solidFill>
-            <a:srgbClr val="3C465B"/>
-          </a:solidFill>
-          <a:ln>
-            <a:noFill/>
-          </a:ln>
-          <a:effectLst/>
-        </p:spPr>
-        <p:style>
-          <a:lnRef idx="1">
-            <a:schemeClr val="accent1"/>
-          </a:lnRef>
-          <a:fillRef idx="3">
-            <a:schemeClr val="accent1"/>
-          </a:fillRef>
-          <a:effectRef idx="2">
-            <a:schemeClr val="accent1"/>
-          </a:effectRef>
-          <a:fontRef idx="minor">
-            <a:schemeClr val="lt1"/>
-          </a:fontRef>
-        </p:style>
-        <p:txBody>
-          <a:bodyPr rtlCol="0" anchor="ctr"/>
-          <a:lstStyle/>
-          <a:p>
-            <a:pPr algn="ctr"/>
-          </a:p>
-        </p:txBody>
-      </p:sp>
-      <p:sp>
-        <p:nvSpPr>
-          <p:cNvPr id="18" name="TextBox 17"/>
-          <p:cNvSpPr txBox="1"/>
-          <p:nvPr/>
-        </p:nvSpPr>
-        <p:spPr>
-          <a:xfrm>
-            <a:off x="557784" y="2084831"/>
-            <a:ext cx="2148840" cy="713232"/>
-          </a:xfrm>
-          <a:prstGeom prst="rect">
-            <a:avLst/>
-          </a:prstGeom>
-          <a:noFill/>
-        </p:spPr>
-        <p:txBody>
-          <a:bodyPr wrap="square" anchor="ctr" lIns="0" rIns="0" tIns="0" bIns="0">
-            <a:spAutoFit/>
-          </a:bodyPr>
-          <a:lstStyle/>
-          <a:p>
-            <a:pPr algn="l"/>
-            <a:r>
-              <a:rPr sz="1150" b="1">
-                <a:solidFill>
-                  <a:srgbClr val="FFFFFF"/>
-                </a:solidFill>
-                <a:latin typeface="Segoe UI"/>
-              </a:rPr>
-              <a:t>TRUST &amp; POLICY</a:t>
-            </a:r>
-          </a:p>
-          <a:p>
-            <a:pPr algn="l"/>
-            <a:r>
-              <a:rPr sz="800" b="0">
-                <a:solidFill>
-                  <a:srgbClr val="ECF0FB"/>
-                </a:solidFill>
-                <a:latin typeface="Segoe UI"/>
-              </a:rPr>
-              <a:t>identity &amp; access</a:t>
-            </a:r>
-          </a:p>
-        </p:txBody>
-      </p:sp>
-      <p:sp>
-        <p:nvSpPr>
-          <p:cNvPr id="19" name="Rounded Rectangle 18"/>
-          <p:cNvSpPr/>
-          <p:nvPr/>
-        </p:nvSpPr>
-        <p:spPr>
-          <a:xfrm>
-            <a:off x="2999232" y="2185415"/>
-            <a:ext cx="2791967" cy="512064"/>
-          </a:xfrm>
-          <a:prstGeom prst="roundRect">
-            <a:avLst>
-              <a:gd name="adj" fmla="val 16000"/>
-            </a:avLst>
-          </a:prstGeom>
-          <a:solidFill>
-            <a:srgbClr val="3C465B"/>
-          </a:solidFill>
-          <a:ln>
-            <a:noFill/>
-          </a:ln>
-          <a:effectLst/>
-        </p:spPr>
-        <p:style>
-          <a:lnRef idx="1">
-            <a:schemeClr val="accent1"/>
-          </a:lnRef>
-          <a:fillRef idx="3">
-            <a:schemeClr val="accent1"/>
-          </a:fillRef>
-          <a:effectRef idx="2">
-            <a:schemeClr val="accent1"/>
-          </a:effectRef>
-          <a:fontRef idx="minor">
-            <a:schemeClr val="lt1"/>
-          </a:fontRef>
-        </p:style>
-        <p:txBody>
-          <a:bodyPr rtlCol="0" anchor="ctr"/>
-          <a:lstStyle/>
-          <a:p>
-            <a:pPr algn="ctr"/>
-          </a:p>
-        </p:txBody>
-      </p:sp>
-      <p:sp>
-        <p:nvSpPr>
-          <p:cNvPr id="20" name="TextBox 19"/>
-          <p:cNvSpPr txBox="1"/>
-          <p:nvPr/>
-        </p:nvSpPr>
-        <p:spPr>
-          <a:xfrm>
-            <a:off x="3072384" y="2185415"/>
-            <a:ext cx="2645663" cy="512064"/>
-          </a:xfrm>
-          <a:prstGeom prst="rect">
-            <a:avLst/>
-          </a:prstGeom>
-          <a:noFill/>
-        </p:spPr>
-        <p:txBody>
-          <a:bodyPr wrap="square" anchor="ctr" lIns="0" rIns="0" tIns="0" bIns="0">
-            <a:spAutoFit/>
-          </a:bodyPr>
-          <a:lstStyle/>
-          <a:p>
-            <a:pPr algn="ctr"/>
-            <a:r>
-              <a:rPr sz="1050" b="1">
-                <a:solidFill>
-                  <a:srgbClr val="FFFFFF"/>
-                </a:solidFill>
-                <a:latin typeface="Segoe UI"/>
-              </a:rPr>
-              <a:t>Microsoft Entra ID</a:t>
-            </a:r>
-          </a:p>
-          <a:p>
-            <a:pPr algn="ctr"/>
-            <a:r>
-              <a:rPr sz="800" b="0">
-                <a:solidFill>
-                  <a:srgbClr val="ECF0FB"/>
-                </a:solidFill>
-                <a:latin typeface="Segoe UI"/>
-              </a:rPr>
-              <a:t>DefaultAzureCredential</a:t>
-            </a:r>
-          </a:p>
-        </p:txBody>
-      </p:sp>
-      <p:sp>
-        <p:nvSpPr>
-          <p:cNvPr id="21" name="Rounded Rectangle 20"/>
-          <p:cNvSpPr/>
-          <p:nvPr/>
-        </p:nvSpPr>
-        <p:spPr>
-          <a:xfrm>
-            <a:off x="5919215" y="2185415"/>
-            <a:ext cx="2791967" cy="512064"/>
-          </a:xfrm>
-          <a:prstGeom prst="roundRect">
-            <a:avLst>
-              <a:gd name="adj" fmla="val 16000"/>
-            </a:avLst>
-          </a:prstGeom>
-          <a:solidFill>
-            <a:srgbClr val="3C465B"/>
-          </a:solidFill>
-          <a:ln>
-            <a:noFill/>
-          </a:ln>
-          <a:effectLst/>
-        </p:spPr>
-        <p:style>
-          <a:lnRef idx="1">
-            <a:schemeClr val="accent1"/>
-          </a:lnRef>
-          <a:fillRef idx="3">
-            <a:schemeClr val="accent1"/>
-          </a:fillRef>
-          <a:effectRef idx="2">
-            <a:schemeClr val="accent1"/>
-          </a:effectRef>
-          <a:fontRef idx="minor">
-            <a:schemeClr val="lt1"/>
-          </a:fontRef>
-        </p:style>
-        <p:txBody>
-          <a:bodyPr rtlCol="0" anchor="ctr"/>
-          <a:lstStyle/>
-          <a:p>
-            <a:pPr algn="ctr"/>
-          </a:p>
-        </p:txBody>
-      </p:sp>
-      <p:sp>
-        <p:nvSpPr>
-          <p:cNvPr id="22" name="TextBox 21"/>
-          <p:cNvSpPr txBox="1"/>
-          <p:nvPr/>
-        </p:nvSpPr>
-        <p:spPr>
-          <a:xfrm>
-            <a:off x="5992367" y="2185415"/>
-            <a:ext cx="2645663" cy="512064"/>
-          </a:xfrm>
-          <a:prstGeom prst="rect">
-            <a:avLst/>
-          </a:prstGeom>
-          <a:noFill/>
-        </p:spPr>
-        <p:txBody>
-          <a:bodyPr wrap="square" anchor="ctr" lIns="0" rIns="0" tIns="0" bIns="0">
-            <a:spAutoFit/>
-          </a:bodyPr>
-          <a:lstStyle/>
-          <a:p>
-            <a:pPr algn="ctr"/>
-            <a:r>
-              <a:rPr sz="1050" b="1">
-                <a:solidFill>
-                  <a:srgbClr val="FFFFFF"/>
-                </a:solidFill>
-                <a:latin typeface="Segoe UI"/>
-              </a:rPr>
-              <a:t>Basic auth gate</a:t>
-            </a:r>
-          </a:p>
-          <a:p>
-            <a:pPr algn="ctr"/>
-            <a:r>
-              <a:rPr sz="800" b="0">
-                <a:solidFill>
-                  <a:srgbClr val="ECF0FB"/>
-                </a:solidFill>
-                <a:latin typeface="Segoe UI"/>
-              </a:rPr>
-              <a:t>front-door protection</a:t>
-            </a:r>
-          </a:p>
-        </p:txBody>
-      </p:sp>
-      <p:sp>
-        <p:nvSpPr>
-          <p:cNvPr id="23" name="Rounded Rectangle 22"/>
-          <p:cNvSpPr/>
-          <p:nvPr/>
-        </p:nvSpPr>
-        <p:spPr>
-          <a:xfrm>
-            <a:off x="8839200" y="2185415"/>
-            <a:ext cx="2791967" cy="512064"/>
-          </a:xfrm>
-          <a:prstGeom prst="roundRect">
-            <a:avLst>
-              <a:gd name="adj" fmla="val 16000"/>
-            </a:avLst>
-          </a:prstGeom>
-          <a:solidFill>
-            <a:srgbClr val="3C465B"/>
-          </a:solidFill>
-          <a:ln>
-            <a:noFill/>
-          </a:ln>
-          <a:effectLst/>
-        </p:spPr>
-        <p:style>
-          <a:lnRef idx="1">
-            <a:schemeClr val="accent1"/>
-          </a:lnRef>
-          <a:fillRef idx="3">
-            <a:schemeClr val="accent1"/>
-          </a:fillRef>
-          <a:effectRef idx="2">
-            <a:schemeClr val="accent1"/>
-          </a:effectRef>
-          <a:fontRef idx="minor">
-            <a:schemeClr val="lt1"/>
-          </a:fontRef>
-        </p:style>
-        <p:txBody>
-          <a:bodyPr rtlCol="0" anchor="ctr"/>
-          <a:lstStyle/>
-          <a:p>
-            <a:pPr algn="ctr"/>
-          </a:p>
-        </p:txBody>
-      </p:sp>
-      <p:sp>
-        <p:nvSpPr>
-          <p:cNvPr id="24" name="TextBox 23"/>
-          <p:cNvSpPr txBox="1"/>
-          <p:nvPr/>
-        </p:nvSpPr>
-        <p:spPr>
-          <a:xfrm>
-            <a:off x="8912352" y="2185415"/>
-            <a:ext cx="2645663" cy="512064"/>
-          </a:xfrm>
-          <a:prstGeom prst="rect">
-            <a:avLst/>
-          </a:prstGeom>
-          <a:noFill/>
-        </p:spPr>
-        <p:txBody>
-          <a:bodyPr wrap="square" anchor="ctr" lIns="0" rIns="0" tIns="0" bIns="0">
-            <a:spAutoFit/>
-          </a:bodyPr>
-          <a:lstStyle/>
-          <a:p>
-            <a:pPr algn="ctr"/>
-            <a:r>
-              <a:rPr sz="1050" b="1">
-                <a:solidFill>
-                  <a:srgbClr val="FFFFFF"/>
-                </a:solidFill>
-                <a:latin typeface="Segoe UI"/>
-              </a:rPr>
-              <a:t>Typed read-only MCP</a:t>
-            </a:r>
-          </a:p>
-          <a:p>
-            <a:pPr algn="ctr"/>
-            <a:r>
-              <a:rPr sz="800" b="0">
-                <a:solidFill>
-                  <a:srgbClr val="ECF0FB"/>
-                </a:solidFill>
-                <a:latin typeface="Segoe UI"/>
-              </a:rPr>
-              <a:t>no write paths</a:t>
-            </a:r>
-          </a:p>
-        </p:txBody>
-      </p:sp>
-      <p:sp>
-        <p:nvSpPr>
-          <p:cNvPr id="25" name="Rounded Rectangle 24"/>
-          <p:cNvSpPr/>
-          <p:nvPr/>
-        </p:nvSpPr>
-        <p:spPr>
-          <a:xfrm>
-            <a:off x="411480" y="2889503"/>
-            <a:ext cx="11384280" cy="786384"/>
-          </a:xfrm>
-          <a:prstGeom prst="roundRect">
-            <a:avLst>
-              <a:gd name="adj" fmla="val 10000"/>
-            </a:avLst>
-          </a:prstGeom>
-          <a:solidFill>
-            <a:srgbClr val="F0ECFB"/>
-          </a:solidFill>
-          <a:ln>
-            <a:noFill/>
-          </a:ln>
-          <a:effectLst/>
-        </p:spPr>
-        <p:style>
-          <a:lnRef idx="1">
-            <a:schemeClr val="accent1"/>
-          </a:lnRef>
-          <a:fillRef idx="3">
-            <a:schemeClr val="accent1"/>
-          </a:fillRef>
-          <a:effectRef idx="2">
-            <a:schemeClr val="accent1"/>
-          </a:effectRef>
-          <a:fontRef idx="minor">
-            <a:schemeClr val="lt1"/>
-          </a:fontRef>
-        </p:style>
-        <p:txBody>
-          <a:bodyPr rtlCol="0" anchor="ctr"/>
-          <a:lstStyle/>
-          <a:p>
-            <a:pPr algn="ctr"/>
-          </a:p>
-        </p:txBody>
-      </p:sp>
-      <p:sp>
-        <p:nvSpPr>
-          <p:cNvPr id="26" name="Rounded Rectangle 25"/>
-          <p:cNvSpPr/>
-          <p:nvPr/>
-        </p:nvSpPr>
-        <p:spPr>
-          <a:xfrm>
-            <a:off x="411480" y="2889503"/>
-            <a:ext cx="2423160" cy="786384"/>
-          </a:xfrm>
-          <a:prstGeom prst="roundRect">
-            <a:avLst>
-              <a:gd name="adj" fmla="val 10000"/>
-            </a:avLst>
-          </a:prstGeom>
-          <a:solidFill>
-            <a:srgbClr val="6B4DE0"/>
-          </a:solidFill>
-          <a:ln>
-            <a:noFill/>
-          </a:ln>
-          <a:effectLst/>
-        </p:spPr>
-        <p:style>
-          <a:lnRef idx="1">
-            <a:schemeClr val="accent1"/>
-          </a:lnRef>
-          <a:fillRef idx="3">
-            <a:schemeClr val="accent1"/>
-          </a:fillRef>
-          <a:effectRef idx="2">
-            <a:schemeClr val="accent1"/>
-          </a:effectRef>
-          <a:fontRef idx="minor">
-            <a:schemeClr val="lt1"/>
-          </a:fontRef>
-        </p:style>
-        <p:txBody>
-          <a:bodyPr rtlCol="0" anchor="ctr"/>
-          <a:lstStyle/>
-          <a:p>
-            <a:pPr algn="ctr"/>
-          </a:p>
-        </p:txBody>
-      </p:sp>
-      <p:sp>
-        <p:nvSpPr>
-          <p:cNvPr id="27" name="TextBox 26"/>
-          <p:cNvSpPr txBox="1"/>
-          <p:nvPr/>
-        </p:nvSpPr>
-        <p:spPr>
-          <a:xfrm>
-            <a:off x="557784" y="2889503"/>
-            <a:ext cx="2148840" cy="786384"/>
-          </a:xfrm>
-          <a:prstGeom prst="rect">
-            <a:avLst/>
-          </a:prstGeom>
-          <a:noFill/>
-        </p:spPr>
-        <p:txBody>
-          <a:bodyPr wrap="square" anchor="ctr" lIns="0" rIns="0" tIns="0" bIns="0">
-            <a:spAutoFit/>
-          </a:bodyPr>
-          <a:lstStyle/>
-          <a:p>
-            <a:pPr algn="l"/>
-            <a:r>
-              <a:rPr sz="1150" b="1">
-                <a:solidFill>
-                  <a:srgbClr val="FFFFFF"/>
-                </a:solidFill>
-                <a:latin typeface="Segoe UI"/>
-              </a:rPr>
-              <a:t>ORCHESTRATION</a:t>
-            </a:r>
-          </a:p>
-          <a:p>
-            <a:pPr algn="l"/>
-            <a:r>
-              <a:rPr sz="800" b="0">
-                <a:solidFill>
-                  <a:srgbClr val="ECF0FB"/>
-                </a:solidFill>
-                <a:latin typeface="Segoe UI"/>
-              </a:rPr>
-              <a:t>intent routing + Magentic + response</a:t>
-            </a:r>
-          </a:p>
-        </p:txBody>
-      </p:sp>
-      <p:sp>
-        <p:nvSpPr>
-          <p:cNvPr id="28" name="Rounded Rectangle 27"/>
-          <p:cNvSpPr/>
-          <p:nvPr/>
-        </p:nvSpPr>
-        <p:spPr>
-          <a:xfrm>
-            <a:off x="2999232" y="2990087"/>
-            <a:ext cx="1623974" cy="585216"/>
-          </a:xfrm>
-          <a:prstGeom prst="roundRect">
-            <a:avLst>
-              <a:gd name="adj" fmla="val 16000"/>
-            </a:avLst>
-          </a:prstGeom>
-          <a:solidFill>
-            <a:srgbClr val="6B4DE0"/>
-          </a:solidFill>
-          <a:ln>
-            <a:noFill/>
-          </a:ln>
-          <a:effectLst/>
-        </p:spPr>
-        <p:style>
-          <a:lnRef idx="1">
-            <a:schemeClr val="accent1"/>
-          </a:lnRef>
-          <a:fillRef idx="3">
-            <a:schemeClr val="accent1"/>
-          </a:fillRef>
-          <a:effectRef idx="2">
-            <a:schemeClr val="accent1"/>
-          </a:effectRef>
-          <a:fontRef idx="minor">
-            <a:schemeClr val="lt1"/>
-          </a:fontRef>
-        </p:style>
-        <p:txBody>
-          <a:bodyPr rtlCol="0" anchor="ctr"/>
-          <a:lstStyle/>
-          <a:p>
-            <a:pPr algn="ctr"/>
-          </a:p>
-        </p:txBody>
-      </p:sp>
-      <p:sp>
-        <p:nvSpPr>
-          <p:cNvPr id="29" name="TextBox 28"/>
-          <p:cNvSpPr txBox="1"/>
-          <p:nvPr/>
-        </p:nvSpPr>
-        <p:spPr>
-          <a:xfrm>
-            <a:off x="3072384" y="2990087"/>
-            <a:ext cx="1477670" cy="585216"/>
-          </a:xfrm>
-          <a:prstGeom prst="rect">
-            <a:avLst/>
-          </a:prstGeom>
-          <a:noFill/>
-        </p:spPr>
-        <p:txBody>
-          <a:bodyPr wrap="square" anchor="ctr" lIns="0" rIns="0" tIns="0" bIns="0">
-            <a:spAutoFit/>
-          </a:bodyPr>
-          <a:lstStyle/>
-          <a:p>
-            <a:pPr algn="ctr"/>
-            <a:r>
-              <a:rPr sz="1050" b="1">
-                <a:solidFill>
-                  <a:srgbClr val="FFFFFF"/>
-                </a:solidFill>
-                <a:latin typeface="Segoe UI"/>
-              </a:rPr>
-              <a:t>Agent Framework</a:t>
-            </a:r>
-          </a:p>
-          <a:p>
-            <a:pPr algn="ctr"/>
-            <a:r>
-              <a:rPr sz="800" b="0">
-                <a:solidFill>
-                  <a:srgbClr val="ECF0FB"/>
-                </a:solidFill>
-                <a:latin typeface="Segoe UI"/>
-              </a:rPr>
-              <a:t>Magentic multi-agent</a:t>
-            </a:r>
-          </a:p>
-        </p:txBody>
-      </p:sp>
-      <p:sp>
-        <p:nvSpPr>
-          <p:cNvPr id="30" name="Rounded Rectangle 29"/>
-          <p:cNvSpPr/>
-          <p:nvPr/>
-        </p:nvSpPr>
-        <p:spPr>
-          <a:xfrm>
-            <a:off x="4751222" y="2990087"/>
-            <a:ext cx="1623974" cy="585216"/>
-          </a:xfrm>
-          <a:prstGeom prst="roundRect">
-            <a:avLst>
-              <a:gd name="adj" fmla="val 16000"/>
-            </a:avLst>
-          </a:prstGeom>
-          <a:solidFill>
-            <a:srgbClr val="6B4DE0"/>
-          </a:solidFill>
-          <a:ln>
-            <a:noFill/>
-          </a:ln>
-          <a:effectLst/>
-        </p:spPr>
-        <p:style>
-          <a:lnRef idx="1">
-            <a:schemeClr val="accent1"/>
-          </a:lnRef>
-          <a:fillRef idx="3">
-            <a:schemeClr val="accent1"/>
-          </a:fillRef>
-          <a:effectRef idx="2">
-            <a:schemeClr val="accent1"/>
-          </a:effectRef>
-          <a:fontRef idx="minor">
-            <a:schemeClr val="lt1"/>
-          </a:fontRef>
-        </p:style>
-        <p:txBody>
-          <a:bodyPr rtlCol="0" anchor="ctr"/>
-          <a:lstStyle/>
-          <a:p>
-            <a:pPr algn="ctr"/>
-          </a:p>
-        </p:txBody>
-      </p:sp>
-      <p:sp>
-        <p:nvSpPr>
-          <p:cNvPr id="31" name="TextBox 30"/>
-          <p:cNvSpPr txBox="1"/>
-          <p:nvPr/>
-        </p:nvSpPr>
-        <p:spPr>
-          <a:xfrm>
-            <a:off x="4824374" y="2990087"/>
-            <a:ext cx="1477670" cy="585216"/>
-          </a:xfrm>
-          <a:prstGeom prst="rect">
-            <a:avLst/>
-          </a:prstGeom>
-          <a:noFill/>
-        </p:spPr>
-        <p:txBody>
-          <a:bodyPr wrap="square" anchor="ctr" lIns="0" rIns="0" tIns="0" bIns="0">
-            <a:spAutoFit/>
-          </a:bodyPr>
-          <a:lstStyle/>
-          <a:p>
-            <a:pPr algn="ctr"/>
-            <a:r>
-              <a:rPr sz="1050" b="1">
-                <a:solidFill>
-                  <a:srgbClr val="FFFFFF"/>
-                </a:solidFill>
-                <a:latin typeface="Segoe UI"/>
-              </a:rPr>
-              <a:t>Intent Detector</a:t>
-            </a:r>
-          </a:p>
-          <a:p>
-            <a:pPr algn="ctr"/>
-            <a:r>
-              <a:rPr sz="800" b="0">
-                <a:solidFill>
-                  <a:srgbClr val="ECF0FB"/>
-                </a:solidFill>
-                <a:latin typeface="Segoe UI"/>
-              </a:rPr>
-              <a:t>chat vs business · shared memory</a:t>
-            </a:r>
-          </a:p>
-        </p:txBody>
-      </p:sp>
-      <p:sp>
-        <p:nvSpPr>
-          <p:cNvPr id="32" name="Rounded Rectangle 31"/>
-          <p:cNvSpPr/>
-          <p:nvPr/>
-        </p:nvSpPr>
-        <p:spPr>
-          <a:xfrm>
-            <a:off x="6503212" y="2990087"/>
-            <a:ext cx="1623974" cy="585216"/>
-          </a:xfrm>
-          <a:prstGeom prst="roundRect">
-            <a:avLst>
-              <a:gd name="adj" fmla="val 16000"/>
-            </a:avLst>
-          </a:prstGeom>
-          <a:solidFill>
-            <a:srgbClr val="6B4DE0"/>
-          </a:solidFill>
-          <a:ln>
-            <a:noFill/>
-          </a:ln>
-          <a:effectLst/>
-        </p:spPr>
-        <p:style>
-          <a:lnRef idx="1">
-            <a:schemeClr val="accent1"/>
-          </a:lnRef>
-          <a:fillRef idx="3">
-            <a:schemeClr val="accent1"/>
-          </a:fillRef>
-          <a:effectRef idx="2">
-            <a:schemeClr val="accent1"/>
-          </a:effectRef>
-          <a:fontRef idx="minor">
-            <a:schemeClr val="lt1"/>
-          </a:fontRef>
-        </p:style>
-        <p:txBody>
-          <a:bodyPr rtlCol="0" anchor="ctr"/>
-          <a:lstStyle/>
-          <a:p>
-            <a:pPr algn="ctr"/>
-          </a:p>
-        </p:txBody>
-      </p:sp>
-      <p:sp>
-        <p:nvSpPr>
-          <p:cNvPr id="33" name="TextBox 32"/>
-          <p:cNvSpPr txBox="1"/>
-          <p:nvPr/>
-        </p:nvSpPr>
-        <p:spPr>
-          <a:xfrm>
-            <a:off x="6576364" y="2990087"/>
-            <a:ext cx="1477670" cy="585216"/>
-          </a:xfrm>
-          <a:prstGeom prst="rect">
-            <a:avLst/>
-          </a:prstGeom>
-          <a:noFill/>
-        </p:spPr>
-        <p:txBody>
-          <a:bodyPr wrap="square" anchor="ctr" lIns="0" rIns="0" tIns="0" bIns="0">
-            <a:spAutoFit/>
-          </a:bodyPr>
-          <a:lstStyle/>
-          <a:p>
-            <a:pPr algn="ctr"/>
-            <a:r>
-              <a:rPr sz="1050" b="1">
-                <a:solidFill>
-                  <a:srgbClr val="FFFFFF"/>
-                </a:solidFill>
-                <a:latin typeface="Segoe UI"/>
-              </a:rPr>
-              <a:t>Manager · gpt-4.1-mini</a:t>
-            </a:r>
-          </a:p>
-          <a:p>
-            <a:pPr algn="ctr"/>
-            <a:r>
-              <a:rPr sz="800" b="0">
-                <a:solidFill>
-                  <a:srgbClr val="ECF0FB"/>
-                </a:solidFill>
-                <a:latin typeface="Segoe UI"/>
-              </a:rPr>
-              <a:t>plans the specialists</a:t>
-            </a:r>
-          </a:p>
-        </p:txBody>
-      </p:sp>
-      <p:sp>
-        <p:nvSpPr>
-          <p:cNvPr id="34" name="Rounded Rectangle 33"/>
-          <p:cNvSpPr/>
-          <p:nvPr/>
-        </p:nvSpPr>
-        <p:spPr>
-          <a:xfrm>
-            <a:off x="8255203" y="2990087"/>
-            <a:ext cx="1623974" cy="585216"/>
-          </a:xfrm>
-          <a:prstGeom prst="roundRect">
-            <a:avLst>
-              <a:gd name="adj" fmla="val 16000"/>
-            </a:avLst>
-          </a:prstGeom>
-          <a:solidFill>
-            <a:srgbClr val="6B4DE0"/>
-          </a:solidFill>
-          <a:ln>
-            <a:noFill/>
-          </a:ln>
-          <a:effectLst/>
-        </p:spPr>
-        <p:style>
-          <a:lnRef idx="1">
-            <a:schemeClr val="accent1"/>
-          </a:lnRef>
-          <a:fillRef idx="3">
-            <a:schemeClr val="accent1"/>
-          </a:fillRef>
-          <a:effectRef idx="2">
-            <a:schemeClr val="accent1"/>
-          </a:effectRef>
-          <a:fontRef idx="minor">
-            <a:schemeClr val="lt1"/>
-          </a:fontRef>
-        </p:style>
-        <p:txBody>
-          <a:bodyPr rtlCol="0" anchor="ctr"/>
-          <a:lstStyle/>
-          <a:p>
-            <a:pPr algn="ctr"/>
-          </a:p>
-        </p:txBody>
-      </p:sp>
-      <p:sp>
-        <p:nvSpPr>
-          <p:cNvPr id="35" name="TextBox 34"/>
-          <p:cNvSpPr txBox="1"/>
-          <p:nvPr/>
-        </p:nvSpPr>
-        <p:spPr>
-          <a:xfrm>
-            <a:off x="8328355" y="2990087"/>
-            <a:ext cx="1477670" cy="585216"/>
-          </a:xfrm>
-          <a:prstGeom prst="rect">
-            <a:avLst/>
-          </a:prstGeom>
-          <a:noFill/>
-        </p:spPr>
-        <p:txBody>
-          <a:bodyPr wrap="square" anchor="ctr" lIns="0" rIns="0" tIns="0" bIns="0">
-            <a:spAutoFit/>
-          </a:bodyPr>
-          <a:lstStyle/>
-          <a:p>
-            <a:pPr algn="ctr"/>
-            <a:r>
-              <a:rPr sz="1050" b="1">
-                <a:solidFill>
-                  <a:srgbClr val="FFFFFF"/>
-                </a:solidFill>
-                <a:latin typeface="Segoe UI"/>
-              </a:rPr>
-              <a:t>Sales·Inv·Mktg·Action</a:t>
-            </a:r>
-          </a:p>
-          <a:p>
-            <a:pPr algn="ctr"/>
-            <a:r>
-              <a:rPr sz="800" b="0">
-                <a:solidFill>
-                  <a:srgbClr val="ECF0FB"/>
-                </a:solidFill>
-                <a:latin typeface="Segoe UI"/>
-              </a:rPr>
-              <a:t>Foundry hosted agents</a:t>
-            </a:r>
-          </a:p>
-        </p:txBody>
-      </p:sp>
-      <p:sp>
-        <p:nvSpPr>
-          <p:cNvPr id="36" name="Rounded Rectangle 35"/>
-          <p:cNvSpPr/>
-          <p:nvPr/>
-        </p:nvSpPr>
-        <p:spPr>
-          <a:xfrm>
-            <a:off x="10007193" y="2990087"/>
-            <a:ext cx="1623974" cy="585216"/>
-          </a:xfrm>
-          <a:prstGeom prst="roundRect">
-            <a:avLst>
-              <a:gd name="adj" fmla="val 16000"/>
-            </a:avLst>
-          </a:prstGeom>
-          <a:solidFill>
-            <a:srgbClr val="6B4DE0"/>
-          </a:solidFill>
-          <a:ln>
-            <a:noFill/>
-          </a:ln>
-          <a:effectLst/>
-        </p:spPr>
-        <p:style>
-          <a:lnRef idx="1">
-            <a:schemeClr val="accent1"/>
-          </a:lnRef>
-          <a:fillRef idx="3">
-            <a:schemeClr val="accent1"/>
-          </a:fillRef>
-          <a:effectRef idx="2">
-            <a:schemeClr val="accent1"/>
-          </a:effectRef>
-          <a:fontRef idx="minor">
-            <a:schemeClr val="lt1"/>
-          </a:fontRef>
-        </p:style>
-        <p:txBody>
-          <a:bodyPr rtlCol="0" anchor="ctr"/>
-          <a:lstStyle/>
-          <a:p>
-            <a:pPr algn="ctr"/>
-          </a:p>
-        </p:txBody>
-      </p:sp>
-      <p:sp>
-        <p:nvSpPr>
-          <p:cNvPr id="37" name="TextBox 36"/>
-          <p:cNvSpPr txBox="1"/>
-          <p:nvPr/>
-        </p:nvSpPr>
-        <p:spPr>
-          <a:xfrm>
-            <a:off x="10080345" y="2990087"/>
-            <a:ext cx="1477670" cy="585216"/>
-          </a:xfrm>
-          <a:prstGeom prst="rect">
-            <a:avLst/>
-          </a:prstGeom>
-          <a:noFill/>
-        </p:spPr>
-        <p:txBody>
-          <a:bodyPr wrap="square" anchor="ctr" lIns="0" rIns="0" tIns="0" bIns="0">
-            <a:spAutoFit/>
-          </a:bodyPr>
-          <a:lstStyle/>
-          <a:p>
-            <a:pPr algn="ctr"/>
-            <a:r>
-              <a:rPr sz="1050" b="1">
-                <a:solidFill>
-                  <a:srgbClr val="FFFFFF"/>
-                </a:solidFill>
-                <a:latin typeface="Segoe UI"/>
-              </a:rPr>
-              <a:t>Response Generator</a:t>
-            </a:r>
-          </a:p>
-          <a:p>
-            <a:pPr algn="ctr"/>
-            <a:r>
-              <a:rPr sz="800" b="0">
-                <a:solidFill>
-                  <a:srgbClr val="ECF0FB"/>
-                </a:solidFill>
-                <a:latin typeface="Segoe UI"/>
-              </a:rPr>
-              <a:t>final reply · keeps charts</a:t>
-            </a:r>
-          </a:p>
-        </p:txBody>
-      </p:sp>
-      <p:sp>
-        <p:nvSpPr>
-          <p:cNvPr id="38" name="Rounded Rectangle 37"/>
-          <p:cNvSpPr/>
-          <p:nvPr/>
-        </p:nvSpPr>
-        <p:spPr>
-          <a:xfrm>
-            <a:off x="411480" y="3767327"/>
-            <a:ext cx="11384280" cy="713232"/>
-          </a:xfrm>
-          <a:prstGeom prst="roundRect">
-            <a:avLst>
-              <a:gd name="adj" fmla="val 10000"/>
-            </a:avLst>
-          </a:prstGeom>
-          <a:solidFill>
-            <a:srgbClr val="E6F5F3"/>
-          </a:solidFill>
-          <a:ln>
-            <a:noFill/>
-          </a:ln>
-          <a:effectLst/>
-        </p:spPr>
-        <p:style>
-          <a:lnRef idx="1">
-            <a:schemeClr val="accent1"/>
-          </a:lnRef>
-          <a:fillRef idx="3">
-            <a:schemeClr val="accent1"/>
-          </a:fillRef>
-          <a:effectRef idx="2">
-            <a:schemeClr val="accent1"/>
-          </a:effectRef>
-          <a:fontRef idx="minor">
-            <a:schemeClr val="lt1"/>
-          </a:fontRef>
-        </p:style>
-        <p:txBody>
-          <a:bodyPr rtlCol="0" anchor="ctr"/>
-          <a:lstStyle/>
-          <a:p>
-            <a:pPr algn="ctr"/>
-          </a:p>
-        </p:txBody>
-      </p:sp>
-      <p:sp>
-        <p:nvSpPr>
-          <p:cNvPr id="39" name="Rounded Rectangle 38"/>
-          <p:cNvSpPr/>
-          <p:nvPr/>
-        </p:nvSpPr>
-        <p:spPr>
-          <a:xfrm>
-            <a:off x="411480" y="3767327"/>
-            <a:ext cx="2423160" cy="713232"/>
-          </a:xfrm>
-          <a:prstGeom prst="roundRect">
-            <a:avLst>
-              <a:gd name="adj" fmla="val 10000"/>
-            </a:avLst>
-          </a:prstGeom>
-          <a:solidFill>
-            <a:srgbClr val="129A8F"/>
-          </a:solidFill>
-          <a:ln>
-            <a:noFill/>
-          </a:ln>
-          <a:effectLst/>
-        </p:spPr>
-        <p:style>
-          <a:lnRef idx="1">
-            <a:schemeClr val="accent1"/>
-          </a:lnRef>
-          <a:fillRef idx="3">
-            <a:schemeClr val="accent1"/>
-          </a:fillRef>
-          <a:effectRef idx="2">
-            <a:schemeClr val="accent1"/>
-          </a:effectRef>
-          <a:fontRef idx="minor">
-            <a:schemeClr val="lt1"/>
-          </a:fontRef>
-        </p:style>
-        <p:txBody>
-          <a:bodyPr rtlCol="0" anchor="ctr"/>
-          <a:lstStyle/>
-          <a:p>
-            <a:pPr algn="ctr"/>
-          </a:p>
-        </p:txBody>
-      </p:sp>
-      <p:sp>
-        <p:nvSpPr>
-          <p:cNvPr id="40" name="TextBox 39"/>
-          <p:cNvSpPr txBox="1"/>
-          <p:nvPr/>
-        </p:nvSpPr>
-        <p:spPr>
-          <a:xfrm>
-            <a:off x="557784" y="3767327"/>
-            <a:ext cx="2148840" cy="713232"/>
-          </a:xfrm>
-          <a:prstGeom prst="rect">
-            <a:avLst/>
-          </a:prstGeom>
-          <a:noFill/>
-        </p:spPr>
-        <p:txBody>
-          <a:bodyPr wrap="square" anchor="ctr" lIns="0" rIns="0" tIns="0" bIns="0">
-            <a:spAutoFit/>
-          </a:bodyPr>
-          <a:lstStyle/>
-          <a:p>
-            <a:pPr algn="l"/>
-            <a:r>
-              <a:rPr sz="1150" b="1">
-                <a:solidFill>
-                  <a:srgbClr val="FFFFFF"/>
-                </a:solidFill>
-                <a:latin typeface="Segoe UI"/>
-              </a:rPr>
-              <a:t>TOOLS &amp; MCP</a:t>
-            </a:r>
-          </a:p>
-          <a:p>
-            <a:pPr algn="l"/>
-            <a:r>
-              <a:rPr sz="800" b="0">
-                <a:solidFill>
-                  <a:srgbClr val="ECF0FB"/>
-                </a:solidFill>
-                <a:latin typeface="Segoe UI"/>
-              </a:rPr>
-              <a:t>Cosmos-backed tools</a:t>
-            </a:r>
-          </a:p>
-        </p:txBody>
-      </p:sp>
-      <p:sp>
-        <p:nvSpPr>
-          <p:cNvPr id="41" name="Rounded Rectangle 40"/>
-          <p:cNvSpPr/>
-          <p:nvPr/>
-        </p:nvSpPr>
-        <p:spPr>
-          <a:xfrm>
-            <a:off x="2999232" y="3867911"/>
-            <a:ext cx="2791967" cy="512064"/>
-          </a:xfrm>
-          <a:prstGeom prst="roundRect">
-            <a:avLst>
-              <a:gd name="adj" fmla="val 16000"/>
-            </a:avLst>
-          </a:prstGeom>
-          <a:solidFill>
-            <a:srgbClr val="129A8F"/>
-          </a:solidFill>
-          <a:ln>
-            <a:noFill/>
-          </a:ln>
-          <a:effectLst/>
-        </p:spPr>
-        <p:style>
-          <a:lnRef idx="1">
-            <a:schemeClr val="accent1"/>
-          </a:lnRef>
-          <a:fillRef idx="3">
-            <a:schemeClr val="accent1"/>
-          </a:fillRef>
-          <a:effectRef idx="2">
-            <a:schemeClr val="accent1"/>
-          </a:effectRef>
-          <a:fontRef idx="minor">
-            <a:schemeClr val="lt1"/>
-          </a:fontRef>
-        </p:style>
-        <p:txBody>
-          <a:bodyPr rtlCol="0" anchor="ctr"/>
-          <a:lstStyle/>
-          <a:p>
-            <a:pPr algn="ctr"/>
-          </a:p>
-        </p:txBody>
-      </p:sp>
-      <p:sp>
-        <p:nvSpPr>
-          <p:cNvPr id="42" name="TextBox 41"/>
-          <p:cNvSpPr txBox="1"/>
-          <p:nvPr/>
-        </p:nvSpPr>
-        <p:spPr>
-          <a:xfrm>
-            <a:off x="3072384" y="3867911"/>
-            <a:ext cx="2645663" cy="512064"/>
-          </a:xfrm>
-          <a:prstGeom prst="rect">
-            <a:avLst/>
-          </a:prstGeom>
-          <a:noFill/>
-        </p:spPr>
-        <p:txBody>
-          <a:bodyPr wrap="square" anchor="ctr" lIns="0" rIns="0" tIns="0" bIns="0">
-            <a:spAutoFit/>
-          </a:bodyPr>
-          <a:lstStyle/>
-          <a:p>
-            <a:pPr algn="ctr"/>
-            <a:r>
-              <a:rPr sz="1050" b="1">
-                <a:solidFill>
-                  <a:srgbClr val="FFFFFF"/>
-                </a:solidFill>
-                <a:latin typeface="Segoe UI"/>
-              </a:rPr>
-              <a:t>Products MCP</a:t>
-            </a:r>
-          </a:p>
-          <a:p>
-            <a:pPr algn="ctr"/>
-            <a:r>
-              <a:rPr sz="800" b="0">
-                <a:solidFill>
-                  <a:srgbClr val="ECF0FB"/>
-                </a:solidFill>
-                <a:latin typeface="Segoe UI"/>
-              </a:rPr>
-              <a:t>sales &amp; inventory</a:t>
-            </a:r>
-          </a:p>
-        </p:txBody>
-      </p:sp>
-      <p:sp>
-        <p:nvSpPr>
-          <p:cNvPr id="43" name="Rounded Rectangle 42"/>
-          <p:cNvSpPr/>
-          <p:nvPr/>
-        </p:nvSpPr>
-        <p:spPr>
-          <a:xfrm>
-            <a:off x="5919215" y="3867911"/>
-            <a:ext cx="2791967" cy="512064"/>
-          </a:xfrm>
-          <a:prstGeom prst="roundRect">
-            <a:avLst>
-              <a:gd name="adj" fmla="val 16000"/>
-            </a:avLst>
-          </a:prstGeom>
-          <a:solidFill>
-            <a:srgbClr val="129A8F"/>
-          </a:solidFill>
-          <a:ln>
-            <a:noFill/>
-          </a:ln>
-          <a:effectLst/>
-        </p:spPr>
-        <p:style>
-          <a:lnRef idx="1">
-            <a:schemeClr val="accent1"/>
-          </a:lnRef>
-          <a:fillRef idx="3">
-            <a:schemeClr val="accent1"/>
-          </a:fillRef>
-          <a:effectRef idx="2">
-            <a:schemeClr val="accent1"/>
-          </a:effectRef>
-          <a:fontRef idx="minor">
-            <a:schemeClr val="lt1"/>
-          </a:fontRef>
-        </p:style>
-        <p:txBody>
-          <a:bodyPr rtlCol="0" anchor="ctr"/>
-          <a:lstStyle/>
-          <a:p>
-            <a:pPr algn="ctr"/>
-          </a:p>
-        </p:txBody>
-      </p:sp>
-      <p:sp>
-        <p:nvSpPr>
-          <p:cNvPr id="44" name="TextBox 43"/>
-          <p:cNvSpPr txBox="1"/>
-          <p:nvPr/>
-        </p:nvSpPr>
-        <p:spPr>
-          <a:xfrm>
-            <a:off x="5992367" y="3867911"/>
-            <a:ext cx="2645663" cy="512064"/>
-          </a:xfrm>
-          <a:prstGeom prst="rect">
-            <a:avLst/>
-          </a:prstGeom>
-          <a:noFill/>
-        </p:spPr>
-        <p:txBody>
-          <a:bodyPr wrap="square" anchor="ctr" lIns="0" rIns="0" tIns="0" bIns="0">
-            <a:spAutoFit/>
-          </a:bodyPr>
-          <a:lstStyle/>
-          <a:p>
-            <a:pPr algn="ctr"/>
-            <a:r>
-              <a:rPr sz="1050" b="1">
-                <a:solidFill>
-                  <a:srgbClr val="FFFFFF"/>
-                </a:solidFill>
-                <a:latin typeface="Segoe UI"/>
-              </a:rPr>
-              <a:t>Marketing MCP</a:t>
-            </a:r>
-          </a:p>
-          <a:p>
-            <a:pPr algn="ctr"/>
-            <a:r>
-              <a:rPr sz="800" b="0">
-                <a:solidFill>
-                  <a:srgbClr val="ECF0FB"/>
-                </a:solidFill>
-                <a:latin typeface="Segoe UI"/>
-              </a:rPr>
-              <a:t>campaigns &amp; ROI</a:t>
-            </a:r>
-          </a:p>
-        </p:txBody>
-      </p:sp>
-      <p:sp>
-        <p:nvSpPr>
-          <p:cNvPr id="45" name="Rounded Rectangle 44"/>
-          <p:cNvSpPr/>
-          <p:nvPr/>
-        </p:nvSpPr>
-        <p:spPr>
-          <a:xfrm>
-            <a:off x="8839200" y="3867911"/>
-            <a:ext cx="2791967" cy="512064"/>
-          </a:xfrm>
-          <a:prstGeom prst="roundRect">
-            <a:avLst>
-              <a:gd name="adj" fmla="val 16000"/>
-            </a:avLst>
-          </a:prstGeom>
-          <a:solidFill>
-            <a:srgbClr val="129A8F"/>
-          </a:solidFill>
-          <a:ln>
-            <a:noFill/>
-          </a:ln>
-          <a:effectLst/>
-        </p:spPr>
-        <p:style>
-          <a:lnRef idx="1">
-            <a:schemeClr val="accent1"/>
-          </a:lnRef>
-          <a:fillRef idx="3">
-            <a:schemeClr val="accent1"/>
-          </a:fillRef>
-          <a:effectRef idx="2">
-            <a:schemeClr val="accent1"/>
-          </a:effectRef>
-          <a:fontRef idx="minor">
-            <a:schemeClr val="lt1"/>
-          </a:fontRef>
-        </p:style>
-        <p:txBody>
-          <a:bodyPr rtlCol="0" anchor="ctr"/>
-          <a:lstStyle/>
-          <a:p>
-            <a:pPr algn="ctr"/>
-          </a:p>
-        </p:txBody>
-      </p:sp>
-      <p:sp>
-        <p:nvSpPr>
-          <p:cNvPr id="46" name="TextBox 45"/>
-          <p:cNvSpPr txBox="1"/>
-          <p:nvPr/>
-        </p:nvSpPr>
-        <p:spPr>
-          <a:xfrm>
-            <a:off x="8912352" y="3867911"/>
-            <a:ext cx="2645663" cy="512064"/>
-          </a:xfrm>
-          <a:prstGeom prst="rect">
-            <a:avLst/>
-          </a:prstGeom>
-          <a:noFill/>
-        </p:spPr>
-        <p:txBody>
-          <a:bodyPr wrap="square" anchor="ctr" lIns="0" rIns="0" tIns="0" bIns="0">
-            <a:spAutoFit/>
-          </a:bodyPr>
-          <a:lstStyle/>
-          <a:p>
-            <a:pPr algn="ctr"/>
-            <a:r>
-              <a:rPr sz="1050" b="1">
-                <a:solidFill>
-                  <a:srgbClr val="FFFFFF"/>
-                </a:solidFill>
-                <a:latin typeface="Segoe UI"/>
-              </a:rPr>
-              <a:t>Code sandbox</a:t>
-            </a:r>
-          </a:p>
-          <a:p>
-            <a:pPr algn="ctr"/>
-            <a:r>
-              <a:rPr sz="800" b="0">
-                <a:solidFill>
-                  <a:srgbClr val="ECF0FB"/>
-                </a:solidFill>
-                <a:latin typeface="Segoe UI"/>
-              </a:rPr>
-              <a:t>Code Interpreter</a:t>
-            </a:r>
-          </a:p>
-        </p:txBody>
-      </p:sp>
-      <p:sp>
-        <p:nvSpPr>
-          <p:cNvPr id="47" name="Rounded Rectangle 46"/>
-          <p:cNvSpPr/>
-          <p:nvPr/>
-        </p:nvSpPr>
-        <p:spPr>
-          <a:xfrm>
-            <a:off x="411480" y="4571999"/>
-            <a:ext cx="11384280" cy="713232"/>
-          </a:xfrm>
-          <a:prstGeom prst="roundRect">
-            <a:avLst>
-              <a:gd name="adj" fmla="val 10000"/>
-            </a:avLst>
-          </a:prstGeom>
-          <a:solidFill>
-            <a:srgbClr val="E5F5EB"/>
-          </a:solidFill>
-          <a:ln>
-            <a:noFill/>
-          </a:ln>
-          <a:effectLst/>
-        </p:spPr>
-        <p:style>
-          <a:lnRef idx="1">
-            <a:schemeClr val="accent1"/>
-          </a:lnRef>
-          <a:fillRef idx="3">
-            <a:schemeClr val="accent1"/>
-          </a:fillRef>
-          <a:effectRef idx="2">
-            <a:schemeClr val="accent1"/>
-          </a:effectRef>
-          <a:fontRef idx="minor">
-            <a:schemeClr val="lt1"/>
-          </a:fontRef>
-        </p:style>
-        <p:txBody>
-          <a:bodyPr rtlCol="0" anchor="ctr"/>
-          <a:lstStyle/>
-          <a:p>
-            <a:pPr algn="ctr"/>
-          </a:p>
-        </p:txBody>
-      </p:sp>
-      <p:sp>
-        <p:nvSpPr>
-          <p:cNvPr id="48" name="Rounded Rectangle 47"/>
-          <p:cNvSpPr/>
-          <p:nvPr/>
-        </p:nvSpPr>
-        <p:spPr>
-          <a:xfrm>
-            <a:off x="411480" y="4571999"/>
-            <a:ext cx="2423160" cy="713232"/>
-          </a:xfrm>
-          <a:prstGeom prst="roundRect">
-            <a:avLst>
-              <a:gd name="adj" fmla="val 10000"/>
-            </a:avLst>
-          </a:prstGeom>
-          <a:solidFill>
-            <a:srgbClr val="1E9E5A"/>
-          </a:solidFill>
-          <a:ln>
-            <a:noFill/>
-          </a:ln>
-          <a:effectLst/>
-        </p:spPr>
-        <p:style>
-          <a:lnRef idx="1">
-            <a:schemeClr val="accent1"/>
-          </a:lnRef>
-          <a:fillRef idx="3">
-            <a:schemeClr val="accent1"/>
-          </a:fillRef>
-          <a:effectRef idx="2">
-            <a:schemeClr val="accent1"/>
-          </a:effectRef>
-          <a:fontRef idx="minor">
-            <a:schemeClr val="lt1"/>
-          </a:fontRef>
-        </p:style>
-        <p:txBody>
-          <a:bodyPr rtlCol="0" anchor="ctr"/>
-          <a:lstStyle/>
-          <a:p>
-            <a:pPr algn="ctr"/>
-          </a:p>
-        </p:txBody>
-      </p:sp>
-      <p:sp>
-        <p:nvSpPr>
-          <p:cNvPr id="49" name="TextBox 48"/>
-          <p:cNvSpPr txBox="1"/>
-          <p:nvPr/>
-        </p:nvSpPr>
-        <p:spPr>
-          <a:xfrm>
-            <a:off x="557784" y="4571999"/>
-            <a:ext cx="2148840" cy="713232"/>
-          </a:xfrm>
-          <a:prstGeom prst="rect">
-            <a:avLst/>
-          </a:prstGeom>
-          <a:noFill/>
-        </p:spPr>
-        <p:txBody>
-          <a:bodyPr wrap="square" anchor="ctr" lIns="0" rIns="0" tIns="0" bIns="0">
-            <a:spAutoFit/>
-          </a:bodyPr>
-          <a:lstStyle/>
-          <a:p>
-            <a:pPr algn="l"/>
-            <a:r>
-              <a:rPr sz="1150" b="1">
-                <a:solidFill>
-                  <a:srgbClr val="FFFFFF"/>
-                </a:solidFill>
-                <a:latin typeface="Segoe UI"/>
-              </a:rPr>
-              <a:t>KNOWLEDGE &amp; DATA</a:t>
-            </a:r>
-          </a:p>
-          <a:p>
-            <a:pPr algn="l"/>
-            <a:r>
-              <a:rPr sz="800" b="0">
-                <a:solidFill>
-                  <a:srgbClr val="ECF0FB"/>
-                </a:solidFill>
-                <a:latin typeface="Segoe UI"/>
-              </a:rPr>
-              <a:t>ground every number</a:t>
-            </a:r>
-          </a:p>
-        </p:txBody>
-      </p:sp>
-      <p:sp>
-        <p:nvSpPr>
-          <p:cNvPr id="50" name="Rounded Rectangle 49"/>
-          <p:cNvSpPr/>
-          <p:nvPr/>
-        </p:nvSpPr>
-        <p:spPr>
-          <a:xfrm>
-            <a:off x="2999232" y="4672583"/>
-            <a:ext cx="2791967" cy="512064"/>
-          </a:xfrm>
-          <a:prstGeom prst="roundRect">
-            <a:avLst>
-              <a:gd name="adj" fmla="val 16000"/>
-            </a:avLst>
-          </a:prstGeom>
-          <a:solidFill>
-            <a:srgbClr val="1E9E5A"/>
-          </a:solidFill>
-          <a:ln>
-            <a:noFill/>
-          </a:ln>
-          <a:effectLst/>
-        </p:spPr>
-        <p:style>
-          <a:lnRef idx="1">
-            <a:schemeClr val="accent1"/>
-          </a:lnRef>
-          <a:fillRef idx="3">
-            <a:schemeClr val="accent1"/>
-          </a:fillRef>
-          <a:effectRef idx="2">
-            <a:schemeClr val="accent1"/>
-          </a:effectRef>
-          <a:fontRef idx="minor">
-            <a:schemeClr val="lt1"/>
-          </a:fontRef>
-        </p:style>
-        <p:txBody>
-          <a:bodyPr rtlCol="0" anchor="ctr"/>
-          <a:lstStyle/>
-          <a:p>
-            <a:pPr algn="ctr"/>
-          </a:p>
-        </p:txBody>
-      </p:sp>
-      <p:sp>
-        <p:nvSpPr>
-          <p:cNvPr id="51" name="TextBox 50"/>
-          <p:cNvSpPr txBox="1"/>
-          <p:nvPr/>
-        </p:nvSpPr>
-        <p:spPr>
-          <a:xfrm>
-            <a:off x="3072384" y="4672583"/>
-            <a:ext cx="2645663" cy="512064"/>
-          </a:xfrm>
-          <a:prstGeom prst="rect">
-            <a:avLst/>
-          </a:prstGeom>
-          <a:noFill/>
-        </p:spPr>
-        <p:txBody>
-          <a:bodyPr wrap="square" anchor="ctr" lIns="0" rIns="0" tIns="0" bIns="0">
-            <a:spAutoFit/>
-          </a:bodyPr>
-          <a:lstStyle/>
-          <a:p>
-            <a:pPr algn="ctr"/>
-            <a:r>
-              <a:rPr sz="1050" b="1">
-                <a:solidFill>
-                  <a:srgbClr val="FFFFFF"/>
-                </a:solidFill>
-                <a:latin typeface="Segoe UI"/>
-              </a:rPr>
-              <a:t>Azure Cosmos DB</a:t>
-            </a:r>
-          </a:p>
-          <a:p>
-            <a:pPr algn="ctr"/>
-            <a:r>
-              <a:rPr sz="800" b="0">
-                <a:solidFill>
-                  <a:srgbClr val="ECF0FB"/>
-                </a:solidFill>
-                <a:latin typeface="Segoe UI"/>
-              </a:rPr>
-              <a:t>sales · inventory · marketing</a:t>
-            </a:r>
-          </a:p>
-        </p:txBody>
-      </p:sp>
-      <p:sp>
-        <p:nvSpPr>
-          <p:cNvPr id="52" name="Rounded Rectangle 51"/>
-          <p:cNvSpPr/>
-          <p:nvPr/>
-        </p:nvSpPr>
-        <p:spPr>
-          <a:xfrm>
-            <a:off x="5919215" y="4672583"/>
-            <a:ext cx="2791967" cy="512064"/>
-          </a:xfrm>
-          <a:prstGeom prst="roundRect">
-            <a:avLst>
-              <a:gd name="adj" fmla="val 16000"/>
-            </a:avLst>
-          </a:prstGeom>
-          <a:solidFill>
-            <a:srgbClr val="1E9E5A"/>
-          </a:solidFill>
-          <a:ln>
-            <a:noFill/>
-          </a:ln>
-          <a:effectLst/>
-        </p:spPr>
-        <p:style>
-          <a:lnRef idx="1">
-            <a:schemeClr val="accent1"/>
-          </a:lnRef>
-          <a:fillRef idx="3">
-            <a:schemeClr val="accent1"/>
-          </a:fillRef>
-          <a:effectRef idx="2">
-            <a:schemeClr val="accent1"/>
-          </a:effectRef>
-          <a:fontRef idx="minor">
-            <a:schemeClr val="lt1"/>
-          </a:fontRef>
-        </p:style>
-        <p:txBody>
-          <a:bodyPr rtlCol="0" anchor="ctr"/>
-          <a:lstStyle/>
-          <a:p>
-            <a:pPr algn="ctr"/>
-          </a:p>
-        </p:txBody>
-      </p:sp>
-      <p:sp>
-        <p:nvSpPr>
-          <p:cNvPr id="53" name="TextBox 52"/>
-          <p:cNvSpPr txBox="1"/>
-          <p:nvPr/>
-        </p:nvSpPr>
-        <p:spPr>
-          <a:xfrm>
-            <a:off x="5992367" y="4672583"/>
-            <a:ext cx="2645663" cy="512064"/>
-          </a:xfrm>
-          <a:prstGeom prst="rect">
-            <a:avLst/>
-          </a:prstGeom>
-          <a:noFill/>
-        </p:spPr>
-        <p:txBody>
-          <a:bodyPr wrap="square" anchor="ctr" lIns="0" rIns="0" tIns="0" bIns="0">
-            <a:spAutoFit/>
-          </a:bodyPr>
-          <a:lstStyle/>
-          <a:p>
-            <a:pPr algn="ctr"/>
-            <a:r>
-              <a:rPr sz="1050" b="1">
-                <a:solidFill>
-                  <a:srgbClr val="FFFFFF"/>
-                </a:solidFill>
-                <a:latin typeface="Segoe UI"/>
-              </a:rPr>
-              <a:t>Foundry IQ</a:t>
-            </a:r>
-          </a:p>
-          <a:p>
-            <a:pPr algn="ctr"/>
-            <a:r>
-              <a:rPr sz="800" b="0">
-                <a:solidFill>
-                  <a:srgbClr val="ECF0FB"/>
-                </a:solidFill>
-                <a:latin typeface="Segoe UI"/>
-              </a:rPr>
-              <a:t>briefs &amp; post-mortems</a:t>
-            </a:r>
-          </a:p>
-        </p:txBody>
-      </p:sp>
-      <p:sp>
-        <p:nvSpPr>
-          <p:cNvPr id="54" name="Rounded Rectangle 53"/>
-          <p:cNvSpPr/>
-          <p:nvPr/>
-        </p:nvSpPr>
-        <p:spPr>
-          <a:xfrm>
-            <a:off x="8839200" y="4672583"/>
-            <a:ext cx="2791967" cy="512064"/>
-          </a:xfrm>
-          <a:prstGeom prst="roundRect">
-            <a:avLst>
-              <a:gd name="adj" fmla="val 16000"/>
-            </a:avLst>
-          </a:prstGeom>
-          <a:solidFill>
-            <a:srgbClr val="1E9E5A"/>
-          </a:solidFill>
-          <a:ln>
-            <a:noFill/>
-          </a:ln>
-          <a:effectLst/>
-        </p:spPr>
-        <p:style>
-          <a:lnRef idx="1">
-            <a:schemeClr val="accent1"/>
-          </a:lnRef>
-          <a:fillRef idx="3">
-            <a:schemeClr val="accent1"/>
-          </a:fillRef>
-          <a:effectRef idx="2">
-            <a:schemeClr val="accent1"/>
-          </a:effectRef>
-          <a:fontRef idx="minor">
-            <a:schemeClr val="lt1"/>
-          </a:fontRef>
-        </p:style>
-        <p:txBody>
-          <a:bodyPr rtlCol="0" anchor="ctr"/>
-          <a:lstStyle/>
-          <a:p>
-            <a:pPr algn="ctr"/>
-          </a:p>
-        </p:txBody>
-      </p:sp>
-      <p:sp>
-        <p:nvSpPr>
-          <p:cNvPr id="55" name="TextBox 54"/>
-          <p:cNvSpPr txBox="1"/>
-          <p:nvPr/>
-        </p:nvSpPr>
-        <p:spPr>
-          <a:xfrm>
-            <a:off x="8912352" y="4672583"/>
-            <a:ext cx="2645663" cy="512064"/>
-          </a:xfrm>
-          <a:prstGeom prst="rect">
-            <a:avLst/>
-          </a:prstGeom>
-          <a:noFill/>
-        </p:spPr>
-        <p:txBody>
-          <a:bodyPr wrap="square" anchor="ctr" lIns="0" rIns="0" tIns="0" bIns="0">
-            <a:spAutoFit/>
-          </a:bodyPr>
-          <a:lstStyle/>
-          <a:p>
-            <a:pPr algn="ctr"/>
-            <a:r>
-              <a:rPr sz="1050" b="1">
-                <a:solidFill>
-                  <a:srgbClr val="FFFFFF"/>
-                </a:solidFill>
-                <a:latin typeface="Segoe UI"/>
-              </a:rPr>
-              <a:t>Bing web_search</a:t>
-            </a:r>
-          </a:p>
-          <a:p>
-            <a:pPr algn="ctr"/>
-            <a:r>
-              <a:rPr sz="800" b="0">
-                <a:solidFill>
-                  <a:srgbClr val="ECF0FB"/>
-                </a:solidFill>
-                <a:latin typeface="Segoe UI"/>
-              </a:rPr>
-              <a:t>live context</a:t>
-            </a:r>
-          </a:p>
-        </p:txBody>
-      </p:sp>
-      <p:sp>
-        <p:nvSpPr>
-          <p:cNvPr id="56" name="Rounded Rectangle 55"/>
-          <p:cNvSpPr/>
-          <p:nvPr/>
-        </p:nvSpPr>
-        <p:spPr>
-          <a:xfrm>
-            <a:off x="411480" y="5376671"/>
-            <a:ext cx="11384280" cy="713232"/>
-          </a:xfrm>
-          <a:prstGeom prst="roundRect">
-            <a:avLst>
-              <a:gd name="adj" fmla="val 10000"/>
-            </a:avLst>
-          </a:prstGeom>
-          <a:solidFill>
-            <a:srgbClr val="FDF1DF"/>
-          </a:solidFill>
-          <a:ln>
-            <a:noFill/>
-          </a:ln>
-          <a:effectLst/>
-        </p:spPr>
-        <p:style>
-          <a:lnRef idx="1">
-            <a:schemeClr val="accent1"/>
-          </a:lnRef>
-          <a:fillRef idx="3">
-            <a:schemeClr val="accent1"/>
-          </a:fillRef>
-          <a:effectRef idx="2">
-            <a:schemeClr val="accent1"/>
-          </a:effectRef>
-          <a:fontRef idx="minor">
-            <a:schemeClr val="lt1"/>
-          </a:fontRef>
-        </p:style>
-        <p:txBody>
-          <a:bodyPr rtlCol="0" anchor="ctr"/>
-          <a:lstStyle/>
-          <a:p>
-            <a:pPr algn="ctr"/>
-          </a:p>
-        </p:txBody>
-      </p:sp>
-      <p:sp>
-        <p:nvSpPr>
-          <p:cNvPr id="57" name="Rounded Rectangle 56"/>
-          <p:cNvSpPr/>
-          <p:nvPr/>
-        </p:nvSpPr>
-        <p:spPr>
-          <a:xfrm>
-            <a:off x="411480" y="5376671"/>
-            <a:ext cx="2423160" cy="713232"/>
-          </a:xfrm>
-          <a:prstGeom prst="roundRect">
-            <a:avLst>
-              <a:gd name="adj" fmla="val 10000"/>
-            </a:avLst>
-          </a:prstGeom>
-          <a:solidFill>
-            <a:srgbClr val="E28A00"/>
-          </a:solidFill>
-          <a:ln>
-            <a:noFill/>
-          </a:ln>
-          <a:effectLst/>
-        </p:spPr>
-        <p:style>
-          <a:lnRef idx="1">
-            <a:schemeClr val="accent1"/>
-          </a:lnRef>
-          <a:fillRef idx="3">
-            <a:schemeClr val="accent1"/>
-          </a:fillRef>
-          <a:effectRef idx="2">
-            <a:schemeClr val="accent1"/>
-          </a:effectRef>
-          <a:fontRef idx="minor">
-            <a:schemeClr val="lt1"/>
-          </a:fontRef>
-        </p:style>
-        <p:txBody>
-          <a:bodyPr rtlCol="0" anchor="ctr"/>
-          <a:lstStyle/>
-          <a:p>
-            <a:pPr algn="ctr"/>
-          </a:p>
-        </p:txBody>
-      </p:sp>
-      <p:sp>
-        <p:nvSpPr>
-          <p:cNvPr id="58" name="TextBox 57"/>
-          <p:cNvSpPr txBox="1"/>
-          <p:nvPr/>
-        </p:nvSpPr>
-        <p:spPr>
-          <a:xfrm>
-            <a:off x="557784" y="5376671"/>
-            <a:ext cx="2148840" cy="713232"/>
-          </a:xfrm>
-          <a:prstGeom prst="rect">
-            <a:avLst/>
-          </a:prstGeom>
-          <a:noFill/>
-        </p:spPr>
-        <p:txBody>
-          <a:bodyPr wrap="square" anchor="ctr" lIns="0" rIns="0" tIns="0" bIns="0">
-            <a:spAutoFit/>
-          </a:bodyPr>
-          <a:lstStyle/>
-          <a:p>
-            <a:pPr algn="l"/>
-            <a:r>
-              <a:rPr sz="1150" b="1">
-                <a:solidFill>
-                  <a:srgbClr val="FFFFFF"/>
-                </a:solidFill>
-                <a:latin typeface="Segoe UI"/>
-              </a:rPr>
-              <a:t>MODELS</a:t>
-            </a:r>
-          </a:p>
-          <a:p>
-            <a:pPr algn="l"/>
-            <a:r>
-              <a:rPr sz="800" b="0">
-                <a:solidFill>
-                  <a:srgbClr val="ECF0FB"/>
-                </a:solidFill>
-                <a:latin typeface="Segoe UI"/>
-              </a:rPr>
-              <a:t>reason &amp; answer</a:t>
-            </a:r>
-          </a:p>
-        </p:txBody>
-      </p:sp>
-      <p:sp>
-        <p:nvSpPr>
-          <p:cNvPr id="59" name="Rounded Rectangle 58"/>
-          <p:cNvSpPr/>
-          <p:nvPr/>
-        </p:nvSpPr>
-        <p:spPr>
-          <a:xfrm>
-            <a:off x="2999232" y="5477255"/>
-            <a:ext cx="2791967" cy="512064"/>
-          </a:xfrm>
-          <a:prstGeom prst="roundRect">
-            <a:avLst>
-              <a:gd name="adj" fmla="val 16000"/>
-            </a:avLst>
-          </a:prstGeom>
-          <a:solidFill>
-            <a:srgbClr val="E28A00"/>
-          </a:solidFill>
-          <a:ln>
-            <a:noFill/>
-          </a:ln>
-          <a:effectLst/>
-        </p:spPr>
-        <p:style>
-          <a:lnRef idx="1">
-            <a:schemeClr val="accent1"/>
-          </a:lnRef>
-          <a:fillRef idx="3">
-            <a:schemeClr val="accent1"/>
-          </a:fillRef>
-          <a:effectRef idx="2">
-            <a:schemeClr val="accent1"/>
-          </a:effectRef>
-          <a:fontRef idx="minor">
-            <a:schemeClr val="lt1"/>
-          </a:fontRef>
-        </p:style>
-        <p:txBody>
-          <a:bodyPr rtlCol="0" anchor="ctr"/>
-          <a:lstStyle/>
-          <a:p>
-            <a:pPr algn="ctr"/>
-          </a:p>
-        </p:txBody>
-      </p:sp>
-      <p:sp>
-        <p:nvSpPr>
-          <p:cNvPr id="60" name="TextBox 59"/>
-          <p:cNvSpPr txBox="1"/>
-          <p:nvPr/>
-        </p:nvSpPr>
-        <p:spPr>
-          <a:xfrm>
-            <a:off x="3072384" y="5477255"/>
-            <a:ext cx="2645663" cy="512064"/>
-          </a:xfrm>
-          <a:prstGeom prst="rect">
-            <a:avLst/>
-          </a:prstGeom>
-          <a:noFill/>
-        </p:spPr>
-        <p:txBody>
-          <a:bodyPr wrap="square" anchor="ctr" lIns="0" rIns="0" tIns="0" bIns="0">
-            <a:spAutoFit/>
-          </a:bodyPr>
-          <a:lstStyle/>
-          <a:p>
-            <a:pPr algn="ctr"/>
-            <a:r>
-              <a:rPr sz="1050" b="1">
-                <a:solidFill>
-                  <a:srgbClr val="FFFFFF"/>
-                </a:solidFill>
-                <a:latin typeface="Segoe UI"/>
-              </a:rPr>
-              <a:t>gpt-4.1-mini</a:t>
-            </a:r>
-          </a:p>
-          <a:p>
-            <a:pPr algn="ctr"/>
-            <a:r>
-              <a:rPr sz="800" b="0">
-                <a:solidFill>
-                  <a:srgbClr val="ECF0FB"/>
-                </a:solidFill>
-                <a:latin typeface="Segoe UI"/>
-              </a:rPr>
-              <a:t>manager + agents</a:t>
-            </a:r>
-          </a:p>
-        </p:txBody>
-      </p:sp>
-      <p:sp>
-        <p:nvSpPr>
-          <p:cNvPr id="61" name="Rounded Rectangle 60"/>
-          <p:cNvSpPr/>
-          <p:nvPr/>
-        </p:nvSpPr>
-        <p:spPr>
-          <a:xfrm>
-            <a:off x="5919215" y="5477255"/>
-            <a:ext cx="2791967" cy="512064"/>
-          </a:xfrm>
-          <a:prstGeom prst="roundRect">
-            <a:avLst>
-              <a:gd name="adj" fmla="val 16000"/>
-            </a:avLst>
-          </a:prstGeom>
-          <a:solidFill>
-            <a:srgbClr val="E28A00"/>
-          </a:solidFill>
-          <a:ln>
-            <a:noFill/>
-          </a:ln>
-          <a:effectLst/>
-        </p:spPr>
-        <p:style>
-          <a:lnRef idx="1">
-            <a:schemeClr val="accent1"/>
-          </a:lnRef>
-          <a:fillRef idx="3">
-            <a:schemeClr val="accent1"/>
-          </a:fillRef>
-          <a:effectRef idx="2">
-            <a:schemeClr val="accent1"/>
-          </a:effectRef>
-          <a:fontRef idx="minor">
-            <a:schemeClr val="lt1"/>
-          </a:fontRef>
-        </p:style>
-        <p:txBody>
-          <a:bodyPr rtlCol="0" anchor="ctr"/>
-          <a:lstStyle/>
-          <a:p>
-            <a:pPr algn="ctr"/>
-          </a:p>
-        </p:txBody>
-      </p:sp>
-      <p:sp>
-        <p:nvSpPr>
-          <p:cNvPr id="62" name="TextBox 61"/>
-          <p:cNvSpPr txBox="1"/>
-          <p:nvPr/>
-        </p:nvSpPr>
-        <p:spPr>
-          <a:xfrm>
-            <a:off x="5992367" y="5477255"/>
-            <a:ext cx="2645663" cy="512064"/>
-          </a:xfrm>
-          <a:prstGeom prst="rect">
-            <a:avLst/>
-          </a:prstGeom>
-          <a:noFill/>
-        </p:spPr>
-        <p:txBody>
-          <a:bodyPr wrap="square" anchor="ctr" lIns="0" rIns="0" tIns="0" bIns="0">
-            <a:spAutoFit/>
-          </a:bodyPr>
-          <a:lstStyle/>
-          <a:p>
-            <a:pPr algn="ctr"/>
-            <a:r>
-              <a:rPr sz="1050" b="1">
-                <a:solidFill>
-                  <a:srgbClr val="FFFFFF"/>
-                </a:solidFill>
-                <a:latin typeface="Segoe UI"/>
-              </a:rPr>
-              <a:t>Foundry agent models</a:t>
-            </a:r>
-          </a:p>
-          <a:p>
-            <a:pPr algn="ctr"/>
-            <a:r>
-              <a:rPr sz="800" b="0">
-                <a:solidFill>
-                  <a:srgbClr val="ECF0FB"/>
-                </a:solidFill>
-                <a:latin typeface="Segoe UI"/>
-              </a:rPr>
-              <a:t>per-agent config</a:t>
-            </a:r>
-          </a:p>
-        </p:txBody>
-      </p:sp>
-      <p:sp>
-        <p:nvSpPr>
-          <p:cNvPr id="63" name="Rounded Rectangle 62"/>
-          <p:cNvSpPr/>
-          <p:nvPr/>
-        </p:nvSpPr>
-        <p:spPr>
-          <a:xfrm>
-            <a:off x="8839200" y="5477255"/>
-            <a:ext cx="2791967" cy="512064"/>
-          </a:xfrm>
-          <a:prstGeom prst="roundRect">
-            <a:avLst>
-              <a:gd name="adj" fmla="val 16000"/>
-            </a:avLst>
-          </a:prstGeom>
-          <a:solidFill>
-            <a:srgbClr val="E28A00"/>
-          </a:solidFill>
-          <a:ln>
-            <a:noFill/>
-          </a:ln>
-          <a:effectLst/>
-        </p:spPr>
-        <p:style>
-          <a:lnRef idx="1">
-            <a:schemeClr val="accent1"/>
-          </a:lnRef>
-          <a:fillRef idx="3">
-            <a:schemeClr val="accent1"/>
-          </a:fillRef>
-          <a:effectRef idx="2">
-            <a:schemeClr val="accent1"/>
-          </a:effectRef>
-          <a:fontRef idx="minor">
-            <a:schemeClr val="lt1"/>
-          </a:fontRef>
-        </p:style>
-        <p:txBody>
-          <a:bodyPr rtlCol="0" anchor="ctr"/>
-          <a:lstStyle/>
-          <a:p>
-            <a:pPr algn="ctr"/>
-          </a:p>
-        </p:txBody>
-      </p:sp>
-      <p:sp>
-        <p:nvSpPr>
-          <p:cNvPr id="64" name="TextBox 63"/>
-          <p:cNvSpPr txBox="1"/>
-          <p:nvPr/>
-        </p:nvSpPr>
-        <p:spPr>
-          <a:xfrm>
-            <a:off x="8912352" y="5477255"/>
-            <a:ext cx="2645663" cy="512064"/>
-          </a:xfrm>
-          <a:prstGeom prst="rect">
-            <a:avLst/>
-          </a:prstGeom>
-          <a:noFill/>
-        </p:spPr>
-        <p:txBody>
-          <a:bodyPr wrap="square" anchor="ctr" lIns="0" rIns="0" tIns="0" bIns="0">
-            <a:spAutoFit/>
-          </a:bodyPr>
-          <a:lstStyle/>
-          <a:p>
-            <a:pPr algn="ctr"/>
-            <a:r>
-              <a:rPr sz="1050" b="1">
-                <a:solidFill>
-                  <a:srgbClr val="FFFFFF"/>
-                </a:solidFill>
-                <a:latin typeface="Segoe UI"/>
-              </a:rPr>
-              <a:t>Code Interpreter</a:t>
-            </a:r>
-          </a:p>
-          <a:p>
-            <a:pPr algn="ctr"/>
-            <a:r>
-              <a:rPr sz="800" b="0">
-                <a:solidFill>
-                  <a:srgbClr val="ECF0FB"/>
-                </a:solidFill>
-                <a:latin typeface="Segoe UI"/>
-              </a:rPr>
-              <a:t>consolidated chart + math</a:t>
-            </a:r>
-          </a:p>
-        </p:txBody>
-      </p:sp>
-      <p:sp>
-        <p:nvSpPr>
-          <p:cNvPr id="65" name="Rounded Rectangle 64"/>
-          <p:cNvSpPr/>
-          <p:nvPr/>
-        </p:nvSpPr>
-        <p:spPr>
-          <a:xfrm>
-            <a:off x="411480" y="6419088"/>
-            <a:ext cx="11384280" cy="384048"/>
-          </a:xfrm>
-          <a:prstGeom prst="roundRect">
-            <a:avLst>
-              <a:gd name="adj" fmla="val 25000"/>
-            </a:avLst>
-          </a:prstGeom>
-          <a:solidFill>
-            <a:srgbClr val="1B1F2A"/>
-          </a:solidFill>
-          <a:ln>
-            <a:noFill/>
-          </a:ln>
-          <a:effectLst/>
-        </p:spPr>
-        <p:style>
-          <a:lnRef idx="1">
-            <a:schemeClr val="accent1"/>
-          </a:lnRef>
-          <a:fillRef idx="3">
-            <a:schemeClr val="accent1"/>
-          </a:fillRef>
-          <a:effectRef idx="2">
-            <a:schemeClr val="accent1"/>
-          </a:effectRef>
-          <a:fontRef idx="minor">
-            <a:schemeClr val="lt1"/>
-          </a:fontRef>
-        </p:style>
-        <p:txBody>
-          <a:bodyPr rtlCol="0" anchor="ctr"/>
-          <a:lstStyle/>
-          <a:p>
-            <a:pPr algn="ctr"/>
-          </a:p>
-        </p:txBody>
-      </p:sp>
-      <p:sp>
-        <p:nvSpPr>
-          <p:cNvPr id="66" name="TextBox 65"/>
-          <p:cNvSpPr txBox="1"/>
-          <p:nvPr/>
-        </p:nvSpPr>
-        <p:spPr>
-          <a:xfrm>
-            <a:off x="548640" y="6437376"/>
-            <a:ext cx="11155680" cy="347472"/>
-          </a:xfrm>
-          <a:prstGeom prst="rect">
-            <a:avLst/>
-          </a:prstGeom>
-          <a:noFill/>
-        </p:spPr>
-        <p:txBody>
-          <a:bodyPr wrap="square" anchor="ctr" lIns="0" rIns="0" tIns="0" bIns="0">
-            <a:spAutoFit/>
-          </a:bodyPr>
-          <a:lstStyle/>
-          <a:p>
-            <a:pPr algn="l"/>
-            <a:r>
-              <a:rPr sz="1050" b="1">
-                <a:solidFill>
-                  <a:srgbClr val="E28A00"/>
-                </a:solidFill>
-                <a:latin typeface="Segoe UI"/>
-              </a:rPr>
-              <a:t>Observability in the demo:  </a:t>
-            </a:r>
-            <a:r>
-              <a:rPr sz="1050" b="0">
-                <a:solidFill>
-                  <a:srgbClr val="FFFFFF"/>
-                </a:solidFill>
-                <a:latin typeface="Segoe UI"/>
-              </a:rPr>
-              <a:t>Application Insights / OpenTelemetry tracing · Foundry Evaluations · red-team &amp; guardrails modules.</a:t>
             </a:r>
           </a:p>
         </p:txBody>
@@ -17767,4 +11480,10 @@
   </a:objectDefaults>
   <a:extraClrSchemeLst/>
 </a:theme>
+</file>
+
+<file path=docMetadata/LabelInfo.xml><?xml version="1.0" encoding="utf-8"?>
+<clbl:labelList xmlns:clbl="http://schemas.microsoft.com/office/2020/mipLabelMetadata">
+  <clbl:label id="{f42aa342-8706-4288-bd11-ebb85995028c}" enabled="1" method="Standard" siteId="{72f988bf-86f1-41af-91ab-2d7cd011db47}" contentBits="0" removed="0"/>
+</clbl:labelList>
 </file>